--- a/exports/Moradabad_Division_DRM_Budget_FR_Analysis_H_Full_FY_2025_26_Actual.pptx
+++ b/exports/Moradabad_Division_DRM_Budget_FR_Analysis_H_Full_FY_2025_26_Actual.pptx
@@ -6251,10 +6251,10 @@
                 <a:gridCol w="1118625"/>
                 <a:gridCol w="1118625"/>
                 <a:gridCol w="1222201"/>
-                <a:gridCol w="745750"/>
+                <a:gridCol w="745749"/>
                 <a:gridCol w="1222201"/>
-                <a:gridCol w="745750"/>
-                <a:gridCol w="1118627"/>
+                <a:gridCol w="745749"/>
+                <a:gridCol w="1118629"/>
               </a:tblGrid>
               <a:tr h="432714">
                 <a:tc>

--- a/exports/Moradabad_Division_DRM_Budget_FR_Analysis_H_Full_FY_2025_26_Actual.pptx
+++ b/exports/Moradabad_Division_DRM_Budget_FR_Analysis_H_Full_FY_2025_26_Actual.pptx
@@ -6185,7 +6185,7 @@
                 </a:solidFill>
                 <a:latin typeface="Times New Roman"/>
               </a:rPr>
-              <a:t>Demand SMH Wise - AUG 2026 | uploaded 2026-09-05T18:02:11+05:30</a:t>
+              <a:t>Demand SMH Wise - AUG 2026 | uploaded 2026-09-11T10:57:00+05:30</a:t>
             </a:r>
           </a:p>
         </p:txBody>
@@ -6356,27 +6356,7 @@
                           </a:solidFill>
                           <a:latin typeface="Times New Roman"/>
                         </a:rPr>
-                        <a:t>A</a:t>
-                      </a:r>
-                      <a:br/>
-                      <a:r>
-                        <a:rPr lang="en-US" sz="1000" b="1">
-                          <a:solidFill>
-                            <a:srgbClr val="FFFFFF"/>
-                          </a:solidFill>
-                          <a:latin typeface="Times New Roman"/>
-                        </a:rPr>
-                        <a:t>OBA</a:t>
-                      </a:r>
-                      <a:br/>
-                      <a:r>
-                        <a:rPr lang="en-US" sz="1000" b="1">
-                          <a:solidFill>
-                            <a:srgbClr val="FFFFFF"/>
-                          </a:solidFill>
-                          <a:latin typeface="Times New Roman"/>
-                        </a:rPr>
-                        <a:t>BG_ISL 2026-27</a:t>
+                        <a:t>A\nOBA/RG\nRG if available, else BG_ISL 2026-27</a:t>
                       </a:r>
                     </a:p>
                   </a:txBody>
@@ -13304,7 +13284,7 @@
                 </a:solidFill>
                 <a:latin typeface="Times New Roman"/>
               </a:rPr>
-              <a:t>PU Wise - Staff - AUG 2026 | uploaded 2026-09-05T18:02:11+05:30</a:t>
+              <a:t>PU Wise - Staff - AUG 2026 | uploaded 2026-09-11T10:57:00+05:30</a:t>
             </a:r>
           </a:p>
         </p:txBody>
@@ -13431,27 +13411,7 @@
                           </a:solidFill>
                           <a:latin typeface="Times New Roman"/>
                         </a:rPr>
-                        <a:t>A</a:t>
-                      </a:r>
-                      <a:br/>
-                      <a:r>
-                        <a:rPr lang="en-US" sz="1000" b="1">
-                          <a:solidFill>
-                            <a:srgbClr val="FFFFFF"/>
-                          </a:solidFill>
-                          <a:latin typeface="Times New Roman"/>
-                        </a:rPr>
-                        <a:t>OBA</a:t>
-                      </a:r>
-                      <a:br/>
-                      <a:r>
-                        <a:rPr lang="en-US" sz="1000" b="1">
-                          <a:solidFill>
-                            <a:srgbClr val="FFFFFF"/>
-                          </a:solidFill>
-                          <a:latin typeface="Times New Roman"/>
-                        </a:rPr>
-                        <a:t>BG_ISL 2026-27</a:t>
+                        <a:t>A\nOBA/RG\nRG if available, else BG_ISL 2026-27</a:t>
                       </a:r>
                     </a:p>
                   </a:txBody>
@@ -19820,7 +19780,7 @@
                 </a:solidFill>
                 <a:latin typeface="Times New Roman"/>
               </a:rPr>
-              <a:t>PU Wise - Non-Staff Part 1 - AUG 2026 | uploaded 2026-09-05T18:02:11+05:30</a:t>
+              <a:t>PU Wise - Non-Staff Part 1 - AUG 2026 | uploaded 2026-09-11T10:57:00+05:30</a:t>
             </a:r>
           </a:p>
         </p:txBody>
@@ -19947,27 +19907,7 @@
                           </a:solidFill>
                           <a:latin typeface="Times New Roman"/>
                         </a:rPr>
-                        <a:t>A</a:t>
-                      </a:r>
-                      <a:br/>
-                      <a:r>
-                        <a:rPr lang="en-US" sz="1000" b="1">
-                          <a:solidFill>
-                            <a:srgbClr val="FFFFFF"/>
-                          </a:solidFill>
-                          <a:latin typeface="Times New Roman"/>
-                        </a:rPr>
-                        <a:t>OBA</a:t>
-                      </a:r>
-                      <a:br/>
-                      <a:r>
-                        <a:rPr lang="en-US" sz="1000" b="1">
-                          <a:solidFill>
-                            <a:srgbClr val="FFFFFF"/>
-                          </a:solidFill>
-                          <a:latin typeface="Times New Roman"/>
-                        </a:rPr>
-                        <a:t>BG_ISL 2026-27</a:t>
+                        <a:t>A\nOBA/RG\nRG if available, else BG_ISL 2026-27</a:t>
                       </a:r>
                     </a:p>
                   </a:txBody>

--- a/exports/Moradabad_Division_DRM_Budget_FR_Analysis_H_Full_FY_2025_26_Actual.pptx
+++ b/exports/Moradabad_Division_DRM_Budget_FR_Analysis_H_Full_FY_2025_26_Actual.pptx
@@ -6185,7 +6185,7 @@
                 </a:solidFill>
                 <a:latin typeface="Times New Roman"/>
               </a:rPr>
-              <a:t>Demand SMH Wise - AUG 2026 | uploaded 2026-09-11T10:57:00+05:30</a:t>
+              <a:t>Demand SMH Wise - AUG 2026 | uploaded 2026-09-15T16:03:44+05:30</a:t>
             </a:r>
           </a:p>
         </p:txBody>
@@ -13284,7 +13284,7 @@
                 </a:solidFill>
                 <a:latin typeface="Times New Roman"/>
               </a:rPr>
-              <a:t>PU Wise - Staff - AUG 2026 | uploaded 2026-09-11T10:57:00+05:30</a:t>
+              <a:t>PU Wise - Staff - AUG 2026 | uploaded 2026-09-15T16:03:44+05:30</a:t>
             </a:r>
           </a:p>
         </p:txBody>
@@ -19780,7 +19780,7 @@
                 </a:solidFill>
                 <a:latin typeface="Times New Roman"/>
               </a:rPr>
-              <a:t>PU Wise - Non-Staff Part 1 - AUG 2026 | uploaded 2026-09-11T10:57:00+05:30</a:t>
+              <a:t>PU Wise - Non-Staff Part 1 - AUG 2026 | uploaded 2026-09-15T16:03:44+05:30</a:t>
             </a:r>
           </a:p>
         </p:txBody>

--- a/exports/Moradabad_Division_DRM_Budget_FR_Analysis_H_Full_FY_2025_26_Actual.pptx
+++ b/exports/Moradabad_Division_DRM_Budget_FR_Analysis_H_Full_FY_2025_26_Actual.pptx
@@ -6185,7 +6185,7 @@
                 </a:solidFill>
                 <a:latin typeface="Times New Roman"/>
               </a:rPr>
-              <a:t>Demand SMH Wise - AUG 2026 | uploaded 2026-09-15T16:03:44+05:30</a:t>
+              <a:t>Demand SMH Wise - AUG 2026 | uploaded 2026-09-17T21:32:11+05:30</a:t>
             </a:r>
           </a:p>
         </p:txBody>
@@ -6251,10 +6251,10 @@
                 <a:gridCol w="1118625"/>
                 <a:gridCol w="1118625"/>
                 <a:gridCol w="1222201"/>
-                <a:gridCol w="745749"/>
+                <a:gridCol w="745750"/>
                 <a:gridCol w="1222201"/>
-                <a:gridCol w="745749"/>
-                <a:gridCol w="1118629"/>
+                <a:gridCol w="745750"/>
+                <a:gridCol w="1118627"/>
               </a:tblGrid>
               <a:tr h="432714">
                 <a:tc>
@@ -13284,7 +13284,7 @@
                 </a:solidFill>
                 <a:latin typeface="Times New Roman"/>
               </a:rPr>
-              <a:t>PU Wise - Staff - AUG 2026 | uploaded 2026-09-15T16:03:44+05:30</a:t>
+              <a:t>PU Wise - Staff - AUG 2026 | uploaded 2026-09-17T21:32:11+05:30</a:t>
             </a:r>
           </a:p>
         </p:txBody>
@@ -19780,7 +19780,7 @@
                 </a:solidFill>
                 <a:latin typeface="Times New Roman"/>
               </a:rPr>
-              <a:t>PU Wise - Non-Staff Part 1 - AUG 2026 | uploaded 2026-09-15T16:03:44+05:30</a:t>
+              <a:t>PU Wise - Non-Staff Part 1 - AUG 2026 | uploaded 2026-09-17T21:32:11+05:30</a:t>
             </a:r>
           </a:p>
         </p:txBody>
@@ -23133,7 +23133,7 @@
                 </a:solidFill>
                 <a:latin typeface="Times New Roman"/>
               </a:rPr>
-              <a:t>Open Line FR Report - As On 17.09.2026 (Rows 1-13)</a:t>
+              <a:t>Open Line FR Report - As On 05.09.2026 (Rows 1-13)</a:t>
             </a:r>
           </a:p>
         </p:txBody>
@@ -23677,7 +23677,7 @@
                           </a:solidFill>
                           <a:latin typeface="Times New Roman"/>
                         </a:rPr>
-                        <a:t>81,555</a:t>
+                        <a:t>77,992</a:t>
                       </a:r>
                       <a:br/>
                       <a:r>
@@ -23687,7 +23687,7 @@
                           </a:solidFill>
                           <a:latin typeface="Times New Roman"/>
                         </a:rPr>
-                        <a:t>Cr. 8.16</a:t>
+                        <a:t>Cr. 7.80</a:t>
                       </a:r>
                     </a:p>
                   </a:txBody>
@@ -23730,7 +23730,7 @@
                           </a:solidFill>
                           <a:latin typeface="Times New Roman"/>
                         </a:rPr>
-                        <a:t>-79,348</a:t>
+                        <a:t>-82,911</a:t>
                       </a:r>
                       <a:br/>
                       <a:r>
@@ -23740,7 +23740,7 @@
                           </a:solidFill>
                           <a:latin typeface="Times New Roman"/>
                         </a:rPr>
-                        <a:t>Cr. -7.93</a:t>
+                        <a:t>Cr. -8.29</a:t>
                       </a:r>
                     </a:p>
                   </a:txBody>
@@ -23783,7 +23783,7 @@
                           </a:solidFill>
                           <a:latin typeface="Times New Roman"/>
                         </a:rPr>
-                        <a:t>50.69</a:t>
+                        <a:t>48.47</a:t>
                       </a:r>
                     </a:p>
                   </a:txBody>
@@ -24010,7 +24010,7 @@
                           </a:solidFill>
                           <a:latin typeface="Times New Roman"/>
                         </a:rPr>
-                        <a:t>12,549</a:t>
+                        <a:t>11,801</a:t>
                       </a:r>
                       <a:br/>
                       <a:r>
@@ -24020,7 +24020,7 @@
                           </a:solidFill>
                           <a:latin typeface="Times New Roman"/>
                         </a:rPr>
-                        <a:t>Cr. 1.25</a:t>
+                        <a:t>Cr. 1.18</a:t>
                       </a:r>
                     </a:p>
                   </a:txBody>
@@ -24063,7 +24063,7 @@
                           </a:solidFill>
                           <a:latin typeface="Times New Roman"/>
                         </a:rPr>
-                        <a:t>-19,678</a:t>
+                        <a:t>-20,426</a:t>
                       </a:r>
                       <a:br/>
                       <a:r>
@@ -24073,7 +24073,7 @@
                           </a:solidFill>
                           <a:latin typeface="Times New Roman"/>
                         </a:rPr>
-                        <a:t>Cr. -1.97</a:t>
+                        <a:t>Cr. -2.04</a:t>
                       </a:r>
                     </a:p>
                   </a:txBody>
@@ -24116,7 +24116,7 @@
                           </a:solidFill>
                           <a:latin typeface="Times New Roman"/>
                         </a:rPr>
-                        <a:t>38.94</a:t>
+                        <a:t>36.62</a:t>
                       </a:r>
                     </a:p>
                   </a:txBody>
@@ -24343,7 +24343,7 @@
                           </a:solidFill>
                           <a:latin typeface="Times New Roman"/>
                         </a:rPr>
-                        <a:t>64,226</a:t>
+                        <a:t>57,289</a:t>
                       </a:r>
                       <a:br/>
                       <a:r>
@@ -24353,7 +24353,7 @@
                           </a:solidFill>
                           <a:latin typeface="Times New Roman"/>
                         </a:rPr>
-                        <a:t>Cr. 6.42</a:t>
+                        <a:t>Cr. 5.73</a:t>
                       </a:r>
                     </a:p>
                   </a:txBody>
@@ -24396,7 +24396,7 @@
                           </a:solidFill>
                           <a:latin typeface="Times New Roman"/>
                         </a:rPr>
-                        <a:t>-56,092</a:t>
+                        <a:t>-63,029</a:t>
                       </a:r>
                       <a:br/>
                       <a:r>
@@ -24406,7 +24406,7 @@
                           </a:solidFill>
                           <a:latin typeface="Times New Roman"/>
                         </a:rPr>
-                        <a:t>Cr. -5.61</a:t>
+                        <a:t>Cr. -6.30</a:t>
                       </a:r>
                     </a:p>
                   </a:txBody>
@@ -24449,7 +24449,7 @@
                           </a:solidFill>
                           <a:latin typeface="Times New Roman"/>
                         </a:rPr>
-                        <a:t>53.38</a:t>
+                        <a:t>47.61</a:t>
                       </a:r>
                     </a:p>
                   </a:txBody>
@@ -24676,7 +24676,7 @@
                           </a:solidFill>
                           <a:latin typeface="Times New Roman"/>
                         </a:rPr>
-                        <a:t>376,586</a:t>
+                        <a:t>363,937</a:t>
                       </a:r>
                       <a:br/>
                       <a:r>
@@ -24686,7 +24686,7 @@
                           </a:solidFill>
                           <a:latin typeface="Times New Roman"/>
                         </a:rPr>
-                        <a:t>Cr. 37.66</a:t>
+                        <a:t>Cr. 36.39</a:t>
                       </a:r>
                     </a:p>
                   </a:txBody>
@@ -24729,7 +24729,7 @@
                           </a:solidFill>
                           <a:latin typeface="Times New Roman"/>
                         </a:rPr>
-                        <a:t>-130,834</a:t>
+                        <a:t>-143,483</a:t>
                       </a:r>
                       <a:br/>
                       <a:r>
@@ -24739,7 +24739,7 @@
                           </a:solidFill>
                           <a:latin typeface="Times New Roman"/>
                         </a:rPr>
-                        <a:t>Cr. -13.08</a:t>
+                        <a:t>Cr. -14.35</a:t>
                       </a:r>
                     </a:p>
                   </a:txBody>
@@ -24782,7 +24782,7 @@
                           </a:solidFill>
                           <a:latin typeface="Times New Roman"/>
                         </a:rPr>
-                        <a:t>74.22</a:t>
+                        <a:t>71.72</a:t>
                       </a:r>
                     </a:p>
                   </a:txBody>
@@ -25009,7 +25009,7 @@
                           </a:solidFill>
                           <a:latin typeface="Times New Roman"/>
                         </a:rPr>
-                        <a:t>3,758,184</a:t>
+                        <a:t>3,692,699</a:t>
                       </a:r>
                       <a:br/>
                       <a:r>
@@ -25019,7 +25019,7 @@
                           </a:solidFill>
                           <a:latin typeface="Times New Roman"/>
                         </a:rPr>
-                        <a:t>Cr. 375.82</a:t>
+                        <a:t>Cr. 369.27</a:t>
                       </a:r>
                     </a:p>
                   </a:txBody>
@@ -25062,7 +25062,7 @@
                           </a:solidFill>
                           <a:latin typeface="Times New Roman"/>
                         </a:rPr>
-                        <a:t>795,389</a:t>
+                        <a:t>729,904</a:t>
                       </a:r>
                       <a:br/>
                       <a:r>
@@ -25072,7 +25072,7 @@
                           </a:solidFill>
                           <a:latin typeface="Times New Roman"/>
                         </a:rPr>
-                        <a:t>Cr. 79.54</a:t>
+                        <a:t>Cr. 72.99</a:t>
                       </a:r>
                     </a:p>
                   </a:txBody>
@@ -25115,7 +25115,7 @@
                           </a:solidFill>
                           <a:latin typeface="Times New Roman"/>
                         </a:rPr>
-                        <a:t>126.85</a:t>
+                        <a:t>124.64</a:t>
                       </a:r>
                     </a:p>
                   </a:txBody>
@@ -25342,7 +25342,7 @@
                           </a:solidFill>
                           <a:latin typeface="Times New Roman"/>
                         </a:rPr>
-                        <a:t>164,242</a:t>
+                        <a:t>151,197</a:t>
                       </a:r>
                       <a:br/>
                       <a:r>
@@ -25352,7 +25352,7 @@
                           </a:solidFill>
                           <a:latin typeface="Times New Roman"/>
                         </a:rPr>
-                        <a:t>Cr. 16.42</a:t>
+                        <a:t>Cr. 15.12</a:t>
                       </a:r>
                     </a:p>
                   </a:txBody>
@@ -25395,7 +25395,7 @@
                           </a:solidFill>
                           <a:latin typeface="Times New Roman"/>
                         </a:rPr>
-                        <a:t>31,975</a:t>
+                        <a:t>18,930</a:t>
                       </a:r>
                       <a:br/>
                       <a:r>
@@ -25405,7 +25405,7 @@
                           </a:solidFill>
                           <a:latin typeface="Times New Roman"/>
                         </a:rPr>
-                        <a:t>Cr. 3.20</a:t>
+                        <a:t>Cr. 1.89</a:t>
                       </a:r>
                     </a:p>
                   </a:txBody>
@@ -25448,7 +25448,7 @@
                           </a:solidFill>
                           <a:latin typeface="Times New Roman"/>
                         </a:rPr>
-                        <a:t>124.17</a:t>
+                        <a:t>114.31</a:t>
                       </a:r>
                     </a:p>
                   </a:txBody>
@@ -25675,7 +25675,7 @@
                           </a:solidFill>
                           <a:latin typeface="Times New Roman"/>
                         </a:rPr>
-                        <a:t>139,533</a:t>
+                        <a:t>123,038</a:t>
                       </a:r>
                       <a:br/>
                       <a:r>
@@ -25685,7 +25685,7 @@
                           </a:solidFill>
                           <a:latin typeface="Times New Roman"/>
                         </a:rPr>
-                        <a:t>Cr. 13.95</a:t>
+                        <a:t>Cr. 12.30</a:t>
                       </a:r>
                     </a:p>
                   </a:txBody>
@@ -25728,7 +25728,7 @@
                           </a:solidFill>
                           <a:latin typeface="Times New Roman"/>
                         </a:rPr>
-                        <a:t>-383,310</a:t>
+                        <a:t>-399,805</a:t>
                       </a:r>
                       <a:br/>
                       <a:r>
@@ -25738,7 +25738,7 @@
                           </a:solidFill>
                           <a:latin typeface="Times New Roman"/>
                         </a:rPr>
-                        <a:t>Cr. -38.33</a:t>
+                        <a:t>Cr. -39.98</a:t>
                       </a:r>
                     </a:p>
                   </a:txBody>
@@ -25781,7 +25781,7 @@
                           </a:solidFill>
                           <a:latin typeface="Times New Roman"/>
                         </a:rPr>
-                        <a:t>26.69</a:t>
+                        <a:t>23.53</a:t>
                       </a:r>
                     </a:p>
                   </a:txBody>
@@ -26008,7 +26008,7 @@
                           </a:solidFill>
                           <a:latin typeface="Times New Roman"/>
                         </a:rPr>
-                        <a:t>104,326</a:t>
+                        <a:t>94,924</a:t>
                       </a:r>
                       <a:br/>
                       <a:r>
@@ -26018,7 +26018,7 @@
                           </a:solidFill>
                           <a:latin typeface="Times New Roman"/>
                         </a:rPr>
-                        <a:t>Cr. 10.43</a:t>
+                        <a:t>Cr. 9.49</a:t>
                       </a:r>
                     </a:p>
                   </a:txBody>
@@ -26061,7 +26061,7 @@
                           </a:solidFill>
                           <a:latin typeface="Times New Roman"/>
                         </a:rPr>
-                        <a:t>-203,517</a:t>
+                        <a:t>-212,919</a:t>
                       </a:r>
                       <a:br/>
                       <a:r>
@@ -26071,7 +26071,7 @@
                           </a:solidFill>
                           <a:latin typeface="Times New Roman"/>
                         </a:rPr>
-                        <a:t>Cr. -20.35</a:t>
+                        <a:t>Cr. -21.29</a:t>
                       </a:r>
                     </a:p>
                   </a:txBody>
@@ -26114,7 +26114,7 @@
                           </a:solidFill>
                           <a:latin typeface="Times New Roman"/>
                         </a:rPr>
-                        <a:t>33.89</a:t>
+                        <a:t>30.84</a:t>
                       </a:r>
                     </a:p>
                   </a:txBody>
@@ -27007,7 +27007,7 @@
                           </a:solidFill>
                           <a:latin typeface="Times New Roman"/>
                         </a:rPr>
-                        <a:t>5,681</a:t>
+                        <a:t>5,129</a:t>
                       </a:r>
                       <a:br/>
                       <a:r>
@@ -27017,7 +27017,7 @@
                           </a:solidFill>
                           <a:latin typeface="Times New Roman"/>
                         </a:rPr>
-                        <a:t>Cr. 0.57</a:t>
+                        <a:t>Cr. 0.51</a:t>
                       </a:r>
                     </a:p>
                   </a:txBody>
@@ -27060,7 +27060,7 @@
                           </a:solidFill>
                           <a:latin typeface="Times New Roman"/>
                         </a:rPr>
-                        <a:t>-48,021</a:t>
+                        <a:t>-48,573</a:t>
                       </a:r>
                       <a:br/>
                       <a:r>
@@ -27070,7 +27070,7 @@
                           </a:solidFill>
                           <a:latin typeface="Times New Roman"/>
                         </a:rPr>
-                        <a:t>Cr. -4.80</a:t>
+                        <a:t>Cr. -4.86</a:t>
                       </a:r>
                     </a:p>
                   </a:txBody>
@@ -27113,7 +27113,7 @@
                           </a:solidFill>
                           <a:latin typeface="Times New Roman"/>
                         </a:rPr>
-                        <a:t>10.58</a:t>
+                        <a:t>9.55</a:t>
                       </a:r>
                     </a:p>
                   </a:txBody>
@@ -27673,7 +27673,7 @@
                           </a:solidFill>
                           <a:latin typeface="Times New Roman"/>
                         </a:rPr>
-                        <a:t>139,726</a:t>
+                        <a:t>131,048</a:t>
                       </a:r>
                       <a:br/>
                       <a:r>
@@ -27683,7 +27683,7 @@
                           </a:solidFill>
                           <a:latin typeface="Times New Roman"/>
                         </a:rPr>
-                        <a:t>Cr. 13.97</a:t>
+                        <a:t>Cr. 13.10</a:t>
                       </a:r>
                     </a:p>
                   </a:txBody>
@@ -27726,7 +27726,7 @@
                           </a:solidFill>
                           <a:latin typeface="Times New Roman"/>
                         </a:rPr>
-                        <a:t>-171,186</a:t>
+                        <a:t>-179,864</a:t>
                       </a:r>
                       <a:br/>
                       <a:r>
@@ -27736,7 +27736,7 @@
                           </a:solidFill>
                           <a:latin typeface="Times New Roman"/>
                         </a:rPr>
-                        <a:t>Cr. -17.12</a:t>
+                        <a:t>Cr. -17.99</a:t>
                       </a:r>
                     </a:p>
                   </a:txBody>
@@ -27779,7 +27779,7 @@
                           </a:solidFill>
                           <a:latin typeface="Times New Roman"/>
                         </a:rPr>
-                        <a:t>44.94</a:t>
+                        <a:t>42.15</a:t>
                       </a:r>
                     </a:p>
                   </a:txBody>
@@ -27913,7 +27913,7 @@
                 </a:solidFill>
                 <a:latin typeface="Times New Roman"/>
               </a:rPr>
-              <a:t>Open Line FR Report - As On 17.09.2026 (Rows 14-18)</a:t>
+              <a:t>Open Line FR Report - As On 05.09.2026 (Rows 14-18)</a:t>
             </a:r>
           </a:p>
         </p:txBody>
@@ -28790,7 +28790,7 @@
                           </a:solidFill>
                           <a:latin typeface="Times New Roman"/>
                         </a:rPr>
-                        <a:t>112,585</a:t>
+                        <a:t>103,375</a:t>
                       </a:r>
                       <a:br/>
                       <a:r>
@@ -28800,7 +28800,7 @@
                           </a:solidFill>
                           <a:latin typeface="Times New Roman"/>
                         </a:rPr>
-                        <a:t>Cr. 11.26</a:t>
+                        <a:t>Cr. 10.34</a:t>
                       </a:r>
                     </a:p>
                   </a:txBody>
@@ -28843,7 +28843,7 @@
                           </a:solidFill>
                           <a:latin typeface="Times New Roman"/>
                         </a:rPr>
-                        <a:t>-203,148</a:t>
+                        <a:t>-212,358</a:t>
                       </a:r>
                       <a:br/>
                       <a:r>
@@ -28853,7 +28853,7 @@
                           </a:solidFill>
                           <a:latin typeface="Times New Roman"/>
                         </a:rPr>
-                        <a:t>Cr. -20.31</a:t>
+                        <a:t>Cr. -21.24</a:t>
                       </a:r>
                     </a:p>
                   </a:txBody>
@@ -28896,7 +28896,7 @@
                           </a:solidFill>
                           <a:latin typeface="Times New Roman"/>
                         </a:rPr>
-                        <a:t>35.66</a:t>
+                        <a:t>32.74</a:t>
                       </a:r>
                     </a:p>
                   </a:txBody>
@@ -29789,7 +29789,7 @@
                           </a:solidFill>
                           <a:latin typeface="Times New Roman"/>
                         </a:rPr>
-                        <a:t>5,043,318</a:t>
+                        <a:t>4,896,554</a:t>
                       </a:r>
                       <a:br/>
                       <a:r>
@@ -29799,7 +29799,7 @@
                           </a:solidFill>
                           <a:latin typeface="Times New Roman"/>
                         </a:rPr>
-                        <a:t>Cr. 504.33</a:t>
+                        <a:t>Cr. 489.66</a:t>
                       </a:r>
                     </a:p>
                   </a:txBody>
@@ -29842,7 +29842,7 @@
                           </a:solidFill>
                           <a:latin typeface="Times New Roman"/>
                         </a:rPr>
-                        <a:t>-564,383</a:t>
+                        <a:t>-711,147</a:t>
                       </a:r>
                       <a:br/>
                       <a:r>
@@ -29852,7 +29852,7 @@
                           </a:solidFill>
                           <a:latin typeface="Times New Roman"/>
                         </a:rPr>
-                        <a:t>Cr. -56.44</a:t>
+                        <a:t>Cr. -71.11</a:t>
                       </a:r>
                     </a:p>
                   </a:txBody>
@@ -29895,7 +29895,7 @@
                           </a:solidFill>
                           <a:latin typeface="Times New Roman"/>
                         </a:rPr>
-                        <a:t>89.94</a:t>
+                        <a:t>87.32</a:t>
                       </a:r>
                     </a:p>
                   </a:txBody>
@@ -30029,7 +30029,7 @@
                 </a:solidFill>
                 <a:latin typeface="Times New Roman"/>
               </a:rPr>
-              <a:t>Open Line FR Fund Wise - As On 17.09.2026</a:t>
+              <a:t>Open Line FR Fund Wise - As On 05.09.2026</a:t>
             </a:r>
           </a:p>
         </p:txBody>
@@ -30530,7 +30530,7 @@
                           </a:solidFill>
                           <a:latin typeface="Times New Roman"/>
                         </a:rPr>
-                        <a:t>441,204</a:t>
+                        <a:t>408,842</a:t>
                       </a:r>
                       <a:br/>
                       <a:r>
@@ -30540,7 +30540,7 @@
                           </a:solidFill>
                           <a:latin typeface="Times New Roman"/>
                         </a:rPr>
-                        <a:t>Cr. 44.12</a:t>
+                        <a:t>Cr. 40.88</a:t>
                       </a:r>
                     </a:p>
                   </a:txBody>
@@ -30583,7 +30583,7 @@
                           </a:solidFill>
                           <a:latin typeface="Times New Roman"/>
                         </a:rPr>
-                        <a:t>577,149</a:t>
+                        <a:t>609,511</a:t>
                       </a:r>
                       <a:br/>
                       <a:r>
@@ -30593,7 +30593,7 @@
                           </a:solidFill>
                           <a:latin typeface="Times New Roman"/>
                         </a:rPr>
-                        <a:t>Cr. 57.71</a:t>
+                        <a:t>Cr. 60.95</a:t>
                       </a:r>
                     </a:p>
                   </a:txBody>
@@ -30636,7 +30636,7 @@
                           </a:solidFill>
                           <a:latin typeface="Times New Roman"/>
                         </a:rPr>
-                        <a:t>43.33</a:t>
+                        <a:t>40.15</a:t>
                       </a:r>
                     </a:p>
                   </a:txBody>
@@ -30679,7 +30679,7 @@
                           </a:solidFill>
                           <a:latin typeface="Times New Roman"/>
                         </a:rPr>
-                        <a:t>56.67</a:t>
+                        <a:t>59.85</a:t>
                       </a:r>
                     </a:p>
                   </a:txBody>
@@ -31862,7 +31862,7 @@
                           </a:solidFill>
                           <a:latin typeface="Times New Roman"/>
                         </a:rPr>
-                        <a:t>3,802,846</a:t>
+                        <a:t>3,746,106</a:t>
                       </a:r>
                       <a:br/>
                       <a:r>
@@ -31872,7 +31872,7 @@
                           </a:solidFill>
                           <a:latin typeface="Times New Roman"/>
                         </a:rPr>
-                        <a:t>Cr. 380.28</a:t>
+                        <a:t>Cr. 374.61</a:t>
                       </a:r>
                     </a:p>
                   </a:txBody>
@@ -31915,7 +31915,7 @@
                           </a:solidFill>
                           <a:latin typeface="Times New Roman"/>
                         </a:rPr>
-                        <a:t>-685,331</a:t>
+                        <a:t>-628,591</a:t>
                       </a:r>
                       <a:br/>
                       <a:r>
@@ -31925,7 +31925,7 @@
                           </a:solidFill>
                           <a:latin typeface="Times New Roman"/>
                         </a:rPr>
-                        <a:t>Cr. -68.53</a:t>
+                        <a:t>Cr. -62.86</a:t>
                       </a:r>
                     </a:p>
                   </a:txBody>
@@ -31968,7 +31968,7 @@
                           </a:solidFill>
                           <a:latin typeface="Times New Roman"/>
                         </a:rPr>
-                        <a:t>121.98</a:t>
+                        <a:t>120.16</a:t>
                       </a:r>
                     </a:p>
                   </a:txBody>
@@ -32011,7 +32011,7 @@
                           </a:solidFill>
                           <a:latin typeface="Times New Roman"/>
                         </a:rPr>
-                        <a:t>-21.98</a:t>
+                        <a:t>-20.16</a:t>
                       </a:r>
                     </a:p>
                   </a:txBody>
@@ -32528,7 +32528,7 @@
                           </a:solidFill>
                           <a:latin typeface="Times New Roman"/>
                         </a:rPr>
-                        <a:t>765,318</a:t>
+                        <a:t>707,656</a:t>
                       </a:r>
                       <a:br/>
                       <a:r>
@@ -32538,7 +32538,7 @@
                           </a:solidFill>
                           <a:latin typeface="Times New Roman"/>
                         </a:rPr>
-                        <a:t>Cr. 76.53</a:t>
+                        <a:t>Cr. 70.77</a:t>
                       </a:r>
                     </a:p>
                   </a:txBody>
@@ -32581,7 +32581,7 @@
                           </a:solidFill>
                           <a:latin typeface="Times New Roman"/>
                         </a:rPr>
-                        <a:t>535,691</a:t>
+                        <a:t>593,353</a:t>
                       </a:r>
                       <a:br/>
                       <a:r>
@@ -32591,7 +32591,7 @@
                           </a:solidFill>
                           <a:latin typeface="Times New Roman"/>
                         </a:rPr>
-                        <a:t>Cr. 53.57</a:t>
+                        <a:t>Cr. 59.34</a:t>
                       </a:r>
                     </a:p>
                   </a:txBody>
@@ -32634,7 +32634,7 @@
                           </a:solidFill>
                           <a:latin typeface="Times New Roman"/>
                         </a:rPr>
-                        <a:t>58.82</a:t>
+                        <a:t>54.39</a:t>
                       </a:r>
                     </a:p>
                   </a:txBody>
@@ -32677,7 +32677,7 @@
                           </a:solidFill>
                           <a:latin typeface="Times New Roman"/>
                         </a:rPr>
-                        <a:t>41.18</a:t>
+                        <a:t>45.61</a:t>
                       </a:r>
                     </a:p>
                   </a:txBody>

--- a/exports/Moradabad_Division_DRM_Budget_FR_Analysis_H_Full_FY_2025_26_Actual.pptx
+++ b/exports/Moradabad_Division_DRM_Budget_FR_Analysis_H_Full_FY_2025_26_Actual.pptx
@@ -6251,10 +6251,10 @@
                 <a:gridCol w="1118625"/>
                 <a:gridCol w="1118625"/>
                 <a:gridCol w="1222201"/>
-                <a:gridCol w="745749"/>
+                <a:gridCol w="745750"/>
                 <a:gridCol w="1222201"/>
-                <a:gridCol w="745749"/>
-                <a:gridCol w="1118629"/>
+                <a:gridCol w="745750"/>
+                <a:gridCol w="1118627"/>
               </a:tblGrid>
               <a:tr h="432714">
                 <a:tc>

--- a/exports/Moradabad_Division_DRM_Budget_FR_Analysis_H_Full_FY_2025_26_Actual.pptx
+++ b/exports/Moradabad_Division_DRM_Budget_FR_Analysis_H_Full_FY_2025_26_Actual.pptx
@@ -6185,7 +6185,7 @@
                 </a:solidFill>
                 <a:latin typeface="Times New Roman"/>
               </a:rPr>
-              <a:t>Demand SMH Wise - AUG 2026 | uploaded 2026-09-22T17:27:48+05:30</a:t>
+              <a:t>Demand SMH Wise - AUG 2026 | uploaded 2026-09-25T10:56:20+05:30</a:t>
             </a:r>
           </a:p>
         </p:txBody>
@@ -13284,7 +13284,7 @@
                 </a:solidFill>
                 <a:latin typeface="Times New Roman"/>
               </a:rPr>
-              <a:t>PU Wise - Staff - AUG 2026 | uploaded 2026-09-22T17:27:48+05:30</a:t>
+              <a:t>PU Wise - Staff - AUG 2026 | uploaded 2026-09-25T10:56:20+05:30</a:t>
             </a:r>
           </a:p>
         </p:txBody>
@@ -13940,7 +13940,7 @@
                           </a:solidFill>
                           <a:latin typeface="Times New Roman"/>
                         </a:rPr>
-                        <a:t>671</a:t>
+                        <a:t>6,706,409</a:t>
                       </a:r>
                       <a:br/>
                       <a:r>
@@ -13950,7 +13950,7 @@
                           </a:solidFill>
                           <a:latin typeface="Times New Roman"/>
                         </a:rPr>
-                        <a:t>0.07 Cr</a:t>
+                        <a:t>670.64 Cr</a:t>
                       </a:r>
                     </a:p>
                   </a:txBody>
@@ -13993,7 +13993,7 @@
                           </a:solidFill>
                           <a:latin typeface="Times New Roman"/>
                         </a:rPr>
-                        <a:t>280</a:t>
+                        <a:t>2,794,337</a:t>
                       </a:r>
                       <a:br/>
                       <a:r>
@@ -14003,7 +14003,7 @@
                           </a:solidFill>
                           <a:latin typeface="Times New Roman"/>
                         </a:rPr>
-                        <a:t>0.03 Cr</a:t>
+                        <a:t>279.43 Cr</a:t>
                       </a:r>
                     </a:p>
                   </a:txBody>
@@ -14099,7 +14099,7 @@
                           </a:solidFill>
                           <a:latin typeface="Times New Roman"/>
                         </a:rPr>
-                        <a:t>3,071,543</a:t>
+                        <a:t>277,486</a:t>
                       </a:r>
                       <a:br/>
                       <a:r>
@@ -14109,7 +14109,7 @@
                           </a:solidFill>
                           <a:latin typeface="Times New Roman"/>
                         </a:rPr>
-                        <a:t>307.15 Cr</a:t>
+                        <a:t>27.75 Cr</a:t>
                       </a:r>
                     </a:p>
                   </a:txBody>
@@ -14152,7 +14152,7 @@
                           </a:solidFill>
                           <a:latin typeface="Times New Roman"/>
                         </a:rPr>
-                        <a:t>1098715</a:t>
+                        <a:t>110</a:t>
                       </a:r>
                     </a:p>
                   </a:txBody>
@@ -14195,7 +14195,7 @@
                           </a:solidFill>
                           <a:latin typeface="Times New Roman"/>
                         </a:rPr>
-                        <a:t>-3,071,152</a:t>
+                        <a:t>3,634,586</a:t>
                       </a:r>
                       <a:br/>
                       <a:r>
@@ -14205,7 +14205,7 @@
                           </a:solidFill>
                           <a:latin typeface="Times New Roman"/>
                         </a:rPr>
-                        <a:t>-307.12 Cr</a:t>
+                        <a:t>363.46 Cr</a:t>
                       </a:r>
                     </a:p>
                   </a:txBody>
@@ -14248,33 +14248,33 @@
                           </a:solidFill>
                           <a:latin typeface="Times New Roman"/>
                         </a:rPr>
-                        <a:t>457798</a:t>
-                      </a:r>
-                    </a:p>
-                  </a:txBody>
-                  <a:tcPr marL="12000" marR="12000" marT="8000" marB="8000">
-                    <a:lnL w="12700">
-                      <a:solidFill>
-                        <a:srgbClr val="000000"/>
-                      </a:solidFill>
-                    </a:lnL>
-                    <a:lnR w="12700">
-                      <a:solidFill>
-                        <a:srgbClr val="000000"/>
-                      </a:solidFill>
-                    </a:lnR>
-                    <a:lnT w="12700">
-                      <a:solidFill>
-                        <a:srgbClr val="000000"/>
-                      </a:solidFill>
-                    </a:lnT>
-                    <a:lnB w="12700">
-                      <a:solidFill>
-                        <a:srgbClr val="000000"/>
-                      </a:solidFill>
-                    </a:lnB>
-                    <a:solidFill>
-                      <a:srgbClr val="FCE4E4"/>
+                        <a:t>46</a:t>
+                      </a:r>
+                    </a:p>
+                  </a:txBody>
+                  <a:tcPr marL="12000" marR="12000" marT="8000" marB="8000">
+                    <a:lnL w="12700">
+                      <a:solidFill>
+                        <a:srgbClr val="000000"/>
+                      </a:solidFill>
+                    </a:lnL>
+                    <a:lnR w="12700">
+                      <a:solidFill>
+                        <a:srgbClr val="000000"/>
+                      </a:solidFill>
+                    </a:lnR>
+                    <a:lnT w="12700">
+                      <a:solidFill>
+                        <a:srgbClr val="000000"/>
+                      </a:solidFill>
+                    </a:lnT>
+                    <a:lnB w="12700">
+                      <a:solidFill>
+                        <a:srgbClr val="000000"/>
+                      </a:solidFill>
+                    </a:lnB>
+                    <a:solidFill>
+                      <a:srgbClr val="DFF3E7"/>
                     </a:solidFill>
                   </a:tcPr>
                 </a:tc>
@@ -14389,7 +14389,7 @@
                           </a:solidFill>
                           <a:latin typeface="Times New Roman"/>
                         </a:rPr>
-                        <a:t>410</a:t>
+                        <a:t>4,100,453</a:t>
                       </a:r>
                       <a:br/>
                       <a:r>
@@ -14399,7 +14399,7 @@
                           </a:solidFill>
                           <a:latin typeface="Times New Roman"/>
                         </a:rPr>
-                        <a:t>0.04 Cr</a:t>
+                        <a:t>410.05 Cr</a:t>
                       </a:r>
                     </a:p>
                   </a:txBody>
@@ -14442,7 +14442,7 @@
                           </a:solidFill>
                           <a:latin typeface="Times New Roman"/>
                         </a:rPr>
-                        <a:t>171</a:t>
+                        <a:t>1,708,522</a:t>
                       </a:r>
                       <a:br/>
                       <a:r>
@@ -14452,7 +14452,7 @@
                           </a:solidFill>
                           <a:latin typeface="Times New Roman"/>
                         </a:rPr>
-                        <a:t>0.02 Cr</a:t>
+                        <a:t>170.85 Cr</a:t>
                       </a:r>
                     </a:p>
                   </a:txBody>
@@ -14548,7 +14548,7 @@
                           </a:solidFill>
                           <a:latin typeface="Times New Roman"/>
                         </a:rPr>
-                        <a:t>1,966,447</a:t>
+                        <a:t>258,096</a:t>
                       </a:r>
                       <a:br/>
                       <a:r>
@@ -14558,7 +14558,7 @@
                           </a:solidFill>
                           <a:latin typeface="Times New Roman"/>
                         </a:rPr>
-                        <a:t>196.64 Cr</a:t>
+                        <a:t>25.81 Cr</a:t>
                       </a:r>
                     </a:p>
                   </a:txBody>
@@ -14601,7 +14601,7 @@
                           </a:solidFill>
                           <a:latin typeface="Times New Roman"/>
                         </a:rPr>
-                        <a:t>1151191</a:t>
+                        <a:t>115</a:t>
                       </a:r>
                     </a:p>
                   </a:txBody>
@@ -14644,7 +14644,7 @@
                           </a:solidFill>
                           <a:latin typeface="Times New Roman"/>
                         </a:rPr>
-                        <a:t>-1,966,208</a:t>
+                        <a:t>2,133,835</a:t>
                       </a:r>
                       <a:br/>
                       <a:r>
@@ -14654,7 +14654,7 @@
                           </a:solidFill>
                           <a:latin typeface="Times New Roman"/>
                         </a:rPr>
-                        <a:t>-196.62 Cr</a:t>
+                        <a:t>213.38 Cr</a:t>
                       </a:r>
                     </a:p>
                   </a:txBody>
@@ -14697,33 +14697,33 @@
                           </a:solidFill>
                           <a:latin typeface="Times New Roman"/>
                         </a:rPr>
-                        <a:t>479663</a:t>
-                      </a:r>
-                    </a:p>
-                  </a:txBody>
-                  <a:tcPr marL="12000" marR="12000" marT="8000" marB="8000">
-                    <a:lnL w="12700">
-                      <a:solidFill>
-                        <a:srgbClr val="000000"/>
-                      </a:solidFill>
-                    </a:lnL>
-                    <a:lnR w="12700">
-                      <a:solidFill>
-                        <a:srgbClr val="000000"/>
-                      </a:solidFill>
-                    </a:lnR>
-                    <a:lnT w="12700">
-                      <a:solidFill>
-                        <a:srgbClr val="000000"/>
-                      </a:solidFill>
-                    </a:lnT>
-                    <a:lnB w="12700">
-                      <a:solidFill>
-                        <a:srgbClr val="000000"/>
-                      </a:solidFill>
-                    </a:lnB>
-                    <a:solidFill>
-                      <a:srgbClr val="FCE4E4"/>
+                        <a:t>48</a:t>
+                      </a:r>
+                    </a:p>
+                  </a:txBody>
+                  <a:tcPr marL="12000" marR="12000" marT="8000" marB="8000">
+                    <a:lnL w="12700">
+                      <a:solidFill>
+                        <a:srgbClr val="000000"/>
+                      </a:solidFill>
+                    </a:lnL>
+                    <a:lnR w="12700">
+                      <a:solidFill>
+                        <a:srgbClr val="000000"/>
+                      </a:solidFill>
+                    </a:lnR>
+                    <a:lnT w="12700">
+                      <a:solidFill>
+                        <a:srgbClr val="000000"/>
+                      </a:solidFill>
+                    </a:lnT>
+                    <a:lnB w="12700">
+                      <a:solidFill>
+                        <a:srgbClr val="000000"/>
+                      </a:solidFill>
+                    </a:lnB>
+                    <a:solidFill>
+                      <a:srgbClr val="DFF3E7"/>
                     </a:solidFill>
                   </a:tcPr>
                 </a:tc>
@@ -14838,7 +14838,7 @@
                           </a:solidFill>
                           <a:latin typeface="Times New Roman"/>
                         </a:rPr>
-                        <a:t>29</a:t>
+                        <a:t>285,089</a:t>
                       </a:r>
                       <a:br/>
                       <a:r>
@@ -14848,7 +14848,7 @@
                           </a:solidFill>
                           <a:latin typeface="Times New Roman"/>
                         </a:rPr>
-                        <a:t>0.00 Cr</a:t>
+                        <a:t>28.51 Cr</a:t>
                       </a:r>
                     </a:p>
                   </a:txBody>
@@ -14891,7 +14891,7 @@
                           </a:solidFill>
                           <a:latin typeface="Times New Roman"/>
                         </a:rPr>
-                        <a:t>12</a:t>
+                        <a:t>118,787</a:t>
                       </a:r>
                       <a:br/>
                       <a:r>
@@ -14901,7 +14901,7 @@
                           </a:solidFill>
                           <a:latin typeface="Times New Roman"/>
                         </a:rPr>
-                        <a:t>0.00 Cr</a:t>
+                        <a:t>11.88 Cr</a:t>
                       </a:r>
                     </a:p>
                   </a:txBody>
@@ -14997,7 +14997,7 @@
                           </a:solidFill>
                           <a:latin typeface="Times New Roman"/>
                         </a:rPr>
-                        <a:t>60</a:t>
+                        <a:t>-118,715</a:t>
                       </a:r>
                       <a:br/>
                       <a:r>
@@ -15007,7 +15007,7 @@
                           </a:solidFill>
                           <a:latin typeface="Times New Roman"/>
                         </a:rPr>
-                        <a:t>0.01 Cr</a:t>
+                        <a:t>-11.87 Cr</a:t>
                       </a:r>
                     </a:p>
                   </a:txBody>
@@ -15050,33 +15050,33 @@
                           </a:solidFill>
                           <a:latin typeface="Times New Roman"/>
                         </a:rPr>
-                        <a:t>596</a:t>
-                      </a:r>
-                    </a:p>
-                  </a:txBody>
-                  <a:tcPr marL="12000" marR="12000" marT="8000" marB="8000">
-                    <a:lnL w="12700">
-                      <a:solidFill>
-                        <a:srgbClr val="000000"/>
-                      </a:solidFill>
-                    </a:lnL>
-                    <a:lnR w="12700">
-                      <a:solidFill>
-                        <a:srgbClr val="000000"/>
-                      </a:solidFill>
-                    </a:lnR>
-                    <a:lnT w="12700">
-                      <a:solidFill>
-                        <a:srgbClr val="000000"/>
-                      </a:solidFill>
-                    </a:lnT>
-                    <a:lnB w="12700">
-                      <a:solidFill>
-                        <a:srgbClr val="000000"/>
-                      </a:solidFill>
-                    </a:lnB>
-                    <a:solidFill>
-                      <a:srgbClr val="FCE4E4"/>
+                        <a:t>0</a:t>
+                      </a:r>
+                    </a:p>
+                  </a:txBody>
+                  <a:tcPr marL="12000" marR="12000" marT="8000" marB="8000">
+                    <a:lnL w="12700">
+                      <a:solidFill>
+                        <a:srgbClr val="000000"/>
+                      </a:solidFill>
+                    </a:lnL>
+                    <a:lnR w="12700">
+                      <a:solidFill>
+                        <a:srgbClr val="000000"/>
+                      </a:solidFill>
+                    </a:lnR>
+                    <a:lnT w="12700">
+                      <a:solidFill>
+                        <a:srgbClr val="000000"/>
+                      </a:solidFill>
+                    </a:lnT>
+                    <a:lnB w="12700">
+                      <a:solidFill>
+                        <a:srgbClr val="000000"/>
+                      </a:solidFill>
+                    </a:lnB>
+                    <a:solidFill>
+                      <a:srgbClr val="DFF3E7"/>
                     </a:solidFill>
                   </a:tcPr>
                 </a:tc>
@@ -15093,7 +15093,7 @@
                           </a:solidFill>
                           <a:latin typeface="Times New Roman"/>
                         </a:rPr>
-                        <a:t>-43</a:t>
+                        <a:t>285,017</a:t>
                       </a:r>
                       <a:br/>
                       <a:r>
@@ -15103,7 +15103,7 @@
                           </a:solidFill>
                           <a:latin typeface="Times New Roman"/>
                         </a:rPr>
-                        <a:t>-0.00 Cr</a:t>
+                        <a:t>28.50 Cr</a:t>
                       </a:r>
                     </a:p>
                   </a:txBody>
@@ -15146,33 +15146,33 @@
                           </a:solidFill>
                           <a:latin typeface="Times New Roman"/>
                         </a:rPr>
-                        <a:t>248</a:t>
-                      </a:r>
-                    </a:p>
-                  </a:txBody>
-                  <a:tcPr marL="12000" marR="12000" marT="8000" marB="8000">
-                    <a:lnL w="12700">
-                      <a:solidFill>
-                        <a:srgbClr val="000000"/>
-                      </a:solidFill>
-                    </a:lnL>
-                    <a:lnR w="12700">
-                      <a:solidFill>
-                        <a:srgbClr val="000000"/>
-                      </a:solidFill>
-                    </a:lnR>
-                    <a:lnT w="12700">
-                      <a:solidFill>
-                        <a:srgbClr val="000000"/>
-                      </a:solidFill>
-                    </a:lnT>
-                    <a:lnB w="12700">
-                      <a:solidFill>
-                        <a:srgbClr val="000000"/>
-                      </a:solidFill>
-                    </a:lnB>
-                    <a:solidFill>
-                      <a:srgbClr val="FCE4E4"/>
+                        <a:t>0</a:t>
+                      </a:r>
+                    </a:p>
+                  </a:txBody>
+                  <a:tcPr marL="12000" marR="12000" marT="8000" marB="8000">
+                    <a:lnL w="12700">
+                      <a:solidFill>
+                        <a:srgbClr val="000000"/>
+                      </a:solidFill>
+                    </a:lnL>
+                    <a:lnR w="12700">
+                      <a:solidFill>
+                        <a:srgbClr val="000000"/>
+                      </a:solidFill>
+                    </a:lnR>
+                    <a:lnT w="12700">
+                      <a:solidFill>
+                        <a:srgbClr val="000000"/>
+                      </a:solidFill>
+                    </a:lnT>
+                    <a:lnB w="12700">
+                      <a:solidFill>
+                        <a:srgbClr val="000000"/>
+                      </a:solidFill>
+                    </a:lnB>
+                    <a:solidFill>
+                      <a:srgbClr val="DFF3E7"/>
                     </a:solidFill>
                   </a:tcPr>
                 </a:tc>
@@ -15287,7 +15287,7 @@
                           </a:solidFill>
                           <a:latin typeface="Times New Roman"/>
                         </a:rPr>
-                        <a:t>78</a:t>
+                        <a:t>776,198</a:t>
                       </a:r>
                       <a:br/>
                       <a:r>
@@ -15297,7 +15297,7 @@
                           </a:solidFill>
                           <a:latin typeface="Times New Roman"/>
                         </a:rPr>
-                        <a:t>0.01 Cr</a:t>
+                        <a:t>77.62 Cr</a:t>
                       </a:r>
                     </a:p>
                   </a:txBody>
@@ -15340,7 +15340,7 @@
                           </a:solidFill>
                           <a:latin typeface="Times New Roman"/>
                         </a:rPr>
-                        <a:t>32</a:t>
+                        <a:t>323,416</a:t>
                       </a:r>
                       <a:br/>
                       <a:r>
@@ -15350,7 +15350,7 @@
                           </a:solidFill>
                           <a:latin typeface="Times New Roman"/>
                         </a:rPr>
-                        <a:t>0.00 Cr</a:t>
+                        <a:t>32.34 Cr</a:t>
                       </a:r>
                     </a:p>
                   </a:txBody>
@@ -15446,7 +15446,7 @@
                           </a:solidFill>
                           <a:latin typeface="Times New Roman"/>
                         </a:rPr>
-                        <a:t>337,330</a:t>
+                        <a:t>13,946</a:t>
                       </a:r>
                       <a:br/>
                       <a:r>
@@ -15456,7 +15456,7 @@
                           </a:solidFill>
                           <a:latin typeface="Times New Roman"/>
                         </a:rPr>
-                        <a:t>33.73 Cr</a:t>
+                        <a:t>1.39 Cr</a:t>
                       </a:r>
                     </a:p>
                   </a:txBody>
@@ -15499,7 +15499,7 @@
                           </a:solidFill>
                           <a:latin typeface="Times New Roman"/>
                         </a:rPr>
-                        <a:t>1038037</a:t>
+                        <a:t>104</a:t>
                       </a:r>
                     </a:p>
                   </a:txBody>
@@ -15542,7 +15542,7 @@
                           </a:solidFill>
                           <a:latin typeface="Times New Roman"/>
                         </a:rPr>
-                        <a:t>-337,284</a:t>
+                        <a:t>438,836</a:t>
                       </a:r>
                       <a:br/>
                       <a:r>
@@ -15552,7 +15552,7 @@
                           </a:solidFill>
                           <a:latin typeface="Times New Roman"/>
                         </a:rPr>
-                        <a:t>-33.73 Cr</a:t>
+                        <a:t>43.88 Cr</a:t>
                       </a:r>
                     </a:p>
                   </a:txBody>
@@ -15595,33 +15595,33 @@
                           </a:solidFill>
                           <a:latin typeface="Times New Roman"/>
                         </a:rPr>
-                        <a:t>432515</a:t>
-                      </a:r>
-                    </a:p>
-                  </a:txBody>
-                  <a:tcPr marL="12000" marR="12000" marT="8000" marB="8000">
-                    <a:lnL w="12700">
-                      <a:solidFill>
-                        <a:srgbClr val="000000"/>
-                      </a:solidFill>
-                    </a:lnL>
-                    <a:lnR w="12700">
-                      <a:solidFill>
-                        <a:srgbClr val="000000"/>
-                      </a:solidFill>
-                    </a:lnR>
-                    <a:lnT w="12700">
-                      <a:solidFill>
-                        <a:srgbClr val="000000"/>
-                      </a:solidFill>
-                    </a:lnT>
-                    <a:lnB w="12700">
-                      <a:solidFill>
-                        <a:srgbClr val="000000"/>
-                      </a:solidFill>
-                    </a:lnB>
-                    <a:solidFill>
-                      <a:srgbClr val="FCE4E4"/>
+                        <a:t>43</a:t>
+                      </a:r>
+                    </a:p>
+                  </a:txBody>
+                  <a:tcPr marL="12000" marR="12000" marT="8000" marB="8000">
+                    <a:lnL w="12700">
+                      <a:solidFill>
+                        <a:srgbClr val="000000"/>
+                      </a:solidFill>
+                    </a:lnL>
+                    <a:lnR w="12700">
+                      <a:solidFill>
+                        <a:srgbClr val="000000"/>
+                      </a:solidFill>
+                    </a:lnR>
+                    <a:lnT w="12700">
+                      <a:solidFill>
+                        <a:srgbClr val="000000"/>
+                      </a:solidFill>
+                    </a:lnT>
+                    <a:lnB w="12700">
+                      <a:solidFill>
+                        <a:srgbClr val="000000"/>
+                      </a:solidFill>
+                    </a:lnB>
+                    <a:solidFill>
+                      <a:srgbClr val="DFF3E7"/>
                     </a:solidFill>
                   </a:tcPr>
                 </a:tc>
@@ -15736,7 +15736,7 @@
                           </a:solidFill>
                           <a:latin typeface="Times New Roman"/>
                         </a:rPr>
-                        <a:t>50</a:t>
+                        <a:t>496,609</a:t>
                       </a:r>
                       <a:br/>
                       <a:r>
@@ -15746,7 +15746,7 @@
                           </a:solidFill>
                           <a:latin typeface="Times New Roman"/>
                         </a:rPr>
-                        <a:t>0.01 Cr</a:t>
+                        <a:t>49.66 Cr</a:t>
                       </a:r>
                     </a:p>
                   </a:txBody>
@@ -15789,7 +15789,7 @@
                           </a:solidFill>
                           <a:latin typeface="Times New Roman"/>
                         </a:rPr>
-                        <a:t>21</a:t>
+                        <a:t>206,920</a:t>
                       </a:r>
                       <a:br/>
                       <a:r>
@@ -15799,7 +15799,7 @@
                           </a:solidFill>
                           <a:latin typeface="Times New Roman"/>
                         </a:rPr>
-                        <a:t>0.00 Cr</a:t>
+                        <a:t>20.69 Cr</a:t>
                       </a:r>
                     </a:p>
                   </a:txBody>
@@ -15895,7 +15895,7 @@
                           </a:solidFill>
                           <a:latin typeface="Times New Roman"/>
                         </a:rPr>
-                        <a:t>216,376</a:t>
+                        <a:t>9,477</a:t>
                       </a:r>
                       <a:br/>
                       <a:r>
@@ -15905,7 +15905,7 @@
                           </a:solidFill>
                           <a:latin typeface="Times New Roman"/>
                         </a:rPr>
-                        <a:t>21.64 Cr</a:t>
+                        <a:t>0.95 Cr</a:t>
                       </a:r>
                     </a:p>
                   </a:txBody>
@@ -15948,7 +15948,7 @@
                           </a:solidFill>
                           <a:latin typeface="Times New Roman"/>
                         </a:rPr>
-                        <a:t>1038706</a:t>
+                        <a:t>105</a:t>
                       </a:r>
                     </a:p>
                   </a:txBody>
@@ -15991,7 +15991,7 @@
                           </a:solidFill>
                           <a:latin typeface="Times New Roman"/>
                         </a:rPr>
-                        <a:t>-216,347</a:t>
+                        <a:t>280,212</a:t>
                       </a:r>
                       <a:br/>
                       <a:r>
@@ -16001,7 +16001,7 @@
                           </a:solidFill>
                           <a:latin typeface="Times New Roman"/>
                         </a:rPr>
-                        <a:t>-21.63 Cr</a:t>
+                        <a:t>28.02 Cr</a:t>
                       </a:r>
                     </a:p>
                   </a:txBody>
@@ -16044,33 +16044,33 @@
                           </a:solidFill>
                           <a:latin typeface="Times New Roman"/>
                         </a:rPr>
-                        <a:t>432794</a:t>
-                      </a:r>
-                    </a:p>
-                  </a:txBody>
-                  <a:tcPr marL="12000" marR="12000" marT="8000" marB="8000">
-                    <a:lnL w="12700">
-                      <a:solidFill>
-                        <a:srgbClr val="000000"/>
-                      </a:solidFill>
-                    </a:lnL>
-                    <a:lnR w="12700">
-                      <a:solidFill>
-                        <a:srgbClr val="000000"/>
-                      </a:solidFill>
-                    </a:lnR>
-                    <a:lnT w="12700">
-                      <a:solidFill>
-                        <a:srgbClr val="000000"/>
-                      </a:solidFill>
-                    </a:lnT>
-                    <a:lnB w="12700">
-                      <a:solidFill>
-                        <a:srgbClr val="000000"/>
-                      </a:solidFill>
-                    </a:lnB>
-                    <a:solidFill>
-                      <a:srgbClr val="FCE4E4"/>
+                        <a:t>44</a:t>
+                      </a:r>
+                    </a:p>
+                  </a:txBody>
+                  <a:tcPr marL="12000" marR="12000" marT="8000" marB="8000">
+                    <a:lnL w="12700">
+                      <a:solidFill>
+                        <a:srgbClr val="000000"/>
+                      </a:solidFill>
+                    </a:lnL>
+                    <a:lnR w="12700">
+                      <a:solidFill>
+                        <a:srgbClr val="000000"/>
+                      </a:solidFill>
+                    </a:lnR>
+                    <a:lnT w="12700">
+                      <a:solidFill>
+                        <a:srgbClr val="000000"/>
+                      </a:solidFill>
+                    </a:lnT>
+                    <a:lnB w="12700">
+                      <a:solidFill>
+                        <a:srgbClr val="000000"/>
+                      </a:solidFill>
+                    </a:lnB>
+                    <a:solidFill>
+                      <a:srgbClr val="DFF3E7"/>
                     </a:solidFill>
                   </a:tcPr>
                 </a:tc>
@@ -16185,7 +16185,7 @@
                           </a:solidFill>
                           <a:latin typeface="Times New Roman"/>
                         </a:rPr>
-                        <a:t>68</a:t>
+                        <a:t>680,197</a:t>
                       </a:r>
                       <a:br/>
                       <a:r>
@@ -16195,7 +16195,7 @@
                           </a:solidFill>
                           <a:latin typeface="Times New Roman"/>
                         </a:rPr>
-                        <a:t>0.01 Cr</a:t>
+                        <a:t>68.02 Cr</a:t>
                       </a:r>
                     </a:p>
                   </a:txBody>
@@ -16238,7 +16238,7 @@
                           </a:solidFill>
                           <a:latin typeface="Times New Roman"/>
                         </a:rPr>
-                        <a:t>28</a:t>
+                        <a:t>283,415</a:t>
                       </a:r>
                       <a:br/>
                       <a:r>
@@ -16248,7 +16248,7 @@
                           </a:solidFill>
                           <a:latin typeface="Times New Roman"/>
                         </a:rPr>
-                        <a:t>0.00 Cr</a:t>
+                        <a:t>28.34 Cr</a:t>
                       </a:r>
                     </a:p>
                   </a:txBody>
@@ -16344,7 +16344,7 @@
                           </a:solidFill>
                           <a:latin typeface="Times New Roman"/>
                         </a:rPr>
-                        <a:t>364,625</a:t>
+                        <a:t>81,238</a:t>
                       </a:r>
                       <a:br/>
                       <a:r>
@@ -16354,7 +16354,7 @@
                           </a:solidFill>
                           <a:latin typeface="Times New Roman"/>
                         </a:rPr>
-                        <a:t>36.46 Cr</a:t>
+                        <a:t>8.12 Cr</a:t>
                       </a:r>
                     </a:p>
                   </a:txBody>
@@ -16397,7 +16397,7 @@
                           </a:solidFill>
                           <a:latin typeface="Times New Roman"/>
                         </a:rPr>
-                        <a:t>1287011</a:t>
+                        <a:t>129</a:t>
                       </a:r>
                     </a:p>
                   </a:txBody>
@@ -16440,7 +16440,7 @@
                           </a:solidFill>
                           <a:latin typeface="Times New Roman"/>
                         </a:rPr>
-                        <a:t>-364,585</a:t>
+                        <a:t>315,544</a:t>
                       </a:r>
                       <a:br/>
                       <a:r>
@@ -16450,7 +16450,7 @@
                           </a:solidFill>
                           <a:latin typeface="Times New Roman"/>
                         </a:rPr>
-                        <a:t>-36.46 Cr</a:t>
+                        <a:t>31.55 Cr</a:t>
                       </a:r>
                     </a:p>
                   </a:txBody>
@@ -16493,33 +16493,33 @@
                           </a:solidFill>
                           <a:latin typeface="Times New Roman"/>
                         </a:rPr>
-                        <a:t>536254</a:t>
-                      </a:r>
-                    </a:p>
-                  </a:txBody>
-                  <a:tcPr marL="12000" marR="12000" marT="8000" marB="8000">
-                    <a:lnL w="12700">
-                      <a:solidFill>
-                        <a:srgbClr val="000000"/>
-                      </a:solidFill>
-                    </a:lnL>
-                    <a:lnR w="12700">
-                      <a:solidFill>
-                        <a:srgbClr val="000000"/>
-                      </a:solidFill>
-                    </a:lnR>
-                    <a:lnT w="12700">
-                      <a:solidFill>
-                        <a:srgbClr val="000000"/>
-                      </a:solidFill>
-                    </a:lnT>
-                    <a:lnB w="12700">
-                      <a:solidFill>
-                        <a:srgbClr val="000000"/>
-                      </a:solidFill>
-                    </a:lnB>
-                    <a:solidFill>
-                      <a:srgbClr val="FCE4E4"/>
+                        <a:t>54</a:t>
+                      </a:r>
+                    </a:p>
+                  </a:txBody>
+                  <a:tcPr marL="12000" marR="12000" marT="8000" marB="8000">
+                    <a:lnL w="12700">
+                      <a:solidFill>
+                        <a:srgbClr val="000000"/>
+                      </a:solidFill>
+                    </a:lnL>
+                    <a:lnR w="12700">
+                      <a:solidFill>
+                        <a:srgbClr val="000000"/>
+                      </a:solidFill>
+                    </a:lnR>
+                    <a:lnT w="12700">
+                      <a:solidFill>
+                        <a:srgbClr val="000000"/>
+                      </a:solidFill>
+                    </a:lnT>
+                    <a:lnB w="12700">
+                      <a:solidFill>
+                        <a:srgbClr val="000000"/>
+                      </a:solidFill>
+                    </a:lnB>
+                    <a:solidFill>
+                      <a:srgbClr val="DFF3E7"/>
                     </a:solidFill>
                   </a:tcPr>
                 </a:tc>
@@ -16634,7 +16634,7 @@
                           </a:solidFill>
                           <a:latin typeface="Times New Roman"/>
                         </a:rPr>
-                        <a:t>8</a:t>
+                        <a:t>77,300</a:t>
                       </a:r>
                       <a:br/>
                       <a:r>
@@ -16644,7 +16644,7 @@
                           </a:solidFill>
                           <a:latin typeface="Times New Roman"/>
                         </a:rPr>
-                        <a:t>0.00 Cr</a:t>
+                        <a:t>7.73 Cr</a:t>
                       </a:r>
                     </a:p>
                   </a:txBody>
@@ -16687,7 +16687,7 @@
                           </a:solidFill>
                           <a:latin typeface="Times New Roman"/>
                         </a:rPr>
-                        <a:t>3</a:t>
+                        <a:t>32,208</a:t>
                       </a:r>
                       <a:br/>
                       <a:r>
@@ -16697,7 +16697,7 @@
                           </a:solidFill>
                           <a:latin typeface="Times New Roman"/>
                         </a:rPr>
-                        <a:t>0.00 Cr</a:t>
+                        <a:t>3.22 Cr</a:t>
                       </a:r>
                     </a:p>
                   </a:txBody>
@@ -16793,7 +16793,7 @@
                           </a:solidFill>
                           <a:latin typeface="Times New Roman"/>
                         </a:rPr>
-                        <a:t>59,579</a:t>
+                        <a:t>27,374</a:t>
                       </a:r>
                       <a:br/>
                       <a:r>
@@ -16803,7 +16803,7 @@
                           </a:solidFill>
                           <a:latin typeface="Times New Roman"/>
                         </a:rPr>
-                        <a:t>5.96 Cr</a:t>
+                        <a:t>2.74 Cr</a:t>
                       </a:r>
                     </a:p>
                   </a:txBody>
@@ -16846,7 +16846,7 @@
                           </a:solidFill>
                           <a:latin typeface="Times New Roman"/>
                         </a:rPr>
-                        <a:t>1787460</a:t>
+                        <a:t>185</a:t>
                       </a:r>
                     </a:p>
                   </a:txBody>
@@ -16889,7 +16889,7 @@
                           </a:solidFill>
                           <a:latin typeface="Times New Roman"/>
                         </a:rPr>
-                        <a:t>-59,574</a:t>
+                        <a:t>17,718</a:t>
                       </a:r>
                       <a:br/>
                       <a:r>
@@ -16899,7 +16899,7 @@
                           </a:solidFill>
                           <a:latin typeface="Times New Roman"/>
                         </a:rPr>
-                        <a:t>-5.96 Cr</a:t>
+                        <a:t>1.77 Cr</a:t>
                       </a:r>
                     </a:p>
                   </a:txBody>
@@ -16942,33 +16942,33 @@
                           </a:solidFill>
                           <a:latin typeface="Times New Roman"/>
                         </a:rPr>
-                        <a:t>744775</a:t>
-                      </a:r>
-                    </a:p>
-                  </a:txBody>
-                  <a:tcPr marL="12000" marR="12000" marT="8000" marB="8000">
-                    <a:lnL w="12700">
-                      <a:solidFill>
-                        <a:srgbClr val="000000"/>
-                      </a:solidFill>
-                    </a:lnL>
-                    <a:lnR w="12700">
-                      <a:solidFill>
-                        <a:srgbClr val="000000"/>
-                      </a:solidFill>
-                    </a:lnR>
-                    <a:lnT w="12700">
-                      <a:solidFill>
-                        <a:srgbClr val="000000"/>
-                      </a:solidFill>
-                    </a:lnT>
-                    <a:lnB w="12700">
-                      <a:solidFill>
-                        <a:srgbClr val="000000"/>
-                      </a:solidFill>
-                    </a:lnB>
-                    <a:solidFill>
-                      <a:srgbClr val="FCE4E4"/>
+                        <a:t>77</a:t>
+                      </a:r>
+                    </a:p>
+                  </a:txBody>
+                  <a:tcPr marL="12000" marR="12000" marT="8000" marB="8000">
+                    <a:lnL w="12700">
+                      <a:solidFill>
+                        <a:srgbClr val="000000"/>
+                      </a:solidFill>
+                    </a:lnL>
+                    <a:lnR w="12700">
+                      <a:solidFill>
+                        <a:srgbClr val="000000"/>
+                      </a:solidFill>
+                    </a:lnR>
+                    <a:lnT w="12700">
+                      <a:solidFill>
+                        <a:srgbClr val="000000"/>
+                      </a:solidFill>
+                    </a:lnT>
+                    <a:lnB w="12700">
+                      <a:solidFill>
+                        <a:srgbClr val="000000"/>
+                      </a:solidFill>
+                    </a:lnB>
+                    <a:solidFill>
+                      <a:srgbClr val="FFF2CC"/>
                     </a:solidFill>
                   </a:tcPr>
                 </a:tc>
@@ -17083,7 +17083,7 @@
                           </a:solidFill>
                           <a:latin typeface="Times New Roman"/>
                         </a:rPr>
-                        <a:t>21</a:t>
+                        <a:t>209,913</a:t>
                       </a:r>
                       <a:br/>
                       <a:r>
@@ -17093,7 +17093,7 @@
                           </a:solidFill>
                           <a:latin typeface="Times New Roman"/>
                         </a:rPr>
-                        <a:t>0.00 Cr</a:t>
+                        <a:t>20.99 Cr</a:t>
                       </a:r>
                     </a:p>
                   </a:txBody>
@@ -17136,7 +17136,7 @@
                           </a:solidFill>
                           <a:latin typeface="Times New Roman"/>
                         </a:rPr>
-                        <a:t>9</a:t>
+                        <a:t>87,464</a:t>
                       </a:r>
                       <a:br/>
                       <a:r>
@@ -17146,7 +17146,7 @@
                           </a:solidFill>
                           <a:latin typeface="Times New Roman"/>
                         </a:rPr>
-                        <a:t>0.00 Cr</a:t>
+                        <a:t>8.75 Cr</a:t>
                       </a:r>
                     </a:p>
                   </a:txBody>
@@ -17242,7 +17242,7 @@
                           </a:solidFill>
                           <a:latin typeface="Times New Roman"/>
                         </a:rPr>
-                        <a:t>122,483</a:t>
+                        <a:t>35,028</a:t>
                       </a:r>
                       <a:br/>
                       <a:r>
@@ -17252,7 +17252,7 @@
                           </a:solidFill>
                           <a:latin typeface="Times New Roman"/>
                         </a:rPr>
-                        <a:t>12.25 Cr</a:t>
+                        <a:t>3.50 Cr</a:t>
                       </a:r>
                     </a:p>
                   </a:txBody>
@@ -17295,7 +17295,7 @@
                           </a:solidFill>
                           <a:latin typeface="Times New Roman"/>
                         </a:rPr>
-                        <a:t>1399909</a:t>
+                        <a:t>140</a:t>
                       </a:r>
                     </a:p>
                   </a:txBody>
@@ -17338,7 +17338,7 @@
                           </a:solidFill>
                           <a:latin typeface="Times New Roman"/>
                         </a:rPr>
-                        <a:t>-122,471</a:t>
+                        <a:t>87,421</a:t>
                       </a:r>
                       <a:br/>
                       <a:r>
@@ -17348,7 +17348,7 @@
                           </a:solidFill>
                           <a:latin typeface="Times New Roman"/>
                         </a:rPr>
-                        <a:t>-12.25 Cr</a:t>
+                        <a:t>8.74 Cr</a:t>
                       </a:r>
                     </a:p>
                   </a:txBody>
@@ -17391,33 +17391,33 @@
                           </a:solidFill>
                           <a:latin typeface="Times New Roman"/>
                         </a:rPr>
-                        <a:t>583295</a:t>
-                      </a:r>
-                    </a:p>
-                  </a:txBody>
-                  <a:tcPr marL="12000" marR="12000" marT="8000" marB="8000">
-                    <a:lnL w="12700">
-                      <a:solidFill>
-                        <a:srgbClr val="000000"/>
-                      </a:solidFill>
-                    </a:lnL>
-                    <a:lnR w="12700">
-                      <a:solidFill>
-                        <a:srgbClr val="000000"/>
-                      </a:solidFill>
-                    </a:lnR>
-                    <a:lnT w="12700">
-                      <a:solidFill>
-                        <a:srgbClr val="000000"/>
-                      </a:solidFill>
-                    </a:lnT>
-                    <a:lnB w="12700">
-                      <a:solidFill>
-                        <a:srgbClr val="000000"/>
-                      </a:solidFill>
-                    </a:lnB>
-                    <a:solidFill>
-                      <a:srgbClr val="FCE4E4"/>
+                        <a:t>58</a:t>
+                      </a:r>
+                    </a:p>
+                  </a:txBody>
+                  <a:tcPr marL="12000" marR="12000" marT="8000" marB="8000">
+                    <a:lnL w="12700">
+                      <a:solidFill>
+                        <a:srgbClr val="000000"/>
+                      </a:solidFill>
+                    </a:lnL>
+                    <a:lnR w="12700">
+                      <a:solidFill>
+                        <a:srgbClr val="000000"/>
+                      </a:solidFill>
+                    </a:lnR>
+                    <a:lnT w="12700">
+                      <a:solidFill>
+                        <a:srgbClr val="000000"/>
+                      </a:solidFill>
+                    </a:lnT>
+                    <a:lnB w="12700">
+                      <a:solidFill>
+                        <a:srgbClr val="000000"/>
+                      </a:solidFill>
+                    </a:lnB>
+                    <a:solidFill>
+                      <a:srgbClr val="DFF3E7"/>
                     </a:solidFill>
                   </a:tcPr>
                 </a:tc>
@@ -17532,341 +17532,341 @@
                           </a:solidFill>
                           <a:latin typeface="Times New Roman"/>
                         </a:rPr>
+                        <a:t>527,832</a:t>
+                      </a:r>
+                      <a:br/>
+                      <a:r>
+                        <a:rPr lang="en-US" sz="820">
+                          <a:solidFill>
+                            <a:srgbClr val="006F78"/>
+                          </a:solidFill>
+                          <a:latin typeface="Times New Roman"/>
+                        </a:rPr>
+                        <a:t>52.78 Cr</a:t>
+                      </a:r>
+                    </a:p>
+                  </a:txBody>
+                  <a:tcPr marL="12000" marR="12000" marT="8000" marB="8000">
+                    <a:lnL w="12700">
+                      <a:solidFill>
+                        <a:srgbClr val="000000"/>
+                      </a:solidFill>
+                    </a:lnL>
+                    <a:lnR w="12700">
+                      <a:solidFill>
+                        <a:srgbClr val="000000"/>
+                      </a:solidFill>
+                    </a:lnR>
+                    <a:lnT w="12700">
+                      <a:solidFill>
+                        <a:srgbClr val="000000"/>
+                      </a:solidFill>
+                    </a:lnT>
+                    <a:lnB w="12700">
+                      <a:solidFill>
+                        <a:srgbClr val="000000"/>
+                      </a:solidFill>
+                    </a:lnB>
+                    <a:solidFill>
+                      <a:srgbClr val="FFFFFF"/>
+                    </a:solidFill>
+                  </a:tcPr>
+                </a:tc>
+                <a:tc>
+                  <a:txBody>
+                    <a:bodyPr wrap="square" anchor="ctr" lIns="18000" rIns="18000" tIns="10000" bIns="10000"/>
+                    <a:lstStyle/>
+                    <a:p>
+                      <a:pPr algn="ctr"/>
+                      <a:r>
+                        <a:rPr lang="en-US" sz="1000">
+                          <a:solidFill>
+                            <a:srgbClr val="000000"/>
+                          </a:solidFill>
+                          <a:latin typeface="Times New Roman"/>
+                        </a:rPr>
+                        <a:t>219,930</a:t>
+                      </a:r>
+                      <a:br/>
+                      <a:r>
+                        <a:rPr lang="en-US" sz="820">
+                          <a:solidFill>
+                            <a:srgbClr val="006F78"/>
+                          </a:solidFill>
+                          <a:latin typeface="Times New Roman"/>
+                        </a:rPr>
+                        <a:t>21.99 Cr</a:t>
+                      </a:r>
+                    </a:p>
+                  </a:txBody>
+                  <a:tcPr marL="12000" marR="12000" marT="8000" marB="8000">
+                    <a:lnL w="12700">
+                      <a:solidFill>
+                        <a:srgbClr val="000000"/>
+                      </a:solidFill>
+                    </a:lnL>
+                    <a:lnR w="12700">
+                      <a:solidFill>
+                        <a:srgbClr val="000000"/>
+                      </a:solidFill>
+                    </a:lnR>
+                    <a:lnT w="12700">
+                      <a:solidFill>
+                        <a:srgbClr val="000000"/>
+                      </a:solidFill>
+                    </a:lnT>
+                    <a:lnB w="12700">
+                      <a:solidFill>
+                        <a:srgbClr val="000000"/>
+                      </a:solidFill>
+                    </a:lnB>
+                    <a:solidFill>
+                      <a:srgbClr val="FFFFFF"/>
+                    </a:solidFill>
+                  </a:tcPr>
+                </a:tc>
+                <a:tc>
+                  <a:txBody>
+                    <a:bodyPr wrap="square" anchor="ctr" lIns="18000" rIns="18000" tIns="10000" bIns="10000"/>
+                    <a:lstStyle/>
+                    <a:p>
+                      <a:pPr algn="ctr"/>
+                      <a:r>
+                        <a:rPr lang="en-US" sz="1000">
+                          <a:solidFill>
+                            <a:srgbClr val="000000"/>
+                          </a:solidFill>
+                          <a:latin typeface="Times New Roman"/>
+                        </a:rPr>
+                        <a:t>278,899</a:t>
+                      </a:r>
+                      <a:br/>
+                      <a:r>
+                        <a:rPr lang="en-US" sz="820">
+                          <a:solidFill>
+                            <a:srgbClr val="006F78"/>
+                          </a:solidFill>
+                          <a:latin typeface="Times New Roman"/>
+                        </a:rPr>
+                        <a:t>27.89 Cr</a:t>
+                      </a:r>
+                    </a:p>
+                  </a:txBody>
+                  <a:tcPr marL="12000" marR="12000" marT="8000" marB="8000">
+                    <a:lnL w="12700">
+                      <a:solidFill>
+                        <a:srgbClr val="000000"/>
+                      </a:solidFill>
+                    </a:lnL>
+                    <a:lnR w="12700">
+                      <a:solidFill>
+                        <a:srgbClr val="000000"/>
+                      </a:solidFill>
+                    </a:lnR>
+                    <a:lnT w="12700">
+                      <a:solidFill>
+                        <a:srgbClr val="000000"/>
+                      </a:solidFill>
+                    </a:lnT>
+                    <a:lnB w="12700">
+                      <a:solidFill>
+                        <a:srgbClr val="000000"/>
+                      </a:solidFill>
+                    </a:lnB>
+                    <a:solidFill>
+                      <a:srgbClr val="FFFFFF"/>
+                    </a:solidFill>
+                  </a:tcPr>
+                </a:tc>
+                <a:tc>
+                  <a:txBody>
+                    <a:bodyPr wrap="square" anchor="ctr" lIns="18000" rIns="18000" tIns="10000" bIns="10000"/>
+                    <a:lstStyle/>
+                    <a:p>
+                      <a:pPr algn="ctr"/>
+                      <a:r>
+                        <a:rPr lang="en-US" sz="1000">
+                          <a:solidFill>
+                            <a:srgbClr val="000000"/>
+                          </a:solidFill>
+                          <a:latin typeface="Times New Roman"/>
+                        </a:rPr>
+                        <a:t>58,969</a:t>
+                      </a:r>
+                      <a:br/>
+                      <a:r>
+                        <a:rPr lang="en-US" sz="820">
+                          <a:solidFill>
+                            <a:srgbClr val="006F78"/>
+                          </a:solidFill>
+                          <a:latin typeface="Times New Roman"/>
+                        </a:rPr>
+                        <a:t>5.90 Cr</a:t>
+                      </a:r>
+                    </a:p>
+                  </a:txBody>
+                  <a:tcPr marL="12000" marR="12000" marT="8000" marB="8000">
+                    <a:lnL w="12700">
+                      <a:solidFill>
+                        <a:srgbClr val="000000"/>
+                      </a:solidFill>
+                    </a:lnL>
+                    <a:lnR w="12700">
+                      <a:solidFill>
+                        <a:srgbClr val="000000"/>
+                      </a:solidFill>
+                    </a:lnR>
+                    <a:lnT w="12700">
+                      <a:solidFill>
+                        <a:srgbClr val="000000"/>
+                      </a:solidFill>
+                    </a:lnT>
+                    <a:lnB w="12700">
+                      <a:solidFill>
+                        <a:srgbClr val="000000"/>
+                      </a:solidFill>
+                    </a:lnB>
+                    <a:solidFill>
+                      <a:srgbClr val="FFFFFF"/>
+                    </a:solidFill>
+                  </a:tcPr>
+                </a:tc>
+                <a:tc>
+                  <a:txBody>
+                    <a:bodyPr wrap="square" anchor="ctr" lIns="18000" rIns="18000" tIns="10000" bIns="10000"/>
+                    <a:lstStyle/>
+                    <a:p>
+                      <a:pPr algn="ctr"/>
+                      <a:r>
+                        <a:rPr lang="en-US" sz="1000" b="1">
+                          <a:solidFill>
+                            <a:srgbClr val="000000"/>
+                          </a:solidFill>
+                          <a:latin typeface="Times New Roman"/>
+                        </a:rPr>
+                        <a:t>127</a:t>
+                      </a:r>
+                    </a:p>
+                  </a:txBody>
+                  <a:tcPr marL="12000" marR="12000" marT="8000" marB="8000">
+                    <a:lnL w="12700">
+                      <a:solidFill>
+                        <a:srgbClr val="000000"/>
+                      </a:solidFill>
+                    </a:lnL>
+                    <a:lnR w="12700">
+                      <a:solidFill>
+                        <a:srgbClr val="000000"/>
+                      </a:solidFill>
+                    </a:lnR>
+                    <a:lnT w="12700">
+                      <a:solidFill>
+                        <a:srgbClr val="000000"/>
+                      </a:solidFill>
+                    </a:lnT>
+                    <a:lnB w="12700">
+                      <a:solidFill>
+                        <a:srgbClr val="000000"/>
+                      </a:solidFill>
+                    </a:lnB>
+                    <a:solidFill>
+                      <a:srgbClr val="FCE4E4"/>
+                    </a:solidFill>
+                  </a:tcPr>
+                </a:tc>
+                <a:tc>
+                  <a:txBody>
+                    <a:bodyPr wrap="square" anchor="ctr" lIns="18000" rIns="18000" tIns="10000" bIns="10000"/>
+                    <a:lstStyle/>
+                    <a:p>
+                      <a:pPr algn="ctr"/>
+                      <a:r>
+                        <a:rPr lang="en-US" sz="1000">
+                          <a:solidFill>
+                            <a:srgbClr val="000000"/>
+                          </a:solidFill>
+                          <a:latin typeface="Times New Roman"/>
+                        </a:rPr>
+                        <a:t>248,933</a:t>
+                      </a:r>
+                      <a:br/>
+                      <a:r>
+                        <a:rPr lang="en-US" sz="820">
+                          <a:solidFill>
+                            <a:srgbClr val="006F78"/>
+                          </a:solidFill>
+                          <a:latin typeface="Times New Roman"/>
+                        </a:rPr>
+                        <a:t>24.89 Cr</a:t>
+                      </a:r>
+                    </a:p>
+                  </a:txBody>
+                  <a:tcPr marL="12000" marR="12000" marT="8000" marB="8000">
+                    <a:lnL w="12700">
+                      <a:solidFill>
+                        <a:srgbClr val="000000"/>
+                      </a:solidFill>
+                    </a:lnL>
+                    <a:lnR w="12700">
+                      <a:solidFill>
+                        <a:srgbClr val="000000"/>
+                      </a:solidFill>
+                    </a:lnR>
+                    <a:lnT w="12700">
+                      <a:solidFill>
+                        <a:srgbClr val="000000"/>
+                      </a:solidFill>
+                    </a:lnT>
+                    <a:lnB w="12700">
+                      <a:solidFill>
+                        <a:srgbClr val="000000"/>
+                      </a:solidFill>
+                    </a:lnB>
+                    <a:solidFill>
+                      <a:srgbClr val="FFFFFF"/>
+                    </a:solidFill>
+                  </a:tcPr>
+                </a:tc>
+                <a:tc>
+                  <a:txBody>
+                    <a:bodyPr wrap="square" anchor="ctr" lIns="18000" rIns="18000" tIns="10000" bIns="10000"/>
+                    <a:lstStyle/>
+                    <a:p>
+                      <a:pPr algn="ctr"/>
+                      <a:r>
+                        <a:rPr lang="en-US" sz="1000" b="1">
+                          <a:solidFill>
+                            <a:srgbClr val="000000"/>
+                          </a:solidFill>
+                          <a:latin typeface="Times New Roman"/>
+                        </a:rPr>
                         <a:t>53</a:t>
                       </a:r>
-                      <a:br/>
-                      <a:r>
-                        <a:rPr lang="en-US" sz="820">
-                          <a:solidFill>
-                            <a:srgbClr val="006F78"/>
-                          </a:solidFill>
-                          <a:latin typeface="Times New Roman"/>
-                        </a:rPr>
-                        <a:t>0.01 Cr</a:t>
-                      </a:r>
-                    </a:p>
-                  </a:txBody>
-                  <a:tcPr marL="12000" marR="12000" marT="8000" marB="8000">
-                    <a:lnL w="12700">
-                      <a:solidFill>
-                        <a:srgbClr val="000000"/>
-                      </a:solidFill>
-                    </a:lnL>
-                    <a:lnR w="12700">
-                      <a:solidFill>
-                        <a:srgbClr val="000000"/>
-                      </a:solidFill>
-                    </a:lnR>
-                    <a:lnT w="12700">
-                      <a:solidFill>
-                        <a:srgbClr val="000000"/>
-                      </a:solidFill>
-                    </a:lnT>
-                    <a:lnB w="12700">
-                      <a:solidFill>
-                        <a:srgbClr val="000000"/>
-                      </a:solidFill>
-                    </a:lnB>
-                    <a:solidFill>
-                      <a:srgbClr val="FFFFFF"/>
-                    </a:solidFill>
-                  </a:tcPr>
-                </a:tc>
-                <a:tc>
-                  <a:txBody>
-                    <a:bodyPr wrap="square" anchor="ctr" lIns="18000" rIns="18000" tIns="10000" bIns="10000"/>
-                    <a:lstStyle/>
-                    <a:p>
-                      <a:pPr algn="ctr"/>
-                      <a:r>
-                        <a:rPr lang="en-US" sz="1000">
-                          <a:solidFill>
-                            <a:srgbClr val="000000"/>
-                          </a:solidFill>
-                          <a:latin typeface="Times New Roman"/>
-                        </a:rPr>
-                        <a:t>22</a:t>
-                      </a:r>
-                      <a:br/>
-                      <a:r>
-                        <a:rPr lang="en-US" sz="820">
-                          <a:solidFill>
-                            <a:srgbClr val="006F78"/>
-                          </a:solidFill>
-                          <a:latin typeface="Times New Roman"/>
-                        </a:rPr>
-                        <a:t>0.00 Cr</a:t>
-                      </a:r>
-                    </a:p>
-                  </a:txBody>
-                  <a:tcPr marL="12000" marR="12000" marT="8000" marB="8000">
-                    <a:lnL w="12700">
-                      <a:solidFill>
-                        <a:srgbClr val="000000"/>
-                      </a:solidFill>
-                    </a:lnL>
-                    <a:lnR w="12700">
-                      <a:solidFill>
-                        <a:srgbClr val="000000"/>
-                      </a:solidFill>
-                    </a:lnR>
-                    <a:lnT w="12700">
-                      <a:solidFill>
-                        <a:srgbClr val="000000"/>
-                      </a:solidFill>
-                    </a:lnT>
-                    <a:lnB w="12700">
-                      <a:solidFill>
-                        <a:srgbClr val="000000"/>
-                      </a:solidFill>
-                    </a:lnB>
-                    <a:solidFill>
-                      <a:srgbClr val="FFFFFF"/>
-                    </a:solidFill>
-                  </a:tcPr>
-                </a:tc>
-                <a:tc>
-                  <a:txBody>
-                    <a:bodyPr wrap="square" anchor="ctr" lIns="18000" rIns="18000" tIns="10000" bIns="10000"/>
-                    <a:lstStyle/>
-                    <a:p>
-                      <a:pPr algn="ctr"/>
-                      <a:r>
-                        <a:rPr lang="en-US" sz="1000">
-                          <a:solidFill>
-                            <a:srgbClr val="000000"/>
-                          </a:solidFill>
-                          <a:latin typeface="Times New Roman"/>
-                        </a:rPr>
-                        <a:t>278,899</a:t>
-                      </a:r>
-                      <a:br/>
-                      <a:r>
-                        <a:rPr lang="en-US" sz="820">
-                          <a:solidFill>
-                            <a:srgbClr val="006F78"/>
-                          </a:solidFill>
-                          <a:latin typeface="Times New Roman"/>
-                        </a:rPr>
-                        <a:t>27.89 Cr</a:t>
-                      </a:r>
-                    </a:p>
-                  </a:txBody>
-                  <a:tcPr marL="12000" marR="12000" marT="8000" marB="8000">
-                    <a:lnL w="12700">
-                      <a:solidFill>
-                        <a:srgbClr val="000000"/>
-                      </a:solidFill>
-                    </a:lnL>
-                    <a:lnR w="12700">
-                      <a:solidFill>
-                        <a:srgbClr val="000000"/>
-                      </a:solidFill>
-                    </a:lnR>
-                    <a:lnT w="12700">
-                      <a:solidFill>
-                        <a:srgbClr val="000000"/>
-                      </a:solidFill>
-                    </a:lnT>
-                    <a:lnB w="12700">
-                      <a:solidFill>
-                        <a:srgbClr val="000000"/>
-                      </a:solidFill>
-                    </a:lnB>
-                    <a:solidFill>
-                      <a:srgbClr val="FFFFFF"/>
-                    </a:solidFill>
-                  </a:tcPr>
-                </a:tc>
-                <a:tc>
-                  <a:txBody>
-                    <a:bodyPr wrap="square" anchor="ctr" lIns="18000" rIns="18000" tIns="10000" bIns="10000"/>
-                    <a:lstStyle/>
-                    <a:p>
-                      <a:pPr algn="ctr"/>
-                      <a:r>
-                        <a:rPr lang="en-US" sz="1000">
-                          <a:solidFill>
-                            <a:srgbClr val="000000"/>
-                          </a:solidFill>
-                          <a:latin typeface="Times New Roman"/>
-                        </a:rPr>
-                        <a:t>278,877</a:t>
-                      </a:r>
-                      <a:br/>
-                      <a:r>
-                        <a:rPr lang="en-US" sz="820">
-                          <a:solidFill>
-                            <a:srgbClr val="006F78"/>
-                          </a:solidFill>
-                          <a:latin typeface="Times New Roman"/>
-                        </a:rPr>
-                        <a:t>27.89 Cr</a:t>
-                      </a:r>
-                    </a:p>
-                  </a:txBody>
-                  <a:tcPr marL="12000" marR="12000" marT="8000" marB="8000">
-                    <a:lnL w="12700">
-                      <a:solidFill>
-                        <a:srgbClr val="000000"/>
-                      </a:solidFill>
-                    </a:lnL>
-                    <a:lnR w="12700">
-                      <a:solidFill>
-                        <a:srgbClr val="000000"/>
-                      </a:solidFill>
-                    </a:lnR>
-                    <a:lnT w="12700">
-                      <a:solidFill>
-                        <a:srgbClr val="000000"/>
-                      </a:solidFill>
-                    </a:lnT>
-                    <a:lnB w="12700">
-                      <a:solidFill>
-                        <a:srgbClr val="000000"/>
-                      </a:solidFill>
-                    </a:lnB>
-                    <a:solidFill>
-                      <a:srgbClr val="FFFFFF"/>
-                    </a:solidFill>
-                  </a:tcPr>
-                </a:tc>
-                <a:tc>
-                  <a:txBody>
-                    <a:bodyPr wrap="square" anchor="ctr" lIns="18000" rIns="18000" tIns="10000" bIns="10000"/>
-                    <a:lstStyle/>
-                    <a:p>
-                      <a:pPr algn="ctr"/>
-                      <a:r>
-                        <a:rPr lang="en-US" sz="1000" b="1">
-                          <a:solidFill>
-                            <a:srgbClr val="000000"/>
-                          </a:solidFill>
-                          <a:latin typeface="Times New Roman"/>
-                        </a:rPr>
-                        <a:t>1262939</a:t>
-                      </a:r>
-                    </a:p>
-                  </a:txBody>
-                  <a:tcPr marL="12000" marR="12000" marT="8000" marB="8000">
-                    <a:lnL w="12700">
-                      <a:solidFill>
-                        <a:srgbClr val="000000"/>
-                      </a:solidFill>
-                    </a:lnL>
-                    <a:lnR w="12700">
-                      <a:solidFill>
-                        <a:srgbClr val="000000"/>
-                      </a:solidFill>
-                    </a:lnR>
-                    <a:lnT w="12700">
-                      <a:solidFill>
-                        <a:srgbClr val="000000"/>
-                      </a:solidFill>
-                    </a:lnT>
-                    <a:lnB w="12700">
-                      <a:solidFill>
-                        <a:srgbClr val="000000"/>
-                      </a:solidFill>
-                    </a:lnB>
-                    <a:solidFill>
-                      <a:srgbClr val="FCE4E4"/>
-                    </a:solidFill>
-                  </a:tcPr>
-                </a:tc>
-                <a:tc>
-                  <a:txBody>
-                    <a:bodyPr wrap="square" anchor="ctr" lIns="18000" rIns="18000" tIns="10000" bIns="10000"/>
-                    <a:lstStyle/>
-                    <a:p>
-                      <a:pPr algn="ctr"/>
-                      <a:r>
-                        <a:rPr lang="en-US" sz="1000">
-                          <a:solidFill>
-                            <a:srgbClr val="000000"/>
-                          </a:solidFill>
-                          <a:latin typeface="Times New Roman"/>
-                        </a:rPr>
-                        <a:t>-278,846</a:t>
-                      </a:r>
-                      <a:br/>
-                      <a:r>
-                        <a:rPr lang="en-US" sz="820">
-                          <a:solidFill>
-                            <a:srgbClr val="006F78"/>
-                          </a:solidFill>
-                          <a:latin typeface="Times New Roman"/>
-                        </a:rPr>
-                        <a:t>-27.88 Cr</a:t>
-                      </a:r>
-                    </a:p>
-                  </a:txBody>
-                  <a:tcPr marL="12000" marR="12000" marT="8000" marB="8000">
-                    <a:lnL w="12700">
-                      <a:solidFill>
-                        <a:srgbClr val="000000"/>
-                      </a:solidFill>
-                    </a:lnL>
-                    <a:lnR w="12700">
-                      <a:solidFill>
-                        <a:srgbClr val="000000"/>
-                      </a:solidFill>
-                    </a:lnR>
-                    <a:lnT w="12700">
-                      <a:solidFill>
-                        <a:srgbClr val="000000"/>
-                      </a:solidFill>
-                    </a:lnT>
-                    <a:lnB w="12700">
-                      <a:solidFill>
-                        <a:srgbClr val="000000"/>
-                      </a:solidFill>
-                    </a:lnB>
-                    <a:solidFill>
-                      <a:srgbClr val="FFFFFF"/>
-                    </a:solidFill>
-                  </a:tcPr>
-                </a:tc>
-                <a:tc>
-                  <a:txBody>
-                    <a:bodyPr wrap="square" anchor="ctr" lIns="18000" rIns="18000" tIns="10000" bIns="10000"/>
-                    <a:lstStyle/>
-                    <a:p>
-                      <a:pPr algn="ctr"/>
-                      <a:r>
-                        <a:rPr lang="en-US" sz="1000" b="1">
-                          <a:solidFill>
-                            <a:srgbClr val="000000"/>
-                          </a:solidFill>
-                          <a:latin typeface="Times New Roman"/>
-                        </a:rPr>
-                        <a:t>526225</a:t>
-                      </a:r>
-                    </a:p>
-                  </a:txBody>
-                  <a:tcPr marL="12000" marR="12000" marT="8000" marB="8000">
-                    <a:lnL w="12700">
-                      <a:solidFill>
-                        <a:srgbClr val="000000"/>
-                      </a:solidFill>
-                    </a:lnL>
-                    <a:lnR w="12700">
-                      <a:solidFill>
-                        <a:srgbClr val="000000"/>
-                      </a:solidFill>
-                    </a:lnR>
-                    <a:lnT w="12700">
-                      <a:solidFill>
-                        <a:srgbClr val="000000"/>
-                      </a:solidFill>
-                    </a:lnT>
-                    <a:lnB w="12700">
-                      <a:solidFill>
-                        <a:srgbClr val="000000"/>
-                      </a:solidFill>
-                    </a:lnB>
-                    <a:solidFill>
-                      <a:srgbClr val="FCE4E4"/>
+                    </a:p>
+                  </a:txBody>
+                  <a:tcPr marL="12000" marR="12000" marT="8000" marB="8000">
+                    <a:lnL w="12700">
+                      <a:solidFill>
+                        <a:srgbClr val="000000"/>
+                      </a:solidFill>
+                    </a:lnL>
+                    <a:lnR w="12700">
+                      <a:solidFill>
+                        <a:srgbClr val="000000"/>
+                      </a:solidFill>
+                    </a:lnR>
+                    <a:lnT w="12700">
+                      <a:solidFill>
+                        <a:srgbClr val="000000"/>
+                      </a:solidFill>
+                    </a:lnT>
+                    <a:lnB w="12700">
+                      <a:solidFill>
+                        <a:srgbClr val="000000"/>
+                      </a:solidFill>
+                    </a:lnB>
+                    <a:solidFill>
+                      <a:srgbClr val="DFF3E7"/>
                     </a:solidFill>
                   </a:tcPr>
                 </a:tc>
@@ -17981,7 +17981,7 @@
                           </a:solidFill>
                           <a:latin typeface="Times New Roman"/>
                         </a:rPr>
-                        <a:t>2</a:t>
+                        <a:t>16,048</a:t>
                       </a:r>
                       <a:br/>
                       <a:r>
@@ -17991,7 +17991,7 @@
                           </a:solidFill>
                           <a:latin typeface="Times New Roman"/>
                         </a:rPr>
-                        <a:t>0.00 Cr</a:t>
+                        <a:t>1.60 Cr</a:t>
                       </a:r>
                     </a:p>
                   </a:txBody>
@@ -18034,7 +18034,7 @@
                           </a:solidFill>
                           <a:latin typeface="Times New Roman"/>
                         </a:rPr>
-                        <a:t>1</a:t>
+                        <a:t>6,687</a:t>
                       </a:r>
                       <a:br/>
                       <a:r>
@@ -18044,7 +18044,7 @@
                           </a:solidFill>
                           <a:latin typeface="Times New Roman"/>
                         </a:rPr>
-                        <a:t>0.00 Cr</a:t>
+                        <a:t>0.67 Cr</a:t>
                       </a:r>
                     </a:p>
                   </a:txBody>
@@ -18140,7 +18140,7 @@
                           </a:solidFill>
                           <a:latin typeface="Times New Roman"/>
                         </a:rPr>
-                        <a:t>11,131</a:t>
+                        <a:t>4,445</a:t>
                       </a:r>
                       <a:br/>
                       <a:r>
@@ -18150,7 +18150,7 @@
                           </a:solidFill>
                           <a:latin typeface="Times New Roman"/>
                         </a:rPr>
-                        <a:t>1.11 Cr</a:t>
+                        <a:t>0.44 Cr</a:t>
                       </a:r>
                     </a:p>
                   </a:txBody>
@@ -18193,7 +18193,7 @@
                           </a:solidFill>
                           <a:latin typeface="Times New Roman"/>
                         </a:rPr>
-                        <a:t>1335840</a:t>
+                        <a:t>166</a:t>
                       </a:r>
                     </a:p>
                   </a:txBody>
@@ -18236,7 +18236,7 @@
                           </a:solidFill>
                           <a:latin typeface="Times New Roman"/>
                         </a:rPr>
-                        <a:t>-11,130</a:t>
+                        <a:t>4,916</a:t>
                       </a:r>
                       <a:br/>
                       <a:r>
@@ -18246,7 +18246,7 @@
                           </a:solidFill>
                           <a:latin typeface="Times New Roman"/>
                         </a:rPr>
-                        <a:t>-1.11 Cr</a:t>
+                        <a:t>0.49 Cr</a:t>
                       </a:r>
                     </a:p>
                   </a:txBody>
@@ -18289,33 +18289,33 @@
                           </a:solidFill>
                           <a:latin typeface="Times New Roman"/>
                         </a:rPr>
-                        <a:t>556600</a:t>
-                      </a:r>
-                    </a:p>
-                  </a:txBody>
-                  <a:tcPr marL="12000" marR="12000" marT="8000" marB="8000">
-                    <a:lnL w="12700">
-                      <a:solidFill>
-                        <a:srgbClr val="000000"/>
-                      </a:solidFill>
-                    </a:lnL>
-                    <a:lnR w="12700">
-                      <a:solidFill>
-                        <a:srgbClr val="000000"/>
-                      </a:solidFill>
-                    </a:lnR>
-                    <a:lnT w="12700">
-                      <a:solidFill>
-                        <a:srgbClr val="000000"/>
-                      </a:solidFill>
-                    </a:lnT>
-                    <a:lnB w="12700">
-                      <a:solidFill>
-                        <a:srgbClr val="000000"/>
-                      </a:solidFill>
-                    </a:lnB>
-                    <a:solidFill>
-                      <a:srgbClr val="FCE4E4"/>
+                        <a:t>69</a:t>
+                      </a:r>
+                    </a:p>
+                  </a:txBody>
+                  <a:tcPr marL="12000" marR="12000" marT="8000" marB="8000">
+                    <a:lnL w="12700">
+                      <a:solidFill>
+                        <a:srgbClr val="000000"/>
+                      </a:solidFill>
+                    </a:lnL>
+                    <a:lnR w="12700">
+                      <a:solidFill>
+                        <a:srgbClr val="000000"/>
+                      </a:solidFill>
+                    </a:lnR>
+                    <a:lnT w="12700">
+                      <a:solidFill>
+                        <a:srgbClr val="000000"/>
+                      </a:solidFill>
+                    </a:lnT>
+                    <a:lnB w="12700">
+                      <a:solidFill>
+                        <a:srgbClr val="000000"/>
+                      </a:solidFill>
+                    </a:lnB>
+                    <a:solidFill>
+                      <a:srgbClr val="DFF3E7"/>
                     </a:solidFill>
                   </a:tcPr>
                 </a:tc>
@@ -18430,7 +18430,7 @@
                           </a:solidFill>
                           <a:latin typeface="Times New Roman"/>
                         </a:rPr>
-                        <a:t>31</a:t>
+                        <a:t>308,081</a:t>
                       </a:r>
                       <a:br/>
                       <a:r>
@@ -18440,7 +18440,7 @@
                           </a:solidFill>
                           <a:latin typeface="Times New Roman"/>
                         </a:rPr>
-                        <a:t>0.00 Cr</a:t>
+                        <a:t>30.81 Cr</a:t>
                       </a:r>
                     </a:p>
                   </a:txBody>
@@ -18483,7 +18483,7 @@
                           </a:solidFill>
                           <a:latin typeface="Times New Roman"/>
                         </a:rPr>
-                        <a:t>13</a:t>
+                        <a:t>128,367</a:t>
                       </a:r>
                       <a:br/>
                       <a:r>
@@ -18493,7 +18493,7 @@
                           </a:solidFill>
                           <a:latin typeface="Times New Roman"/>
                         </a:rPr>
-                        <a:t>0.00 Cr</a:t>
+                        <a:t>12.84 Cr</a:t>
                       </a:r>
                     </a:p>
                   </a:txBody>
@@ -18589,7 +18589,7 @@
                           </a:solidFill>
                           <a:latin typeface="Times New Roman"/>
                         </a:rPr>
-                        <a:t>217,087</a:t>
+                        <a:t>88,733</a:t>
                       </a:r>
                       <a:br/>
                       <a:r>
@@ -18599,7 +18599,7 @@
                           </a:solidFill>
                           <a:latin typeface="Times New Roman"/>
                         </a:rPr>
-                        <a:t>21.71 Cr</a:t>
+                        <a:t>8.87 Cr</a:t>
                       </a:r>
                     </a:p>
                   </a:txBody>
@@ -18642,7 +18642,7 @@
                           </a:solidFill>
                           <a:latin typeface="Times New Roman"/>
                         </a:rPr>
-                        <a:t>1680774</a:t>
+                        <a:t>169</a:t>
                       </a:r>
                     </a:p>
                   </a:txBody>
@@ -18685,7 +18685,7 @@
                           </a:solidFill>
                           <a:latin typeface="Times New Roman"/>
                         </a:rPr>
-                        <a:t>-217,069</a:t>
+                        <a:t>90,981</a:t>
                       </a:r>
                       <a:br/>
                       <a:r>
@@ -18695,7 +18695,7 @@
                           </a:solidFill>
                           <a:latin typeface="Times New Roman"/>
                         </a:rPr>
-                        <a:t>-21.71 Cr</a:t>
+                        <a:t>9.10 Cr</a:t>
                       </a:r>
                     </a:p>
                   </a:txBody>
@@ -18738,33 +18738,33 @@
                           </a:solidFill>
                           <a:latin typeface="Times New Roman"/>
                         </a:rPr>
-                        <a:t>700323</a:t>
-                      </a:r>
-                    </a:p>
-                  </a:txBody>
-                  <a:tcPr marL="12000" marR="12000" marT="8000" marB="8000">
-                    <a:lnL w="12700">
-                      <a:solidFill>
-                        <a:srgbClr val="000000"/>
-                      </a:solidFill>
-                    </a:lnL>
-                    <a:lnR w="12700">
-                      <a:solidFill>
-                        <a:srgbClr val="000000"/>
-                      </a:solidFill>
-                    </a:lnR>
-                    <a:lnT w="12700">
-                      <a:solidFill>
-                        <a:srgbClr val="000000"/>
-                      </a:solidFill>
-                    </a:lnT>
-                    <a:lnB w="12700">
-                      <a:solidFill>
-                        <a:srgbClr val="000000"/>
-                      </a:solidFill>
-                    </a:lnB>
-                    <a:solidFill>
-                      <a:srgbClr val="FCE4E4"/>
+                        <a:t>70</a:t>
+                      </a:r>
+                    </a:p>
+                  </a:txBody>
+                  <a:tcPr marL="12000" marR="12000" marT="8000" marB="8000">
+                    <a:lnL w="12700">
+                      <a:solidFill>
+                        <a:srgbClr val="000000"/>
+                      </a:solidFill>
+                    </a:lnL>
+                    <a:lnR w="12700">
+                      <a:solidFill>
+                        <a:srgbClr val="000000"/>
+                      </a:solidFill>
+                    </a:lnR>
+                    <a:lnT w="12700">
+                      <a:solidFill>
+                        <a:srgbClr val="000000"/>
+                      </a:solidFill>
+                    </a:lnT>
+                    <a:lnB w="12700">
+                      <a:solidFill>
+                        <a:srgbClr val="000000"/>
+                      </a:solidFill>
+                    </a:lnB>
+                    <a:solidFill>
+                      <a:srgbClr val="DFF3E7"/>
                     </a:solidFill>
                   </a:tcPr>
                 </a:tc>
@@ -18879,7 +18879,7 @@
                           </a:solidFill>
                           <a:latin typeface="Times New Roman"/>
                         </a:rPr>
-                        <a:t>38</a:t>
+                        <a:t>379,418</a:t>
                       </a:r>
                       <a:br/>
                       <a:r>
@@ -18889,7 +18889,7 @@
                           </a:solidFill>
                           <a:latin typeface="Times New Roman"/>
                         </a:rPr>
-                        <a:t>0.00 Cr</a:t>
+                        <a:t>37.94 Cr</a:t>
                       </a:r>
                     </a:p>
                   </a:txBody>
@@ -18932,7 +18932,7 @@
                           </a:solidFill>
                           <a:latin typeface="Times New Roman"/>
                         </a:rPr>
-                        <a:t>16</a:t>
+                        <a:t>158,091</a:t>
                       </a:r>
                       <a:br/>
                       <a:r>
@@ -18942,7 +18942,7 @@
                           </a:solidFill>
                           <a:latin typeface="Times New Roman"/>
                         </a:rPr>
-                        <a:t>0.00 Cr</a:t>
+                        <a:t>15.81 Cr</a:t>
                       </a:r>
                     </a:p>
                   </a:txBody>
@@ -19038,7 +19038,7 @@
                           </a:solidFill>
                           <a:latin typeface="Times New Roman"/>
                         </a:rPr>
-                        <a:t>374,995</a:t>
+                        <a:t>216,920</a:t>
                       </a:r>
                       <a:br/>
                       <a:r>
@@ -19048,7 +19048,7 @@
                           </a:solidFill>
                           <a:latin typeface="Times New Roman"/>
                         </a:rPr>
-                        <a:t>37.50 Cr</a:t>
+                        <a:t>21.69 Cr</a:t>
                       </a:r>
                     </a:p>
                   </a:txBody>
@@ -19091,7 +19091,7 @@
                           </a:solidFill>
                           <a:latin typeface="Times New Roman"/>
                         </a:rPr>
-                        <a:t>2368491</a:t>
+                        <a:t>237</a:t>
                       </a:r>
                     </a:p>
                   </a:txBody>
@@ -19134,7 +19134,7 @@
                           </a:solidFill>
                           <a:latin typeface="Times New Roman"/>
                         </a:rPr>
-                        <a:t>-374,973</a:t>
+                        <a:t>4,407</a:t>
                       </a:r>
                       <a:br/>
                       <a:r>
@@ -19144,7 +19144,7 @@
                           </a:solidFill>
                           <a:latin typeface="Times New Roman"/>
                         </a:rPr>
-                        <a:t>-37.50 Cr</a:t>
+                        <a:t>0.44 Cr</a:t>
                       </a:r>
                     </a:p>
                   </a:txBody>
@@ -19187,33 +19187,33 @@
                           </a:solidFill>
                           <a:latin typeface="Times New Roman"/>
                         </a:rPr>
-                        <a:t>986871</a:t>
-                      </a:r>
-                    </a:p>
-                  </a:txBody>
-                  <a:tcPr marL="12000" marR="12000" marT="8000" marB="8000">
-                    <a:lnL w="12700">
-                      <a:solidFill>
-                        <a:srgbClr val="000000"/>
-                      </a:solidFill>
-                    </a:lnL>
-                    <a:lnR w="12700">
-                      <a:solidFill>
-                        <a:srgbClr val="000000"/>
-                      </a:solidFill>
-                    </a:lnR>
-                    <a:lnT w="12700">
-                      <a:solidFill>
-                        <a:srgbClr val="000000"/>
-                      </a:solidFill>
-                    </a:lnT>
-                    <a:lnB w="12700">
-                      <a:solidFill>
-                        <a:srgbClr val="000000"/>
-                      </a:solidFill>
-                    </a:lnB>
-                    <a:solidFill>
-                      <a:srgbClr val="FCE4E4"/>
+                        <a:t>99</a:t>
+                      </a:r>
+                    </a:p>
+                  </a:txBody>
+                  <a:tcPr marL="12000" marR="12000" marT="8000" marB="8000">
+                    <a:lnL w="12700">
+                      <a:solidFill>
+                        <a:srgbClr val="000000"/>
+                      </a:solidFill>
+                    </a:lnL>
+                    <a:lnR w="12700">
+                      <a:solidFill>
+                        <a:srgbClr val="000000"/>
+                      </a:solidFill>
+                    </a:lnR>
+                    <a:lnT w="12700">
+                      <a:solidFill>
+                        <a:srgbClr val="000000"/>
+                      </a:solidFill>
+                    </a:lnT>
+                    <a:lnB w="12700">
+                      <a:solidFill>
+                        <a:srgbClr val="000000"/>
+                      </a:solidFill>
+                    </a:lnB>
+                    <a:solidFill>
+                      <a:srgbClr val="FFF2CC"/>
                     </a:solidFill>
                   </a:tcPr>
                 </a:tc>
@@ -19328,7 +19328,7 @@
                           </a:solidFill>
                           <a:latin typeface="Times New Roman"/>
                         </a:rPr>
-                        <a:t>1,459</a:t>
+                        <a:t>14,563,547</a:t>
                       </a:r>
                       <a:br/>
                       <a:r>
@@ -19338,7 +19338,7 @@
                           </a:solidFill>
                           <a:latin typeface="Times New Roman"/>
                         </a:rPr>
-                        <a:t>0.15 Cr</a:t>
+                        <a:t>1456.35 Cr</a:t>
                       </a:r>
                     </a:p>
                   </a:txBody>
@@ -19381,7 +19381,7 @@
                           </a:solidFill>
                           <a:latin typeface="Times New Roman"/>
                         </a:rPr>
-                        <a:t>608</a:t>
+                        <a:t>6,068,145</a:t>
                       </a:r>
                       <a:br/>
                       <a:r>
@@ -19391,7 +19391,7 @@
                           </a:solidFill>
                           <a:latin typeface="Times New Roman"/>
                         </a:rPr>
-                        <a:t>0.06 Cr</a:t>
+                        <a:t>606.81 Cr</a:t>
                       </a:r>
                     </a:p>
                   </a:txBody>
@@ -19487,7 +19487,7 @@
                           </a:solidFill>
                           <a:latin typeface="Times New Roman"/>
                         </a:rPr>
-                        <a:t>7,020,533</a:t>
+                        <a:t>952,996</a:t>
                       </a:r>
                       <a:br/>
                       <a:r>
@@ -19497,7 +19497,7 @@
                           </a:solidFill>
                           <a:latin typeface="Times New Roman"/>
                         </a:rPr>
-                        <a:t>702.05 Cr</a:t>
+                        <a:t>95.30 Cr</a:t>
                       </a:r>
                     </a:p>
                   </a:txBody>
@@ -19540,7 +19540,7 @@
                           </a:solidFill>
                           <a:latin typeface="Times New Roman"/>
                         </a:rPr>
-                        <a:t>1154951</a:t>
+                        <a:t>116</a:t>
                       </a:r>
                     </a:p>
                   </a:txBody>
@@ -19583,7 +19583,7 @@
                           </a:solidFill>
                           <a:latin typeface="Times New Roman"/>
                         </a:rPr>
-                        <a:t>-7,019,682</a:t>
+                        <a:t>7,542,406</a:t>
                       </a:r>
                       <a:br/>
                       <a:r>
@@ -19593,7 +19593,7 @@
                           </a:solidFill>
                           <a:latin typeface="Times New Roman"/>
                         </a:rPr>
-                        <a:t>-701.97 Cr</a:t>
+                        <a:t>754.24 Cr</a:t>
                       </a:r>
                     </a:p>
                   </a:txBody>
@@ -19636,33 +19636,33 @@
                           </a:solidFill>
                           <a:latin typeface="Times New Roman"/>
                         </a:rPr>
-                        <a:t>481230</a:t>
-                      </a:r>
-                    </a:p>
-                  </a:txBody>
-                  <a:tcPr marL="12000" marR="12000" marT="8000" marB="8000">
-                    <a:lnL w="12700">
-                      <a:solidFill>
-                        <a:srgbClr val="000000"/>
-                      </a:solidFill>
-                    </a:lnL>
-                    <a:lnR w="12700">
-                      <a:solidFill>
-                        <a:srgbClr val="000000"/>
-                      </a:solidFill>
-                    </a:lnR>
-                    <a:lnT w="12700">
-                      <a:solidFill>
-                        <a:srgbClr val="000000"/>
-                      </a:solidFill>
-                    </a:lnT>
-                    <a:lnB w="12700">
-                      <a:solidFill>
-                        <a:srgbClr val="000000"/>
-                      </a:solidFill>
-                    </a:lnB>
-                    <a:solidFill>
-                      <a:srgbClr val="D92323"/>
+                        <a:t>48</a:t>
+                      </a:r>
+                    </a:p>
+                  </a:txBody>
+                  <a:tcPr marL="12000" marR="12000" marT="8000" marB="8000">
+                    <a:lnL w="12700">
+                      <a:solidFill>
+                        <a:srgbClr val="000000"/>
+                      </a:solidFill>
+                    </a:lnL>
+                    <a:lnR w="12700">
+                      <a:solidFill>
+                        <a:srgbClr val="000000"/>
+                      </a:solidFill>
+                    </a:lnR>
+                    <a:lnT w="12700">
+                      <a:solidFill>
+                        <a:srgbClr val="000000"/>
+                      </a:solidFill>
+                    </a:lnT>
+                    <a:lnB w="12700">
+                      <a:solidFill>
+                        <a:srgbClr val="000000"/>
+                      </a:solidFill>
+                    </a:lnB>
+                    <a:solidFill>
+                      <a:srgbClr val="25A55B"/>
                     </a:solidFill>
                   </a:tcPr>
                 </a:tc>
@@ -19780,7 +19780,7 @@
                 </a:solidFill>
                 <a:latin typeface="Times New Roman"/>
               </a:rPr>
-              <a:t>PU Wise - Non-Staff Part 1 - AUG 2026 | uploaded 2026-09-22T17:27:48+05:30</a:t>
+              <a:t>PU Wise - Non-Staff Part 1 - AUG 2026 | uploaded 2026-09-25T10:56:20+05:30</a:t>
             </a:r>
           </a:p>
         </p:txBody>
@@ -20436,7 +20436,7 @@
                           </a:solidFill>
                           <a:latin typeface="Times New Roman"/>
                         </a:rPr>
-                        <a:t>107</a:t>
+                        <a:t>1,068,752</a:t>
                       </a:r>
                       <a:br/>
                       <a:r>
@@ -20446,7 +20446,7 @@
                           </a:solidFill>
                           <a:latin typeface="Times New Roman"/>
                         </a:rPr>
-                        <a:t>0.01 Cr</a:t>
+                        <a:t>106.88 Cr</a:t>
                       </a:r>
                     </a:p>
                   </a:txBody>
@@ -20489,7 +20489,7 @@
                           </a:solidFill>
                           <a:latin typeface="Times New Roman"/>
                         </a:rPr>
-                        <a:t>45</a:t>
+                        <a:t>445,313</a:t>
                       </a:r>
                       <a:br/>
                       <a:r>
@@ -20499,7 +20499,7 @@
                           </a:solidFill>
                           <a:latin typeface="Times New Roman"/>
                         </a:rPr>
-                        <a:t>0.00 Cr</a:t>
+                        <a:t>44.53 Cr</a:t>
                       </a:r>
                     </a:p>
                   </a:txBody>
@@ -20595,7 +20595,7 @@
                           </a:solidFill>
                           <a:latin typeface="Times New Roman"/>
                         </a:rPr>
-                        <a:t>860,094</a:t>
+                        <a:t>414,826</a:t>
                       </a:r>
                       <a:br/>
                       <a:r>
@@ -20605,7 +20605,7 @@
                           </a:solidFill>
                           <a:latin typeface="Times New Roman"/>
                         </a:rPr>
-                        <a:t>86.01 Cr</a:t>
+                        <a:t>41.48 Cr</a:t>
                       </a:r>
                     </a:p>
                   </a:txBody>
@@ -20648,7 +20648,7 @@
                           </a:solidFill>
                           <a:latin typeface="Times New Roman"/>
                         </a:rPr>
-                        <a:t>1929284</a:t>
+                        <a:t>193</a:t>
                       </a:r>
                     </a:p>
                   </a:txBody>
@@ -20691,7 +20691,7 @@
                           </a:solidFill>
                           <a:latin typeface="Times New Roman"/>
                         </a:rPr>
-                        <a:t>-860,032</a:t>
+                        <a:t>208,613</a:t>
                       </a:r>
                       <a:br/>
                       <a:r>
@@ -20701,7 +20701,7 @@
                           </a:solidFill>
                           <a:latin typeface="Times New Roman"/>
                         </a:rPr>
-                        <a:t>-86.00 Cr</a:t>
+                        <a:t>20.86 Cr</a:t>
                       </a:r>
                     </a:p>
                   </a:txBody>
@@ -20744,33 +20744,33 @@
                           </a:solidFill>
                           <a:latin typeface="Times New Roman"/>
                         </a:rPr>
-                        <a:t>803868</a:t>
-                      </a:r>
-                    </a:p>
-                  </a:txBody>
-                  <a:tcPr marL="12000" marR="12000" marT="8000" marB="8000">
-                    <a:lnL w="12700">
-                      <a:solidFill>
-                        <a:srgbClr val="000000"/>
-                      </a:solidFill>
-                    </a:lnL>
-                    <a:lnR w="12700">
-                      <a:solidFill>
-                        <a:srgbClr val="000000"/>
-                      </a:solidFill>
-                    </a:lnR>
-                    <a:lnT w="12700">
-                      <a:solidFill>
-                        <a:srgbClr val="000000"/>
-                      </a:solidFill>
-                    </a:lnT>
-                    <a:lnB w="12700">
-                      <a:solidFill>
-                        <a:srgbClr val="000000"/>
-                      </a:solidFill>
-                    </a:lnB>
-                    <a:solidFill>
-                      <a:srgbClr val="FCE4E4"/>
+                        <a:t>80</a:t>
+                      </a:r>
+                    </a:p>
+                  </a:txBody>
+                  <a:tcPr marL="12000" marR="12000" marT="8000" marB="8000">
+                    <a:lnL w="12700">
+                      <a:solidFill>
+                        <a:srgbClr val="000000"/>
+                      </a:solidFill>
+                    </a:lnL>
+                    <a:lnR w="12700">
+                      <a:solidFill>
+                        <a:srgbClr val="000000"/>
+                      </a:solidFill>
+                    </a:lnR>
+                    <a:lnT w="12700">
+                      <a:solidFill>
+                        <a:srgbClr val="000000"/>
+                      </a:solidFill>
+                    </a:lnT>
+                    <a:lnB w="12700">
+                      <a:solidFill>
+                        <a:srgbClr val="000000"/>
+                      </a:solidFill>
+                    </a:lnB>
+                    <a:solidFill>
+                      <a:srgbClr val="FFF2CC"/>
                     </a:solidFill>
                   </a:tcPr>
                 </a:tc>
@@ -20885,7 +20885,7 @@
                           </a:solidFill>
                           <a:latin typeface="Times New Roman"/>
                         </a:rPr>
-                        <a:t>15</a:t>
+                        <a:t>149,947</a:t>
                       </a:r>
                       <a:br/>
                       <a:r>
@@ -20895,7 +20895,7 @@
                           </a:solidFill>
                           <a:latin typeface="Times New Roman"/>
                         </a:rPr>
-                        <a:t>0.00 Cr</a:t>
+                        <a:t>14.99 Cr</a:t>
                       </a:r>
                     </a:p>
                   </a:txBody>
@@ -20938,7 +20938,7 @@
                           </a:solidFill>
                           <a:latin typeface="Times New Roman"/>
                         </a:rPr>
-                        <a:t>6</a:t>
+                        <a:t>62,478</a:t>
                       </a:r>
                       <a:br/>
                       <a:r>
@@ -20948,7 +20948,7 @@
                           </a:solidFill>
                           <a:latin typeface="Times New Roman"/>
                         </a:rPr>
-                        <a:t>0.00 Cr</a:t>
+                        <a:t>6.25 Cr</a:t>
                       </a:r>
                     </a:p>
                   </a:txBody>
@@ -21044,7 +21044,7 @@
                           </a:solidFill>
                           <a:latin typeface="Times New Roman"/>
                         </a:rPr>
-                        <a:t>70,602</a:t>
+                        <a:t>8,130</a:t>
                       </a:r>
                       <a:br/>
                       <a:r>
@@ -21054,7 +21054,7 @@
                           </a:solidFill>
                           <a:latin typeface="Times New Roman"/>
                         </a:rPr>
-                        <a:t>7.06 Cr</a:t>
+                        <a:t>0.81 Cr</a:t>
                       </a:r>
                     </a:p>
                   </a:txBody>
@@ -21097,7 +21097,7 @@
                           </a:solidFill>
                           <a:latin typeface="Times New Roman"/>
                         </a:rPr>
-                        <a:t>1129728</a:t>
+                        <a:t>113</a:t>
                       </a:r>
                     </a:p>
                   </a:txBody>
@@ -21140,7 +21140,7 @@
                           </a:solidFill>
                           <a:latin typeface="Times New Roman"/>
                         </a:rPr>
-                        <a:t>-70,593</a:t>
+                        <a:t>79,339</a:t>
                       </a:r>
                       <a:br/>
                       <a:r>
@@ -21150,7 +21150,7 @@
                           </a:solidFill>
                           <a:latin typeface="Times New Roman"/>
                         </a:rPr>
-                        <a:t>-7.06 Cr</a:t>
+                        <a:t>7.93 Cr</a:t>
                       </a:r>
                     </a:p>
                   </a:txBody>
@@ -21193,33 +21193,33 @@
                           </a:solidFill>
                           <a:latin typeface="Times New Roman"/>
                         </a:rPr>
-                        <a:t>470720</a:t>
-                      </a:r>
-                    </a:p>
-                  </a:txBody>
-                  <a:tcPr marL="12000" marR="12000" marT="8000" marB="8000">
-                    <a:lnL w="12700">
-                      <a:solidFill>
-                        <a:srgbClr val="000000"/>
-                      </a:solidFill>
-                    </a:lnL>
-                    <a:lnR w="12700">
-                      <a:solidFill>
-                        <a:srgbClr val="000000"/>
-                      </a:solidFill>
-                    </a:lnR>
-                    <a:lnT w="12700">
-                      <a:solidFill>
-                        <a:srgbClr val="000000"/>
-                      </a:solidFill>
-                    </a:lnT>
-                    <a:lnB w="12700">
-                      <a:solidFill>
-                        <a:srgbClr val="000000"/>
-                      </a:solidFill>
-                    </a:lnB>
-                    <a:solidFill>
-                      <a:srgbClr val="FCE4E4"/>
+                        <a:t>47</a:t>
+                      </a:r>
+                    </a:p>
+                  </a:txBody>
+                  <a:tcPr marL="12000" marR="12000" marT="8000" marB="8000">
+                    <a:lnL w="12700">
+                      <a:solidFill>
+                        <a:srgbClr val="000000"/>
+                      </a:solidFill>
+                    </a:lnL>
+                    <a:lnR w="12700">
+                      <a:solidFill>
+                        <a:srgbClr val="000000"/>
+                      </a:solidFill>
+                    </a:lnR>
+                    <a:lnT w="12700">
+                      <a:solidFill>
+                        <a:srgbClr val="000000"/>
+                      </a:solidFill>
+                    </a:lnT>
+                    <a:lnB w="12700">
+                      <a:solidFill>
+                        <a:srgbClr val="000000"/>
+                      </a:solidFill>
+                    </a:lnB>
+                    <a:solidFill>
+                      <a:srgbClr val="DFF3E7"/>
                     </a:solidFill>
                   </a:tcPr>
                 </a:tc>
@@ -21334,7 +21334,7 @@
                           </a:solidFill>
                           <a:latin typeface="Times New Roman"/>
                         </a:rPr>
-                        <a:t>388</a:t>
+                        <a:t>3,878,724</a:t>
                       </a:r>
                       <a:br/>
                       <a:r>
@@ -21344,7 +21344,7 @@
                           </a:solidFill>
                           <a:latin typeface="Times New Roman"/>
                         </a:rPr>
-                        <a:t>0.04 Cr</a:t>
+                        <a:t>387.87 Cr</a:t>
                       </a:r>
                     </a:p>
                   </a:txBody>
@@ -21387,7 +21387,7 @@
                           </a:solidFill>
                           <a:latin typeface="Times New Roman"/>
                         </a:rPr>
-                        <a:t>162</a:t>
+                        <a:t>1,616,135</a:t>
                       </a:r>
                       <a:br/>
                       <a:r>
@@ -21397,7 +21397,7 @@
                           </a:solidFill>
                           <a:latin typeface="Times New Roman"/>
                         </a:rPr>
-                        <a:t>0.02 Cr</a:t>
+                        <a:t>161.61 Cr</a:t>
                       </a:r>
                     </a:p>
                   </a:txBody>
@@ -21493,7 +21493,7 @@
                           </a:solidFill>
                           <a:latin typeface="Times New Roman"/>
                         </a:rPr>
-                        <a:t>1,916,347</a:t>
+                        <a:t>300,374</a:t>
                       </a:r>
                       <a:br/>
                       <a:r>
@@ -21503,7 +21503,7 @@
                           </a:solidFill>
                           <a:latin typeface="Times New Roman"/>
                         </a:rPr>
-                        <a:t>191.63 Cr</a:t>
+                        <a:t>30.04 Cr</a:t>
                       </a:r>
                     </a:p>
                   </a:txBody>
@@ -21546,7 +21546,7 @@
                           </a:solidFill>
                           <a:latin typeface="Times New Roman"/>
                         </a:rPr>
-                        <a:t>1185469</a:t>
+                        <a:t>119</a:t>
                       </a:r>
                     </a:p>
                   </a:txBody>
@@ -21589,7 +21589,7 @@
                           </a:solidFill>
                           <a:latin typeface="Times New Roman"/>
                         </a:rPr>
-                        <a:t>-1,916,121</a:t>
+                        <a:t>1,962,215</a:t>
                       </a:r>
                       <a:br/>
                       <a:r>
@@ -21599,7 +21599,7 @@
                           </a:solidFill>
                           <a:latin typeface="Times New Roman"/>
                         </a:rPr>
-                        <a:t>-191.61 Cr</a:t>
+                        <a:t>196.22 Cr</a:t>
                       </a:r>
                     </a:p>
                   </a:txBody>
@@ -21642,33 +21642,33 @@
                           </a:solidFill>
                           <a:latin typeface="Times New Roman"/>
                         </a:rPr>
-                        <a:t>493946</a:t>
-                      </a:r>
-                    </a:p>
-                  </a:txBody>
-                  <a:tcPr marL="12000" marR="12000" marT="8000" marB="8000">
-                    <a:lnL w="12700">
-                      <a:solidFill>
-                        <a:srgbClr val="000000"/>
-                      </a:solidFill>
-                    </a:lnL>
-                    <a:lnR w="12700">
-                      <a:solidFill>
-                        <a:srgbClr val="000000"/>
-                      </a:solidFill>
-                    </a:lnR>
-                    <a:lnT w="12700">
-                      <a:solidFill>
-                        <a:srgbClr val="000000"/>
-                      </a:solidFill>
-                    </a:lnT>
-                    <a:lnB w="12700">
-                      <a:solidFill>
-                        <a:srgbClr val="000000"/>
-                      </a:solidFill>
-                    </a:lnB>
-                    <a:solidFill>
-                      <a:srgbClr val="FCE4E4"/>
+                        <a:t>49</a:t>
+                      </a:r>
+                    </a:p>
+                  </a:txBody>
+                  <a:tcPr marL="12000" marR="12000" marT="8000" marB="8000">
+                    <a:lnL w="12700">
+                      <a:solidFill>
+                        <a:srgbClr val="000000"/>
+                      </a:solidFill>
+                    </a:lnL>
+                    <a:lnR w="12700">
+                      <a:solidFill>
+                        <a:srgbClr val="000000"/>
+                      </a:solidFill>
+                    </a:lnR>
+                    <a:lnT w="12700">
+                      <a:solidFill>
+                        <a:srgbClr val="000000"/>
+                      </a:solidFill>
+                    </a:lnT>
+                    <a:lnB w="12700">
+                      <a:solidFill>
+                        <a:srgbClr val="000000"/>
+                      </a:solidFill>
+                    </a:lnB>
+                    <a:solidFill>
+                      <a:srgbClr val="DFF3E7"/>
                     </a:solidFill>
                   </a:tcPr>
                 </a:tc>
@@ -21783,7 +21783,7 @@
                           </a:solidFill>
                           <a:latin typeface="Times New Roman"/>
                         </a:rPr>
-                        <a:t>325</a:t>
+                        <a:t>3,254,310</a:t>
                       </a:r>
                       <a:br/>
                       <a:r>
@@ -21793,7 +21793,7 @@
                           </a:solidFill>
                           <a:latin typeface="Times New Roman"/>
                         </a:rPr>
-                        <a:t>0.03 Cr</a:t>
+                        <a:t>325.43 Cr</a:t>
                       </a:r>
                     </a:p>
                   </a:txBody>
@@ -21836,8 +21836,210 @@
                           </a:solidFill>
                           <a:latin typeface="Times New Roman"/>
                         </a:rPr>
+                        <a:t>1,355,962</a:t>
+                      </a:r>
+                      <a:br/>
+                      <a:r>
+                        <a:rPr lang="en-US" sz="820">
+                          <a:solidFill>
+                            <a:srgbClr val="006F78"/>
+                          </a:solidFill>
+                          <a:latin typeface="Times New Roman"/>
+                        </a:rPr>
+                        <a:t>135.60 Cr</a:t>
+                      </a:r>
+                    </a:p>
+                  </a:txBody>
+                  <a:tcPr marL="12000" marR="12000" marT="8000" marB="8000">
+                    <a:lnL w="12700">
+                      <a:solidFill>
+                        <a:srgbClr val="000000"/>
+                      </a:solidFill>
+                    </a:lnL>
+                    <a:lnR w="12700">
+                      <a:solidFill>
+                        <a:srgbClr val="000000"/>
+                      </a:solidFill>
+                    </a:lnR>
+                    <a:lnT w="12700">
+                      <a:solidFill>
+                        <a:srgbClr val="000000"/>
+                      </a:solidFill>
+                    </a:lnT>
+                    <a:lnB w="12700">
+                      <a:solidFill>
+                        <a:srgbClr val="000000"/>
+                      </a:solidFill>
+                    </a:lnB>
+                    <a:solidFill>
+                      <a:srgbClr val="D9EAF7"/>
+                    </a:solidFill>
+                  </a:tcPr>
+                </a:tc>
+                <a:tc>
+                  <a:txBody>
+                    <a:bodyPr wrap="square" anchor="ctr" lIns="18000" rIns="18000" tIns="10000" bIns="10000"/>
+                    <a:lstStyle/>
+                    <a:p>
+                      <a:pPr algn="ctr"/>
+                      <a:r>
+                        <a:rPr lang="en-US" sz="1000">
+                          <a:solidFill>
+                            <a:srgbClr val="000000"/>
+                          </a:solidFill>
+                          <a:latin typeface="Times New Roman"/>
+                        </a:rPr>
+                        <a:t>1,824,117</a:t>
+                      </a:r>
+                      <a:br/>
+                      <a:r>
+                        <a:rPr lang="en-US" sz="820">
+                          <a:solidFill>
+                            <a:srgbClr val="006F78"/>
+                          </a:solidFill>
+                          <a:latin typeface="Times New Roman"/>
+                        </a:rPr>
+                        <a:t>182.41 Cr</a:t>
+                      </a:r>
+                    </a:p>
+                  </a:txBody>
+                  <a:tcPr marL="12000" marR="12000" marT="8000" marB="8000">
+                    <a:lnL w="12700">
+                      <a:solidFill>
+                        <a:srgbClr val="000000"/>
+                      </a:solidFill>
+                    </a:lnL>
+                    <a:lnR w="12700">
+                      <a:solidFill>
+                        <a:srgbClr val="000000"/>
+                      </a:solidFill>
+                    </a:lnR>
+                    <a:lnT w="12700">
+                      <a:solidFill>
+                        <a:srgbClr val="000000"/>
+                      </a:solidFill>
+                    </a:lnT>
+                    <a:lnB w="12700">
+                      <a:solidFill>
+                        <a:srgbClr val="000000"/>
+                      </a:solidFill>
+                    </a:lnB>
+                    <a:solidFill>
+                      <a:srgbClr val="D9EAF7"/>
+                    </a:solidFill>
+                  </a:tcPr>
+                </a:tc>
+                <a:tc>
+                  <a:txBody>
+                    <a:bodyPr wrap="square" anchor="ctr" lIns="18000" rIns="18000" tIns="10000" bIns="10000"/>
+                    <a:lstStyle/>
+                    <a:p>
+                      <a:pPr algn="ctr"/>
+                      <a:r>
+                        <a:rPr lang="en-US" sz="1000">
+                          <a:solidFill>
+                            <a:srgbClr val="000000"/>
+                          </a:solidFill>
+                          <a:latin typeface="Times New Roman"/>
+                        </a:rPr>
+                        <a:t>468,154</a:t>
+                      </a:r>
+                      <a:br/>
+                      <a:r>
+                        <a:rPr lang="en-US" sz="820">
+                          <a:solidFill>
+                            <a:srgbClr val="006F78"/>
+                          </a:solidFill>
+                          <a:latin typeface="Times New Roman"/>
+                        </a:rPr>
+                        <a:t>46.82 Cr</a:t>
+                      </a:r>
+                    </a:p>
+                  </a:txBody>
+                  <a:tcPr marL="12000" marR="12000" marT="8000" marB="8000">
+                    <a:lnL w="12700">
+                      <a:solidFill>
+                        <a:srgbClr val="000000"/>
+                      </a:solidFill>
+                    </a:lnL>
+                    <a:lnR w="12700">
+                      <a:solidFill>
+                        <a:srgbClr val="000000"/>
+                      </a:solidFill>
+                    </a:lnR>
+                    <a:lnT w="12700">
+                      <a:solidFill>
+                        <a:srgbClr val="000000"/>
+                      </a:solidFill>
+                    </a:lnT>
+                    <a:lnB w="12700">
+                      <a:solidFill>
+                        <a:srgbClr val="000000"/>
+                      </a:solidFill>
+                    </a:lnB>
+                    <a:solidFill>
+                      <a:srgbClr val="D9EAF7"/>
+                    </a:solidFill>
+                  </a:tcPr>
+                </a:tc>
+                <a:tc>
+                  <a:txBody>
+                    <a:bodyPr wrap="square" anchor="ctr" lIns="18000" rIns="18000" tIns="10000" bIns="10000"/>
+                    <a:lstStyle/>
+                    <a:p>
+                      <a:pPr algn="ctr"/>
+                      <a:r>
+                        <a:rPr lang="en-US" sz="1000" b="1">
+                          <a:solidFill>
+                            <a:srgbClr val="000000"/>
+                          </a:solidFill>
+                          <a:latin typeface="Times New Roman"/>
+                        </a:rPr>
                         <a:t>135</a:t>
                       </a:r>
+                    </a:p>
+                  </a:txBody>
+                  <a:tcPr marL="12000" marR="12000" marT="8000" marB="8000">
+                    <a:lnL w="12700">
+                      <a:solidFill>
+                        <a:srgbClr val="000000"/>
+                      </a:solidFill>
+                    </a:lnL>
+                    <a:lnR w="12700">
+                      <a:solidFill>
+                        <a:srgbClr val="000000"/>
+                      </a:solidFill>
+                    </a:lnR>
+                    <a:lnT w="12700">
+                      <a:solidFill>
+                        <a:srgbClr val="000000"/>
+                      </a:solidFill>
+                    </a:lnT>
+                    <a:lnB w="12700">
+                      <a:solidFill>
+                        <a:srgbClr val="000000"/>
+                      </a:solidFill>
+                    </a:lnB>
+                    <a:solidFill>
+                      <a:srgbClr val="FCE4E4"/>
+                    </a:solidFill>
+                  </a:tcPr>
+                </a:tc>
+                <a:tc>
+                  <a:txBody>
+                    <a:bodyPr wrap="square" anchor="ctr" lIns="18000" rIns="18000" tIns="10000" bIns="10000"/>
+                    <a:lstStyle/>
+                    <a:p>
+                      <a:pPr algn="ctr"/>
+                      <a:r>
+                        <a:rPr lang="en-US" sz="1000">
+                          <a:solidFill>
+                            <a:srgbClr val="000000"/>
+                          </a:solidFill>
+                          <a:latin typeface="Times New Roman"/>
+                        </a:rPr>
+                        <a:t>1,430,193</a:t>
+                      </a:r>
                       <a:br/>
                       <a:r>
                         <a:rPr lang="en-US" sz="820">
@@ -21846,7 +22048,7 @@
                           </a:solidFill>
                           <a:latin typeface="Times New Roman"/>
                         </a:rPr>
-                        <a:t>0.01 Cr</a:t>
+                        <a:t>143.02 Cr</a:t>
                       </a:r>
                     </a:p>
                   </a:txBody>
@@ -21883,241 +22085,39 @@
                     <a:p>
                       <a:pPr algn="ctr"/>
                       <a:r>
-                        <a:rPr lang="en-US" sz="1000">
-                          <a:solidFill>
-                            <a:srgbClr val="000000"/>
-                          </a:solidFill>
-                          <a:latin typeface="Times New Roman"/>
-                        </a:rPr>
-                        <a:t>1,824,117</a:t>
-                      </a:r>
-                      <a:br/>
-                      <a:r>
-                        <a:rPr lang="en-US" sz="820">
-                          <a:solidFill>
-                            <a:srgbClr val="006F78"/>
-                          </a:solidFill>
-                          <a:latin typeface="Times New Roman"/>
-                        </a:rPr>
-                        <a:t>182.41 Cr</a:t>
-                      </a:r>
-                    </a:p>
-                  </a:txBody>
-                  <a:tcPr marL="12000" marR="12000" marT="8000" marB="8000">
-                    <a:lnL w="12700">
-                      <a:solidFill>
-                        <a:srgbClr val="000000"/>
-                      </a:solidFill>
-                    </a:lnL>
-                    <a:lnR w="12700">
-                      <a:solidFill>
-                        <a:srgbClr val="000000"/>
-                      </a:solidFill>
-                    </a:lnR>
-                    <a:lnT w="12700">
-                      <a:solidFill>
-                        <a:srgbClr val="000000"/>
-                      </a:solidFill>
-                    </a:lnT>
-                    <a:lnB w="12700">
-                      <a:solidFill>
-                        <a:srgbClr val="000000"/>
-                      </a:solidFill>
-                    </a:lnB>
-                    <a:solidFill>
-                      <a:srgbClr val="D9EAF7"/>
-                    </a:solidFill>
-                  </a:tcPr>
-                </a:tc>
-                <a:tc>
-                  <a:txBody>
-                    <a:bodyPr wrap="square" anchor="ctr" lIns="18000" rIns="18000" tIns="10000" bIns="10000"/>
-                    <a:lstStyle/>
-                    <a:p>
-                      <a:pPr algn="ctr"/>
-                      <a:r>
-                        <a:rPr lang="en-US" sz="1000">
-                          <a:solidFill>
-                            <a:srgbClr val="000000"/>
-                          </a:solidFill>
-                          <a:latin typeface="Times New Roman"/>
-                        </a:rPr>
-                        <a:t>1,823,982</a:t>
-                      </a:r>
-                      <a:br/>
-                      <a:r>
-                        <a:rPr lang="en-US" sz="820">
-                          <a:solidFill>
-                            <a:srgbClr val="006F78"/>
-                          </a:solidFill>
-                          <a:latin typeface="Times New Roman"/>
-                        </a:rPr>
-                        <a:t>182.40 Cr</a:t>
-                      </a:r>
-                    </a:p>
-                  </a:txBody>
-                  <a:tcPr marL="12000" marR="12000" marT="8000" marB="8000">
-                    <a:lnL w="12700">
-                      <a:solidFill>
-                        <a:srgbClr val="000000"/>
-                      </a:solidFill>
-                    </a:lnL>
-                    <a:lnR w="12700">
-                      <a:solidFill>
-                        <a:srgbClr val="000000"/>
-                      </a:solidFill>
-                    </a:lnR>
-                    <a:lnT w="12700">
-                      <a:solidFill>
-                        <a:srgbClr val="000000"/>
-                      </a:solidFill>
-                    </a:lnT>
-                    <a:lnB w="12700">
-                      <a:solidFill>
-                        <a:srgbClr val="000000"/>
-                      </a:solidFill>
-                    </a:lnB>
-                    <a:solidFill>
-                      <a:srgbClr val="D9EAF7"/>
-                    </a:solidFill>
-                  </a:tcPr>
-                </a:tc>
-                <a:tc>
-                  <a:txBody>
-                    <a:bodyPr wrap="square" anchor="ctr" lIns="18000" rIns="18000" tIns="10000" bIns="10000"/>
-                    <a:lstStyle/>
-                    <a:p>
-                      <a:pPr algn="ctr"/>
-                      <a:r>
                         <a:rPr lang="en-US" sz="1000" b="1">
                           <a:solidFill>
                             <a:srgbClr val="000000"/>
                           </a:solidFill>
                           <a:latin typeface="Times New Roman"/>
                         </a:rPr>
-                        <a:t>1347040</a:t>
-                      </a:r>
-                    </a:p>
-                  </a:txBody>
-                  <a:tcPr marL="12000" marR="12000" marT="8000" marB="8000">
-                    <a:lnL w="12700">
-                      <a:solidFill>
-                        <a:srgbClr val="000000"/>
-                      </a:solidFill>
-                    </a:lnL>
-                    <a:lnR w="12700">
-                      <a:solidFill>
-                        <a:srgbClr val="000000"/>
-                      </a:solidFill>
-                    </a:lnR>
-                    <a:lnT w="12700">
-                      <a:solidFill>
-                        <a:srgbClr val="000000"/>
-                      </a:solidFill>
-                    </a:lnT>
-                    <a:lnB w="12700">
-                      <a:solidFill>
-                        <a:srgbClr val="000000"/>
-                      </a:solidFill>
-                    </a:lnB>
-                    <a:solidFill>
-                      <a:srgbClr val="FCE4E4"/>
-                    </a:solidFill>
-                  </a:tcPr>
-                </a:tc>
-                <a:tc>
-                  <a:txBody>
-                    <a:bodyPr wrap="square" anchor="ctr" lIns="18000" rIns="18000" tIns="10000" bIns="10000"/>
-                    <a:lstStyle/>
-                    <a:p>
-                      <a:pPr algn="ctr"/>
-                      <a:r>
-                        <a:rPr lang="en-US" sz="1000">
-                          <a:solidFill>
-                            <a:srgbClr val="000000"/>
-                          </a:solidFill>
-                          <a:latin typeface="Times New Roman"/>
-                        </a:rPr>
-                        <a:t>-1,823,792</a:t>
-                      </a:r>
-                      <a:br/>
-                      <a:r>
-                        <a:rPr lang="en-US" sz="820">
-                          <a:solidFill>
-                            <a:srgbClr val="006F78"/>
-                          </a:solidFill>
-                          <a:latin typeface="Times New Roman"/>
-                        </a:rPr>
-                        <a:t>-182.38 Cr</a:t>
-                      </a:r>
-                    </a:p>
-                  </a:txBody>
-                  <a:tcPr marL="12000" marR="12000" marT="8000" marB="8000">
-                    <a:lnL w="12700">
-                      <a:solidFill>
-                        <a:srgbClr val="000000"/>
-                      </a:solidFill>
-                    </a:lnL>
-                    <a:lnR w="12700">
-                      <a:solidFill>
-                        <a:srgbClr val="000000"/>
-                      </a:solidFill>
-                    </a:lnR>
-                    <a:lnT w="12700">
-                      <a:solidFill>
-                        <a:srgbClr val="000000"/>
-                      </a:solidFill>
-                    </a:lnT>
-                    <a:lnB w="12700">
-                      <a:solidFill>
-                        <a:srgbClr val="000000"/>
-                      </a:solidFill>
-                    </a:lnB>
-                    <a:solidFill>
-                      <a:srgbClr val="D9EAF7"/>
-                    </a:solidFill>
-                  </a:tcPr>
-                </a:tc>
-                <a:tc>
-                  <a:txBody>
-                    <a:bodyPr wrap="square" anchor="ctr" lIns="18000" rIns="18000" tIns="10000" bIns="10000"/>
-                    <a:lstStyle/>
-                    <a:p>
-                      <a:pPr algn="ctr"/>
-                      <a:r>
-                        <a:rPr lang="en-US" sz="1000" b="1">
-                          <a:solidFill>
-                            <a:srgbClr val="000000"/>
-                          </a:solidFill>
-                          <a:latin typeface="Times New Roman"/>
-                        </a:rPr>
-                        <a:t>561267</a:t>
-                      </a:r>
-                    </a:p>
-                  </a:txBody>
-                  <a:tcPr marL="12000" marR="12000" marT="8000" marB="8000">
-                    <a:lnL w="12700">
-                      <a:solidFill>
-                        <a:srgbClr val="000000"/>
-                      </a:solidFill>
-                    </a:lnL>
-                    <a:lnR w="12700">
-                      <a:solidFill>
-                        <a:srgbClr val="000000"/>
-                      </a:solidFill>
-                    </a:lnR>
-                    <a:lnT w="12700">
-                      <a:solidFill>
-                        <a:srgbClr val="000000"/>
-                      </a:solidFill>
-                    </a:lnT>
-                    <a:lnB w="12700">
-                      <a:solidFill>
-                        <a:srgbClr val="000000"/>
-                      </a:solidFill>
-                    </a:lnB>
-                    <a:solidFill>
-                      <a:srgbClr val="FCE4E4"/>
+                        <a:t>56</a:t>
+                      </a:r>
+                    </a:p>
+                  </a:txBody>
+                  <a:tcPr marL="12000" marR="12000" marT="8000" marB="8000">
+                    <a:lnL w="12700">
+                      <a:solidFill>
+                        <a:srgbClr val="000000"/>
+                      </a:solidFill>
+                    </a:lnL>
+                    <a:lnR w="12700">
+                      <a:solidFill>
+                        <a:srgbClr val="000000"/>
+                      </a:solidFill>
+                    </a:lnR>
+                    <a:lnT w="12700">
+                      <a:solidFill>
+                        <a:srgbClr val="000000"/>
+                      </a:solidFill>
+                    </a:lnT>
+                    <a:lnB w="12700">
+                      <a:solidFill>
+                        <a:srgbClr val="000000"/>
+                      </a:solidFill>
+                    </a:lnB>
+                    <a:solidFill>
+                      <a:srgbClr val="DFF3E7"/>
                     </a:solidFill>
                   </a:tcPr>
                 </a:tc>
@@ -22232,7 +22232,7 @@
                           </a:solidFill>
                           <a:latin typeface="Times New Roman"/>
                         </a:rPr>
-                        <a:t>470</a:t>
+                        <a:t>4,703,356</a:t>
                       </a:r>
                       <a:br/>
                       <a:r>
@@ -22242,7 +22242,7 @@
                           </a:solidFill>
                           <a:latin typeface="Times New Roman"/>
                         </a:rPr>
-                        <a:t>0.05 Cr</a:t>
+                        <a:t>470.34 Cr</a:t>
                       </a:r>
                     </a:p>
                   </a:txBody>
@@ -22285,7 +22285,7 @@
                           </a:solidFill>
                           <a:latin typeface="Times New Roman"/>
                         </a:rPr>
-                        <a:t>196</a:t>
+                        <a:t>1,959,732</a:t>
                       </a:r>
                       <a:br/>
                       <a:r>
@@ -22295,7 +22295,7 @@
                           </a:solidFill>
                           <a:latin typeface="Times New Roman"/>
                         </a:rPr>
-                        <a:t>0.02 Cr</a:t>
+                        <a:t>195.97 Cr</a:t>
                       </a:r>
                     </a:p>
                   </a:txBody>
@@ -22391,7 +22391,7 @@
                           </a:solidFill>
                           <a:latin typeface="Times New Roman"/>
                         </a:rPr>
-                        <a:t>2,715,219</a:t>
+                        <a:t>755,683</a:t>
                       </a:r>
                       <a:br/>
                       <a:r>
@@ -22401,7 +22401,7 @@
                           </a:solidFill>
                           <a:latin typeface="Times New Roman"/>
                         </a:rPr>
-                        <a:t>271.52 Cr</a:t>
+                        <a:t>75.57 Cr</a:t>
                       </a:r>
                     </a:p>
                   </a:txBody>
@@ -22444,7 +22444,7 @@
                           </a:solidFill>
                           <a:latin typeface="Times New Roman"/>
                         </a:rPr>
-                        <a:t>1386595</a:t>
+                        <a:t>139</a:t>
                       </a:r>
                     </a:p>
                   </a:txBody>
@@ -22487,7 +22487,7 @@
                           </a:solidFill>
                           <a:latin typeface="Times New Roman"/>
                         </a:rPr>
-                        <a:t>-2,714,945</a:t>
+                        <a:t>1,987,941</a:t>
                       </a:r>
                       <a:br/>
                       <a:r>
@@ -22497,7 +22497,7 @@
                           </a:solidFill>
                           <a:latin typeface="Times New Roman"/>
                         </a:rPr>
-                        <a:t>-271.49 Cr</a:t>
+                        <a:t>198.79 Cr</a:t>
                       </a:r>
                     </a:p>
                   </a:txBody>
@@ -22540,33 +22540,33 @@
                           </a:solidFill>
                           <a:latin typeface="Times New Roman"/>
                         </a:rPr>
-                        <a:t>577748</a:t>
-                      </a:r>
-                    </a:p>
-                  </a:txBody>
-                  <a:tcPr marL="12000" marR="12000" marT="8000" marB="8000">
-                    <a:lnL w="12700">
-                      <a:solidFill>
-                        <a:srgbClr val="000000"/>
-                      </a:solidFill>
-                    </a:lnL>
-                    <a:lnR w="12700">
-                      <a:solidFill>
-                        <a:srgbClr val="000000"/>
-                      </a:solidFill>
-                    </a:lnR>
-                    <a:lnT w="12700">
-                      <a:solidFill>
-                        <a:srgbClr val="000000"/>
-                      </a:solidFill>
-                    </a:lnT>
-                    <a:lnB w="12700">
-                      <a:solidFill>
-                        <a:srgbClr val="000000"/>
-                      </a:solidFill>
-                    </a:lnB>
-                    <a:solidFill>
-                      <a:srgbClr val="FCE4E4"/>
+                        <a:t>58</a:t>
+                      </a:r>
+                    </a:p>
+                  </a:txBody>
+                  <a:tcPr marL="12000" marR="12000" marT="8000" marB="8000">
+                    <a:lnL w="12700">
+                      <a:solidFill>
+                        <a:srgbClr val="000000"/>
+                      </a:solidFill>
+                    </a:lnL>
+                    <a:lnR w="12700">
+                      <a:solidFill>
+                        <a:srgbClr val="000000"/>
+                      </a:solidFill>
+                    </a:lnR>
+                    <a:lnT w="12700">
+                      <a:solidFill>
+                        <a:srgbClr val="000000"/>
+                      </a:solidFill>
+                    </a:lnT>
+                    <a:lnB w="12700">
+                      <a:solidFill>
+                        <a:srgbClr val="000000"/>
+                      </a:solidFill>
+                    </a:lnB>
+                    <a:solidFill>
+                      <a:srgbClr val="DFF3E7"/>
                     </a:solidFill>
                   </a:tcPr>
                 </a:tc>
@@ -22681,7 +22681,7 @@
                           </a:solidFill>
                           <a:latin typeface="Times New Roman"/>
                         </a:rPr>
-                        <a:t>1,305</a:t>
+                        <a:t>13,055,089</a:t>
                       </a:r>
                       <a:br/>
                       <a:r>
@@ -22691,7 +22691,7 @@
                           </a:solidFill>
                           <a:latin typeface="Times New Roman"/>
                         </a:rPr>
-                        <a:t>0.13 Cr</a:t>
+                        <a:t>1305.51 Cr</a:t>
                       </a:r>
                     </a:p>
                   </a:txBody>
@@ -22734,7 +22734,7 @@
                           </a:solidFill>
                           <a:latin typeface="Times New Roman"/>
                         </a:rPr>
-                        <a:t>544</a:t>
+                        <a:t>5,439,620</a:t>
                       </a:r>
                       <a:br/>
                       <a:r>
@@ -22744,7 +22744,7 @@
                           </a:solidFill>
                           <a:latin typeface="Times New Roman"/>
                         </a:rPr>
-                        <a:t>0.05 Cr</a:t>
+                        <a:t>543.96 Cr</a:t>
                       </a:r>
                     </a:p>
                   </a:txBody>
@@ -22840,7 +22840,7 @@
                           </a:solidFill>
                           <a:latin typeface="Times New Roman"/>
                         </a:rPr>
-                        <a:t>7,386,244</a:t>
+                        <a:t>1,947,168</a:t>
                       </a:r>
                       <a:br/>
                       <a:r>
@@ -22850,7 +22850,7 @@
                           </a:solidFill>
                           <a:latin typeface="Times New Roman"/>
                         </a:rPr>
-                        <a:t>738.62 Cr</a:t>
+                        <a:t>194.72 Cr</a:t>
                       </a:r>
                     </a:p>
                   </a:txBody>
@@ -22893,7 +22893,7 @@
                           </a:solidFill>
                           <a:latin typeface="Times New Roman"/>
                         </a:rPr>
-                        <a:t>1358490</a:t>
+                        <a:t>136</a:t>
                       </a:r>
                     </a:p>
                   </a:txBody>
@@ -22936,7 +22936,7 @@
                           </a:solidFill>
                           <a:latin typeface="Times New Roman"/>
                         </a:rPr>
-                        <a:t>-7,385,483</a:t>
+                        <a:t>5,668,301</a:t>
                       </a:r>
                       <a:br/>
                       <a:r>
@@ -22946,7 +22946,7 @@
                           </a:solidFill>
                           <a:latin typeface="Times New Roman"/>
                         </a:rPr>
-                        <a:t>-738.55 Cr</a:t>
+                        <a:t>566.83 Cr</a:t>
                       </a:r>
                     </a:p>
                   </a:txBody>
@@ -22989,33 +22989,33 @@
                           </a:solidFill>
                           <a:latin typeface="Times New Roman"/>
                         </a:rPr>
-                        <a:t>566037</a:t>
-                      </a:r>
-                    </a:p>
-                  </a:txBody>
-                  <a:tcPr marL="12000" marR="12000" marT="8000" marB="8000">
-                    <a:lnL w="12700">
-                      <a:solidFill>
-                        <a:srgbClr val="000000"/>
-                      </a:solidFill>
-                    </a:lnL>
-                    <a:lnR w="12700">
-                      <a:solidFill>
-                        <a:srgbClr val="000000"/>
-                      </a:solidFill>
-                    </a:lnR>
-                    <a:lnT w="12700">
-                      <a:solidFill>
-                        <a:srgbClr val="000000"/>
-                      </a:solidFill>
-                    </a:lnT>
-                    <a:lnB w="12700">
-                      <a:solidFill>
-                        <a:srgbClr val="000000"/>
-                      </a:solidFill>
-                    </a:lnB>
-                    <a:solidFill>
-                      <a:srgbClr val="D92323"/>
+                        <a:t>57</a:t>
+                      </a:r>
+                    </a:p>
+                  </a:txBody>
+                  <a:tcPr marL="12000" marR="12000" marT="8000" marB="8000">
+                    <a:lnL w="12700">
+                      <a:solidFill>
+                        <a:srgbClr val="000000"/>
+                      </a:solidFill>
+                    </a:lnL>
+                    <a:lnR w="12700">
+                      <a:solidFill>
+                        <a:srgbClr val="000000"/>
+                      </a:solidFill>
+                    </a:lnR>
+                    <a:lnT w="12700">
+                      <a:solidFill>
+                        <a:srgbClr val="000000"/>
+                      </a:solidFill>
+                    </a:lnT>
+                    <a:lnB w="12700">
+                      <a:solidFill>
+                        <a:srgbClr val="000000"/>
+                      </a:solidFill>
+                    </a:lnB>
+                    <a:solidFill>
+                      <a:srgbClr val="25A55B"/>
                     </a:solidFill>
                   </a:tcPr>
                 </a:tc>
@@ -23133,7 +23133,7 @@
                 </a:solidFill>
                 <a:latin typeface="Times New Roman"/>
               </a:rPr>
-              <a:t>Open Line FR Report - As On 05.09.2026 (Rows 1-13)</a:t>
+              <a:t>Open Line FR Report - As On 25.09.2026 (Rows 1-13)</a:t>
             </a:r>
           </a:p>
         </p:txBody>
@@ -23677,7 +23677,7 @@
                           </a:solidFill>
                           <a:latin typeface="Times New Roman"/>
                         </a:rPr>
-                        <a:t>77,992</a:t>
+                        <a:t>81,555</a:t>
                       </a:r>
                       <a:br/>
                       <a:r>
@@ -23687,7 +23687,7 @@
                           </a:solidFill>
                           <a:latin typeface="Times New Roman"/>
                         </a:rPr>
-                        <a:t>7.80 Cr</a:t>
+                        <a:t>8.16 Cr</a:t>
                       </a:r>
                     </a:p>
                   </a:txBody>
@@ -23730,7 +23730,7 @@
                           </a:solidFill>
                           <a:latin typeface="Times New Roman"/>
                         </a:rPr>
-                        <a:t>-82,911</a:t>
+                        <a:t>-79,348</a:t>
                       </a:r>
                       <a:br/>
                       <a:r>
@@ -23740,7 +23740,7 @@
                           </a:solidFill>
                           <a:latin typeface="Times New Roman"/>
                         </a:rPr>
-                        <a:t>-8.29 Cr</a:t>
+                        <a:t>-7.93 Cr</a:t>
                       </a:r>
                     </a:p>
                   </a:txBody>
@@ -23783,7 +23783,7 @@
                           </a:solidFill>
                           <a:latin typeface="Times New Roman"/>
                         </a:rPr>
-                        <a:t>48.47</a:t>
+                        <a:t>50.69</a:t>
                       </a:r>
                     </a:p>
                   </a:txBody>
@@ -24010,7 +24010,7 @@
                           </a:solidFill>
                           <a:latin typeface="Times New Roman"/>
                         </a:rPr>
-                        <a:t>11,801</a:t>
+                        <a:t>12,767</a:t>
                       </a:r>
                       <a:br/>
                       <a:r>
@@ -24020,7 +24020,7 @@
                           </a:solidFill>
                           <a:latin typeface="Times New Roman"/>
                         </a:rPr>
-                        <a:t>1.18 Cr</a:t>
+                        <a:t>1.28 Cr</a:t>
                       </a:r>
                     </a:p>
                   </a:txBody>
@@ -24063,7 +24063,7 @@
                           </a:solidFill>
                           <a:latin typeface="Times New Roman"/>
                         </a:rPr>
-                        <a:t>-20,426</a:t>
+                        <a:t>-19,460</a:t>
                       </a:r>
                       <a:br/>
                       <a:r>
@@ -24073,7 +24073,7 @@
                           </a:solidFill>
                           <a:latin typeface="Times New Roman"/>
                         </a:rPr>
-                        <a:t>-2.04 Cr</a:t>
+                        <a:t>-1.95 Cr</a:t>
                       </a:r>
                     </a:p>
                   </a:txBody>
@@ -24116,7 +24116,7 @@
                           </a:solidFill>
                           <a:latin typeface="Times New Roman"/>
                         </a:rPr>
-                        <a:t>36.62</a:t>
+                        <a:t>39.62</a:t>
                       </a:r>
                     </a:p>
                   </a:txBody>
@@ -24343,7 +24343,7 @@
                           </a:solidFill>
                           <a:latin typeface="Times New Roman"/>
                         </a:rPr>
-                        <a:t>57,289</a:t>
+                        <a:t>64,676</a:t>
                       </a:r>
                       <a:br/>
                       <a:r>
@@ -24353,7 +24353,7 @@
                           </a:solidFill>
                           <a:latin typeface="Times New Roman"/>
                         </a:rPr>
-                        <a:t>5.73 Cr</a:t>
+                        <a:t>6.47 Cr</a:t>
                       </a:r>
                     </a:p>
                   </a:txBody>
@@ -24396,7 +24396,7 @@
                           </a:solidFill>
                           <a:latin typeface="Times New Roman"/>
                         </a:rPr>
-                        <a:t>-63,029</a:t>
+                        <a:t>-55,642</a:t>
                       </a:r>
                       <a:br/>
                       <a:r>
@@ -24406,7 +24406,7 @@
                           </a:solidFill>
                           <a:latin typeface="Times New Roman"/>
                         </a:rPr>
-                        <a:t>-6.30 Cr</a:t>
+                        <a:t>-5.56 Cr</a:t>
                       </a:r>
                     </a:p>
                   </a:txBody>
@@ -24449,7 +24449,7 @@
                           </a:solidFill>
                           <a:latin typeface="Times New Roman"/>
                         </a:rPr>
-                        <a:t>47.61</a:t>
+                        <a:t>53.75</a:t>
                       </a:r>
                     </a:p>
                   </a:txBody>
@@ -24676,7 +24676,7 @@
                           </a:solidFill>
                           <a:latin typeface="Times New Roman"/>
                         </a:rPr>
-                        <a:t>363,937</a:t>
+                        <a:t>379,202</a:t>
                       </a:r>
                       <a:br/>
                       <a:r>
@@ -24686,7 +24686,7 @@
                           </a:solidFill>
                           <a:latin typeface="Times New Roman"/>
                         </a:rPr>
-                        <a:t>36.39 Cr</a:t>
+                        <a:t>37.92 Cr</a:t>
                       </a:r>
                     </a:p>
                   </a:txBody>
@@ -24729,7 +24729,7 @@
                           </a:solidFill>
                           <a:latin typeface="Times New Roman"/>
                         </a:rPr>
-                        <a:t>-143,483</a:t>
+                        <a:t>-128,218</a:t>
                       </a:r>
                       <a:br/>
                       <a:r>
@@ -24739,7 +24739,7 @@
                           </a:solidFill>
                           <a:latin typeface="Times New Roman"/>
                         </a:rPr>
-                        <a:t>-14.35 Cr</a:t>
+                        <a:t>-12.82 Cr</a:t>
                       </a:r>
                     </a:p>
                   </a:txBody>
@@ -24782,7 +24782,7 @@
                           </a:solidFill>
                           <a:latin typeface="Times New Roman"/>
                         </a:rPr>
-                        <a:t>71.72</a:t>
+                        <a:t>74.73</a:t>
                       </a:r>
                     </a:p>
                   </a:txBody>
@@ -25009,7 +25009,7 @@
                           </a:solidFill>
                           <a:latin typeface="Times New Roman"/>
                         </a:rPr>
-                        <a:t>3,692,699</a:t>
+                        <a:t>3,805,865</a:t>
                       </a:r>
                       <a:br/>
                       <a:r>
@@ -25019,7 +25019,7 @@
                           </a:solidFill>
                           <a:latin typeface="Times New Roman"/>
                         </a:rPr>
-                        <a:t>369.27 Cr</a:t>
+                        <a:t>380.59 Cr</a:t>
                       </a:r>
                     </a:p>
                   </a:txBody>
@@ -25062,7 +25062,7 @@
                           </a:solidFill>
                           <a:latin typeface="Times New Roman"/>
                         </a:rPr>
-                        <a:t>729,904</a:t>
+                        <a:t>843,070</a:t>
                       </a:r>
                       <a:br/>
                       <a:r>
@@ -25072,7 +25072,7 @@
                           </a:solidFill>
                           <a:latin typeface="Times New Roman"/>
                         </a:rPr>
-                        <a:t>72.99 Cr</a:t>
+                        <a:t>84.31 Cr</a:t>
                       </a:r>
                     </a:p>
                   </a:txBody>
@@ -25115,7 +25115,7 @@
                           </a:solidFill>
                           <a:latin typeface="Times New Roman"/>
                         </a:rPr>
-                        <a:t>124.64</a:t>
+                        <a:t>128.46</a:t>
                       </a:r>
                     </a:p>
                   </a:txBody>
@@ -25342,7 +25342,7 @@
                           </a:solidFill>
                           <a:latin typeface="Times New Roman"/>
                         </a:rPr>
-                        <a:t>151,197</a:t>
+                        <a:t>183,938</a:t>
                       </a:r>
                       <a:br/>
                       <a:r>
@@ -25352,7 +25352,7 @@
                           </a:solidFill>
                           <a:latin typeface="Times New Roman"/>
                         </a:rPr>
-                        <a:t>15.12 Cr</a:t>
+                        <a:t>18.39 Cr</a:t>
                       </a:r>
                     </a:p>
                   </a:txBody>
@@ -25395,7 +25395,7 @@
                           </a:solidFill>
                           <a:latin typeface="Times New Roman"/>
                         </a:rPr>
-                        <a:t>18,930</a:t>
+                        <a:t>51,671</a:t>
                       </a:r>
                       <a:br/>
                       <a:r>
@@ -25405,7 +25405,7 @@
                           </a:solidFill>
                           <a:latin typeface="Times New Roman"/>
                         </a:rPr>
-                        <a:t>1.89 Cr</a:t>
+                        <a:t>5.17 Cr</a:t>
                       </a:r>
                     </a:p>
                   </a:txBody>
@@ -25448,7 +25448,7 @@
                           </a:solidFill>
                           <a:latin typeface="Times New Roman"/>
                         </a:rPr>
-                        <a:t>114.31</a:t>
+                        <a:t>139.07</a:t>
                       </a:r>
                     </a:p>
                   </a:txBody>
@@ -25675,7 +25675,7 @@
                           </a:solidFill>
                           <a:latin typeface="Times New Roman"/>
                         </a:rPr>
-                        <a:t>123,038</a:t>
+                        <a:t>140,407</a:t>
                       </a:r>
                       <a:br/>
                       <a:r>
@@ -25685,7 +25685,7 @@
                           </a:solidFill>
                           <a:latin typeface="Times New Roman"/>
                         </a:rPr>
-                        <a:t>12.30 Cr</a:t>
+                        <a:t>14.04 Cr</a:t>
                       </a:r>
                     </a:p>
                   </a:txBody>
@@ -25728,7 +25728,7 @@
                           </a:solidFill>
                           <a:latin typeface="Times New Roman"/>
                         </a:rPr>
-                        <a:t>-399,805</a:t>
+                        <a:t>-382,436</a:t>
                       </a:r>
                       <a:br/>
                       <a:r>
@@ -25738,7 +25738,7 @@
                           </a:solidFill>
                           <a:latin typeface="Times New Roman"/>
                         </a:rPr>
-                        <a:t>-39.98 Cr</a:t>
+                        <a:t>-38.24 Cr</a:t>
                       </a:r>
                     </a:p>
                   </a:txBody>
@@ -25781,7 +25781,7 @@
                           </a:solidFill>
                           <a:latin typeface="Times New Roman"/>
                         </a:rPr>
-                        <a:t>23.53</a:t>
+                        <a:t>26.85</a:t>
                       </a:r>
                     </a:p>
                   </a:txBody>
@@ -26008,7 +26008,7 @@
                           </a:solidFill>
                           <a:latin typeface="Times New Roman"/>
                         </a:rPr>
-                        <a:t>94,924</a:t>
+                        <a:t>105,095</a:t>
                       </a:r>
                       <a:br/>
                       <a:r>
@@ -26018,7 +26018,7 @@
                           </a:solidFill>
                           <a:latin typeface="Times New Roman"/>
                         </a:rPr>
-                        <a:t>9.49 Cr</a:t>
+                        <a:t>10.51 Cr</a:t>
                       </a:r>
                     </a:p>
                   </a:txBody>
@@ -26061,7 +26061,7 @@
                           </a:solidFill>
                           <a:latin typeface="Times New Roman"/>
                         </a:rPr>
-                        <a:t>-212,919</a:t>
+                        <a:t>-202,748</a:t>
                       </a:r>
                       <a:br/>
                       <a:r>
@@ -26071,7 +26071,7 @@
                           </a:solidFill>
                           <a:latin typeface="Times New Roman"/>
                         </a:rPr>
-                        <a:t>-21.29 Cr</a:t>
+                        <a:t>-20.27 Cr</a:t>
                       </a:r>
                     </a:p>
                   </a:txBody>
@@ -26114,7 +26114,7 @@
                           </a:solidFill>
                           <a:latin typeface="Times New Roman"/>
                         </a:rPr>
-                        <a:t>30.84</a:t>
+                        <a:t>34.14</a:t>
                       </a:r>
                     </a:p>
                   </a:txBody>
@@ -26621,7 +26621,7 @@
                           </a:solidFill>
                           <a:latin typeface="Times New Roman"/>
                         </a:rPr>
-                        <a:t>13,194</a:t>
+                        <a:t>40,372</a:t>
                       </a:r>
                       <a:br/>
                       <a:r>
@@ -26631,7 +26631,7 @@
                           </a:solidFill>
                           <a:latin typeface="Times New Roman"/>
                         </a:rPr>
-                        <a:t>1.32 Cr</a:t>
+                        <a:t>4.04 Cr</a:t>
                       </a:r>
                     </a:p>
                   </a:txBody>
@@ -26674,7 +26674,7 @@
                           </a:solidFill>
                           <a:latin typeface="Times New Roman"/>
                         </a:rPr>
-                        <a:t>24,273</a:t>
+                        <a:t>25,991</a:t>
                       </a:r>
                       <a:br/>
                       <a:r>
@@ -26684,7 +26684,7 @@
                           </a:solidFill>
                           <a:latin typeface="Times New Roman"/>
                         </a:rPr>
-                        <a:t>2.43 Cr</a:t>
+                        <a:t>2.60 Cr</a:t>
                       </a:r>
                     </a:p>
                   </a:txBody>
@@ -26727,7 +26727,7 @@
                           </a:solidFill>
                           <a:latin typeface="Times New Roman"/>
                         </a:rPr>
-                        <a:t>11,079</a:t>
+                        <a:t>-14,381</a:t>
                       </a:r>
                       <a:br/>
                       <a:r>
@@ -26737,7 +26737,7 @@
                           </a:solidFill>
                           <a:latin typeface="Times New Roman"/>
                         </a:rPr>
-                        <a:t>1.11 Cr</a:t>
+                        <a:t>-1.44 Cr</a:t>
                       </a:r>
                     </a:p>
                   </a:txBody>
@@ -26780,33 +26780,33 @@
                           </a:solidFill>
                           <a:latin typeface="Times New Roman"/>
                         </a:rPr>
-                        <a:t>183.97</a:t>
-                      </a:r>
-                    </a:p>
-                  </a:txBody>
-                  <a:tcPr marL="12000" marR="12000" marT="8000" marB="8000">
-                    <a:lnL w="12700">
-                      <a:solidFill>
-                        <a:srgbClr val="000000"/>
-                      </a:solidFill>
-                    </a:lnL>
-                    <a:lnR w="12700">
-                      <a:solidFill>
-                        <a:srgbClr val="000000"/>
-                      </a:solidFill>
-                    </a:lnR>
-                    <a:lnT w="12700">
-                      <a:solidFill>
-                        <a:srgbClr val="000000"/>
-                      </a:solidFill>
-                    </a:lnT>
-                    <a:lnB w="12700">
-                      <a:solidFill>
-                        <a:srgbClr val="000000"/>
-                      </a:solidFill>
-                    </a:lnB>
-                    <a:solidFill>
-                      <a:srgbClr val="FCE4E4"/>
+                        <a:t>64.38</a:t>
+                      </a:r>
+                    </a:p>
+                  </a:txBody>
+                  <a:tcPr marL="12000" marR="12000" marT="8000" marB="8000">
+                    <a:lnL w="12700">
+                      <a:solidFill>
+                        <a:srgbClr val="000000"/>
+                      </a:solidFill>
+                    </a:lnL>
+                    <a:lnR w="12700">
+                      <a:solidFill>
+                        <a:srgbClr val="000000"/>
+                      </a:solidFill>
+                    </a:lnR>
+                    <a:lnT w="12700">
+                      <a:solidFill>
+                        <a:srgbClr val="000000"/>
+                      </a:solidFill>
+                    </a:lnT>
+                    <a:lnB w="12700">
+                      <a:solidFill>
+                        <a:srgbClr val="000000"/>
+                      </a:solidFill>
+                    </a:lnB>
+                    <a:solidFill>
+                      <a:srgbClr val="DFF3E7"/>
                     </a:solidFill>
                   </a:tcPr>
                 </a:tc>
@@ -27007,7 +27007,7 @@
                           </a:solidFill>
                           <a:latin typeface="Times New Roman"/>
                         </a:rPr>
-                        <a:t>5,129</a:t>
+                        <a:t>5,681</a:t>
                       </a:r>
                       <a:br/>
                       <a:r>
@@ -27017,7 +27017,7 @@
                           </a:solidFill>
                           <a:latin typeface="Times New Roman"/>
                         </a:rPr>
-                        <a:t>0.51 Cr</a:t>
+                        <a:t>0.57 Cr</a:t>
                       </a:r>
                     </a:p>
                   </a:txBody>
@@ -27060,7 +27060,7 @@
                           </a:solidFill>
                           <a:latin typeface="Times New Roman"/>
                         </a:rPr>
-                        <a:t>-48,573</a:t>
+                        <a:t>-48,021</a:t>
                       </a:r>
                       <a:br/>
                       <a:r>
@@ -27070,7 +27070,7 @@
                           </a:solidFill>
                           <a:latin typeface="Times New Roman"/>
                         </a:rPr>
-                        <a:t>-4.86 Cr</a:t>
+                        <a:t>-4.80 Cr</a:t>
                       </a:r>
                     </a:p>
                   </a:txBody>
@@ -27113,7 +27113,7 @@
                           </a:solidFill>
                           <a:latin typeface="Times New Roman"/>
                         </a:rPr>
-                        <a:t>9.55</a:t>
+                        <a:t>10.58</a:t>
                       </a:r>
                     </a:p>
                   </a:txBody>
@@ -27340,7 +27340,7 @@
                           </a:solidFill>
                           <a:latin typeface="Times New Roman"/>
                         </a:rPr>
-                        <a:t>59,852</a:t>
+                        <a:t>71,111</a:t>
                       </a:r>
                       <a:br/>
                       <a:r>
@@ -27350,7 +27350,7 @@
                           </a:solidFill>
                           <a:latin typeface="Times New Roman"/>
                         </a:rPr>
-                        <a:t>5.99 Cr</a:t>
+                        <a:t>7.11 Cr</a:t>
                       </a:r>
                     </a:p>
                   </a:txBody>
@@ -27393,7 +27393,7 @@
                           </a:solidFill>
                           <a:latin typeface="Times New Roman"/>
                         </a:rPr>
-                        <a:t>-37,648</a:t>
+                        <a:t>-26,389</a:t>
                       </a:r>
                       <a:br/>
                       <a:r>
@@ -27403,7 +27403,7 @@
                           </a:solidFill>
                           <a:latin typeface="Times New Roman"/>
                         </a:rPr>
-                        <a:t>-3.76 Cr</a:t>
+                        <a:t>-2.64 Cr</a:t>
                       </a:r>
                     </a:p>
                   </a:txBody>
@@ -27446,7 +27446,7 @@
                           </a:solidFill>
                           <a:latin typeface="Times New Roman"/>
                         </a:rPr>
-                        <a:t>61.39</a:t>
+                        <a:t>72.93</a:t>
                       </a:r>
                     </a:p>
                   </a:txBody>
@@ -27673,7 +27673,7 @@
                           </a:solidFill>
                           <a:latin typeface="Times New Roman"/>
                         </a:rPr>
-                        <a:t>131,048</a:t>
+                        <a:t>147,126</a:t>
                       </a:r>
                       <a:br/>
                       <a:r>
@@ -27683,7 +27683,7 @@
                           </a:solidFill>
                           <a:latin typeface="Times New Roman"/>
                         </a:rPr>
-                        <a:t>13.10 Cr</a:t>
+                        <a:t>14.71 Cr</a:t>
                       </a:r>
                     </a:p>
                   </a:txBody>
@@ -27726,7 +27726,7 @@
                           </a:solidFill>
                           <a:latin typeface="Times New Roman"/>
                         </a:rPr>
-                        <a:t>-179,864</a:t>
+                        <a:t>-163,786</a:t>
                       </a:r>
                       <a:br/>
                       <a:r>
@@ -27736,7 +27736,7 @@
                           </a:solidFill>
                           <a:latin typeface="Times New Roman"/>
                         </a:rPr>
-                        <a:t>-17.99 Cr</a:t>
+                        <a:t>-16.38 Cr</a:t>
                       </a:r>
                     </a:p>
                   </a:txBody>
@@ -27779,7 +27779,7 @@
                           </a:solidFill>
                           <a:latin typeface="Times New Roman"/>
                         </a:rPr>
-                        <a:t>42.15</a:t>
+                        <a:t>47.32</a:t>
                       </a:r>
                     </a:p>
                   </a:txBody>
@@ -27913,7 +27913,7 @@
                 </a:solidFill>
                 <a:latin typeface="Times New Roman"/>
               </a:rPr>
-              <a:t>Open Line FR Report - As On 05.09.2026 (Rows 14-18)</a:t>
+              <a:t>Open Line FR Report - As On 25.09.2026 (Rows 14-18)</a:t>
             </a:r>
           </a:p>
         </p:txBody>
@@ -28790,7 +28790,7 @@
                           </a:solidFill>
                           <a:latin typeface="Times New Roman"/>
                         </a:rPr>
-                        <a:t>103,375</a:t>
+                        <a:t>112,585</a:t>
                       </a:r>
                       <a:br/>
                       <a:r>
@@ -28800,7 +28800,7 @@
                           </a:solidFill>
                           <a:latin typeface="Times New Roman"/>
                         </a:rPr>
-                        <a:t>10.34 Cr</a:t>
+                        <a:t>11.26 Cr</a:t>
                       </a:r>
                     </a:p>
                   </a:txBody>
@@ -28843,7 +28843,7 @@
                           </a:solidFill>
                           <a:latin typeface="Times New Roman"/>
                         </a:rPr>
-                        <a:t>-212,358</a:t>
+                        <a:t>-203,148</a:t>
                       </a:r>
                       <a:br/>
                       <a:r>
@@ -28853,7 +28853,7 @@
                           </a:solidFill>
                           <a:latin typeface="Times New Roman"/>
                         </a:rPr>
-                        <a:t>-21.24 Cr</a:t>
+                        <a:t>-20.31 Cr</a:t>
                       </a:r>
                     </a:p>
                   </a:txBody>
@@ -28896,7 +28896,7 @@
                           </a:solidFill>
                           <a:latin typeface="Times New Roman"/>
                         </a:rPr>
-                        <a:t>32.74</a:t>
+                        <a:t>35.66</a:t>
                       </a:r>
                     </a:p>
                   </a:txBody>
@@ -29736,7 +29736,7 @@
                           </a:solidFill>
                           <a:latin typeface="Times New Roman"/>
                         </a:rPr>
-                        <a:t>5,607,701</a:t>
+                        <a:t>5,634,879</a:t>
                       </a:r>
                       <a:br/>
                       <a:r>
@@ -29746,7 +29746,7 @@
                           </a:solidFill>
                           <a:latin typeface="Times New Roman"/>
                         </a:rPr>
-                        <a:t>560.77 Cr</a:t>
+                        <a:t>563.49 Cr</a:t>
                       </a:r>
                     </a:p>
                   </a:txBody>
@@ -29789,7 +29789,7 @@
                           </a:solidFill>
                           <a:latin typeface="Times New Roman"/>
                         </a:rPr>
-                        <a:t>4,896,554</a:t>
+                        <a:t>5,135,999</a:t>
                       </a:r>
                       <a:br/>
                       <a:r>
@@ -29799,7 +29799,7 @@
                           </a:solidFill>
                           <a:latin typeface="Times New Roman"/>
                         </a:rPr>
-                        <a:t>489.66 Cr</a:t>
+                        <a:t>513.60 Cr</a:t>
                       </a:r>
                     </a:p>
                   </a:txBody>
@@ -29842,7 +29842,7 @@
                           </a:solidFill>
                           <a:latin typeface="Times New Roman"/>
                         </a:rPr>
-                        <a:t>-711,147</a:t>
+                        <a:t>-498,880</a:t>
                       </a:r>
                       <a:br/>
                       <a:r>
@@ -29852,7 +29852,7 @@
                           </a:solidFill>
                           <a:latin typeface="Times New Roman"/>
                         </a:rPr>
-                        <a:t>-71.11 Cr</a:t>
+                        <a:t>-49.89 Cr</a:t>
                       </a:r>
                     </a:p>
                   </a:txBody>
@@ -29895,7 +29895,7 @@
                           </a:solidFill>
                           <a:latin typeface="Times New Roman"/>
                         </a:rPr>
-                        <a:t>87.32</a:t>
+                        <a:t>91.15</a:t>
                       </a:r>
                     </a:p>
                   </a:txBody>
@@ -30029,7 +30029,7 @@
                 </a:solidFill>
                 <a:latin typeface="Times New Roman"/>
               </a:rPr>
-              <a:t>Open Line FR Fund Wise - As On 05.09.2026</a:t>
+              <a:t>Open Line FR Fund Wise - As On 25.09.2026</a:t>
             </a:r>
           </a:p>
         </p:txBody>
@@ -30477,7 +30477,7 @@
                           </a:solidFill>
                           <a:latin typeface="Times New Roman"/>
                         </a:rPr>
-                        <a:t>1,018,353</a:t>
+                        <a:t>1,045,531</a:t>
                       </a:r>
                       <a:br/>
                       <a:r>
@@ -30487,7 +30487,7 @@
                           </a:solidFill>
                           <a:latin typeface="Times New Roman"/>
                         </a:rPr>
-                        <a:t>101.84 Cr</a:t>
+                        <a:t>104.55 Cr</a:t>
                       </a:r>
                     </a:p>
                   </a:txBody>
@@ -30530,7 +30530,7 @@
                           </a:solidFill>
                           <a:latin typeface="Times New Roman"/>
                         </a:rPr>
-                        <a:t>408,842</a:t>
+                        <a:t>457,028</a:t>
                       </a:r>
                       <a:br/>
                       <a:r>
@@ -30540,7 +30540,7 @@
                           </a:solidFill>
                           <a:latin typeface="Times New Roman"/>
                         </a:rPr>
-                        <a:t>40.88 Cr</a:t>
+                        <a:t>45.70 Cr</a:t>
                       </a:r>
                     </a:p>
                   </a:txBody>
@@ -30583,7 +30583,7 @@
                           </a:solidFill>
                           <a:latin typeface="Times New Roman"/>
                         </a:rPr>
-                        <a:t>609,511</a:t>
+                        <a:t>588,503</a:t>
                       </a:r>
                       <a:br/>
                       <a:r>
@@ -30593,7 +30593,7 @@
                           </a:solidFill>
                           <a:latin typeface="Times New Roman"/>
                         </a:rPr>
-                        <a:t>60.95 Cr</a:t>
+                        <a:t>58.85 Cr</a:t>
                       </a:r>
                     </a:p>
                   </a:txBody>
@@ -30636,7 +30636,7 @@
                           </a:solidFill>
                           <a:latin typeface="Times New Roman"/>
                         </a:rPr>
-                        <a:t>40.15</a:t>
+                        <a:t>43.71</a:t>
                       </a:r>
                     </a:p>
                   </a:txBody>
@@ -30679,7 +30679,7 @@
                           </a:solidFill>
                           <a:latin typeface="Times New Roman"/>
                         </a:rPr>
-                        <a:t>59.85</a:t>
+                        <a:t>56.29</a:t>
                       </a:r>
                     </a:p>
                   </a:txBody>
@@ -30863,7 +30863,7 @@
                           </a:solidFill>
                           <a:latin typeface="Times New Roman"/>
                         </a:rPr>
-                        <a:t>15,491</a:t>
+                        <a:t>21,238</a:t>
                       </a:r>
                       <a:br/>
                       <a:r>
@@ -30873,7 +30873,7 @@
                           </a:solidFill>
                           <a:latin typeface="Times New Roman"/>
                         </a:rPr>
-                        <a:t>1.55 Cr</a:t>
+                        <a:t>2.12 Cr</a:t>
                       </a:r>
                     </a:p>
                   </a:txBody>
@@ -30916,7 +30916,7 @@
                           </a:solidFill>
                           <a:latin typeface="Times New Roman"/>
                         </a:rPr>
-                        <a:t>24,741</a:t>
+                        <a:t>18,994</a:t>
                       </a:r>
                       <a:br/>
                       <a:r>
@@ -30926,7 +30926,7 @@
                           </a:solidFill>
                           <a:latin typeface="Times New Roman"/>
                         </a:rPr>
-                        <a:t>2.47 Cr</a:t>
+                        <a:t>1.90 Cr</a:t>
                       </a:r>
                     </a:p>
                   </a:txBody>
@@ -30969,7 +30969,7 @@
                           </a:solidFill>
                           <a:latin typeface="Times New Roman"/>
                         </a:rPr>
-                        <a:t>38.50</a:t>
+                        <a:t>52.79</a:t>
                       </a:r>
                     </a:p>
                   </a:txBody>
@@ -31012,7 +31012,7 @@
                           </a:solidFill>
                           <a:latin typeface="Times New Roman"/>
                         </a:rPr>
-                        <a:t>61.50</a:t>
+                        <a:t>47.21</a:t>
                       </a:r>
                     </a:p>
                   </a:txBody>
@@ -31862,7 +31862,7 @@
                           </a:solidFill>
                           <a:latin typeface="Times New Roman"/>
                         </a:rPr>
-                        <a:t>3,746,106</a:t>
+                        <a:t>3,844,908</a:t>
                       </a:r>
                       <a:br/>
                       <a:r>
@@ -31872,7 +31872,7 @@
                           </a:solidFill>
                           <a:latin typeface="Times New Roman"/>
                         </a:rPr>
-                        <a:t>374.61 Cr</a:t>
+                        <a:t>384.49 Cr</a:t>
                       </a:r>
                     </a:p>
                   </a:txBody>
@@ -31915,7 +31915,7 @@
                           </a:solidFill>
                           <a:latin typeface="Times New Roman"/>
                         </a:rPr>
-                        <a:t>-628,591</a:t>
+                        <a:t>-727,393</a:t>
                       </a:r>
                       <a:br/>
                       <a:r>
@@ -31925,7 +31925,7 @@
                           </a:solidFill>
                           <a:latin typeface="Times New Roman"/>
                         </a:rPr>
-                        <a:t>-62.86 Cr</a:t>
+                        <a:t>-72.74 Cr</a:t>
                       </a:r>
                     </a:p>
                   </a:txBody>
@@ -31968,7 +31968,7 @@
                           </a:solidFill>
                           <a:latin typeface="Times New Roman"/>
                         </a:rPr>
-                        <a:t>120.16</a:t>
+                        <a:t>123.33</a:t>
                       </a:r>
                     </a:p>
                   </a:txBody>
@@ -32011,7 +32011,7 @@
                           </a:solidFill>
                           <a:latin typeface="Times New Roman"/>
                         </a:rPr>
-                        <a:t>-20.16</a:t>
+                        <a:t>-23.33</a:t>
                       </a:r>
                     </a:p>
                   </a:txBody>
@@ -32528,7 +32528,7 @@
                           </a:solidFill>
                           <a:latin typeface="Times New Roman"/>
                         </a:rPr>
-                        <a:t>707,656</a:t>
+                        <a:t>794,366</a:t>
                       </a:r>
                       <a:br/>
                       <a:r>
@@ -32538,7 +32538,7 @@
                           </a:solidFill>
                           <a:latin typeface="Times New Roman"/>
                         </a:rPr>
-                        <a:t>70.77 Cr</a:t>
+                        <a:t>79.44 Cr</a:t>
                       </a:r>
                     </a:p>
                   </a:txBody>
@@ -32581,7 +32581,7 @@
                           </a:solidFill>
                           <a:latin typeface="Times New Roman"/>
                         </a:rPr>
-                        <a:t>593,353</a:t>
+                        <a:t>506,643</a:t>
                       </a:r>
                       <a:br/>
                       <a:r>
@@ -32591,7 +32591,7 @@
                           </a:solidFill>
                           <a:latin typeface="Times New Roman"/>
                         </a:rPr>
-                        <a:t>59.34 Cr</a:t>
+                        <a:t>50.66 Cr</a:t>
                       </a:r>
                     </a:p>
                   </a:txBody>
@@ -32634,7 +32634,7 @@
                           </a:solidFill>
                           <a:latin typeface="Times New Roman"/>
                         </a:rPr>
-                        <a:t>54.39</a:t>
+                        <a:t>61.06</a:t>
                       </a:r>
                     </a:p>
                   </a:txBody>
@@ -32677,7 +32677,7 @@
                           </a:solidFill>
                           <a:latin typeface="Times New Roman"/>
                         </a:rPr>
-                        <a:t>45.61</a:t>
+                        <a:t>38.94</a:t>
                       </a:r>
                     </a:p>
                   </a:txBody>

--- a/exports/Moradabad_Division_DRM_Budget_FR_Analysis_H_Full_FY_2025_26_Actual.pptx
+++ b/exports/Moradabad_Division_DRM_Budget_FR_Analysis_H_Full_FY_2025_26_Actual.pptx
@@ -6185,7 +6185,7 @@
                 </a:solidFill>
                 <a:latin typeface="Times New Roman"/>
               </a:rPr>
-              <a:t>Demand SMH Wise - AUG 2026 | uploaded 2026-09-25T10:56:20+05:30</a:t>
+              <a:t>Demand SMH Wise - AUG 2026 | uploaded 2026-09-29T13:48:08+05:30</a:t>
             </a:r>
           </a:p>
         </p:txBody>
@@ -6251,10 +6251,10 @@
                 <a:gridCol w="1118625"/>
                 <a:gridCol w="1118625"/>
                 <a:gridCol w="1222201"/>
-                <a:gridCol w="745750"/>
+                <a:gridCol w="745749"/>
                 <a:gridCol w="1222201"/>
-                <a:gridCol w="745750"/>
-                <a:gridCol w="1118627"/>
+                <a:gridCol w="745749"/>
+                <a:gridCol w="1118629"/>
               </a:tblGrid>
               <a:tr h="432714">
                 <a:tc>
@@ -13284,7 +13284,7 @@
                 </a:solidFill>
                 <a:latin typeface="Times New Roman"/>
               </a:rPr>
-              <a:t>PU Wise - Staff - AUG 2026 | uploaded 2026-09-25T10:56:20+05:30</a:t>
+              <a:t>PU Wise - Staff - AUG 2026 | uploaded 2026-09-29T13:48:08+05:30</a:t>
             </a:r>
           </a:p>
         </p:txBody>
@@ -19780,7 +19780,7 @@
                 </a:solidFill>
                 <a:latin typeface="Times New Roman"/>
               </a:rPr>
-              <a:t>PU Wise - Non-Staff Part 1 - AUG 2026 | uploaded 2026-09-25T10:56:20+05:30</a:t>
+              <a:t>PU Wise - Non-Staff Part 1 - AUG 2026 | uploaded 2026-09-29T13:48:08+05:30</a:t>
             </a:r>
           </a:p>
         </p:txBody>

--- a/exports/Moradabad_Division_DRM_Budget_FR_Analysis_H_Full_FY_2025_26_Actual.pptx
+++ b/exports/Moradabad_Division_DRM_Budget_FR_Analysis_H_Full_FY_2025_26_Actual.pptx
@@ -5942,7 +5942,7 @@
                 </a:solidFill>
                 <a:latin typeface="Times New Roman"/>
               </a:rPr>
-              <a:t>Accounts Dept | FY 2026-2027 | DRM Budget &amp; FR Analysis | Completed AUG 2026 | H column: actual final expenditure FY 2025-26</a:t>
+              <a:t>Accounts Dept | FY 2026-2027 | DRM Budget &amp; FR Analysis | Completed SEP 2026 | H column: actual final expenditure FY 2025-26</a:t>
             </a:r>
           </a:p>
         </p:txBody>
@@ -6185,7 +6185,7 @@
                 </a:solidFill>
                 <a:latin typeface="Times New Roman"/>
               </a:rPr>
-              <a:t>Demand SMH Wise - AUG 2026 | uploaded 2026-09-29T13:48:08+05:30</a:t>
+              <a:t>Demand SMH Wise - SEP 2026 | uploaded 2026-10-01T11:01:41+05:30</a:t>
             </a:r>
           </a:p>
         </p:txBody>
@@ -6419,7 +6419,7 @@
                           </a:solidFill>
                           <a:latin typeface="Times New Roman"/>
                         </a:rPr>
-                        <a:t>A / 12 * 5</a:t>
+                        <a:t>A / 12 * 6</a:t>
                       </a:r>
                     </a:p>
                   </a:txBody>
@@ -6482,7 +6482,7 @@
                           </a:solidFill>
                           <a:latin typeface="Times New Roman"/>
                         </a:rPr>
-                        <a:t>Actuals up to AUG 2026</a:t>
+                        <a:t>Actuals up to SEP 2026</a:t>
                       </a:r>
                     </a:p>
                   </a:txBody>
@@ -6981,7 +6981,7 @@
                           </a:solidFill>
                           <a:latin typeface="Times New Roman"/>
                         </a:rPr>
-                        <a:t>267,301</a:t>
+                        <a:t>320,761</a:t>
                       </a:r>
                       <a:br/>
                       <a:r>
@@ -6991,7 +6991,7 @@
                           </a:solidFill>
                           <a:latin typeface="Times New Roman"/>
                         </a:rPr>
-                        <a:t>26.73 Cr</a:t>
+                        <a:t>32.08 Cr</a:t>
                       </a:r>
                     </a:p>
                   </a:txBody>
@@ -7034,7 +7034,7 @@
                           </a:solidFill>
                           <a:latin typeface="Times New Roman"/>
                         </a:rPr>
-                        <a:t>294,135</a:t>
+                        <a:t>350,760</a:t>
                       </a:r>
                       <a:br/>
                       <a:r>
@@ -7044,7 +7044,7 @@
                           </a:solidFill>
                           <a:latin typeface="Times New Roman"/>
                         </a:rPr>
-                        <a:t>29.41 Cr</a:t>
+                        <a:t>35.08 Cr</a:t>
                       </a:r>
                     </a:p>
                   </a:txBody>
@@ -7087,7 +7087,7 @@
                           </a:solidFill>
                           <a:latin typeface="Times New Roman"/>
                         </a:rPr>
-                        <a:t>26,834</a:t>
+                        <a:t>29,999</a:t>
                       </a:r>
                       <a:br/>
                       <a:r>
@@ -7097,7 +7097,7 @@
                           </a:solidFill>
                           <a:latin typeface="Times New Roman"/>
                         </a:rPr>
-                        <a:t>2.68 Cr</a:t>
+                        <a:t>3.00 Cr</a:t>
                       </a:r>
                     </a:p>
                   </a:txBody>
@@ -7140,7 +7140,7 @@
                           </a:solidFill>
                           <a:latin typeface="Times New Roman"/>
                         </a:rPr>
-                        <a:t>110</a:t>
+                        <a:t>109</a:t>
                       </a:r>
                     </a:p>
                   </a:txBody>
@@ -7183,7 +7183,7 @@
                           </a:solidFill>
                           <a:latin typeface="Times New Roman"/>
                         </a:rPr>
-                        <a:t>347,387</a:t>
+                        <a:t>290,762</a:t>
                       </a:r>
                       <a:br/>
                       <a:r>
@@ -7193,7 +7193,7 @@
                           </a:solidFill>
                           <a:latin typeface="Times New Roman"/>
                         </a:rPr>
-                        <a:t>34.74 Cr</a:t>
+                        <a:t>29.08 Cr</a:t>
                       </a:r>
                     </a:p>
                   </a:txBody>
@@ -7236,7 +7236,7 @@
                           </a:solidFill>
                           <a:latin typeface="Times New Roman"/>
                         </a:rPr>
-                        <a:t>46</a:t>
+                        <a:t>55</a:t>
                       </a:r>
                     </a:p>
                   </a:txBody>
@@ -7473,7 +7473,7 @@
                           </a:solidFill>
                           <a:latin typeface="Times New Roman"/>
                         </a:rPr>
-                        <a:t>1,503,709</a:t>
+                        <a:t>1,804,451</a:t>
                       </a:r>
                       <a:br/>
                       <a:r>
@@ -7483,7 +7483,7 @@
                           </a:solidFill>
                           <a:latin typeface="Times New Roman"/>
                         </a:rPr>
-                        <a:t>150.37 Cr</a:t>
+                        <a:t>180.45 Cr</a:t>
                       </a:r>
                     </a:p>
                   </a:txBody>
@@ -7526,7 +7526,7 @@
                           </a:solidFill>
                           <a:latin typeface="Times New Roman"/>
                         </a:rPr>
-                        <a:t>1,781,320</a:t>
+                        <a:t>2,122,627</a:t>
                       </a:r>
                       <a:br/>
                       <a:r>
@@ -7536,7 +7536,7 @@
                           </a:solidFill>
                           <a:latin typeface="Times New Roman"/>
                         </a:rPr>
-                        <a:t>178.13 Cr</a:t>
+                        <a:t>212.26 Cr</a:t>
                       </a:r>
                     </a:p>
                   </a:txBody>
@@ -7579,7 +7579,7 @@
                           </a:solidFill>
                           <a:latin typeface="Times New Roman"/>
                         </a:rPr>
-                        <a:t>277,611</a:t>
+                        <a:t>318,176</a:t>
                       </a:r>
                       <a:br/>
                       <a:r>
@@ -7589,7 +7589,7 @@
                           </a:solidFill>
                           <a:latin typeface="Times New Roman"/>
                         </a:rPr>
-                        <a:t>27.76 Cr</a:t>
+                        <a:t>31.82 Cr</a:t>
                       </a:r>
                     </a:p>
                   </a:txBody>
@@ -7675,7 +7675,7 @@
                           </a:solidFill>
                           <a:latin typeface="Times New Roman"/>
                         </a:rPr>
-                        <a:t>1,827,582</a:t>
+                        <a:t>1,486,275</a:t>
                       </a:r>
                       <a:br/>
                       <a:r>
@@ -7685,7 +7685,7 @@
                           </a:solidFill>
                           <a:latin typeface="Times New Roman"/>
                         </a:rPr>
-                        <a:t>182.76 Cr</a:t>
+                        <a:t>148.63 Cr</a:t>
                       </a:r>
                     </a:p>
                   </a:txBody>
@@ -7728,7 +7728,7 @@
                           </a:solidFill>
                           <a:latin typeface="Times New Roman"/>
                         </a:rPr>
-                        <a:t>49</a:t>
+                        <a:t>59</a:t>
                       </a:r>
                     </a:p>
                   </a:txBody>
@@ -7965,7 +7965,7 @@
                           </a:solidFill>
                           <a:latin typeface="Times New Roman"/>
                         </a:rPr>
-                        <a:t>777,018</a:t>
+                        <a:t>932,422</a:t>
                       </a:r>
                       <a:br/>
                       <a:r>
@@ -7975,7 +7975,7 @@
                           </a:solidFill>
                           <a:latin typeface="Times New Roman"/>
                         </a:rPr>
-                        <a:t>77.70 Cr</a:t>
+                        <a:t>93.24 Cr</a:t>
                       </a:r>
                     </a:p>
                   </a:txBody>
@@ -8071,7 +8071,7 @@
                           </a:solidFill>
                           <a:latin typeface="Times New Roman"/>
                         </a:rPr>
-                        <a:t>5,014</a:t>
+                        <a:t>-150,390</a:t>
                       </a:r>
                       <a:br/>
                       <a:r>
@@ -8081,7 +8081,7 @@
                           </a:solidFill>
                           <a:latin typeface="Times New Roman"/>
                         </a:rPr>
-                        <a:t>0.50 Cr</a:t>
+                        <a:t>-15.04 Cr</a:t>
                       </a:r>
                     </a:p>
                   </a:txBody>
@@ -8124,33 +8124,33 @@
                           </a:solidFill>
                           <a:latin typeface="Times New Roman"/>
                         </a:rPr>
-                        <a:t>101</a:t>
-                      </a:r>
-                    </a:p>
-                  </a:txBody>
-                  <a:tcPr marL="12000" marR="12000" marT="8000" marB="8000">
-                    <a:lnL w="12700">
-                      <a:solidFill>
-                        <a:srgbClr val="000000"/>
-                      </a:solidFill>
-                    </a:lnL>
-                    <a:lnR w="12700">
-                      <a:solidFill>
-                        <a:srgbClr val="000000"/>
-                      </a:solidFill>
-                    </a:lnR>
-                    <a:lnT w="12700">
-                      <a:solidFill>
-                        <a:srgbClr val="000000"/>
-                      </a:solidFill>
-                    </a:lnT>
-                    <a:lnB w="12700">
-                      <a:solidFill>
-                        <a:srgbClr val="000000"/>
-                      </a:solidFill>
-                    </a:lnB>
-                    <a:solidFill>
-                      <a:srgbClr val="FCE4E4"/>
+                        <a:t>84</a:t>
+                      </a:r>
+                    </a:p>
+                  </a:txBody>
+                  <a:tcPr marL="12000" marR="12000" marT="8000" marB="8000">
+                    <a:lnL w="12700">
+                      <a:solidFill>
+                        <a:srgbClr val="000000"/>
+                      </a:solidFill>
+                    </a:lnL>
+                    <a:lnR w="12700">
+                      <a:solidFill>
+                        <a:srgbClr val="000000"/>
+                      </a:solidFill>
+                    </a:lnR>
+                    <a:lnT w="12700">
+                      <a:solidFill>
+                        <a:srgbClr val="000000"/>
+                      </a:solidFill>
+                    </a:lnT>
+                    <a:lnB w="12700">
+                      <a:solidFill>
+                        <a:srgbClr val="000000"/>
+                      </a:solidFill>
+                    </a:lnB>
+                    <a:solidFill>
+                      <a:srgbClr val="FFF2CC"/>
                     </a:solidFill>
                   </a:tcPr>
                 </a:tc>
@@ -8457,7 +8457,7 @@
                           </a:solidFill>
                           <a:latin typeface="Times New Roman"/>
                         </a:rPr>
-                        <a:t>563,992</a:t>
+                        <a:t>676,790</a:t>
                       </a:r>
                       <a:br/>
                       <a:r>
@@ -8467,7 +8467,7 @@
                           </a:solidFill>
                           <a:latin typeface="Times New Roman"/>
                         </a:rPr>
-                        <a:t>56.40 Cr</a:t>
+                        <a:t>67.68 Cr</a:t>
                       </a:r>
                     </a:p>
                   </a:txBody>
@@ -8510,7 +8510,7 @@
                           </a:solidFill>
                           <a:latin typeface="Times New Roman"/>
                         </a:rPr>
-                        <a:t>911,131</a:t>
+                        <a:t>1,015,079</a:t>
                       </a:r>
                       <a:br/>
                       <a:r>
@@ -8520,7 +8520,7 @@
                           </a:solidFill>
                           <a:latin typeface="Times New Roman"/>
                         </a:rPr>
-                        <a:t>91.11 Cr</a:t>
+                        <a:t>101.51 Cr</a:t>
                       </a:r>
                     </a:p>
                   </a:txBody>
@@ -8563,7 +8563,7 @@
                           </a:solidFill>
                           <a:latin typeface="Times New Roman"/>
                         </a:rPr>
-                        <a:t>347,139</a:t>
+                        <a:t>338,288</a:t>
                       </a:r>
                       <a:br/>
                       <a:r>
@@ -8573,7 +8573,7 @@
                           </a:solidFill>
                           <a:latin typeface="Times New Roman"/>
                         </a:rPr>
-                        <a:t>34.71 Cr</a:t>
+                        <a:t>33.83 Cr</a:t>
                       </a:r>
                     </a:p>
                   </a:txBody>
@@ -8616,7 +8616,7 @@
                           </a:solidFill>
                           <a:latin typeface="Times New Roman"/>
                         </a:rPr>
-                        <a:t>162</a:t>
+                        <a:t>150</a:t>
                       </a:r>
                     </a:p>
                   </a:txBody>
@@ -8659,7 +8659,7 @@
                           </a:solidFill>
                           <a:latin typeface="Times New Roman"/>
                         </a:rPr>
-                        <a:t>442,450</a:t>
+                        <a:t>338,502</a:t>
                       </a:r>
                       <a:br/>
                       <a:r>
@@ -8669,7 +8669,7 @@
                           </a:solidFill>
                           <a:latin typeface="Times New Roman"/>
                         </a:rPr>
-                        <a:t>44.24 Cr</a:t>
+                        <a:t>33.85 Cr</a:t>
                       </a:r>
                     </a:p>
                   </a:txBody>
@@ -8712,33 +8712,33 @@
                           </a:solidFill>
                           <a:latin typeface="Times New Roman"/>
                         </a:rPr>
-                        <a:t>67</a:t>
-                      </a:r>
-                    </a:p>
-                  </a:txBody>
-                  <a:tcPr marL="12000" marR="12000" marT="8000" marB="8000">
-                    <a:lnL w="12700">
-                      <a:solidFill>
-                        <a:srgbClr val="000000"/>
-                      </a:solidFill>
-                    </a:lnL>
-                    <a:lnR w="12700">
-                      <a:solidFill>
-                        <a:srgbClr val="000000"/>
-                      </a:solidFill>
-                    </a:lnR>
-                    <a:lnT w="12700">
-                      <a:solidFill>
-                        <a:srgbClr val="000000"/>
-                      </a:solidFill>
-                    </a:lnT>
-                    <a:lnB w="12700">
-                      <a:solidFill>
-                        <a:srgbClr val="000000"/>
-                      </a:solidFill>
-                    </a:lnB>
-                    <a:solidFill>
-                      <a:srgbClr val="DFF3E7"/>
+                        <a:t>75</a:t>
+                      </a:r>
+                    </a:p>
+                  </a:txBody>
+                  <a:tcPr marL="12000" marR="12000" marT="8000" marB="8000">
+                    <a:lnL w="12700">
+                      <a:solidFill>
+                        <a:srgbClr val="000000"/>
+                      </a:solidFill>
+                    </a:lnL>
+                    <a:lnR w="12700">
+                      <a:solidFill>
+                        <a:srgbClr val="000000"/>
+                      </a:solidFill>
+                    </a:lnR>
+                    <a:lnT w="12700">
+                      <a:solidFill>
+                        <a:srgbClr val="000000"/>
+                      </a:solidFill>
+                    </a:lnT>
+                    <a:lnB w="12700">
+                      <a:solidFill>
+                        <a:srgbClr val="000000"/>
+                      </a:solidFill>
+                    </a:lnB>
+                    <a:solidFill>
+                      <a:srgbClr val="FFF2CC"/>
                     </a:solidFill>
                   </a:tcPr>
                 </a:tc>
@@ -8949,7 +8949,7 @@
                           </a:solidFill>
                           <a:latin typeface="Times New Roman"/>
                         </a:rPr>
-                        <a:t>858,312</a:t>
+                        <a:t>1,029,975</a:t>
                       </a:r>
                       <a:br/>
                       <a:r>
@@ -8959,7 +8959,7 @@
                           </a:solidFill>
                           <a:latin typeface="Times New Roman"/>
                         </a:rPr>
-                        <a:t>85.83 Cr</a:t>
+                        <a:t>103.00 Cr</a:t>
                       </a:r>
                     </a:p>
                   </a:txBody>
@@ -9002,7 +9002,7 @@
                           </a:solidFill>
                           <a:latin typeface="Times New Roman"/>
                         </a:rPr>
-                        <a:t>995,022</a:t>
+                        <a:t>1,163,224</a:t>
                       </a:r>
                       <a:br/>
                       <a:r>
@@ -9012,7 +9012,7 @@
                           </a:solidFill>
                           <a:latin typeface="Times New Roman"/>
                         </a:rPr>
-                        <a:t>99.50 Cr</a:t>
+                        <a:t>116.32 Cr</a:t>
                       </a:r>
                     </a:p>
                   </a:txBody>
@@ -9055,7 +9055,7 @@
                           </a:solidFill>
                           <a:latin typeface="Times New Roman"/>
                         </a:rPr>
-                        <a:t>136,710</a:t>
+                        <a:t>133,249</a:t>
                       </a:r>
                       <a:br/>
                       <a:r>
@@ -9065,7 +9065,7 @@
                           </a:solidFill>
                           <a:latin typeface="Times New Roman"/>
                         </a:rPr>
-                        <a:t>13.67 Cr</a:t>
+                        <a:t>13.32 Cr</a:t>
                       </a:r>
                     </a:p>
                   </a:txBody>
@@ -9108,7 +9108,7 @@
                           </a:solidFill>
                           <a:latin typeface="Times New Roman"/>
                         </a:rPr>
-                        <a:t>116</a:t>
+                        <a:t>113</a:t>
                       </a:r>
                     </a:p>
                   </a:txBody>
@@ -9151,7 +9151,7 @@
                           </a:solidFill>
                           <a:latin typeface="Times New Roman"/>
                         </a:rPr>
-                        <a:t>1,064,928</a:t>
+                        <a:t>896,726</a:t>
                       </a:r>
                       <a:br/>
                       <a:r>
@@ -9161,7 +9161,7 @@
                           </a:solidFill>
                           <a:latin typeface="Times New Roman"/>
                         </a:rPr>
-                        <a:t>106.49 Cr</a:t>
+                        <a:t>89.67 Cr</a:t>
                       </a:r>
                     </a:p>
                   </a:txBody>
@@ -9204,7 +9204,7 @@
                           </a:solidFill>
                           <a:latin typeface="Times New Roman"/>
                         </a:rPr>
-                        <a:t>48</a:t>
+                        <a:t>56</a:t>
                       </a:r>
                     </a:p>
                   </a:txBody>
@@ -9441,7 +9441,7 @@
                           </a:solidFill>
                           <a:latin typeface="Times New Roman"/>
                         </a:rPr>
-                        <a:t>1,396,902</a:t>
+                        <a:t>1,676,283</a:t>
                       </a:r>
                       <a:br/>
                       <a:r>
@@ -9451,7 +9451,7 @@
                           </a:solidFill>
                           <a:latin typeface="Times New Roman"/>
                         </a:rPr>
-                        <a:t>139.69 Cr</a:t>
+                        <a:t>167.63 Cr</a:t>
                       </a:r>
                     </a:p>
                   </a:txBody>
@@ -9494,7 +9494,7 @@
                           </a:solidFill>
                           <a:latin typeface="Times New Roman"/>
                         </a:rPr>
-                        <a:t>1,978,638</a:t>
+                        <a:t>2,316,412</a:t>
                       </a:r>
                       <a:br/>
                       <a:r>
@@ -9504,7 +9504,7 @@
                           </a:solidFill>
                           <a:latin typeface="Times New Roman"/>
                         </a:rPr>
-                        <a:t>197.86 Cr</a:t>
+                        <a:t>231.64 Cr</a:t>
                       </a:r>
                     </a:p>
                   </a:txBody>
@@ -9547,7 +9547,7 @@
                           </a:solidFill>
                           <a:latin typeface="Times New Roman"/>
                         </a:rPr>
-                        <a:t>581,736</a:t>
+                        <a:t>640,129</a:t>
                       </a:r>
                       <a:br/>
                       <a:r>
@@ -9557,7 +9557,7 @@
                           </a:solidFill>
                           <a:latin typeface="Times New Roman"/>
                         </a:rPr>
-                        <a:t>58.17 Cr</a:t>
+                        <a:t>64.01 Cr</a:t>
                       </a:r>
                     </a:p>
                   </a:txBody>
@@ -9600,7 +9600,7 @@
                           </a:solidFill>
                           <a:latin typeface="Times New Roman"/>
                         </a:rPr>
-                        <a:t>142</a:t>
+                        <a:t>138</a:t>
                       </a:r>
                     </a:p>
                   </a:txBody>
@@ -9643,7 +9643,7 @@
                           </a:solidFill>
                           <a:latin typeface="Times New Roman"/>
                         </a:rPr>
-                        <a:t>1,373,928</a:t>
+                        <a:t>1,036,154</a:t>
                       </a:r>
                       <a:br/>
                       <a:r>
@@ -9653,7 +9653,7 @@
                           </a:solidFill>
                           <a:latin typeface="Times New Roman"/>
                         </a:rPr>
-                        <a:t>137.39 Cr</a:t>
+                        <a:t>103.62 Cr</a:t>
                       </a:r>
                     </a:p>
                   </a:txBody>
@@ -9696,7 +9696,7 @@
                           </a:solidFill>
                           <a:latin typeface="Times New Roman"/>
                         </a:rPr>
-                        <a:t>59</a:t>
+                        <a:t>69</a:t>
                       </a:r>
                     </a:p>
                   </a:txBody>
@@ -9933,7 +9933,7 @@
                           </a:solidFill>
                           <a:latin typeface="Times New Roman"/>
                         </a:rPr>
-                        <a:t>1,845,319</a:t>
+                        <a:t>2,214,383</a:t>
                       </a:r>
                       <a:br/>
                       <a:r>
@@ -9943,7 +9943,7 @@
                           </a:solidFill>
                           <a:latin typeface="Times New Roman"/>
                         </a:rPr>
-                        <a:t>184.53 Cr</a:t>
+                        <a:t>221.44 Cr</a:t>
                       </a:r>
                     </a:p>
                   </a:txBody>
@@ -9986,7 +9986,7 @@
                           </a:solidFill>
                           <a:latin typeface="Times New Roman"/>
                         </a:rPr>
-                        <a:t>2,192,865</a:t>
+                        <a:t>2,600,978</a:t>
                       </a:r>
                       <a:br/>
                       <a:r>
@@ -9996,7 +9996,7 @@
                           </a:solidFill>
                           <a:latin typeface="Times New Roman"/>
                         </a:rPr>
-                        <a:t>219.29 Cr</a:t>
+                        <a:t>260.10 Cr</a:t>
                       </a:r>
                     </a:p>
                   </a:txBody>
@@ -10039,7 +10039,7 @@
                           </a:solidFill>
                           <a:latin typeface="Times New Roman"/>
                         </a:rPr>
-                        <a:t>347,546</a:t>
+                        <a:t>386,595</a:t>
                       </a:r>
                       <a:br/>
                       <a:r>
@@ -10049,7 +10049,7 @@
                           </a:solidFill>
                           <a:latin typeface="Times New Roman"/>
                         </a:rPr>
-                        <a:t>34.75 Cr</a:t>
+                        <a:t>38.66 Cr</a:t>
                       </a:r>
                     </a:p>
                   </a:txBody>
@@ -10092,7 +10092,7 @@
                           </a:solidFill>
                           <a:latin typeface="Times New Roman"/>
                         </a:rPr>
-                        <a:t>119</a:t>
+                        <a:t>117</a:t>
                       </a:r>
                     </a:p>
                   </a:txBody>
@@ -10135,7 +10135,7 @@
                           </a:solidFill>
                           <a:latin typeface="Times New Roman"/>
                         </a:rPr>
-                        <a:t>2,235,901</a:t>
+                        <a:t>1,827,788</a:t>
                       </a:r>
                       <a:br/>
                       <a:r>
@@ -10145,7 +10145,7 @@
                           </a:solidFill>
                           <a:latin typeface="Times New Roman"/>
                         </a:rPr>
-                        <a:t>223.59 Cr</a:t>
+                        <a:t>182.78 Cr</a:t>
                       </a:r>
                     </a:p>
                   </a:txBody>
@@ -10188,7 +10188,7 @@
                           </a:solidFill>
                           <a:latin typeface="Times New Roman"/>
                         </a:rPr>
-                        <a:t>50</a:t>
+                        <a:t>59</a:t>
                       </a:r>
                     </a:p>
                   </a:txBody>
@@ -10425,7 +10425,7 @@
                           </a:solidFill>
                           <a:latin typeface="Times New Roman"/>
                         </a:rPr>
-                        <a:t>4,836,336</a:t>
+                        <a:t>5,803,603</a:t>
                       </a:r>
                       <a:br/>
                       <a:r>
@@ -10435,7 +10435,7 @@
                           </a:solidFill>
                           <a:latin typeface="Times New Roman"/>
                         </a:rPr>
-                        <a:t>483.63 Cr</a:t>
+                        <a:t>580.36 Cr</a:t>
                       </a:r>
                     </a:p>
                   </a:txBody>
@@ -10478,7 +10478,7 @@
                           </a:solidFill>
                           <a:latin typeface="Times New Roman"/>
                         </a:rPr>
-                        <a:t>5,702,475</a:t>
+                        <a:t>5,756,378</a:t>
                       </a:r>
                       <a:br/>
                       <a:r>
@@ -10488,7 +10488,7 @@
                           </a:solidFill>
                           <a:latin typeface="Times New Roman"/>
                         </a:rPr>
-                        <a:t>570.25 Cr</a:t>
+                        <a:t>575.64 Cr</a:t>
                       </a:r>
                     </a:p>
                   </a:txBody>
@@ -10531,7 +10531,7 @@
                           </a:solidFill>
                           <a:latin typeface="Times New Roman"/>
                         </a:rPr>
-                        <a:t>866,139</a:t>
+                        <a:t>-47,225</a:t>
                       </a:r>
                       <a:br/>
                       <a:r>
@@ -10541,7 +10541,7 @@
                           </a:solidFill>
                           <a:latin typeface="Times New Roman"/>
                         </a:rPr>
-                        <a:t>86.61 Cr</a:t>
+                        <a:t>-4.72 Cr</a:t>
                       </a:r>
                     </a:p>
                   </a:txBody>
@@ -10584,33 +10584,33 @@
                           </a:solidFill>
                           <a:latin typeface="Times New Roman"/>
                         </a:rPr>
-                        <a:t>118</a:t>
-                      </a:r>
-                    </a:p>
-                  </a:txBody>
-                  <a:tcPr marL="12000" marR="12000" marT="8000" marB="8000">
-                    <a:lnL w="12700">
-                      <a:solidFill>
-                        <a:srgbClr val="000000"/>
-                      </a:solidFill>
-                    </a:lnL>
-                    <a:lnR w="12700">
-                      <a:solidFill>
-                        <a:srgbClr val="000000"/>
-                      </a:solidFill>
-                    </a:lnR>
-                    <a:lnT w="12700">
-                      <a:solidFill>
-                        <a:srgbClr val="000000"/>
-                      </a:solidFill>
-                    </a:lnT>
-                    <a:lnB w="12700">
-                      <a:solidFill>
-                        <a:srgbClr val="000000"/>
-                      </a:solidFill>
-                    </a:lnB>
-                    <a:solidFill>
-                      <a:srgbClr val="FCE4E4"/>
+                        <a:t>99</a:t>
+                      </a:r>
+                    </a:p>
+                  </a:txBody>
+                  <a:tcPr marL="12000" marR="12000" marT="8000" marB="8000">
+                    <a:lnL w="12700">
+                      <a:solidFill>
+                        <a:srgbClr val="000000"/>
+                      </a:solidFill>
+                    </a:lnL>
+                    <a:lnR w="12700">
+                      <a:solidFill>
+                        <a:srgbClr val="000000"/>
+                      </a:solidFill>
+                    </a:lnR>
+                    <a:lnT w="12700">
+                      <a:solidFill>
+                        <a:srgbClr val="000000"/>
+                      </a:solidFill>
+                    </a:lnT>
+                    <a:lnB w="12700">
+                      <a:solidFill>
+                        <a:srgbClr val="000000"/>
+                      </a:solidFill>
+                    </a:lnB>
+                    <a:solidFill>
+                      <a:srgbClr val="FFF2CC"/>
                     </a:solidFill>
                   </a:tcPr>
                 </a:tc>
@@ -10627,7 +10627,7 @@
                           </a:solidFill>
                           <a:latin typeface="Times New Roman"/>
                         </a:rPr>
-                        <a:t>5,904,731</a:t>
+                        <a:t>5,850,828</a:t>
                       </a:r>
                       <a:br/>
                       <a:r>
@@ -10637,7 +10637,7 @@
                           </a:solidFill>
                           <a:latin typeface="Times New Roman"/>
                         </a:rPr>
-                        <a:t>590.47 Cr</a:t>
+                        <a:t>585.08 Cr</a:t>
                       </a:r>
                     </a:p>
                   </a:txBody>
@@ -10680,7 +10680,7 @@
                           </a:solidFill>
                           <a:latin typeface="Times New Roman"/>
                         </a:rPr>
-                        <a:t>49</a:t>
+                        <a:t>50</a:t>
                       </a:r>
                     </a:p>
                   </a:txBody>
@@ -10917,7 +10917,7 @@
                           </a:solidFill>
                           <a:latin typeface="Times New Roman"/>
                         </a:rPr>
-                        <a:t>580,347</a:t>
+                        <a:t>696,416</a:t>
                       </a:r>
                       <a:br/>
                       <a:r>
@@ -10927,7 +10927,7 @@
                           </a:solidFill>
                           <a:latin typeface="Times New Roman"/>
                         </a:rPr>
-                        <a:t>58.03 Cr</a:t>
+                        <a:t>69.64 Cr</a:t>
                       </a:r>
                     </a:p>
                   </a:txBody>
@@ -10970,7 +10970,7 @@
                           </a:solidFill>
                           <a:latin typeface="Times New Roman"/>
                         </a:rPr>
-                        <a:t>916,954</a:t>
+                        <a:t>1,052,451</a:t>
                       </a:r>
                       <a:br/>
                       <a:r>
@@ -10980,7 +10980,7 @@
                           </a:solidFill>
                           <a:latin typeface="Times New Roman"/>
                         </a:rPr>
-                        <a:t>91.70 Cr</a:t>
+                        <a:t>105.25 Cr</a:t>
                       </a:r>
                     </a:p>
                   </a:txBody>
@@ -11023,7 +11023,7 @@
                           </a:solidFill>
                           <a:latin typeface="Times New Roman"/>
                         </a:rPr>
-                        <a:t>336,607</a:t>
+                        <a:t>356,035</a:t>
                       </a:r>
                       <a:br/>
                       <a:r>
@@ -11033,7 +11033,7 @@
                           </a:solidFill>
                           <a:latin typeface="Times New Roman"/>
                         </a:rPr>
-                        <a:t>33.66 Cr</a:t>
+                        <a:t>35.60 Cr</a:t>
                       </a:r>
                     </a:p>
                   </a:txBody>
@@ -11076,7 +11076,7 @@
                           </a:solidFill>
                           <a:latin typeface="Times New Roman"/>
                         </a:rPr>
-                        <a:t>158</a:t>
+                        <a:t>151</a:t>
                       </a:r>
                     </a:p>
                   </a:txBody>
@@ -11119,7 +11119,7 @@
                           </a:solidFill>
                           <a:latin typeface="Times New Roman"/>
                         </a:rPr>
-                        <a:t>475,878</a:t>
+                        <a:t>340,381</a:t>
                       </a:r>
                       <a:br/>
                       <a:r>
@@ -11129,7 +11129,7 @@
                           </a:solidFill>
                           <a:latin typeface="Times New Roman"/>
                         </a:rPr>
-                        <a:t>47.59 Cr</a:t>
+                        <a:t>34.04 Cr</a:t>
                       </a:r>
                     </a:p>
                   </a:txBody>
@@ -11172,33 +11172,33 @@
                           </a:solidFill>
                           <a:latin typeface="Times New Roman"/>
                         </a:rPr>
-                        <a:t>66</a:t>
-                      </a:r>
-                    </a:p>
-                  </a:txBody>
-                  <a:tcPr marL="12000" marR="12000" marT="8000" marB="8000">
-                    <a:lnL w="12700">
-                      <a:solidFill>
-                        <a:srgbClr val="000000"/>
-                      </a:solidFill>
-                    </a:lnL>
-                    <a:lnR w="12700">
-                      <a:solidFill>
-                        <a:srgbClr val="000000"/>
-                      </a:solidFill>
-                    </a:lnR>
-                    <a:lnT w="12700">
-                      <a:solidFill>
-                        <a:srgbClr val="000000"/>
-                      </a:solidFill>
-                    </a:lnT>
-                    <a:lnB w="12700">
-                      <a:solidFill>
-                        <a:srgbClr val="000000"/>
-                      </a:solidFill>
-                    </a:lnB>
-                    <a:solidFill>
-                      <a:srgbClr val="DFF3E7"/>
+                        <a:t>76</a:t>
+                      </a:r>
+                    </a:p>
+                  </a:txBody>
+                  <a:tcPr marL="12000" marR="12000" marT="8000" marB="8000">
+                    <a:lnL w="12700">
+                      <a:solidFill>
+                        <a:srgbClr val="000000"/>
+                      </a:solidFill>
+                    </a:lnL>
+                    <a:lnR w="12700">
+                      <a:solidFill>
+                        <a:srgbClr val="000000"/>
+                      </a:solidFill>
+                    </a:lnR>
+                    <a:lnT w="12700">
+                      <a:solidFill>
+                        <a:srgbClr val="000000"/>
+                      </a:solidFill>
+                    </a:lnT>
+                    <a:lnB w="12700">
+                      <a:solidFill>
+                        <a:srgbClr val="000000"/>
+                      </a:solidFill>
+                    </a:lnB>
+                    <a:solidFill>
+                      <a:srgbClr val="FFF2CC"/>
                     </a:solidFill>
                   </a:tcPr>
                 </a:tc>
@@ -11409,7 +11409,7 @@
                           </a:solidFill>
                           <a:latin typeface="Times New Roman"/>
                         </a:rPr>
-                        <a:t>414,432</a:t>
+                        <a:t>497,319</a:t>
                       </a:r>
                       <a:br/>
                       <a:r>
@@ -11419,7 +11419,7 @@
                           </a:solidFill>
                           <a:latin typeface="Times New Roman"/>
                         </a:rPr>
-                        <a:t>41.44 Cr</a:t>
+                        <a:t>49.73 Cr</a:t>
                       </a:r>
                     </a:p>
                   </a:txBody>
@@ -11462,7 +11462,7 @@
                           </a:solidFill>
                           <a:latin typeface="Times New Roman"/>
                         </a:rPr>
-                        <a:t>441,761</a:t>
+                        <a:t>528,378</a:t>
                       </a:r>
                       <a:br/>
                       <a:r>
@@ -11472,7 +11472,7 @@
                           </a:solidFill>
                           <a:latin typeface="Times New Roman"/>
                         </a:rPr>
-                        <a:t>44.18 Cr</a:t>
+                        <a:t>52.84 Cr</a:t>
                       </a:r>
                     </a:p>
                   </a:txBody>
@@ -11515,7 +11515,7 @@
                           </a:solidFill>
                           <a:latin typeface="Times New Roman"/>
                         </a:rPr>
-                        <a:t>27,328</a:t>
+                        <a:t>31,059</a:t>
                       </a:r>
                       <a:br/>
                       <a:r>
@@ -11525,7 +11525,7 @@
                           </a:solidFill>
                           <a:latin typeface="Times New Roman"/>
                         </a:rPr>
-                        <a:t>2.73 Cr</a:t>
+                        <a:t>3.11 Cr</a:t>
                       </a:r>
                     </a:p>
                   </a:txBody>
@@ -11568,7 +11568,7 @@
                           </a:solidFill>
                           <a:latin typeface="Times New Roman"/>
                         </a:rPr>
-                        <a:t>107</a:t>
+                        <a:t>106</a:t>
                       </a:r>
                     </a:p>
                   </a:txBody>
@@ -11611,7 +11611,7 @@
                           </a:solidFill>
                           <a:latin typeface="Times New Roman"/>
                         </a:rPr>
-                        <a:t>552,877</a:t>
+                        <a:t>466,260</a:t>
                       </a:r>
                       <a:br/>
                       <a:r>
@@ -11621,7 +11621,7 @@
                           </a:solidFill>
                           <a:latin typeface="Times New Roman"/>
                         </a:rPr>
-                        <a:t>55.29 Cr</a:t>
+                        <a:t>46.63 Cr</a:t>
                       </a:r>
                     </a:p>
                   </a:txBody>
@@ -11664,7 +11664,7 @@
                           </a:solidFill>
                           <a:latin typeface="Times New Roman"/>
                         </a:rPr>
-                        <a:t>44</a:t>
+                        <a:t>53</a:t>
                       </a:r>
                     </a:p>
                   </a:txBody>
@@ -11901,7 +11901,7 @@
                           </a:solidFill>
                           <a:latin typeface="Times New Roman"/>
                         </a:rPr>
-                        <a:t>537,945</a:t>
+                        <a:t>645,534</a:t>
                       </a:r>
                       <a:br/>
                       <a:r>
@@ -11911,7 +11911,7 @@
                           </a:solidFill>
                           <a:latin typeface="Times New Roman"/>
                         </a:rPr>
-                        <a:t>53.79 Cr</a:t>
+                        <a:t>64.55 Cr</a:t>
                       </a:r>
                     </a:p>
                   </a:txBody>
@@ -11954,7 +11954,7 @@
                           </a:solidFill>
                           <a:latin typeface="Times New Roman"/>
                         </a:rPr>
-                        <a:t>532,662</a:t>
+                        <a:t>639,713</a:t>
                       </a:r>
                       <a:br/>
                       <a:r>
@@ -11964,7 +11964,7 @@
                           </a:solidFill>
                           <a:latin typeface="Times New Roman"/>
                         </a:rPr>
-                        <a:t>53.27 Cr</a:t>
+                        <a:t>63.97 Cr</a:t>
                       </a:r>
                     </a:p>
                   </a:txBody>
@@ -12007,7 +12007,7 @@
                           </a:solidFill>
                           <a:latin typeface="Times New Roman"/>
                         </a:rPr>
-                        <a:t>-5,283</a:t>
+                        <a:t>-5,820</a:t>
                       </a:r>
                       <a:br/>
                       <a:r>
@@ -12017,7 +12017,7 @@
                           </a:solidFill>
                           <a:latin typeface="Times New Roman"/>
                         </a:rPr>
-                        <a:t>-0.53 Cr</a:t>
+                        <a:t>-0.58 Cr</a:t>
                       </a:r>
                     </a:p>
                   </a:txBody>
@@ -12103,7 +12103,7 @@
                           </a:solidFill>
                           <a:latin typeface="Times New Roman"/>
                         </a:rPr>
-                        <a:t>758,405</a:t>
+                        <a:t>651,354</a:t>
                       </a:r>
                       <a:br/>
                       <a:r>
@@ -12113,7 +12113,7 @@
                           </a:solidFill>
                           <a:latin typeface="Times New Roman"/>
                         </a:rPr>
-                        <a:t>75.84 Cr</a:t>
+                        <a:t>65.14 Cr</a:t>
                       </a:r>
                     </a:p>
                   </a:txBody>
@@ -12156,7 +12156,7 @@
                           </a:solidFill>
                           <a:latin typeface="Times New Roman"/>
                         </a:rPr>
-                        <a:t>41</a:t>
+                        <a:t>50</a:t>
                       </a:r>
                     </a:p>
                   </a:txBody>
@@ -12393,7 +12393,7 @@
                           </a:solidFill>
                           <a:latin typeface="Times New Roman"/>
                         </a:rPr>
-                        <a:t>13,581,614</a:t>
+                        <a:t>16,297,936</a:t>
                       </a:r>
                       <a:br/>
                       <a:r>
@@ -12403,7 +12403,7 @@
                           </a:solidFill>
                           <a:latin typeface="Times New Roman"/>
                         </a:rPr>
-                        <a:t>1358.16 Cr</a:t>
+                        <a:t>1629.79 Cr</a:t>
                       </a:r>
                     </a:p>
                   </a:txBody>
@@ -12446,7 +12446,7 @@
                           </a:solidFill>
                           <a:latin typeface="Times New Roman"/>
                         </a:rPr>
-                        <a:t>16,528,995</a:t>
+                        <a:t>18,328,032</a:t>
                       </a:r>
                       <a:br/>
                       <a:r>
@@ -12456,7 +12456,7 @@
                           </a:solidFill>
                           <a:latin typeface="Times New Roman"/>
                         </a:rPr>
-                        <a:t>1652.90 Cr</a:t>
+                        <a:t>1832.80 Cr</a:t>
                       </a:r>
                     </a:p>
                   </a:txBody>
@@ -12499,7 +12499,7 @@
                           </a:solidFill>
                           <a:latin typeface="Times New Roman"/>
                         </a:rPr>
-                        <a:t>2,947,381</a:t>
+                        <a:t>2,030,096</a:t>
                       </a:r>
                       <a:br/>
                       <a:r>
@@ -12509,7 +12509,7 @@
                           </a:solidFill>
                           <a:latin typeface="Times New Roman"/>
                         </a:rPr>
-                        <a:t>294.74 Cr</a:t>
+                        <a:t>203.01 Cr</a:t>
                       </a:r>
                     </a:p>
                   </a:txBody>
@@ -12552,7 +12552,7 @@
                           </a:solidFill>
                           <a:latin typeface="Times New Roman"/>
                         </a:rPr>
-                        <a:t>122</a:t>
+                        <a:t>112</a:t>
                       </a:r>
                     </a:p>
                   </a:txBody>
@@ -12595,7 +12595,7 @@
                           </a:solidFill>
                           <a:latin typeface="Times New Roman"/>
                         </a:rPr>
-                        <a:t>16,066,878</a:t>
+                        <a:t>14,267,841</a:t>
                       </a:r>
                       <a:br/>
                       <a:r>
@@ -12605,7 +12605,7 @@
                           </a:solidFill>
                           <a:latin typeface="Times New Roman"/>
                         </a:rPr>
-                        <a:t>1606.69 Cr</a:t>
+                        <a:t>1426.78 Cr</a:t>
                       </a:r>
                     </a:p>
                   </a:txBody>
@@ -12648,7 +12648,7 @@
                           </a:solidFill>
                           <a:latin typeface="Times New Roman"/>
                         </a:rPr>
-                        <a:t>51</a:t>
+                        <a:t>56</a:t>
                       </a:r>
                     </a:p>
                   </a:txBody>
@@ -12885,7 +12885,7 @@
                           </a:solidFill>
                           <a:latin typeface="Times New Roman"/>
                         </a:rPr>
-                        <a:t>-5,435</a:t>
+                        <a:t>-6,522</a:t>
                       </a:r>
                       <a:br/>
                       <a:r>
@@ -12895,7 +12895,7 @@
                           </a:solidFill>
                           <a:latin typeface="Times New Roman"/>
                         </a:rPr>
-                        <a:t>-0.54 Cr</a:t>
+                        <a:t>-0.65 Cr</a:t>
                       </a:r>
                     </a:p>
                   </a:txBody>
@@ -12938,7 +12938,7 @@
                           </a:solidFill>
                           <a:latin typeface="Times New Roman"/>
                         </a:rPr>
-                        <a:t>1,578,052</a:t>
+                        <a:t>1,591,631</a:t>
                       </a:r>
                       <a:br/>
                       <a:r>
@@ -12948,7 +12948,7 @@
                           </a:solidFill>
                           <a:latin typeface="Times New Roman"/>
                         </a:rPr>
-                        <a:t>157.81 Cr</a:t>
+                        <a:t>159.16 Cr</a:t>
                       </a:r>
                     </a:p>
                   </a:txBody>
@@ -12991,7 +12991,7 @@
                           </a:solidFill>
                           <a:latin typeface="Times New Roman"/>
                         </a:rPr>
-                        <a:t>1,583,487</a:t>
+                        <a:t>1,598,154</a:t>
                       </a:r>
                       <a:br/>
                       <a:r>
@@ -13001,7 +13001,7 @@
                           </a:solidFill>
                           <a:latin typeface="Times New Roman"/>
                         </a:rPr>
-                        <a:t>158.35 Cr</a:t>
+                        <a:t>159.82 Cr</a:t>
                       </a:r>
                     </a:p>
                   </a:txBody>
@@ -13044,7 +13044,7 @@
                           </a:solidFill>
                           <a:latin typeface="Times New Roman"/>
                         </a:rPr>
-                        <a:t>-29033</a:t>
+                        <a:t>-24402</a:t>
                       </a:r>
                     </a:p>
                   </a:txBody>
@@ -13087,7 +13087,7 @@
                           </a:solidFill>
                           <a:latin typeface="Times New Roman"/>
                         </a:rPr>
-                        <a:t>-1,591,097</a:t>
+                        <a:t>-1,604,676</a:t>
                       </a:r>
                       <a:br/>
                       <a:r>
@@ -13097,7 +13097,7 @@
                           </a:solidFill>
                           <a:latin typeface="Times New Roman"/>
                         </a:rPr>
-                        <a:t>-159.11 Cr</a:t>
+                        <a:t>-160.47 Cr</a:t>
                       </a:r>
                     </a:p>
                   </a:txBody>
@@ -13140,7 +13140,7 @@
                           </a:solidFill>
                           <a:latin typeface="Times New Roman"/>
                         </a:rPr>
-                        <a:t>-12097</a:t>
+                        <a:t>-12201</a:t>
                       </a:r>
                     </a:p>
                   </a:txBody>
@@ -13284,7 +13284,7 @@
                 </a:solidFill>
                 <a:latin typeface="Times New Roman"/>
               </a:rPr>
-              <a:t>PU Wise - Staff - AUG 2026 | uploaded 2026-09-29T13:48:08+05:30</a:t>
+              <a:t>PU Wise - Staff - SEP 2026 | uploaded 2026-10-01T11:01:41+05:30</a:t>
             </a:r>
           </a:p>
         </p:txBody>
@@ -13474,7 +13474,7 @@
                           </a:solidFill>
                           <a:latin typeface="Times New Roman"/>
                         </a:rPr>
-                        <a:t>A / 12 * 5</a:t>
+                        <a:t>A / 12 * 6</a:t>
                       </a:r>
                     </a:p>
                   </a:txBody>
@@ -13537,7 +13537,7 @@
                           </a:solidFill>
                           <a:latin typeface="Times New Roman"/>
                         </a:rPr>
-                        <a:t>Actuals up to AUG 2026</a:t>
+                        <a:t>Actuals up to SEP 2026</a:t>
                       </a:r>
                     </a:p>
                   </a:txBody>
@@ -13993,7 +13993,7 @@
                           </a:solidFill>
                           <a:latin typeface="Times New Roman"/>
                         </a:rPr>
-                        <a:t>2,794,337</a:t>
+                        <a:t>3,353,204</a:t>
                       </a:r>
                       <a:br/>
                       <a:r>
@@ -14003,7 +14003,7 @@
                           </a:solidFill>
                           <a:latin typeface="Times New Roman"/>
                         </a:rPr>
-                        <a:t>279.43 Cr</a:t>
+                        <a:t>335.32 Cr</a:t>
                       </a:r>
                     </a:p>
                   </a:txBody>
@@ -14046,7 +14046,7 @@
                           </a:solidFill>
                           <a:latin typeface="Times New Roman"/>
                         </a:rPr>
-                        <a:t>3,071,823</a:t>
+                        <a:t>3,689,447</a:t>
                       </a:r>
                       <a:br/>
                       <a:r>
@@ -14056,7 +14056,7 @@
                           </a:solidFill>
                           <a:latin typeface="Times New Roman"/>
                         </a:rPr>
-                        <a:t>307.18 Cr</a:t>
+                        <a:t>368.94 Cr</a:t>
                       </a:r>
                     </a:p>
                   </a:txBody>
@@ -14099,7 +14099,7 @@
                           </a:solidFill>
                           <a:latin typeface="Times New Roman"/>
                         </a:rPr>
-                        <a:t>277,486</a:t>
+                        <a:t>336,242</a:t>
                       </a:r>
                       <a:br/>
                       <a:r>
@@ -14109,7 +14109,7 @@
                           </a:solidFill>
                           <a:latin typeface="Times New Roman"/>
                         </a:rPr>
-                        <a:t>27.75 Cr</a:t>
+                        <a:t>33.62 Cr</a:t>
                       </a:r>
                     </a:p>
                   </a:txBody>
@@ -14195,7 +14195,7 @@
                           </a:solidFill>
                           <a:latin typeface="Times New Roman"/>
                         </a:rPr>
-                        <a:t>3,634,586</a:t>
+                        <a:t>3,016,962</a:t>
                       </a:r>
                       <a:br/>
                       <a:r>
@@ -14205,7 +14205,7 @@
                           </a:solidFill>
                           <a:latin typeface="Times New Roman"/>
                         </a:rPr>
-                        <a:t>363.46 Cr</a:t>
+                        <a:t>301.70 Cr</a:t>
                       </a:r>
                     </a:p>
                   </a:txBody>
@@ -14248,7 +14248,7 @@
                           </a:solidFill>
                           <a:latin typeface="Times New Roman"/>
                         </a:rPr>
-                        <a:t>46</a:t>
+                        <a:t>55</a:t>
                       </a:r>
                     </a:p>
                   </a:txBody>
@@ -14442,7 +14442,7 @@
                           </a:solidFill>
                           <a:latin typeface="Times New Roman"/>
                         </a:rPr>
-                        <a:t>1,708,522</a:t>
+                        <a:t>2,050,226</a:t>
                       </a:r>
                       <a:br/>
                       <a:r>
@@ -14452,7 +14452,7 @@
                           </a:solidFill>
                           <a:latin typeface="Times New Roman"/>
                         </a:rPr>
-                        <a:t>170.85 Cr</a:t>
+                        <a:t>205.02 Cr</a:t>
                       </a:r>
                     </a:p>
                   </a:txBody>
@@ -14495,7 +14495,7 @@
                           </a:solidFill>
                           <a:latin typeface="Times New Roman"/>
                         </a:rPr>
-                        <a:t>1,966,618</a:t>
+                        <a:t>2,354,387</a:t>
                       </a:r>
                       <a:br/>
                       <a:r>
@@ -14505,7 +14505,7 @@
                           </a:solidFill>
                           <a:latin typeface="Times New Roman"/>
                         </a:rPr>
-                        <a:t>196.66 Cr</a:t>
+                        <a:t>235.44 Cr</a:t>
                       </a:r>
                     </a:p>
                   </a:txBody>
@@ -14548,7 +14548,7 @@
                           </a:solidFill>
                           <a:latin typeface="Times New Roman"/>
                         </a:rPr>
-                        <a:t>258,096</a:t>
+                        <a:t>304,160</a:t>
                       </a:r>
                       <a:br/>
                       <a:r>
@@ -14558,7 +14558,7 @@
                           </a:solidFill>
                           <a:latin typeface="Times New Roman"/>
                         </a:rPr>
-                        <a:t>25.81 Cr</a:t>
+                        <a:t>30.42 Cr</a:t>
                       </a:r>
                     </a:p>
                   </a:txBody>
@@ -14644,7 +14644,7 @@
                           </a:solidFill>
                           <a:latin typeface="Times New Roman"/>
                         </a:rPr>
-                        <a:t>2,133,835</a:t>
+                        <a:t>1,746,066</a:t>
                       </a:r>
                       <a:br/>
                       <a:r>
@@ -14654,7 +14654,7 @@
                           </a:solidFill>
                           <a:latin typeface="Times New Roman"/>
                         </a:rPr>
-                        <a:t>213.38 Cr</a:t>
+                        <a:t>174.61 Cr</a:t>
                       </a:r>
                     </a:p>
                   </a:txBody>
@@ -14697,7 +14697,7 @@
                           </a:solidFill>
                           <a:latin typeface="Times New Roman"/>
                         </a:rPr>
-                        <a:t>48</a:t>
+                        <a:t>57</a:t>
                       </a:r>
                     </a:p>
                   </a:txBody>
@@ -14891,7 +14891,7 @@
                           </a:solidFill>
                           <a:latin typeface="Times New Roman"/>
                         </a:rPr>
-                        <a:t>118,787</a:t>
+                        <a:t>142,544</a:t>
                       </a:r>
                       <a:br/>
                       <a:r>
@@ -14901,7 +14901,7 @@
                           </a:solidFill>
                           <a:latin typeface="Times New Roman"/>
                         </a:rPr>
-                        <a:t>11.88 Cr</a:t>
+                        <a:t>14.25 Cr</a:t>
                       </a:r>
                     </a:p>
                   </a:txBody>
@@ -14997,7 +14997,7 @@
                           </a:solidFill>
                           <a:latin typeface="Times New Roman"/>
                         </a:rPr>
-                        <a:t>-118,715</a:t>
+                        <a:t>-142,472</a:t>
                       </a:r>
                       <a:br/>
                       <a:r>
@@ -15007,7 +15007,7 @@
                           </a:solidFill>
                           <a:latin typeface="Times New Roman"/>
                         </a:rPr>
-                        <a:t>-11.87 Cr</a:t>
+                        <a:t>-14.25 Cr</a:t>
                       </a:r>
                     </a:p>
                   </a:txBody>
@@ -15340,7 +15340,7 @@
                           </a:solidFill>
                           <a:latin typeface="Times New Roman"/>
                         </a:rPr>
-                        <a:t>323,416</a:t>
+                        <a:t>388,099</a:t>
                       </a:r>
                       <a:br/>
                       <a:r>
@@ -15350,7 +15350,7 @@
                           </a:solidFill>
                           <a:latin typeface="Times New Roman"/>
                         </a:rPr>
-                        <a:t>32.34 Cr</a:t>
+                        <a:t>38.81 Cr</a:t>
                       </a:r>
                     </a:p>
                   </a:txBody>
@@ -15393,7 +15393,7 @@
                           </a:solidFill>
                           <a:latin typeface="Times New Roman"/>
                         </a:rPr>
-                        <a:t>337,362</a:t>
+                        <a:t>405,401</a:t>
                       </a:r>
                       <a:br/>
                       <a:r>
@@ -15403,7 +15403,7 @@
                           </a:solidFill>
                           <a:latin typeface="Times New Roman"/>
                         </a:rPr>
-                        <a:t>33.74 Cr</a:t>
+                        <a:t>40.54 Cr</a:t>
                       </a:r>
                     </a:p>
                   </a:txBody>
@@ -15446,7 +15446,7 @@
                           </a:solidFill>
                           <a:latin typeface="Times New Roman"/>
                         </a:rPr>
-                        <a:t>13,946</a:t>
+                        <a:t>17,302</a:t>
                       </a:r>
                       <a:br/>
                       <a:r>
@@ -15456,7 +15456,7 @@
                           </a:solidFill>
                           <a:latin typeface="Times New Roman"/>
                         </a:rPr>
-                        <a:t>1.39 Cr</a:t>
+                        <a:t>1.73 Cr</a:t>
                       </a:r>
                     </a:p>
                   </a:txBody>
@@ -15542,7 +15542,7 @@
                           </a:solidFill>
                           <a:latin typeface="Times New Roman"/>
                         </a:rPr>
-                        <a:t>438,836</a:t>
+                        <a:t>370,797</a:t>
                       </a:r>
                       <a:br/>
                       <a:r>
@@ -15552,7 +15552,7 @@
                           </a:solidFill>
                           <a:latin typeface="Times New Roman"/>
                         </a:rPr>
-                        <a:t>43.88 Cr</a:t>
+                        <a:t>37.08 Cr</a:t>
                       </a:r>
                     </a:p>
                   </a:txBody>
@@ -15595,7 +15595,7 @@
                           </a:solidFill>
                           <a:latin typeface="Times New Roman"/>
                         </a:rPr>
-                        <a:t>43</a:t>
+                        <a:t>52</a:t>
                       </a:r>
                     </a:p>
                   </a:txBody>
@@ -15789,7 +15789,7 @@
                           </a:solidFill>
                           <a:latin typeface="Times New Roman"/>
                         </a:rPr>
-                        <a:t>206,920</a:t>
+                        <a:t>248,304</a:t>
                       </a:r>
                       <a:br/>
                       <a:r>
@@ -15799,7 +15799,7 @@
                           </a:solidFill>
                           <a:latin typeface="Times New Roman"/>
                         </a:rPr>
-                        <a:t>20.69 Cr</a:t>
+                        <a:t>24.83 Cr</a:t>
                       </a:r>
                     </a:p>
                   </a:txBody>
@@ -15842,7 +15842,7 @@
                           </a:solidFill>
                           <a:latin typeface="Times New Roman"/>
                         </a:rPr>
-                        <a:t>216,397</a:t>
+                        <a:t>259,448</a:t>
                       </a:r>
                       <a:br/>
                       <a:r>
@@ -15852,7 +15852,7 @@
                           </a:solidFill>
                           <a:latin typeface="Times New Roman"/>
                         </a:rPr>
-                        <a:t>21.64 Cr</a:t>
+                        <a:t>25.94 Cr</a:t>
                       </a:r>
                     </a:p>
                   </a:txBody>
@@ -15895,7 +15895,7 @@
                           </a:solidFill>
                           <a:latin typeface="Times New Roman"/>
                         </a:rPr>
-                        <a:t>9,477</a:t>
+                        <a:t>11,144</a:t>
                       </a:r>
                       <a:br/>
                       <a:r>
@@ -15905,7 +15905,7 @@
                           </a:solidFill>
                           <a:latin typeface="Times New Roman"/>
                         </a:rPr>
-                        <a:t>0.95 Cr</a:t>
+                        <a:t>1.11 Cr</a:t>
                       </a:r>
                     </a:p>
                   </a:txBody>
@@ -15948,7 +15948,7 @@
                           </a:solidFill>
                           <a:latin typeface="Times New Roman"/>
                         </a:rPr>
-                        <a:t>105</a:t>
+                        <a:t>104</a:t>
                       </a:r>
                     </a:p>
                   </a:txBody>
@@ -15991,7 +15991,7 @@
                           </a:solidFill>
                           <a:latin typeface="Times New Roman"/>
                         </a:rPr>
-                        <a:t>280,212</a:t>
+                        <a:t>237,161</a:t>
                       </a:r>
                       <a:br/>
                       <a:r>
@@ -16001,7 +16001,7 @@
                           </a:solidFill>
                           <a:latin typeface="Times New Roman"/>
                         </a:rPr>
-                        <a:t>28.02 Cr</a:t>
+                        <a:t>23.72 Cr</a:t>
                       </a:r>
                     </a:p>
                   </a:txBody>
@@ -16044,7 +16044,7 @@
                           </a:solidFill>
                           <a:latin typeface="Times New Roman"/>
                         </a:rPr>
-                        <a:t>44</a:t>
+                        <a:t>52</a:t>
                       </a:r>
                     </a:p>
                   </a:txBody>
@@ -16238,7 +16238,7 @@
                           </a:solidFill>
                           <a:latin typeface="Times New Roman"/>
                         </a:rPr>
-                        <a:t>283,415</a:t>
+                        <a:t>340,098</a:t>
                       </a:r>
                       <a:br/>
                       <a:r>
@@ -16248,7 +16248,7 @@
                           </a:solidFill>
                           <a:latin typeface="Times New Roman"/>
                         </a:rPr>
-                        <a:t>28.34 Cr</a:t>
+                        <a:t>34.01 Cr</a:t>
                       </a:r>
                     </a:p>
                   </a:txBody>
@@ -16291,7 +16291,7 @@
                           </a:solidFill>
                           <a:latin typeface="Times New Roman"/>
                         </a:rPr>
-                        <a:t>364,653</a:t>
+                        <a:t>437,059</a:t>
                       </a:r>
                       <a:br/>
                       <a:r>
@@ -16301,7 +16301,7 @@
                           </a:solidFill>
                           <a:latin typeface="Times New Roman"/>
                         </a:rPr>
-                        <a:t>36.47 Cr</a:t>
+                        <a:t>43.71 Cr</a:t>
                       </a:r>
                     </a:p>
                   </a:txBody>
@@ -16344,7 +16344,7 @@
                           </a:solidFill>
                           <a:latin typeface="Times New Roman"/>
                         </a:rPr>
-                        <a:t>81,238</a:t>
+                        <a:t>96,960</a:t>
                       </a:r>
                       <a:br/>
                       <a:r>
@@ -16354,7 +16354,7 @@
                           </a:solidFill>
                           <a:latin typeface="Times New Roman"/>
                         </a:rPr>
-                        <a:t>8.12 Cr</a:t>
+                        <a:t>9.70 Cr</a:t>
                       </a:r>
                     </a:p>
                   </a:txBody>
@@ -16440,7 +16440,7 @@
                           </a:solidFill>
                           <a:latin typeface="Times New Roman"/>
                         </a:rPr>
-                        <a:t>315,544</a:t>
+                        <a:t>243,138</a:t>
                       </a:r>
                       <a:br/>
                       <a:r>
@@ -16450,7 +16450,7 @@
                           </a:solidFill>
                           <a:latin typeface="Times New Roman"/>
                         </a:rPr>
-                        <a:t>31.55 Cr</a:t>
+                        <a:t>24.31 Cr</a:t>
                       </a:r>
                     </a:p>
                   </a:txBody>
@@ -16493,7 +16493,7 @@
                           </a:solidFill>
                           <a:latin typeface="Times New Roman"/>
                         </a:rPr>
-                        <a:t>54</a:t>
+                        <a:t>64</a:t>
                       </a:r>
                     </a:p>
                   </a:txBody>
@@ -16687,7 +16687,7 @@
                           </a:solidFill>
                           <a:latin typeface="Times New Roman"/>
                         </a:rPr>
-                        <a:t>32,208</a:t>
+                        <a:t>38,650</a:t>
                       </a:r>
                       <a:br/>
                       <a:r>
@@ -16697,7 +16697,7 @@
                           </a:solidFill>
                           <a:latin typeface="Times New Roman"/>
                         </a:rPr>
-                        <a:t>3.22 Cr</a:t>
+                        <a:t>3.87 Cr</a:t>
                       </a:r>
                     </a:p>
                   </a:txBody>
@@ -16740,7 +16740,7 @@
                           </a:solidFill>
                           <a:latin typeface="Times New Roman"/>
                         </a:rPr>
-                        <a:t>59,582</a:t>
+                        <a:t>59,779</a:t>
                       </a:r>
                       <a:br/>
                       <a:r>
@@ -16750,7 +16750,7 @@
                           </a:solidFill>
                           <a:latin typeface="Times New Roman"/>
                         </a:rPr>
-                        <a:t>5.96 Cr</a:t>
+                        <a:t>5.98 Cr</a:t>
                       </a:r>
                     </a:p>
                   </a:txBody>
@@ -16793,7 +16793,7 @@
                           </a:solidFill>
                           <a:latin typeface="Times New Roman"/>
                         </a:rPr>
-                        <a:t>27,374</a:t>
+                        <a:t>21,129</a:t>
                       </a:r>
                       <a:br/>
                       <a:r>
@@ -16803,7 +16803,7 @@
                           </a:solidFill>
                           <a:latin typeface="Times New Roman"/>
                         </a:rPr>
-                        <a:t>2.74 Cr</a:t>
+                        <a:t>2.11 Cr</a:t>
                       </a:r>
                     </a:p>
                   </a:txBody>
@@ -16846,7 +16846,7 @@
                           </a:solidFill>
                           <a:latin typeface="Times New Roman"/>
                         </a:rPr>
-                        <a:t>185</a:t>
+                        <a:t>155</a:t>
                       </a:r>
                     </a:p>
                   </a:txBody>
@@ -16889,7 +16889,7 @@
                           </a:solidFill>
                           <a:latin typeface="Times New Roman"/>
                         </a:rPr>
-                        <a:t>17,718</a:t>
+                        <a:t>17,521</a:t>
                       </a:r>
                       <a:br/>
                       <a:r>
@@ -16899,7 +16899,7 @@
                           </a:solidFill>
                           <a:latin typeface="Times New Roman"/>
                         </a:rPr>
-                        <a:t>1.77 Cr</a:t>
+                        <a:t>1.75 Cr</a:t>
                       </a:r>
                     </a:p>
                   </a:txBody>
@@ -17136,7 +17136,7 @@
                           </a:solidFill>
                           <a:latin typeface="Times New Roman"/>
                         </a:rPr>
-                        <a:t>87,464</a:t>
+                        <a:t>104,956</a:t>
                       </a:r>
                       <a:br/>
                       <a:r>
@@ -17146,7 +17146,7 @@
                           </a:solidFill>
                           <a:latin typeface="Times New Roman"/>
                         </a:rPr>
-                        <a:t>8.75 Cr</a:t>
+                        <a:t>10.50 Cr</a:t>
                       </a:r>
                     </a:p>
                   </a:txBody>
@@ -17189,7 +17189,7 @@
                           </a:solidFill>
                           <a:latin typeface="Times New Roman"/>
                         </a:rPr>
-                        <a:t>122,492</a:t>
+                        <a:t>147,747</a:t>
                       </a:r>
                       <a:br/>
                       <a:r>
@@ -17199,7 +17199,7 @@
                           </a:solidFill>
                           <a:latin typeface="Times New Roman"/>
                         </a:rPr>
-                        <a:t>12.25 Cr</a:t>
+                        <a:t>14.77 Cr</a:t>
                       </a:r>
                     </a:p>
                   </a:txBody>
@@ -17242,7 +17242,7 @@
                           </a:solidFill>
                           <a:latin typeface="Times New Roman"/>
                         </a:rPr>
-                        <a:t>35,028</a:t>
+                        <a:t>42,790</a:t>
                       </a:r>
                       <a:br/>
                       <a:r>
@@ -17252,7 +17252,7 @@
                           </a:solidFill>
                           <a:latin typeface="Times New Roman"/>
                         </a:rPr>
-                        <a:t>3.50 Cr</a:t>
+                        <a:t>4.28 Cr</a:t>
                       </a:r>
                     </a:p>
                   </a:txBody>
@@ -17295,7 +17295,7 @@
                           </a:solidFill>
                           <a:latin typeface="Times New Roman"/>
                         </a:rPr>
-                        <a:t>140</a:t>
+                        <a:t>141</a:t>
                       </a:r>
                     </a:p>
                   </a:txBody>
@@ -17338,7 +17338,7 @@
                           </a:solidFill>
                           <a:latin typeface="Times New Roman"/>
                         </a:rPr>
-                        <a:t>87,421</a:t>
+                        <a:t>62,166</a:t>
                       </a:r>
                       <a:br/>
                       <a:r>
@@ -17348,7 +17348,7 @@
                           </a:solidFill>
                           <a:latin typeface="Times New Roman"/>
                         </a:rPr>
-                        <a:t>8.74 Cr</a:t>
+                        <a:t>6.22 Cr</a:t>
                       </a:r>
                     </a:p>
                   </a:txBody>
@@ -17391,7 +17391,7 @@
                           </a:solidFill>
                           <a:latin typeface="Times New Roman"/>
                         </a:rPr>
-                        <a:t>58</a:t>
+                        <a:t>70</a:t>
                       </a:r>
                     </a:p>
                   </a:txBody>
@@ -17585,7 +17585,7 @@
                           </a:solidFill>
                           <a:latin typeface="Times New Roman"/>
                         </a:rPr>
-                        <a:t>219,930</a:t>
+                        <a:t>263,916</a:t>
                       </a:r>
                       <a:br/>
                       <a:r>
@@ -17595,7 +17595,7 @@
                           </a:solidFill>
                           <a:latin typeface="Times New Roman"/>
                         </a:rPr>
-                        <a:t>21.99 Cr</a:t>
+                        <a:t>26.39 Cr</a:t>
                       </a:r>
                     </a:p>
                   </a:txBody>
@@ -17638,7 +17638,7 @@
                           </a:solidFill>
                           <a:latin typeface="Times New Roman"/>
                         </a:rPr>
-                        <a:t>278,899</a:t>
+                        <a:t>318,467</a:t>
                       </a:r>
                       <a:br/>
                       <a:r>
@@ -17648,7 +17648,7 @@
                           </a:solidFill>
                           <a:latin typeface="Times New Roman"/>
                         </a:rPr>
-                        <a:t>27.89 Cr</a:t>
+                        <a:t>31.85 Cr</a:t>
                       </a:r>
                     </a:p>
                   </a:txBody>
@@ -17691,7 +17691,7 @@
                           </a:solidFill>
                           <a:latin typeface="Times New Roman"/>
                         </a:rPr>
-                        <a:t>58,969</a:t>
+                        <a:t>54,551</a:t>
                       </a:r>
                       <a:br/>
                       <a:r>
@@ -17701,7 +17701,7 @@
                           </a:solidFill>
                           <a:latin typeface="Times New Roman"/>
                         </a:rPr>
-                        <a:t>5.90 Cr</a:t>
+                        <a:t>5.46 Cr</a:t>
                       </a:r>
                     </a:p>
                   </a:txBody>
@@ -17744,7 +17744,7 @@
                           </a:solidFill>
                           <a:latin typeface="Times New Roman"/>
                         </a:rPr>
-                        <a:t>127</a:t>
+                        <a:t>121</a:t>
                       </a:r>
                     </a:p>
                   </a:txBody>
@@ -17787,7 +17787,7 @@
                           </a:solidFill>
                           <a:latin typeface="Times New Roman"/>
                         </a:rPr>
-                        <a:t>248,933</a:t>
+                        <a:t>209,365</a:t>
                       </a:r>
                       <a:br/>
                       <a:r>
@@ -17797,7 +17797,7 @@
                           </a:solidFill>
                           <a:latin typeface="Times New Roman"/>
                         </a:rPr>
-                        <a:t>24.89 Cr</a:t>
+                        <a:t>20.94 Cr</a:t>
                       </a:r>
                     </a:p>
                   </a:txBody>
@@ -17840,7 +17840,7 @@
                           </a:solidFill>
                           <a:latin typeface="Times New Roman"/>
                         </a:rPr>
-                        <a:t>53</a:t>
+                        <a:t>60</a:t>
                       </a:r>
                     </a:p>
                   </a:txBody>
@@ -18034,7 +18034,7 @@
                           </a:solidFill>
                           <a:latin typeface="Times New Roman"/>
                         </a:rPr>
-                        <a:t>6,687</a:t>
+                        <a:t>8,024</a:t>
                       </a:r>
                       <a:br/>
                       <a:r>
@@ -18044,7 +18044,7 @@
                           </a:solidFill>
                           <a:latin typeface="Times New Roman"/>
                         </a:rPr>
-                        <a:t>0.67 Cr</a:t>
+                        <a:t>0.80 Cr</a:t>
                       </a:r>
                     </a:p>
                   </a:txBody>
@@ -18087,7 +18087,7 @@
                           </a:solidFill>
                           <a:latin typeface="Times New Roman"/>
                         </a:rPr>
-                        <a:t>11,132</a:t>
+                        <a:t>13,236</a:t>
                       </a:r>
                       <a:br/>
                       <a:r>
@@ -18097,7 +18097,7 @@
                           </a:solidFill>
                           <a:latin typeface="Times New Roman"/>
                         </a:rPr>
-                        <a:t>1.11 Cr</a:t>
+                        <a:t>1.32 Cr</a:t>
                       </a:r>
                     </a:p>
                   </a:txBody>
@@ -18140,7 +18140,7 @@
                           </a:solidFill>
                           <a:latin typeface="Times New Roman"/>
                         </a:rPr>
-                        <a:t>4,445</a:t>
+                        <a:t>5,212</a:t>
                       </a:r>
                       <a:br/>
                       <a:r>
@@ -18150,7 +18150,7 @@
                           </a:solidFill>
                           <a:latin typeface="Times New Roman"/>
                         </a:rPr>
-                        <a:t>0.44 Cr</a:t>
+                        <a:t>0.52 Cr</a:t>
                       </a:r>
                     </a:p>
                   </a:txBody>
@@ -18193,7 +18193,7 @@
                           </a:solidFill>
                           <a:latin typeface="Times New Roman"/>
                         </a:rPr>
-                        <a:t>166</a:t>
+                        <a:t>165</a:t>
                       </a:r>
                     </a:p>
                   </a:txBody>
@@ -18236,7 +18236,7 @@
                           </a:solidFill>
                           <a:latin typeface="Times New Roman"/>
                         </a:rPr>
-                        <a:t>4,916</a:t>
+                        <a:t>2,812</a:t>
                       </a:r>
                       <a:br/>
                       <a:r>
@@ -18246,7 +18246,7 @@
                           </a:solidFill>
                           <a:latin typeface="Times New Roman"/>
                         </a:rPr>
-                        <a:t>0.49 Cr</a:t>
+                        <a:t>0.28 Cr</a:t>
                       </a:r>
                     </a:p>
                   </a:txBody>
@@ -18289,33 +18289,33 @@
                           </a:solidFill>
                           <a:latin typeface="Times New Roman"/>
                         </a:rPr>
-                        <a:t>69</a:t>
-                      </a:r>
-                    </a:p>
-                  </a:txBody>
-                  <a:tcPr marL="12000" marR="12000" marT="8000" marB="8000">
-                    <a:lnL w="12700">
-                      <a:solidFill>
-                        <a:srgbClr val="000000"/>
-                      </a:solidFill>
-                    </a:lnL>
-                    <a:lnR w="12700">
-                      <a:solidFill>
-                        <a:srgbClr val="000000"/>
-                      </a:solidFill>
-                    </a:lnR>
-                    <a:lnT w="12700">
-                      <a:solidFill>
-                        <a:srgbClr val="000000"/>
-                      </a:solidFill>
-                    </a:lnT>
-                    <a:lnB w="12700">
-                      <a:solidFill>
-                        <a:srgbClr val="000000"/>
-                      </a:solidFill>
-                    </a:lnB>
-                    <a:solidFill>
-                      <a:srgbClr val="DFF3E7"/>
+                        <a:t>82</a:t>
+                      </a:r>
+                    </a:p>
+                  </a:txBody>
+                  <a:tcPr marL="12000" marR="12000" marT="8000" marB="8000">
+                    <a:lnL w="12700">
+                      <a:solidFill>
+                        <a:srgbClr val="000000"/>
+                      </a:solidFill>
+                    </a:lnL>
+                    <a:lnR w="12700">
+                      <a:solidFill>
+                        <a:srgbClr val="000000"/>
+                      </a:solidFill>
+                    </a:lnR>
+                    <a:lnT w="12700">
+                      <a:solidFill>
+                        <a:srgbClr val="000000"/>
+                      </a:solidFill>
+                    </a:lnT>
+                    <a:lnB w="12700">
+                      <a:solidFill>
+                        <a:srgbClr val="000000"/>
+                      </a:solidFill>
+                    </a:lnB>
+                    <a:solidFill>
+                      <a:srgbClr val="FFF2CC"/>
                     </a:solidFill>
                   </a:tcPr>
                 </a:tc>
@@ -18483,7 +18483,7 @@
                           </a:solidFill>
                           <a:latin typeface="Times New Roman"/>
                         </a:rPr>
-                        <a:t>128,367</a:t>
+                        <a:t>154,040</a:t>
                       </a:r>
                       <a:br/>
                       <a:r>
@@ -18493,7 +18493,7 @@
                           </a:solidFill>
                           <a:latin typeface="Times New Roman"/>
                         </a:rPr>
-                        <a:t>12.84 Cr</a:t>
+                        <a:t>15.40 Cr</a:t>
                       </a:r>
                     </a:p>
                   </a:txBody>
@@ -18536,7 +18536,7 @@
                           </a:solidFill>
                           <a:latin typeface="Times New Roman"/>
                         </a:rPr>
-                        <a:t>217,100</a:t>
+                        <a:t>265,202</a:t>
                       </a:r>
                       <a:br/>
                       <a:r>
@@ -18546,7 +18546,7 @@
                           </a:solidFill>
                           <a:latin typeface="Times New Roman"/>
                         </a:rPr>
-                        <a:t>21.71 Cr</a:t>
+                        <a:t>26.52 Cr</a:t>
                       </a:r>
                     </a:p>
                   </a:txBody>
@@ -18589,7 +18589,7 @@
                           </a:solidFill>
                           <a:latin typeface="Times New Roman"/>
                         </a:rPr>
-                        <a:t>88,733</a:t>
+                        <a:t>111,162</a:t>
                       </a:r>
                       <a:br/>
                       <a:r>
@@ -18599,7 +18599,7 @@
                           </a:solidFill>
                           <a:latin typeface="Times New Roman"/>
                         </a:rPr>
-                        <a:t>8.87 Cr</a:t>
+                        <a:t>11.12 Cr</a:t>
                       </a:r>
                     </a:p>
                   </a:txBody>
@@ -18642,7 +18642,7 @@
                           </a:solidFill>
                           <a:latin typeface="Times New Roman"/>
                         </a:rPr>
-                        <a:t>169</a:t>
+                        <a:t>172</a:t>
                       </a:r>
                     </a:p>
                   </a:txBody>
@@ -18685,7 +18685,7 @@
                           </a:solidFill>
                           <a:latin typeface="Times New Roman"/>
                         </a:rPr>
-                        <a:t>90,981</a:t>
+                        <a:t>42,879</a:t>
                       </a:r>
                       <a:br/>
                       <a:r>
@@ -18695,7 +18695,7 @@
                           </a:solidFill>
                           <a:latin typeface="Times New Roman"/>
                         </a:rPr>
-                        <a:t>9.10 Cr</a:t>
+                        <a:t>4.29 Cr</a:t>
                       </a:r>
                     </a:p>
                   </a:txBody>
@@ -18738,33 +18738,33 @@
                           </a:solidFill>
                           <a:latin typeface="Times New Roman"/>
                         </a:rPr>
-                        <a:t>70</a:t>
-                      </a:r>
-                    </a:p>
-                  </a:txBody>
-                  <a:tcPr marL="12000" marR="12000" marT="8000" marB="8000">
-                    <a:lnL w="12700">
-                      <a:solidFill>
-                        <a:srgbClr val="000000"/>
-                      </a:solidFill>
-                    </a:lnL>
-                    <a:lnR w="12700">
-                      <a:solidFill>
-                        <a:srgbClr val="000000"/>
-                      </a:solidFill>
-                    </a:lnR>
-                    <a:lnT w="12700">
-                      <a:solidFill>
-                        <a:srgbClr val="000000"/>
-                      </a:solidFill>
-                    </a:lnT>
-                    <a:lnB w="12700">
-                      <a:solidFill>
-                        <a:srgbClr val="000000"/>
-                      </a:solidFill>
-                    </a:lnB>
-                    <a:solidFill>
-                      <a:srgbClr val="DFF3E7"/>
+                        <a:t>86</a:t>
+                      </a:r>
+                    </a:p>
+                  </a:txBody>
+                  <a:tcPr marL="12000" marR="12000" marT="8000" marB="8000">
+                    <a:lnL w="12700">
+                      <a:solidFill>
+                        <a:srgbClr val="000000"/>
+                      </a:solidFill>
+                    </a:lnL>
+                    <a:lnR w="12700">
+                      <a:solidFill>
+                        <a:srgbClr val="000000"/>
+                      </a:solidFill>
+                    </a:lnR>
+                    <a:lnT w="12700">
+                      <a:solidFill>
+                        <a:srgbClr val="000000"/>
+                      </a:solidFill>
+                    </a:lnT>
+                    <a:lnB w="12700">
+                      <a:solidFill>
+                        <a:srgbClr val="000000"/>
+                      </a:solidFill>
+                    </a:lnB>
+                    <a:solidFill>
+                      <a:srgbClr val="FFF2CC"/>
                     </a:solidFill>
                   </a:tcPr>
                 </a:tc>
@@ -18932,7 +18932,7 @@
                           </a:solidFill>
                           <a:latin typeface="Times New Roman"/>
                         </a:rPr>
-                        <a:t>158,091</a:t>
+                        <a:t>189,709</a:t>
                       </a:r>
                       <a:br/>
                       <a:r>
@@ -18942,7 +18942,7 @@
                           </a:solidFill>
                           <a:latin typeface="Times New Roman"/>
                         </a:rPr>
-                        <a:t>15.81 Cr</a:t>
+                        <a:t>18.97 Cr</a:t>
                       </a:r>
                     </a:p>
                   </a:txBody>
@@ -18985,7 +18985,7 @@
                           </a:solidFill>
                           <a:latin typeface="Times New Roman"/>
                         </a:rPr>
-                        <a:t>375,011</a:t>
+                        <a:t>384,936</a:t>
                       </a:r>
                       <a:br/>
                       <a:r>
@@ -18995,7 +18995,7 @@
                           </a:solidFill>
                           <a:latin typeface="Times New Roman"/>
                         </a:rPr>
-                        <a:t>37.50 Cr</a:t>
+                        <a:t>38.49 Cr</a:t>
                       </a:r>
                     </a:p>
                   </a:txBody>
@@ -19038,7 +19038,7 @@
                           </a:solidFill>
                           <a:latin typeface="Times New Roman"/>
                         </a:rPr>
-                        <a:t>216,920</a:t>
+                        <a:t>195,227</a:t>
                       </a:r>
                       <a:br/>
                       <a:r>
@@ -19048,7 +19048,7 @@
                           </a:solidFill>
                           <a:latin typeface="Times New Roman"/>
                         </a:rPr>
-                        <a:t>21.69 Cr</a:t>
+                        <a:t>19.52 Cr</a:t>
                       </a:r>
                     </a:p>
                   </a:txBody>
@@ -19091,7 +19091,7 @@
                           </a:solidFill>
                           <a:latin typeface="Times New Roman"/>
                         </a:rPr>
-                        <a:t>237</a:t>
+                        <a:t>203</a:t>
                       </a:r>
                     </a:p>
                   </a:txBody>
@@ -19134,7 +19134,7 @@
                           </a:solidFill>
                           <a:latin typeface="Times New Roman"/>
                         </a:rPr>
-                        <a:t>4,407</a:t>
+                        <a:t>-5,518</a:t>
                       </a:r>
                       <a:br/>
                       <a:r>
@@ -19144,7 +19144,7 @@
                           </a:solidFill>
                           <a:latin typeface="Times New Roman"/>
                         </a:rPr>
-                        <a:t>0.44 Cr</a:t>
+                        <a:t>-0.55 Cr</a:t>
                       </a:r>
                     </a:p>
                   </a:txBody>
@@ -19187,33 +19187,33 @@
                           </a:solidFill>
                           <a:latin typeface="Times New Roman"/>
                         </a:rPr>
-                        <a:t>99</a:t>
-                      </a:r>
-                    </a:p>
-                  </a:txBody>
-                  <a:tcPr marL="12000" marR="12000" marT="8000" marB="8000">
-                    <a:lnL w="12700">
-                      <a:solidFill>
-                        <a:srgbClr val="000000"/>
-                      </a:solidFill>
-                    </a:lnL>
-                    <a:lnR w="12700">
-                      <a:solidFill>
-                        <a:srgbClr val="000000"/>
-                      </a:solidFill>
-                    </a:lnR>
-                    <a:lnT w="12700">
-                      <a:solidFill>
-                        <a:srgbClr val="000000"/>
-                      </a:solidFill>
-                    </a:lnT>
-                    <a:lnB w="12700">
-                      <a:solidFill>
-                        <a:srgbClr val="000000"/>
-                      </a:solidFill>
-                    </a:lnB>
-                    <a:solidFill>
-                      <a:srgbClr val="FFF2CC"/>
+                        <a:t>101</a:t>
+                      </a:r>
+                    </a:p>
+                  </a:txBody>
+                  <a:tcPr marL="12000" marR="12000" marT="8000" marB="8000">
+                    <a:lnL w="12700">
+                      <a:solidFill>
+                        <a:srgbClr val="000000"/>
+                      </a:solidFill>
+                    </a:lnL>
+                    <a:lnR w="12700">
+                      <a:solidFill>
+                        <a:srgbClr val="000000"/>
+                      </a:solidFill>
+                    </a:lnR>
+                    <a:lnT w="12700">
+                      <a:solidFill>
+                        <a:srgbClr val="000000"/>
+                      </a:solidFill>
+                    </a:lnT>
+                    <a:lnB w="12700">
+                      <a:solidFill>
+                        <a:srgbClr val="000000"/>
+                      </a:solidFill>
+                    </a:lnB>
+                    <a:solidFill>
+                      <a:srgbClr val="FCE4E4"/>
                     </a:solidFill>
                   </a:tcPr>
                 </a:tc>
@@ -19381,7 +19381,7 @@
                           </a:solidFill>
                           <a:latin typeface="Times New Roman"/>
                         </a:rPr>
-                        <a:t>6,068,145</a:t>
+                        <a:t>7,281,774</a:t>
                       </a:r>
                       <a:br/>
                       <a:r>
@@ -19391,7 +19391,7 @@
                           </a:solidFill>
                           <a:latin typeface="Times New Roman"/>
                         </a:rPr>
-                        <a:t>606.81 Cr</a:t>
+                        <a:t>728.18 Cr</a:t>
                       </a:r>
                     </a:p>
                   </a:txBody>
@@ -19434,7 +19434,7 @@
                           </a:solidFill>
                           <a:latin typeface="Times New Roman"/>
                         </a:rPr>
-                        <a:t>7,021,141</a:t>
+                        <a:t>8,335,181</a:t>
                       </a:r>
                       <a:br/>
                       <a:r>
@@ -19444,7 +19444,7 @@
                           </a:solidFill>
                           <a:latin typeface="Times New Roman"/>
                         </a:rPr>
-                        <a:t>702.11 Cr</a:t>
+                        <a:t>833.52 Cr</a:t>
                       </a:r>
                     </a:p>
                   </a:txBody>
@@ -19487,7 +19487,7 @@
                           </a:solidFill>
                           <a:latin typeface="Times New Roman"/>
                         </a:rPr>
-                        <a:t>952,996</a:t>
+                        <a:t>1,053,408</a:t>
                       </a:r>
                       <a:br/>
                       <a:r>
@@ -19497,7 +19497,7 @@
                           </a:solidFill>
                           <a:latin typeface="Times New Roman"/>
                         </a:rPr>
-                        <a:t>95.30 Cr</a:t>
+                        <a:t>105.34 Cr</a:t>
                       </a:r>
                     </a:p>
                   </a:txBody>
@@ -19540,7 +19540,7 @@
                           </a:solidFill>
                           <a:latin typeface="Times New Roman"/>
                         </a:rPr>
-                        <a:t>116</a:t>
+                        <a:t>114</a:t>
                       </a:r>
                     </a:p>
                   </a:txBody>
@@ -19583,7 +19583,7 @@
                           </a:solidFill>
                           <a:latin typeface="Times New Roman"/>
                         </a:rPr>
-                        <a:t>7,542,406</a:t>
+                        <a:t>6,228,366</a:t>
                       </a:r>
                       <a:br/>
                       <a:r>
@@ -19593,7 +19593,7 @@
                           </a:solidFill>
                           <a:latin typeface="Times New Roman"/>
                         </a:rPr>
-                        <a:t>754.24 Cr</a:t>
+                        <a:t>622.84 Cr</a:t>
                       </a:r>
                     </a:p>
                   </a:txBody>
@@ -19636,7 +19636,7 @@
                           </a:solidFill>
                           <a:latin typeface="Times New Roman"/>
                         </a:rPr>
-                        <a:t>48</a:t>
+                        <a:t>57</a:t>
                       </a:r>
                     </a:p>
                   </a:txBody>
@@ -19780,7 +19780,7 @@
                 </a:solidFill>
                 <a:latin typeface="Times New Roman"/>
               </a:rPr>
-              <a:t>PU Wise - Non-Staff Part 1 - AUG 2026 | uploaded 2026-09-29T13:48:08+05:30</a:t>
+              <a:t>PU Wise - Non-Staff Part 1 - SEP 2026 | uploaded 2026-10-01T11:01:41+05:30</a:t>
             </a:r>
           </a:p>
         </p:txBody>
@@ -19970,7 +19970,7 @@
                           </a:solidFill>
                           <a:latin typeface="Times New Roman"/>
                         </a:rPr>
-                        <a:t>A / 12 * 5</a:t>
+                        <a:t>A / 12 * 6</a:t>
                       </a:r>
                     </a:p>
                   </a:txBody>
@@ -20033,7 +20033,7 @@
                           </a:solidFill>
                           <a:latin typeface="Times New Roman"/>
                         </a:rPr>
-                        <a:t>Actuals up to AUG 2026</a:t>
+                        <a:t>Actuals up to SEP 2026</a:t>
                       </a:r>
                     </a:p>
                   </a:txBody>
@@ -20489,7 +20489,7 @@
                           </a:solidFill>
                           <a:latin typeface="Times New Roman"/>
                         </a:rPr>
-                        <a:t>445,313</a:t>
+                        <a:t>534,376</a:t>
                       </a:r>
                       <a:br/>
                       <a:r>
@@ -20499,7 +20499,7 @@
                           </a:solidFill>
                           <a:latin typeface="Times New Roman"/>
                         </a:rPr>
-                        <a:t>44.53 Cr</a:t>
+                        <a:t>53.44 Cr</a:t>
                       </a:r>
                     </a:p>
                   </a:txBody>
@@ -20542,7 +20542,7 @@
                           </a:solidFill>
                           <a:latin typeface="Times New Roman"/>
                         </a:rPr>
-                        <a:t>860,139</a:t>
+                        <a:t>862,766</a:t>
                       </a:r>
                       <a:br/>
                       <a:r>
@@ -20552,7 +20552,7 @@
                           </a:solidFill>
                           <a:latin typeface="Times New Roman"/>
                         </a:rPr>
-                        <a:t>86.01 Cr</a:t>
+                        <a:t>86.28 Cr</a:t>
                       </a:r>
                     </a:p>
                   </a:txBody>
@@ -20595,7 +20595,7 @@
                           </a:solidFill>
                           <a:latin typeface="Times New Roman"/>
                         </a:rPr>
-                        <a:t>414,826</a:t>
+                        <a:t>328,390</a:t>
                       </a:r>
                       <a:br/>
                       <a:r>
@@ -20605,7 +20605,7 @@
                           </a:solidFill>
                           <a:latin typeface="Times New Roman"/>
                         </a:rPr>
-                        <a:t>41.48 Cr</a:t>
+                        <a:t>32.84 Cr</a:t>
                       </a:r>
                     </a:p>
                   </a:txBody>
@@ -20648,7 +20648,7 @@
                           </a:solidFill>
                           <a:latin typeface="Times New Roman"/>
                         </a:rPr>
-                        <a:t>193</a:t>
+                        <a:t>161</a:t>
                       </a:r>
                     </a:p>
                   </a:txBody>
@@ -20691,7 +20691,7 @@
                           </a:solidFill>
                           <a:latin typeface="Times New Roman"/>
                         </a:rPr>
-                        <a:t>208,613</a:t>
+                        <a:t>205,986</a:t>
                       </a:r>
                       <a:br/>
                       <a:r>
@@ -20701,7 +20701,7 @@
                           </a:solidFill>
                           <a:latin typeface="Times New Roman"/>
                         </a:rPr>
-                        <a:t>20.86 Cr</a:t>
+                        <a:t>20.60 Cr</a:t>
                       </a:r>
                     </a:p>
                   </a:txBody>
@@ -20744,7 +20744,7 @@
                           </a:solidFill>
                           <a:latin typeface="Times New Roman"/>
                         </a:rPr>
-                        <a:t>80</a:t>
+                        <a:t>81</a:t>
                       </a:r>
                     </a:p>
                   </a:txBody>
@@ -20938,7 +20938,7 @@
                           </a:solidFill>
                           <a:latin typeface="Times New Roman"/>
                         </a:rPr>
-                        <a:t>62,478</a:t>
+                        <a:t>74,974</a:t>
                       </a:r>
                       <a:br/>
                       <a:r>
@@ -20948,7 +20948,7 @@
                           </a:solidFill>
                           <a:latin typeface="Times New Roman"/>
                         </a:rPr>
-                        <a:t>6.25 Cr</a:t>
+                        <a:t>7.50 Cr</a:t>
                       </a:r>
                     </a:p>
                   </a:txBody>
@@ -20991,7 +20991,7 @@
                           </a:solidFill>
                           <a:latin typeface="Times New Roman"/>
                         </a:rPr>
-                        <a:t>70,608</a:t>
+                        <a:t>79,644</a:t>
                       </a:r>
                       <a:br/>
                       <a:r>
@@ -21001,7 +21001,7 @@
                           </a:solidFill>
                           <a:latin typeface="Times New Roman"/>
                         </a:rPr>
-                        <a:t>7.06 Cr</a:t>
+                        <a:t>7.96 Cr</a:t>
                       </a:r>
                     </a:p>
                   </a:txBody>
@@ -21044,7 +21044,7 @@
                           </a:solidFill>
                           <a:latin typeface="Times New Roman"/>
                         </a:rPr>
-                        <a:t>8,130</a:t>
+                        <a:t>4,670</a:t>
                       </a:r>
                       <a:br/>
                       <a:r>
@@ -21054,7 +21054,7 @@
                           </a:solidFill>
                           <a:latin typeface="Times New Roman"/>
                         </a:rPr>
-                        <a:t>0.81 Cr</a:t>
+                        <a:t>0.47 Cr</a:t>
                       </a:r>
                     </a:p>
                   </a:txBody>
@@ -21097,7 +21097,7 @@
                           </a:solidFill>
                           <a:latin typeface="Times New Roman"/>
                         </a:rPr>
-                        <a:t>113</a:t>
+                        <a:t>106</a:t>
                       </a:r>
                     </a:p>
                   </a:txBody>
@@ -21140,7 +21140,7 @@
                           </a:solidFill>
                           <a:latin typeface="Times New Roman"/>
                         </a:rPr>
-                        <a:t>79,339</a:t>
+                        <a:t>70,303</a:t>
                       </a:r>
                       <a:br/>
                       <a:r>
@@ -21150,7 +21150,7 @@
                           </a:solidFill>
                           <a:latin typeface="Times New Roman"/>
                         </a:rPr>
-                        <a:t>7.93 Cr</a:t>
+                        <a:t>7.03 Cr</a:t>
                       </a:r>
                     </a:p>
                   </a:txBody>
@@ -21193,7 +21193,7 @@
                           </a:solidFill>
                           <a:latin typeface="Times New Roman"/>
                         </a:rPr>
-                        <a:t>47</a:t>
+                        <a:t>53</a:t>
                       </a:r>
                     </a:p>
                   </a:txBody>
@@ -21387,7 +21387,7 @@
                           </a:solidFill>
                           <a:latin typeface="Times New Roman"/>
                         </a:rPr>
-                        <a:t>1,616,135</a:t>
+                        <a:t>1,939,362</a:t>
                       </a:r>
                       <a:br/>
                       <a:r>
@@ -21397,7 +21397,7 @@
                           </a:solidFill>
                           <a:latin typeface="Times New Roman"/>
                         </a:rPr>
-                        <a:t>161.61 Cr</a:t>
+                        <a:t>193.94 Cr</a:t>
                       </a:r>
                     </a:p>
                   </a:txBody>
@@ -21440,7 +21440,7 @@
                           </a:solidFill>
                           <a:latin typeface="Times New Roman"/>
                         </a:rPr>
-                        <a:t>1,916,509</a:t>
+                        <a:t>2,011,062</a:t>
                       </a:r>
                       <a:br/>
                       <a:r>
@@ -21450,7 +21450,7 @@
                           </a:solidFill>
                           <a:latin typeface="Times New Roman"/>
                         </a:rPr>
-                        <a:t>191.65 Cr</a:t>
+                        <a:t>201.11 Cr</a:t>
                       </a:r>
                     </a:p>
                   </a:txBody>
@@ -21493,7 +21493,7 @@
                           </a:solidFill>
                           <a:latin typeface="Times New Roman"/>
                         </a:rPr>
-                        <a:t>300,374</a:t>
+                        <a:t>71,700</a:t>
                       </a:r>
                       <a:br/>
                       <a:r>
@@ -21503,7 +21503,7 @@
                           </a:solidFill>
                           <a:latin typeface="Times New Roman"/>
                         </a:rPr>
-                        <a:t>30.04 Cr</a:t>
+                        <a:t>7.17 Cr</a:t>
                       </a:r>
                     </a:p>
                   </a:txBody>
@@ -21546,7 +21546,7 @@
                           </a:solidFill>
                           <a:latin typeface="Times New Roman"/>
                         </a:rPr>
-                        <a:t>119</a:t>
+                        <a:t>104</a:t>
                       </a:r>
                     </a:p>
                   </a:txBody>
@@ -21589,7 +21589,7 @@
                           </a:solidFill>
                           <a:latin typeface="Times New Roman"/>
                         </a:rPr>
-                        <a:t>1,962,215</a:t>
+                        <a:t>1,867,662</a:t>
                       </a:r>
                       <a:br/>
                       <a:r>
@@ -21599,7 +21599,7 @@
                           </a:solidFill>
                           <a:latin typeface="Times New Roman"/>
                         </a:rPr>
-                        <a:t>196.22 Cr</a:t>
+                        <a:t>186.77 Cr</a:t>
                       </a:r>
                     </a:p>
                   </a:txBody>
@@ -21642,7 +21642,7 @@
                           </a:solidFill>
                           <a:latin typeface="Times New Roman"/>
                         </a:rPr>
-                        <a:t>49</a:t>
+                        <a:t>52</a:t>
                       </a:r>
                     </a:p>
                   </a:txBody>
@@ -21836,7 +21836,7 @@
                           </a:solidFill>
                           <a:latin typeface="Times New Roman"/>
                         </a:rPr>
-                        <a:t>1,355,962</a:t>
+                        <a:t>1,627,155</a:t>
                       </a:r>
                       <a:br/>
                       <a:r>
@@ -21846,7 +21846,7 @@
                           </a:solidFill>
                           <a:latin typeface="Times New Roman"/>
                         </a:rPr>
-                        <a:t>135.60 Cr</a:t>
+                        <a:t>162.72 Cr</a:t>
                       </a:r>
                     </a:p>
                   </a:txBody>
@@ -21889,7 +21889,7 @@
                           </a:solidFill>
                           <a:latin typeface="Times New Roman"/>
                         </a:rPr>
-                        <a:t>1,824,117</a:t>
+                        <a:t>2,013,588</a:t>
                       </a:r>
                       <a:br/>
                       <a:r>
@@ -21899,7 +21899,7 @@
                           </a:solidFill>
                           <a:latin typeface="Times New Roman"/>
                         </a:rPr>
-                        <a:t>182.41 Cr</a:t>
+                        <a:t>201.36 Cr</a:t>
                       </a:r>
                     </a:p>
                   </a:txBody>
@@ -21942,7 +21942,7 @@
                           </a:solidFill>
                           <a:latin typeface="Times New Roman"/>
                         </a:rPr>
-                        <a:t>468,154</a:t>
+                        <a:t>386,433</a:t>
                       </a:r>
                       <a:br/>
                       <a:r>
@@ -21952,7 +21952,7 @@
                           </a:solidFill>
                           <a:latin typeface="Times New Roman"/>
                         </a:rPr>
-                        <a:t>46.82 Cr</a:t>
+                        <a:t>38.64 Cr</a:t>
                       </a:r>
                     </a:p>
                   </a:txBody>
@@ -21995,7 +21995,7 @@
                           </a:solidFill>
                           <a:latin typeface="Times New Roman"/>
                         </a:rPr>
-                        <a:t>135</a:t>
+                        <a:t>124</a:t>
                       </a:r>
                     </a:p>
                   </a:txBody>
@@ -22038,7 +22038,7 @@
                           </a:solidFill>
                           <a:latin typeface="Times New Roman"/>
                         </a:rPr>
-                        <a:t>1,430,193</a:t>
+                        <a:t>1,240,722</a:t>
                       </a:r>
                       <a:br/>
                       <a:r>
@@ -22048,7 +22048,7 @@
                           </a:solidFill>
                           <a:latin typeface="Times New Roman"/>
                         </a:rPr>
-                        <a:t>143.02 Cr</a:t>
+                        <a:t>124.07 Cr</a:t>
                       </a:r>
                     </a:p>
                   </a:txBody>
@@ -22091,7 +22091,7 @@
                           </a:solidFill>
                           <a:latin typeface="Times New Roman"/>
                         </a:rPr>
-                        <a:t>56</a:t>
+                        <a:t>62</a:t>
                       </a:r>
                     </a:p>
                   </a:txBody>
@@ -22285,7 +22285,7 @@
                           </a:solidFill>
                           <a:latin typeface="Times New Roman"/>
                         </a:rPr>
-                        <a:t>1,959,732</a:t>
+                        <a:t>2,351,678</a:t>
                       </a:r>
                       <a:br/>
                       <a:r>
@@ -22295,7 +22295,7 @@
                           </a:solidFill>
                           <a:latin typeface="Times New Roman"/>
                         </a:rPr>
-                        <a:t>195.97 Cr</a:t>
+                        <a:t>235.17 Cr</a:t>
                       </a:r>
                     </a:p>
                   </a:txBody>
@@ -22391,7 +22391,7 @@
                           </a:solidFill>
                           <a:latin typeface="Times New Roman"/>
                         </a:rPr>
-                        <a:t>755,683</a:t>
+                        <a:t>363,737</a:t>
                       </a:r>
                       <a:br/>
                       <a:r>
@@ -22401,7 +22401,7 @@
                           </a:solidFill>
                           <a:latin typeface="Times New Roman"/>
                         </a:rPr>
-                        <a:t>75.57 Cr</a:t>
+                        <a:t>36.37 Cr</a:t>
                       </a:r>
                     </a:p>
                   </a:txBody>
@@ -22444,7 +22444,7 @@
                           </a:solidFill>
                           <a:latin typeface="Times New Roman"/>
                         </a:rPr>
-                        <a:t>139</a:t>
+                        <a:t>115</a:t>
                       </a:r>
                     </a:p>
                   </a:txBody>
@@ -22734,7 +22734,7 @@
                           </a:solidFill>
                           <a:latin typeface="Times New Roman"/>
                         </a:rPr>
-                        <a:t>5,439,620</a:t>
+                        <a:t>6,527,544</a:t>
                       </a:r>
                       <a:br/>
                       <a:r>
@@ -22744,7 +22744,7 @@
                           </a:solidFill>
                           <a:latin typeface="Times New Roman"/>
                         </a:rPr>
-                        <a:t>543.96 Cr</a:t>
+                        <a:t>652.75 Cr</a:t>
                       </a:r>
                     </a:p>
                   </a:txBody>
@@ -22787,7 +22787,7 @@
                           </a:solidFill>
                           <a:latin typeface="Times New Roman"/>
                         </a:rPr>
-                        <a:t>7,386,788</a:t>
+                        <a:t>7,682,475</a:t>
                       </a:r>
                       <a:br/>
                       <a:r>
@@ -22797,7 +22797,7 @@
                           </a:solidFill>
                           <a:latin typeface="Times New Roman"/>
                         </a:rPr>
-                        <a:t>738.68 Cr</a:t>
+                        <a:t>768.25 Cr</a:t>
                       </a:r>
                     </a:p>
                   </a:txBody>
@@ -22840,7 +22840,7 @@
                           </a:solidFill>
                           <a:latin typeface="Times New Roman"/>
                         </a:rPr>
-                        <a:t>1,947,168</a:t>
+                        <a:t>1,154,930</a:t>
                       </a:r>
                       <a:br/>
                       <a:r>
@@ -22850,7 +22850,7 @@
                           </a:solidFill>
                           <a:latin typeface="Times New Roman"/>
                         </a:rPr>
-                        <a:t>194.72 Cr</a:t>
+                        <a:t>115.49 Cr</a:t>
                       </a:r>
                     </a:p>
                   </a:txBody>
@@ -22893,7 +22893,7 @@
                           </a:solidFill>
                           <a:latin typeface="Times New Roman"/>
                         </a:rPr>
-                        <a:t>136</a:t>
+                        <a:t>118</a:t>
                       </a:r>
                     </a:p>
                   </a:txBody>
@@ -22936,7 +22936,7 @@
                           </a:solidFill>
                           <a:latin typeface="Times New Roman"/>
                         </a:rPr>
-                        <a:t>5,668,301</a:t>
+                        <a:t>5,372,614</a:t>
                       </a:r>
                       <a:br/>
                       <a:r>
@@ -22946,7 +22946,7 @@
                           </a:solidFill>
                           <a:latin typeface="Times New Roman"/>
                         </a:rPr>
-                        <a:t>566.83 Cr</a:t>
+                        <a:t>537.26 Cr</a:t>
                       </a:r>
                     </a:p>
                   </a:txBody>
@@ -22989,7 +22989,7 @@
                           </a:solidFill>
                           <a:latin typeface="Times New Roman"/>
                         </a:rPr>
-                        <a:t>57</a:t>
+                        <a:t>59</a:t>
                       </a:r>
                     </a:p>
                   </a:txBody>

--- a/exports/Moradabad_Division_DRM_Budget_FR_Analysis_H_Full_FY_2025_26_Actual.pptx
+++ b/exports/Moradabad_Division_DRM_Budget_FR_Analysis_H_Full_FY_2025_26_Actual.pptx
@@ -6185,7 +6185,7 @@
                 </a:solidFill>
                 <a:latin typeface="Times New Roman"/>
               </a:rPr>
-              <a:t>Demand SMH Wise - SEP 2026 | uploaded 2026-10-01T11:01:41+05:30</a:t>
+              <a:t>Demand SMH Wise - SEP 2026 | uploaded 2026-10-05T14:47:35+05:30</a:t>
             </a:r>
           </a:p>
         </p:txBody>
@@ -7034,7 +7034,7 @@
                           </a:solidFill>
                           <a:latin typeface="Times New Roman"/>
                         </a:rPr>
-                        <a:t>350,760</a:t>
+                        <a:t>353,512</a:t>
                       </a:r>
                       <a:br/>
                       <a:r>
@@ -7044,7 +7044,7 @@
                           </a:solidFill>
                           <a:latin typeface="Times New Roman"/>
                         </a:rPr>
-                        <a:t>35.08 Cr</a:t>
+                        <a:t>35.35 Cr</a:t>
                       </a:r>
                     </a:p>
                   </a:txBody>
@@ -7087,7 +7087,7 @@
                           </a:solidFill>
                           <a:latin typeface="Times New Roman"/>
                         </a:rPr>
-                        <a:t>29,999</a:t>
+                        <a:t>32,751</a:t>
                       </a:r>
                       <a:br/>
                       <a:r>
@@ -7097,7 +7097,7 @@
                           </a:solidFill>
                           <a:latin typeface="Times New Roman"/>
                         </a:rPr>
-                        <a:t>3.00 Cr</a:t>
+                        <a:t>3.28 Cr</a:t>
                       </a:r>
                     </a:p>
                   </a:txBody>
@@ -7140,7 +7140,7 @@
                           </a:solidFill>
                           <a:latin typeface="Times New Roman"/>
                         </a:rPr>
-                        <a:t>109</a:t>
+                        <a:t>110</a:t>
                       </a:r>
                     </a:p>
                   </a:txBody>
@@ -7183,7 +7183,7 @@
                           </a:solidFill>
                           <a:latin typeface="Times New Roman"/>
                         </a:rPr>
-                        <a:t>290,762</a:t>
+                        <a:t>288,010</a:t>
                       </a:r>
                       <a:br/>
                       <a:r>
@@ -7193,7 +7193,7 @@
                           </a:solidFill>
                           <a:latin typeface="Times New Roman"/>
                         </a:rPr>
-                        <a:t>29.08 Cr</a:t>
+                        <a:t>28.80 Cr</a:t>
                       </a:r>
                     </a:p>
                   </a:txBody>
@@ -7526,7 +7526,7 @@
                           </a:solidFill>
                           <a:latin typeface="Times New Roman"/>
                         </a:rPr>
-                        <a:t>2,122,627</a:t>
+                        <a:t>2,126,374</a:t>
                       </a:r>
                       <a:br/>
                       <a:r>
@@ -7536,7 +7536,7 @@
                           </a:solidFill>
                           <a:latin typeface="Times New Roman"/>
                         </a:rPr>
-                        <a:t>212.26 Cr</a:t>
+                        <a:t>212.64 Cr</a:t>
                       </a:r>
                     </a:p>
                   </a:txBody>
@@ -7579,7 +7579,7 @@
                           </a:solidFill>
                           <a:latin typeface="Times New Roman"/>
                         </a:rPr>
-                        <a:t>318,176</a:t>
+                        <a:t>321,923</a:t>
                       </a:r>
                       <a:br/>
                       <a:r>
@@ -7589,7 +7589,7 @@
                           </a:solidFill>
                           <a:latin typeface="Times New Roman"/>
                         </a:rPr>
-                        <a:t>31.82 Cr</a:t>
+                        <a:t>32.19 Cr</a:t>
                       </a:r>
                     </a:p>
                   </a:txBody>
@@ -7675,7 +7675,7 @@
                           </a:solidFill>
                           <a:latin typeface="Times New Roman"/>
                         </a:rPr>
-                        <a:t>1,486,275</a:t>
+                        <a:t>1,482,528</a:t>
                       </a:r>
                       <a:br/>
                       <a:r>
@@ -7685,7 +7685,7 @@
                           </a:solidFill>
                           <a:latin typeface="Times New Roman"/>
                         </a:rPr>
-                        <a:t>148.63 Cr</a:t>
+                        <a:t>148.25 Cr</a:t>
                       </a:r>
                     </a:p>
                   </a:txBody>
@@ -8510,7 +8510,7 @@
                           </a:solidFill>
                           <a:latin typeface="Times New Roman"/>
                         </a:rPr>
-                        <a:t>1,015,079</a:t>
+                        <a:t>1,050,104</a:t>
                       </a:r>
                       <a:br/>
                       <a:r>
@@ -8520,7 +8520,7 @@
                           </a:solidFill>
                           <a:latin typeface="Times New Roman"/>
                         </a:rPr>
-                        <a:t>101.51 Cr</a:t>
+                        <a:t>105.01 Cr</a:t>
                       </a:r>
                     </a:p>
                   </a:txBody>
@@ -8563,7 +8563,7 @@
                           </a:solidFill>
                           <a:latin typeface="Times New Roman"/>
                         </a:rPr>
-                        <a:t>338,288</a:t>
+                        <a:t>373,314</a:t>
                       </a:r>
                       <a:br/>
                       <a:r>
@@ -8573,7 +8573,7 @@
                           </a:solidFill>
                           <a:latin typeface="Times New Roman"/>
                         </a:rPr>
-                        <a:t>33.83 Cr</a:t>
+                        <a:t>37.33 Cr</a:t>
                       </a:r>
                     </a:p>
                   </a:txBody>
@@ -8616,7 +8616,7 @@
                           </a:solidFill>
                           <a:latin typeface="Times New Roman"/>
                         </a:rPr>
-                        <a:t>150</a:t>
+                        <a:t>155</a:t>
                       </a:r>
                     </a:p>
                   </a:txBody>
@@ -8659,7 +8659,7 @@
                           </a:solidFill>
                           <a:latin typeface="Times New Roman"/>
                         </a:rPr>
-                        <a:t>338,502</a:t>
+                        <a:t>303,477</a:t>
                       </a:r>
                       <a:br/>
                       <a:r>
@@ -8669,7 +8669,7 @@
                           </a:solidFill>
                           <a:latin typeface="Times New Roman"/>
                         </a:rPr>
-                        <a:t>33.85 Cr</a:t>
+                        <a:t>30.35 Cr</a:t>
                       </a:r>
                     </a:p>
                   </a:txBody>
@@ -8712,7 +8712,7 @@
                           </a:solidFill>
                           <a:latin typeface="Times New Roman"/>
                         </a:rPr>
-                        <a:t>75</a:t>
+                        <a:t>78</a:t>
                       </a:r>
                     </a:p>
                   </a:txBody>
@@ -9002,7 +9002,7 @@
                           </a:solidFill>
                           <a:latin typeface="Times New Roman"/>
                         </a:rPr>
-                        <a:t>1,163,224</a:t>
+                        <a:t>1,192,410</a:t>
                       </a:r>
                       <a:br/>
                       <a:r>
@@ -9012,7 +9012,7 @@
                           </a:solidFill>
                           <a:latin typeface="Times New Roman"/>
                         </a:rPr>
-                        <a:t>116.32 Cr</a:t>
+                        <a:t>119.24 Cr</a:t>
                       </a:r>
                     </a:p>
                   </a:txBody>
@@ -9055,7 +9055,7 @@
                           </a:solidFill>
                           <a:latin typeface="Times New Roman"/>
                         </a:rPr>
-                        <a:t>133,249</a:t>
+                        <a:t>162,435</a:t>
                       </a:r>
                       <a:br/>
                       <a:r>
@@ -9065,7 +9065,7 @@
                           </a:solidFill>
                           <a:latin typeface="Times New Roman"/>
                         </a:rPr>
-                        <a:t>13.32 Cr</a:t>
+                        <a:t>16.24 Cr</a:t>
                       </a:r>
                     </a:p>
                   </a:txBody>
@@ -9108,7 +9108,7 @@
                           </a:solidFill>
                           <a:latin typeface="Times New Roman"/>
                         </a:rPr>
-                        <a:t>113</a:t>
+                        <a:t>116</a:t>
                       </a:r>
                     </a:p>
                   </a:txBody>
@@ -9151,7 +9151,7 @@
                           </a:solidFill>
                           <a:latin typeface="Times New Roman"/>
                         </a:rPr>
-                        <a:t>896,726</a:t>
+                        <a:t>867,540</a:t>
                       </a:r>
                       <a:br/>
                       <a:r>
@@ -9161,7 +9161,7 @@
                           </a:solidFill>
                           <a:latin typeface="Times New Roman"/>
                         </a:rPr>
-                        <a:t>89.67 Cr</a:t>
+                        <a:t>86.75 Cr</a:t>
                       </a:r>
                     </a:p>
                   </a:txBody>
@@ -9204,7 +9204,7 @@
                           </a:solidFill>
                           <a:latin typeface="Times New Roman"/>
                         </a:rPr>
-                        <a:t>56</a:t>
+                        <a:t>58</a:t>
                       </a:r>
                     </a:p>
                   </a:txBody>
@@ -9494,7 +9494,7 @@
                           </a:solidFill>
                           <a:latin typeface="Times New Roman"/>
                         </a:rPr>
-                        <a:t>2,316,412</a:t>
+                        <a:t>2,344,788</a:t>
                       </a:r>
                       <a:br/>
                       <a:r>
@@ -9504,7 +9504,7 @@
                           </a:solidFill>
                           <a:latin typeface="Times New Roman"/>
                         </a:rPr>
-                        <a:t>231.64 Cr</a:t>
+                        <a:t>234.48 Cr</a:t>
                       </a:r>
                     </a:p>
                   </a:txBody>
@@ -9547,7 +9547,7 @@
                           </a:solidFill>
                           <a:latin typeface="Times New Roman"/>
                         </a:rPr>
-                        <a:t>640,129</a:t>
+                        <a:t>668,505</a:t>
                       </a:r>
                       <a:br/>
                       <a:r>
@@ -9557,7 +9557,7 @@
                           </a:solidFill>
                           <a:latin typeface="Times New Roman"/>
                         </a:rPr>
-                        <a:t>64.01 Cr</a:t>
+                        <a:t>66.85 Cr</a:t>
                       </a:r>
                     </a:p>
                   </a:txBody>
@@ -9600,7 +9600,7 @@
                           </a:solidFill>
                           <a:latin typeface="Times New Roman"/>
                         </a:rPr>
-                        <a:t>138</a:t>
+                        <a:t>140</a:t>
                       </a:r>
                     </a:p>
                   </a:txBody>
@@ -9643,7 +9643,7 @@
                           </a:solidFill>
                           <a:latin typeface="Times New Roman"/>
                         </a:rPr>
-                        <a:t>1,036,154</a:t>
+                        <a:t>1,007,778</a:t>
                       </a:r>
                       <a:br/>
                       <a:r>
@@ -9653,7 +9653,7 @@
                           </a:solidFill>
                           <a:latin typeface="Times New Roman"/>
                         </a:rPr>
-                        <a:t>103.62 Cr</a:t>
+                        <a:t>100.78 Cr</a:t>
                       </a:r>
                     </a:p>
                   </a:txBody>
@@ -9696,7 +9696,7 @@
                           </a:solidFill>
                           <a:latin typeface="Times New Roman"/>
                         </a:rPr>
-                        <a:t>69</a:t>
+                        <a:t>70</a:t>
                       </a:r>
                     </a:p>
                   </a:txBody>
@@ -9986,7 +9986,7 @@
                           </a:solidFill>
                           <a:latin typeface="Times New Roman"/>
                         </a:rPr>
-                        <a:t>2,600,978</a:t>
+                        <a:t>2,602,601</a:t>
                       </a:r>
                       <a:br/>
                       <a:r>
@@ -9996,7 +9996,7 @@
                           </a:solidFill>
                           <a:latin typeface="Times New Roman"/>
                         </a:rPr>
-                        <a:t>260.10 Cr</a:t>
+                        <a:t>260.26 Cr</a:t>
                       </a:r>
                     </a:p>
                   </a:txBody>
@@ -10039,7 +10039,7 @@
                           </a:solidFill>
                           <a:latin typeface="Times New Roman"/>
                         </a:rPr>
-                        <a:t>386,595</a:t>
+                        <a:t>388,218</a:t>
                       </a:r>
                       <a:br/>
                       <a:r>
@@ -10049,7 +10049,7 @@
                           </a:solidFill>
                           <a:latin typeface="Times New Roman"/>
                         </a:rPr>
-                        <a:t>38.66 Cr</a:t>
+                        <a:t>38.82 Cr</a:t>
                       </a:r>
                     </a:p>
                   </a:txBody>
@@ -10092,7 +10092,7 @@
                           </a:solidFill>
                           <a:latin typeface="Times New Roman"/>
                         </a:rPr>
-                        <a:t>117</a:t>
+                        <a:t>118</a:t>
                       </a:r>
                     </a:p>
                   </a:txBody>
@@ -10135,7 +10135,7 @@
                           </a:solidFill>
                           <a:latin typeface="Times New Roman"/>
                         </a:rPr>
-                        <a:t>1,827,788</a:t>
+                        <a:t>1,826,165</a:t>
                       </a:r>
                       <a:br/>
                       <a:r>
@@ -10145,7 +10145,7 @@
                           </a:solidFill>
                           <a:latin typeface="Times New Roman"/>
                         </a:rPr>
-                        <a:t>182.78 Cr</a:t>
+                        <a:t>182.62 Cr</a:t>
                       </a:r>
                     </a:p>
                   </a:txBody>
@@ -10478,7 +10478,7 @@
                           </a:solidFill>
                           <a:latin typeface="Times New Roman"/>
                         </a:rPr>
-                        <a:t>5,756,378</a:t>
+                        <a:t>7,243,570</a:t>
                       </a:r>
                       <a:br/>
                       <a:r>
@@ -10488,7 +10488,7 @@
                           </a:solidFill>
                           <a:latin typeface="Times New Roman"/>
                         </a:rPr>
-                        <a:t>575.64 Cr</a:t>
+                        <a:t>724.36 Cr</a:t>
                       </a:r>
                     </a:p>
                   </a:txBody>
@@ -10531,7 +10531,7 @@
                           </a:solidFill>
                           <a:latin typeface="Times New Roman"/>
                         </a:rPr>
-                        <a:t>-47,225</a:t>
+                        <a:t>1,439,967</a:t>
                       </a:r>
                       <a:br/>
                       <a:r>
@@ -10541,7 +10541,7 @@
                           </a:solidFill>
                           <a:latin typeface="Times New Roman"/>
                         </a:rPr>
-                        <a:t>-4.72 Cr</a:t>
+                        <a:t>144.00 Cr</a:t>
                       </a:r>
                     </a:p>
                   </a:txBody>
@@ -10584,33 +10584,33 @@
                           </a:solidFill>
                           <a:latin typeface="Times New Roman"/>
                         </a:rPr>
-                        <a:t>99</a:t>
-                      </a:r>
-                    </a:p>
-                  </a:txBody>
-                  <a:tcPr marL="12000" marR="12000" marT="8000" marB="8000">
-                    <a:lnL w="12700">
-                      <a:solidFill>
-                        <a:srgbClr val="000000"/>
-                      </a:solidFill>
-                    </a:lnL>
-                    <a:lnR w="12700">
-                      <a:solidFill>
-                        <a:srgbClr val="000000"/>
-                      </a:solidFill>
-                    </a:lnR>
-                    <a:lnT w="12700">
-                      <a:solidFill>
-                        <a:srgbClr val="000000"/>
-                      </a:solidFill>
-                    </a:lnT>
-                    <a:lnB w="12700">
-                      <a:solidFill>
-                        <a:srgbClr val="000000"/>
-                      </a:solidFill>
-                    </a:lnB>
-                    <a:solidFill>
-                      <a:srgbClr val="FFF2CC"/>
+                        <a:t>125</a:t>
+                      </a:r>
+                    </a:p>
+                  </a:txBody>
+                  <a:tcPr marL="12000" marR="12000" marT="8000" marB="8000">
+                    <a:lnL w="12700">
+                      <a:solidFill>
+                        <a:srgbClr val="000000"/>
+                      </a:solidFill>
+                    </a:lnL>
+                    <a:lnR w="12700">
+                      <a:solidFill>
+                        <a:srgbClr val="000000"/>
+                      </a:solidFill>
+                    </a:lnR>
+                    <a:lnT w="12700">
+                      <a:solidFill>
+                        <a:srgbClr val="000000"/>
+                      </a:solidFill>
+                    </a:lnT>
+                    <a:lnB w="12700">
+                      <a:solidFill>
+                        <a:srgbClr val="000000"/>
+                      </a:solidFill>
+                    </a:lnB>
+                    <a:solidFill>
+                      <a:srgbClr val="FCE4E4"/>
                     </a:solidFill>
                   </a:tcPr>
                 </a:tc>
@@ -10627,7 +10627,7 @@
                           </a:solidFill>
                           <a:latin typeface="Times New Roman"/>
                         </a:rPr>
-                        <a:t>5,850,828</a:t>
+                        <a:t>4,363,636</a:t>
                       </a:r>
                       <a:br/>
                       <a:r>
@@ -10637,7 +10637,7 @@
                           </a:solidFill>
                           <a:latin typeface="Times New Roman"/>
                         </a:rPr>
-                        <a:t>585.08 Cr</a:t>
+                        <a:t>436.36 Cr</a:t>
                       </a:r>
                     </a:p>
                   </a:txBody>
@@ -10680,7 +10680,7 @@
                           </a:solidFill>
                           <a:latin typeface="Times New Roman"/>
                         </a:rPr>
-                        <a:t>50</a:t>
+                        <a:t>62</a:t>
                       </a:r>
                     </a:p>
                   </a:txBody>
@@ -10970,7 +10970,7 @@
                           </a:solidFill>
                           <a:latin typeface="Times New Roman"/>
                         </a:rPr>
-                        <a:t>1,052,451</a:t>
+                        <a:t>1,053,707</a:t>
                       </a:r>
                       <a:br/>
                       <a:r>
@@ -10980,7 +10980,7 @@
                           </a:solidFill>
                           <a:latin typeface="Times New Roman"/>
                         </a:rPr>
-                        <a:t>105.25 Cr</a:t>
+                        <a:t>105.37 Cr</a:t>
                       </a:r>
                     </a:p>
                   </a:txBody>
@@ -11023,7 +11023,7 @@
                           </a:solidFill>
                           <a:latin typeface="Times New Roman"/>
                         </a:rPr>
-                        <a:t>356,035</a:t>
+                        <a:t>357,291</a:t>
                       </a:r>
                       <a:br/>
                       <a:r>
@@ -11033,7 +11033,7 @@
                           </a:solidFill>
                           <a:latin typeface="Times New Roman"/>
                         </a:rPr>
-                        <a:t>35.60 Cr</a:t>
+                        <a:t>35.73 Cr</a:t>
                       </a:r>
                     </a:p>
                   </a:txBody>
@@ -11119,7 +11119,7 @@
                           </a:solidFill>
                           <a:latin typeface="Times New Roman"/>
                         </a:rPr>
-                        <a:t>340,381</a:t>
+                        <a:t>339,125</a:t>
                       </a:r>
                       <a:br/>
                       <a:r>
@@ -11129,7 +11129,7 @@
                           </a:solidFill>
                           <a:latin typeface="Times New Roman"/>
                         </a:rPr>
-                        <a:t>34.04 Cr</a:t>
+                        <a:t>33.91 Cr</a:t>
                       </a:r>
                     </a:p>
                   </a:txBody>
@@ -11462,7 +11462,7 @@
                           </a:solidFill>
                           <a:latin typeface="Times New Roman"/>
                         </a:rPr>
-                        <a:t>528,378</a:t>
+                        <a:t>529,510</a:t>
                       </a:r>
                       <a:br/>
                       <a:r>
@@ -11472,7 +11472,7 @@
                           </a:solidFill>
                           <a:latin typeface="Times New Roman"/>
                         </a:rPr>
-                        <a:t>52.84 Cr</a:t>
+                        <a:t>52.95 Cr</a:t>
                       </a:r>
                     </a:p>
                   </a:txBody>
@@ -11515,7 +11515,7 @@
                           </a:solidFill>
                           <a:latin typeface="Times New Roman"/>
                         </a:rPr>
-                        <a:t>31,059</a:t>
+                        <a:t>32,191</a:t>
                       </a:r>
                       <a:br/>
                       <a:r>
@@ -11525,7 +11525,7 @@
                           </a:solidFill>
                           <a:latin typeface="Times New Roman"/>
                         </a:rPr>
-                        <a:t>3.11 Cr</a:t>
+                        <a:t>3.22 Cr</a:t>
                       </a:r>
                     </a:p>
                   </a:txBody>
@@ -11611,7 +11611,7 @@
                           </a:solidFill>
                           <a:latin typeface="Times New Roman"/>
                         </a:rPr>
-                        <a:t>466,260</a:t>
+                        <a:t>465,128</a:t>
                       </a:r>
                       <a:br/>
                       <a:r>
@@ -11621,7 +11621,7 @@
                           </a:solidFill>
                           <a:latin typeface="Times New Roman"/>
                         </a:rPr>
-                        <a:t>46.63 Cr</a:t>
+                        <a:t>46.51 Cr</a:t>
                       </a:r>
                     </a:p>
                   </a:txBody>
@@ -12446,7 +12446,7 @@
                           </a:solidFill>
                           <a:latin typeface="Times New Roman"/>
                         </a:rPr>
-                        <a:t>18,328,032</a:t>
+                        <a:t>19,918,321</a:t>
                       </a:r>
                       <a:br/>
                       <a:r>
@@ -12456,7 +12456,7 @@
                           </a:solidFill>
                           <a:latin typeface="Times New Roman"/>
                         </a:rPr>
-                        <a:t>1832.80 Cr</a:t>
+                        <a:t>1991.83 Cr</a:t>
                       </a:r>
                     </a:p>
                   </a:txBody>
@@ -12499,7 +12499,7 @@
                           </a:solidFill>
                           <a:latin typeface="Times New Roman"/>
                         </a:rPr>
-                        <a:t>2,030,096</a:t>
+                        <a:t>3,620,384</a:t>
                       </a:r>
                       <a:br/>
                       <a:r>
@@ -12509,7 +12509,7 @@
                           </a:solidFill>
                           <a:latin typeface="Times New Roman"/>
                         </a:rPr>
-                        <a:t>203.01 Cr</a:t>
+                        <a:t>362.04 Cr</a:t>
                       </a:r>
                     </a:p>
                   </a:txBody>
@@ -12552,7 +12552,7 @@
                           </a:solidFill>
                           <a:latin typeface="Times New Roman"/>
                         </a:rPr>
-                        <a:t>112</a:t>
+                        <a:t>122</a:t>
                       </a:r>
                     </a:p>
                   </a:txBody>
@@ -12595,7 +12595,7 @@
                           </a:solidFill>
                           <a:latin typeface="Times New Roman"/>
                         </a:rPr>
-                        <a:t>14,267,841</a:t>
+                        <a:t>12,677,552</a:t>
                       </a:r>
                       <a:br/>
                       <a:r>
@@ -12605,7 +12605,7 @@
                           </a:solidFill>
                           <a:latin typeface="Times New Roman"/>
                         </a:rPr>
-                        <a:t>1426.78 Cr</a:t>
+                        <a:t>1267.76 Cr</a:t>
                       </a:r>
                     </a:p>
                   </a:txBody>
@@ -12648,7 +12648,7 @@
                           </a:solidFill>
                           <a:latin typeface="Times New Roman"/>
                         </a:rPr>
-                        <a:t>56</a:t>
+                        <a:t>61</a:t>
                       </a:r>
                     </a:p>
                   </a:txBody>
@@ -12938,7 +12938,7 @@
                           </a:solidFill>
                           <a:latin typeface="Times New Roman"/>
                         </a:rPr>
-                        <a:t>1,591,631</a:t>
+                        <a:t>1,591,127</a:t>
                       </a:r>
                       <a:br/>
                       <a:r>
@@ -12948,7 +12948,7 @@
                           </a:solidFill>
                           <a:latin typeface="Times New Roman"/>
                         </a:rPr>
-                        <a:t>159.16 Cr</a:t>
+                        <a:t>159.11 Cr</a:t>
                       </a:r>
                     </a:p>
                   </a:txBody>
@@ -12991,7 +12991,7 @@
                           </a:solidFill>
                           <a:latin typeface="Times New Roman"/>
                         </a:rPr>
-                        <a:t>1,598,154</a:t>
+                        <a:t>1,597,650</a:t>
                       </a:r>
                       <a:br/>
                       <a:r>
@@ -13001,7 +13001,7 @@
                           </a:solidFill>
                           <a:latin typeface="Times New Roman"/>
                         </a:rPr>
-                        <a:t>159.82 Cr</a:t>
+                        <a:t>159.76 Cr</a:t>
                       </a:r>
                     </a:p>
                   </a:txBody>
@@ -13044,7 +13044,7 @@
                           </a:solidFill>
                           <a:latin typeface="Times New Roman"/>
                         </a:rPr>
-                        <a:t>-24402</a:t>
+                        <a:t>-24394</a:t>
                       </a:r>
                     </a:p>
                   </a:txBody>
@@ -13087,7 +13087,7 @@
                           </a:solidFill>
                           <a:latin typeface="Times New Roman"/>
                         </a:rPr>
-                        <a:t>-1,604,676</a:t>
+                        <a:t>-1,604,172</a:t>
                       </a:r>
                       <a:br/>
                       <a:r>
@@ -13097,7 +13097,7 @@
                           </a:solidFill>
                           <a:latin typeface="Times New Roman"/>
                         </a:rPr>
-                        <a:t>-160.47 Cr</a:t>
+                        <a:t>-160.42 Cr</a:t>
                       </a:r>
                     </a:p>
                   </a:txBody>
@@ -13140,7 +13140,7 @@
                           </a:solidFill>
                           <a:latin typeface="Times New Roman"/>
                         </a:rPr>
-                        <a:t>-12201</a:t>
+                        <a:t>-12197</a:t>
                       </a:r>
                     </a:p>
                   </a:txBody>
@@ -13284,7 +13284,7 @@
                 </a:solidFill>
                 <a:latin typeface="Times New Roman"/>
               </a:rPr>
-              <a:t>PU Wise - Staff - SEP 2026 | uploaded 2026-10-01T11:01:41+05:30</a:t>
+              <a:t>PU Wise - Staff - SEP 2026 | uploaded 2026-10-05T14:47:35+05:30</a:t>
             </a:r>
           </a:p>
         </p:txBody>
@@ -14046,7 +14046,7 @@
                           </a:solidFill>
                           <a:latin typeface="Times New Roman"/>
                         </a:rPr>
-                        <a:t>3,689,447</a:t>
+                        <a:t>3,689,125</a:t>
                       </a:r>
                       <a:br/>
                       <a:r>
@@ -14056,7 +14056,7 @@
                           </a:solidFill>
                           <a:latin typeface="Times New Roman"/>
                         </a:rPr>
-                        <a:t>368.94 Cr</a:t>
+                        <a:t>368.91 Cr</a:t>
                       </a:r>
                     </a:p>
                   </a:txBody>
@@ -14099,7 +14099,7 @@
                           </a:solidFill>
                           <a:latin typeface="Times New Roman"/>
                         </a:rPr>
-                        <a:t>336,242</a:t>
+                        <a:t>335,920</a:t>
                       </a:r>
                       <a:br/>
                       <a:r>
@@ -14109,7 +14109,7 @@
                           </a:solidFill>
                           <a:latin typeface="Times New Roman"/>
                         </a:rPr>
-                        <a:t>33.62 Cr</a:t>
+                        <a:t>33.59 Cr</a:t>
                       </a:r>
                     </a:p>
                   </a:txBody>
@@ -14195,7 +14195,7 @@
                           </a:solidFill>
                           <a:latin typeface="Times New Roman"/>
                         </a:rPr>
-                        <a:t>3,016,962</a:t>
+                        <a:t>3,017,284</a:t>
                       </a:r>
                       <a:br/>
                       <a:r>
@@ -14205,7 +14205,7 @@
                           </a:solidFill>
                           <a:latin typeface="Times New Roman"/>
                         </a:rPr>
-                        <a:t>301.70 Cr</a:t>
+                        <a:t>301.73 Cr</a:t>
                       </a:r>
                     </a:p>
                   </a:txBody>
@@ -14495,7 +14495,7 @@
                           </a:solidFill>
                           <a:latin typeface="Times New Roman"/>
                         </a:rPr>
-                        <a:t>2,354,387</a:t>
+                        <a:t>2,354,304</a:t>
                       </a:r>
                       <a:br/>
                       <a:r>
@@ -14505,7 +14505,7 @@
                           </a:solidFill>
                           <a:latin typeface="Times New Roman"/>
                         </a:rPr>
-                        <a:t>235.44 Cr</a:t>
+                        <a:t>235.43 Cr</a:t>
                       </a:r>
                     </a:p>
                   </a:txBody>
@@ -14548,7 +14548,7 @@
                           </a:solidFill>
                           <a:latin typeface="Times New Roman"/>
                         </a:rPr>
-                        <a:t>304,160</a:t>
+                        <a:t>304,078</a:t>
                       </a:r>
                       <a:br/>
                       <a:r>
@@ -14558,7 +14558,7 @@
                           </a:solidFill>
                           <a:latin typeface="Times New Roman"/>
                         </a:rPr>
-                        <a:t>30.42 Cr</a:t>
+                        <a:t>30.41 Cr</a:t>
                       </a:r>
                     </a:p>
                   </a:txBody>
@@ -14644,7 +14644,7 @@
                           </a:solidFill>
                           <a:latin typeface="Times New Roman"/>
                         </a:rPr>
-                        <a:t>1,746,066</a:t>
+                        <a:t>1,746,149</a:t>
                       </a:r>
                       <a:br/>
                       <a:r>
@@ -15393,7 +15393,7 @@
                           </a:solidFill>
                           <a:latin typeface="Times New Roman"/>
                         </a:rPr>
-                        <a:t>405,401</a:t>
+                        <a:t>405,373</a:t>
                       </a:r>
                       <a:br/>
                       <a:r>
@@ -15446,7 +15446,7 @@
                           </a:solidFill>
                           <a:latin typeface="Times New Roman"/>
                         </a:rPr>
-                        <a:t>17,302</a:t>
+                        <a:t>17,274</a:t>
                       </a:r>
                       <a:br/>
                       <a:r>
@@ -15542,7 +15542,7 @@
                           </a:solidFill>
                           <a:latin typeface="Times New Roman"/>
                         </a:rPr>
-                        <a:t>370,797</a:t>
+                        <a:t>370,825</a:t>
                       </a:r>
                       <a:br/>
                       <a:r>
@@ -15842,7 +15842,7 @@
                           </a:solidFill>
                           <a:latin typeface="Times New Roman"/>
                         </a:rPr>
-                        <a:t>259,448</a:t>
+                        <a:t>259,437</a:t>
                       </a:r>
                       <a:br/>
                       <a:r>
@@ -15895,7 +15895,7 @@
                           </a:solidFill>
                           <a:latin typeface="Times New Roman"/>
                         </a:rPr>
-                        <a:t>11,144</a:t>
+                        <a:t>11,132</a:t>
                       </a:r>
                       <a:br/>
                       <a:r>
@@ -15991,7 +15991,7 @@
                           </a:solidFill>
                           <a:latin typeface="Times New Roman"/>
                         </a:rPr>
-                        <a:t>237,161</a:t>
+                        <a:t>237,172</a:t>
                       </a:r>
                       <a:br/>
                       <a:r>
@@ -16291,7 +16291,7 @@
                           </a:solidFill>
                           <a:latin typeface="Times New Roman"/>
                         </a:rPr>
-                        <a:t>437,059</a:t>
+                        <a:t>437,090</a:t>
                       </a:r>
                       <a:br/>
                       <a:r>
@@ -16344,7 +16344,7 @@
                           </a:solidFill>
                           <a:latin typeface="Times New Roman"/>
                         </a:rPr>
-                        <a:t>96,960</a:t>
+                        <a:t>96,992</a:t>
                       </a:r>
                       <a:br/>
                       <a:r>
@@ -16440,7 +16440,7 @@
                           </a:solidFill>
                           <a:latin typeface="Times New Roman"/>
                         </a:rPr>
-                        <a:t>243,138</a:t>
+                        <a:t>243,107</a:t>
                       </a:r>
                       <a:br/>
                       <a:r>
@@ -17189,7 +17189,7 @@
                           </a:solidFill>
                           <a:latin typeface="Times New Roman"/>
                         </a:rPr>
-                        <a:t>147,747</a:t>
+                        <a:t>147,751</a:t>
                       </a:r>
                       <a:br/>
                       <a:r>
@@ -17199,7 +17199,7 @@
                           </a:solidFill>
                           <a:latin typeface="Times New Roman"/>
                         </a:rPr>
-                        <a:t>14.77 Cr</a:t>
+                        <a:t>14.78 Cr</a:t>
                       </a:r>
                     </a:p>
                   </a:txBody>
@@ -17242,7 +17242,7 @@
                           </a:solidFill>
                           <a:latin typeface="Times New Roman"/>
                         </a:rPr>
-                        <a:t>42,790</a:t>
+                        <a:t>42,794</a:t>
                       </a:r>
                       <a:br/>
                       <a:r>
@@ -17338,7 +17338,7 @@
                           </a:solidFill>
                           <a:latin typeface="Times New Roman"/>
                         </a:rPr>
-                        <a:t>62,166</a:t>
+                        <a:t>62,162</a:t>
                       </a:r>
                       <a:br/>
                       <a:r>
@@ -17638,7 +17638,7 @@
                           </a:solidFill>
                           <a:latin typeface="Times New Roman"/>
                         </a:rPr>
-                        <a:t>318,467</a:t>
+                        <a:t>318,453</a:t>
                       </a:r>
                       <a:br/>
                       <a:r>
@@ -17691,7 +17691,7 @@
                           </a:solidFill>
                           <a:latin typeface="Times New Roman"/>
                         </a:rPr>
-                        <a:t>54,551</a:t>
+                        <a:t>54,537</a:t>
                       </a:r>
                       <a:br/>
                       <a:r>
@@ -17701,7 +17701,7 @@
                           </a:solidFill>
                           <a:latin typeface="Times New Roman"/>
                         </a:rPr>
-                        <a:t>5.46 Cr</a:t>
+                        <a:t>5.45 Cr</a:t>
                       </a:r>
                     </a:p>
                   </a:txBody>
@@ -17787,7 +17787,7 @@
                           </a:solidFill>
                           <a:latin typeface="Times New Roman"/>
                         </a:rPr>
-                        <a:t>209,365</a:t>
+                        <a:t>209,379</a:t>
                       </a:r>
                       <a:br/>
                       <a:r>
@@ -18536,7 +18536,7 @@
                           </a:solidFill>
                           <a:latin typeface="Times New Roman"/>
                         </a:rPr>
-                        <a:t>265,202</a:t>
+                        <a:t>265,224</a:t>
                       </a:r>
                       <a:br/>
                       <a:r>
@@ -18589,7 +18589,7 @@
                           </a:solidFill>
                           <a:latin typeface="Times New Roman"/>
                         </a:rPr>
-                        <a:t>111,162</a:t>
+                        <a:t>111,184</a:t>
                       </a:r>
                       <a:br/>
                       <a:r>
@@ -18685,7 +18685,7 @@
                           </a:solidFill>
                           <a:latin typeface="Times New Roman"/>
                         </a:rPr>
-                        <a:t>42,879</a:t>
+                        <a:t>42,857</a:t>
                       </a:r>
                       <a:br/>
                       <a:r>
@@ -19434,7 +19434,7 @@
                           </a:solidFill>
                           <a:latin typeface="Times New Roman"/>
                         </a:rPr>
-                        <a:t>8,335,181</a:t>
+                        <a:t>8,334,780</a:t>
                       </a:r>
                       <a:br/>
                       <a:r>
@@ -19444,7 +19444,7 @@
                           </a:solidFill>
                           <a:latin typeface="Times New Roman"/>
                         </a:rPr>
-                        <a:t>833.52 Cr</a:t>
+                        <a:t>833.48 Cr</a:t>
                       </a:r>
                     </a:p>
                   </a:txBody>
@@ -19487,7 +19487,7 @@
                           </a:solidFill>
                           <a:latin typeface="Times New Roman"/>
                         </a:rPr>
-                        <a:t>1,053,408</a:t>
+                        <a:t>1,053,006</a:t>
                       </a:r>
                       <a:br/>
                       <a:r>
@@ -19497,7 +19497,7 @@
                           </a:solidFill>
                           <a:latin typeface="Times New Roman"/>
                         </a:rPr>
-                        <a:t>105.34 Cr</a:t>
+                        <a:t>105.30 Cr</a:t>
                       </a:r>
                     </a:p>
                   </a:txBody>
@@ -19583,7 +19583,7 @@
                           </a:solidFill>
                           <a:latin typeface="Times New Roman"/>
                         </a:rPr>
-                        <a:t>6,228,366</a:t>
+                        <a:t>6,228,767</a:t>
                       </a:r>
                       <a:br/>
                       <a:r>
@@ -19593,7 +19593,7 @@
                           </a:solidFill>
                           <a:latin typeface="Times New Roman"/>
                         </a:rPr>
-                        <a:t>622.84 Cr</a:t>
+                        <a:t>622.88 Cr</a:t>
                       </a:r>
                     </a:p>
                   </a:txBody>
@@ -19780,7 +19780,7 @@
                 </a:solidFill>
                 <a:latin typeface="Times New Roman"/>
               </a:rPr>
-              <a:t>PU Wise - Non-Staff Part 1 - SEP 2026 | uploaded 2026-10-01T11:01:41+05:30</a:t>
+              <a:t>PU Wise - Non-Staff Part 1 - SEP 2026 | uploaded 2026-10-05T14:47:35+05:30</a:t>
             </a:r>
           </a:p>
         </p:txBody>
@@ -20542,7 +20542,7 @@
                           </a:solidFill>
                           <a:latin typeface="Times New Roman"/>
                         </a:rPr>
-                        <a:t>862,766</a:t>
+                        <a:t>1,005,406</a:t>
                       </a:r>
                       <a:br/>
                       <a:r>
@@ -20552,7 +20552,7 @@
                           </a:solidFill>
                           <a:latin typeface="Times New Roman"/>
                         </a:rPr>
-                        <a:t>86.28 Cr</a:t>
+                        <a:t>100.54 Cr</a:t>
                       </a:r>
                     </a:p>
                   </a:txBody>
@@ -20595,7 +20595,7 @@
                           </a:solidFill>
                           <a:latin typeface="Times New Roman"/>
                         </a:rPr>
-                        <a:t>328,390</a:t>
+                        <a:t>471,030</a:t>
                       </a:r>
                       <a:br/>
                       <a:r>
@@ -20605,7 +20605,7 @@
                           </a:solidFill>
                           <a:latin typeface="Times New Roman"/>
                         </a:rPr>
-                        <a:t>32.84 Cr</a:t>
+                        <a:t>47.10 Cr</a:t>
                       </a:r>
                     </a:p>
                   </a:txBody>
@@ -20648,7 +20648,7 @@
                           </a:solidFill>
                           <a:latin typeface="Times New Roman"/>
                         </a:rPr>
-                        <a:t>161</a:t>
+                        <a:t>188</a:t>
                       </a:r>
                     </a:p>
                   </a:txBody>
@@ -20691,7 +20691,7 @@
                           </a:solidFill>
                           <a:latin typeface="Times New Roman"/>
                         </a:rPr>
-                        <a:t>205,986</a:t>
+                        <a:t>63,346</a:t>
                       </a:r>
                       <a:br/>
                       <a:r>
@@ -20701,7 +20701,7 @@
                           </a:solidFill>
                           <a:latin typeface="Times New Roman"/>
                         </a:rPr>
-                        <a:t>20.60 Cr</a:t>
+                        <a:t>6.33 Cr</a:t>
                       </a:r>
                     </a:p>
                   </a:txBody>
@@ -20744,7 +20744,7 @@
                           </a:solidFill>
                           <a:latin typeface="Times New Roman"/>
                         </a:rPr>
-                        <a:t>81</a:t>
+                        <a:t>94</a:t>
                       </a:r>
                     </a:p>
                   </a:txBody>
@@ -20991,7 +20991,7 @@
                           </a:solidFill>
                           <a:latin typeface="Times New Roman"/>
                         </a:rPr>
-                        <a:t>79,644</a:t>
+                        <a:t>84,936</a:t>
                       </a:r>
                       <a:br/>
                       <a:r>
@@ -21001,7 +21001,7 @@
                           </a:solidFill>
                           <a:latin typeface="Times New Roman"/>
                         </a:rPr>
-                        <a:t>7.96 Cr</a:t>
+                        <a:t>8.49 Cr</a:t>
                       </a:r>
                     </a:p>
                   </a:txBody>
@@ -21044,7 +21044,7 @@
                           </a:solidFill>
                           <a:latin typeface="Times New Roman"/>
                         </a:rPr>
-                        <a:t>4,670</a:t>
+                        <a:t>9,962</a:t>
                       </a:r>
                       <a:br/>
                       <a:r>
@@ -21054,7 +21054,7 @@
                           </a:solidFill>
                           <a:latin typeface="Times New Roman"/>
                         </a:rPr>
-                        <a:t>0.47 Cr</a:t>
+                        <a:t>1.00 Cr</a:t>
                       </a:r>
                     </a:p>
                   </a:txBody>
@@ -21097,7 +21097,7 @@
                           </a:solidFill>
                           <a:latin typeface="Times New Roman"/>
                         </a:rPr>
-                        <a:t>106</a:t>
+                        <a:t>113</a:t>
                       </a:r>
                     </a:p>
                   </a:txBody>
@@ -21140,7 +21140,7 @@
                           </a:solidFill>
                           <a:latin typeface="Times New Roman"/>
                         </a:rPr>
-                        <a:t>70,303</a:t>
+                        <a:t>65,011</a:t>
                       </a:r>
                       <a:br/>
                       <a:r>
@@ -21150,7 +21150,7 @@
                           </a:solidFill>
                           <a:latin typeface="Times New Roman"/>
                         </a:rPr>
-                        <a:t>7.03 Cr</a:t>
+                        <a:t>6.50 Cr</a:t>
                       </a:r>
                     </a:p>
                   </a:txBody>
@@ -21193,7 +21193,7 @@
                           </a:solidFill>
                           <a:latin typeface="Times New Roman"/>
                         </a:rPr>
-                        <a:t>53</a:t>
+                        <a:t>57</a:t>
                       </a:r>
                     </a:p>
                   </a:txBody>
@@ -21440,7 +21440,7 @@
                           </a:solidFill>
                           <a:latin typeface="Times New Roman"/>
                         </a:rPr>
-                        <a:t>2,011,062</a:t>
+                        <a:t>2,320,788</a:t>
                       </a:r>
                       <a:br/>
                       <a:r>
@@ -21450,7 +21450,7 @@
                           </a:solidFill>
                           <a:latin typeface="Times New Roman"/>
                         </a:rPr>
-                        <a:t>201.11 Cr</a:t>
+                        <a:t>232.08 Cr</a:t>
                       </a:r>
                     </a:p>
                   </a:txBody>
@@ -21493,7 +21493,7 @@
                           </a:solidFill>
                           <a:latin typeface="Times New Roman"/>
                         </a:rPr>
-                        <a:t>71,700</a:t>
+                        <a:t>381,426</a:t>
                       </a:r>
                       <a:br/>
                       <a:r>
@@ -21503,7 +21503,7 @@
                           </a:solidFill>
                           <a:latin typeface="Times New Roman"/>
                         </a:rPr>
-                        <a:t>7.17 Cr</a:t>
+                        <a:t>38.14 Cr</a:t>
                       </a:r>
                     </a:p>
                   </a:txBody>
@@ -21546,7 +21546,7 @@
                           </a:solidFill>
                           <a:latin typeface="Times New Roman"/>
                         </a:rPr>
-                        <a:t>104</a:t>
+                        <a:t>120</a:t>
                       </a:r>
                     </a:p>
                   </a:txBody>
@@ -21589,7 +21589,7 @@
                           </a:solidFill>
                           <a:latin typeface="Times New Roman"/>
                         </a:rPr>
-                        <a:t>1,867,662</a:t>
+                        <a:t>1,557,936</a:t>
                       </a:r>
                       <a:br/>
                       <a:r>
@@ -21599,7 +21599,7 @@
                           </a:solidFill>
                           <a:latin typeface="Times New Roman"/>
                         </a:rPr>
-                        <a:t>186.77 Cr</a:t>
+                        <a:t>155.79 Cr</a:t>
                       </a:r>
                     </a:p>
                   </a:txBody>
@@ -21642,7 +21642,7 @@
                           </a:solidFill>
                           <a:latin typeface="Times New Roman"/>
                         </a:rPr>
-                        <a:t>52</a:t>
+                        <a:t>60</a:t>
                       </a:r>
                     </a:p>
                   </a:txBody>
@@ -21889,7 +21889,7 @@
                           </a:solidFill>
                           <a:latin typeface="Times New Roman"/>
                         </a:rPr>
-                        <a:t>2,013,588</a:t>
+                        <a:t>2,025,688</a:t>
                       </a:r>
                       <a:br/>
                       <a:r>
@@ -21899,7 +21899,7 @@
                           </a:solidFill>
                           <a:latin typeface="Times New Roman"/>
                         </a:rPr>
-                        <a:t>201.36 Cr</a:t>
+                        <a:t>202.57 Cr</a:t>
                       </a:r>
                     </a:p>
                   </a:txBody>
@@ -21942,7 +21942,7 @@
                           </a:solidFill>
                           <a:latin typeface="Times New Roman"/>
                         </a:rPr>
-                        <a:t>386,433</a:t>
+                        <a:t>398,533</a:t>
                       </a:r>
                       <a:br/>
                       <a:r>
@@ -21952,7 +21952,7 @@
                           </a:solidFill>
                           <a:latin typeface="Times New Roman"/>
                         </a:rPr>
-                        <a:t>38.64 Cr</a:t>
+                        <a:t>39.85 Cr</a:t>
                       </a:r>
                     </a:p>
                   </a:txBody>
@@ -22038,7 +22038,7 @@
                           </a:solidFill>
                           <a:latin typeface="Times New Roman"/>
                         </a:rPr>
-                        <a:t>1,240,722</a:t>
+                        <a:t>1,228,622</a:t>
                       </a:r>
                       <a:br/>
                       <a:r>
@@ -22048,7 +22048,7 @@
                           </a:solidFill>
                           <a:latin typeface="Times New Roman"/>
                         </a:rPr>
-                        <a:t>124.07 Cr</a:t>
+                        <a:t>122.86 Cr</a:t>
                       </a:r>
                     </a:p>
                   </a:txBody>
@@ -22338,7 +22338,7 @@
                           </a:solidFill>
                           <a:latin typeface="Times New Roman"/>
                         </a:rPr>
-                        <a:t>2,715,415</a:t>
+                        <a:t>3,395,738</a:t>
                       </a:r>
                       <a:br/>
                       <a:r>
@@ -22348,7 +22348,7 @@
                           </a:solidFill>
                           <a:latin typeface="Times New Roman"/>
                         </a:rPr>
-                        <a:t>271.54 Cr</a:t>
+                        <a:t>339.57 Cr</a:t>
                       </a:r>
                     </a:p>
                   </a:txBody>
@@ -22391,7 +22391,7 @@
                           </a:solidFill>
                           <a:latin typeface="Times New Roman"/>
                         </a:rPr>
-                        <a:t>363,737</a:t>
+                        <a:t>1,044,060</a:t>
                       </a:r>
                       <a:br/>
                       <a:r>
@@ -22401,7 +22401,7 @@
                           </a:solidFill>
                           <a:latin typeface="Times New Roman"/>
                         </a:rPr>
-                        <a:t>36.37 Cr</a:t>
+                        <a:t>104.41 Cr</a:t>
                       </a:r>
                     </a:p>
                   </a:txBody>
@@ -22444,7 +22444,7 @@
                           </a:solidFill>
                           <a:latin typeface="Times New Roman"/>
                         </a:rPr>
-                        <a:t>115</a:t>
+                        <a:t>144</a:t>
                       </a:r>
                     </a:p>
                   </a:txBody>
@@ -22487,7 +22487,7 @@
                           </a:solidFill>
                           <a:latin typeface="Times New Roman"/>
                         </a:rPr>
-                        <a:t>1,987,941</a:t>
+                        <a:t>1,307,618</a:t>
                       </a:r>
                       <a:br/>
                       <a:r>
@@ -22497,7 +22497,7 @@
                           </a:solidFill>
                           <a:latin typeface="Times New Roman"/>
                         </a:rPr>
-                        <a:t>198.79 Cr</a:t>
+                        <a:t>130.76 Cr</a:t>
                       </a:r>
                     </a:p>
                   </a:txBody>
@@ -22540,7 +22540,7 @@
                           </a:solidFill>
                           <a:latin typeface="Times New Roman"/>
                         </a:rPr>
-                        <a:t>58</a:t>
+                        <a:t>72</a:t>
                       </a:r>
                     </a:p>
                   </a:txBody>
@@ -22787,7 +22787,7 @@
                           </a:solidFill>
                           <a:latin typeface="Times New Roman"/>
                         </a:rPr>
-                        <a:t>7,682,475</a:t>
+                        <a:t>8,832,556</a:t>
                       </a:r>
                       <a:br/>
                       <a:r>
@@ -22797,7 +22797,7 @@
                           </a:solidFill>
                           <a:latin typeface="Times New Roman"/>
                         </a:rPr>
-                        <a:t>768.25 Cr</a:t>
+                        <a:t>883.26 Cr</a:t>
                       </a:r>
                     </a:p>
                   </a:txBody>
@@ -22840,7 +22840,7 @@
                           </a:solidFill>
                           <a:latin typeface="Times New Roman"/>
                         </a:rPr>
-                        <a:t>1,154,930</a:t>
+                        <a:t>2,305,012</a:t>
                       </a:r>
                       <a:br/>
                       <a:r>
@@ -22850,7 +22850,7 @@
                           </a:solidFill>
                           <a:latin typeface="Times New Roman"/>
                         </a:rPr>
-                        <a:t>115.49 Cr</a:t>
+                        <a:t>230.50 Cr</a:t>
                       </a:r>
                     </a:p>
                   </a:txBody>
@@ -22893,7 +22893,7 @@
                           </a:solidFill>
                           <a:latin typeface="Times New Roman"/>
                         </a:rPr>
-                        <a:t>118</a:t>
+                        <a:t>135</a:t>
                       </a:r>
                     </a:p>
                   </a:txBody>
@@ -22936,7 +22936,7 @@
                           </a:solidFill>
                           <a:latin typeface="Times New Roman"/>
                         </a:rPr>
-                        <a:t>5,372,614</a:t>
+                        <a:t>4,222,533</a:t>
                       </a:r>
                       <a:br/>
                       <a:r>
@@ -22946,7 +22946,7 @@
                           </a:solidFill>
                           <a:latin typeface="Times New Roman"/>
                         </a:rPr>
-                        <a:t>537.26 Cr</a:t>
+                        <a:t>422.25 Cr</a:t>
                       </a:r>
                     </a:p>
                   </a:txBody>
@@ -22989,7 +22989,7 @@
                           </a:solidFill>
                           <a:latin typeface="Times New Roman"/>
                         </a:rPr>
-                        <a:t>59</a:t>
+                        <a:t>68</a:t>
                       </a:r>
                     </a:p>
                   </a:txBody>
@@ -23133,7 +23133,7 @@
                 </a:solidFill>
                 <a:latin typeface="Times New Roman"/>
               </a:rPr>
-              <a:t>Open Line FR Report - As On 25.09.2026 (Rows 1-13)</a:t>
+              <a:t>Open Line FR Report - As On 05.10.2026 (Rows 1-13)</a:t>
             </a:r>
           </a:p>
         </p:txBody>
@@ -23677,7 +23677,7 @@
                           </a:solidFill>
                           <a:latin typeface="Times New Roman"/>
                         </a:rPr>
-                        <a:t>81,555</a:t>
+                        <a:t>80,418</a:t>
                       </a:r>
                       <a:br/>
                       <a:r>
@@ -23687,7 +23687,7 @@
                           </a:solidFill>
                           <a:latin typeface="Times New Roman"/>
                         </a:rPr>
-                        <a:t>8.16 Cr</a:t>
+                        <a:t>8.04 Cr</a:t>
                       </a:r>
                     </a:p>
                   </a:txBody>
@@ -23730,7 +23730,7 @@
                           </a:solidFill>
                           <a:latin typeface="Times New Roman"/>
                         </a:rPr>
-                        <a:t>-79,348</a:t>
+                        <a:t>-80,485</a:t>
                       </a:r>
                       <a:br/>
                       <a:r>
@@ -23740,7 +23740,7 @@
                           </a:solidFill>
                           <a:latin typeface="Times New Roman"/>
                         </a:rPr>
-                        <a:t>-7.93 Cr</a:t>
+                        <a:t>-8.05 Cr</a:t>
                       </a:r>
                     </a:p>
                   </a:txBody>
@@ -23783,7 +23783,7 @@
                           </a:solidFill>
                           <a:latin typeface="Times New Roman"/>
                         </a:rPr>
-                        <a:t>50.69</a:t>
+                        <a:t>49.98</a:t>
                       </a:r>
                     </a:p>
                   </a:txBody>
@@ -24010,7 +24010,7 @@
                           </a:solidFill>
                           <a:latin typeface="Times New Roman"/>
                         </a:rPr>
-                        <a:t>12,767</a:t>
+                        <a:t>12,890</a:t>
                       </a:r>
                       <a:br/>
                       <a:r>
@@ -24020,7 +24020,7 @@
                           </a:solidFill>
                           <a:latin typeface="Times New Roman"/>
                         </a:rPr>
-                        <a:t>1.28 Cr</a:t>
+                        <a:t>1.29 Cr</a:t>
                       </a:r>
                     </a:p>
                   </a:txBody>
@@ -24063,7 +24063,7 @@
                           </a:solidFill>
                           <a:latin typeface="Times New Roman"/>
                         </a:rPr>
-                        <a:t>-19,460</a:t>
+                        <a:t>-19,337</a:t>
                       </a:r>
                       <a:br/>
                       <a:r>
@@ -24073,7 +24073,7 @@
                           </a:solidFill>
                           <a:latin typeface="Times New Roman"/>
                         </a:rPr>
-                        <a:t>-1.95 Cr</a:t>
+                        <a:t>-1.93 Cr</a:t>
                       </a:r>
                     </a:p>
                   </a:txBody>
@@ -24116,7 +24116,7 @@
                           </a:solidFill>
                           <a:latin typeface="Times New Roman"/>
                         </a:rPr>
-                        <a:t>39.62</a:t>
+                        <a:t>40.00</a:t>
                       </a:r>
                     </a:p>
                   </a:txBody>
@@ -24343,7 +24343,7 @@
                           </a:solidFill>
                           <a:latin typeface="Times New Roman"/>
                         </a:rPr>
-                        <a:t>64,676</a:t>
+                        <a:t>64,681</a:t>
                       </a:r>
                       <a:br/>
                       <a:r>
@@ -24396,7 +24396,7 @@
                           </a:solidFill>
                           <a:latin typeface="Times New Roman"/>
                         </a:rPr>
-                        <a:t>-55,642</a:t>
+                        <a:t>-55,637</a:t>
                       </a:r>
                       <a:br/>
                       <a:r>
@@ -24449,7 +24449,7 @@
                           </a:solidFill>
                           <a:latin typeface="Times New Roman"/>
                         </a:rPr>
-                        <a:t>53.75</a:t>
+                        <a:t>53.76</a:t>
                       </a:r>
                     </a:p>
                   </a:txBody>
@@ -24676,7 +24676,7 @@
                           </a:solidFill>
                           <a:latin typeface="Times New Roman"/>
                         </a:rPr>
-                        <a:t>379,202</a:t>
+                        <a:t>379,598</a:t>
                       </a:r>
                       <a:br/>
                       <a:r>
@@ -24686,7 +24686,7 @@
                           </a:solidFill>
                           <a:latin typeface="Times New Roman"/>
                         </a:rPr>
-                        <a:t>37.92 Cr</a:t>
+                        <a:t>37.96 Cr</a:t>
                       </a:r>
                     </a:p>
                   </a:txBody>
@@ -24729,7 +24729,7 @@
                           </a:solidFill>
                           <a:latin typeface="Times New Roman"/>
                         </a:rPr>
-                        <a:t>-128,218</a:t>
+                        <a:t>-127,822</a:t>
                       </a:r>
                       <a:br/>
                       <a:r>
@@ -24739,7 +24739,7 @@
                           </a:solidFill>
                           <a:latin typeface="Times New Roman"/>
                         </a:rPr>
-                        <a:t>-12.82 Cr</a:t>
+                        <a:t>-12.78 Cr</a:t>
                       </a:r>
                     </a:p>
                   </a:txBody>
@@ -24782,7 +24782,7 @@
                           </a:solidFill>
                           <a:latin typeface="Times New Roman"/>
                         </a:rPr>
-                        <a:t>74.73</a:t>
+                        <a:t>74.81</a:t>
                       </a:r>
                     </a:p>
                   </a:txBody>
@@ -25009,7 +25009,7 @@
                           </a:solidFill>
                           <a:latin typeface="Times New Roman"/>
                         </a:rPr>
-                        <a:t>3,805,865</a:t>
+                        <a:t>4,286,712</a:t>
                       </a:r>
                       <a:br/>
                       <a:r>
@@ -25019,7 +25019,7 @@
                           </a:solidFill>
                           <a:latin typeface="Times New Roman"/>
                         </a:rPr>
-                        <a:t>380.59 Cr</a:t>
+                        <a:t>428.67 Cr</a:t>
                       </a:r>
                     </a:p>
                   </a:txBody>
@@ -25062,7 +25062,7 @@
                           </a:solidFill>
                           <a:latin typeface="Times New Roman"/>
                         </a:rPr>
-                        <a:t>843,070</a:t>
+                        <a:t>1,323,917</a:t>
                       </a:r>
                       <a:br/>
                       <a:r>
@@ -25072,7 +25072,7 @@
                           </a:solidFill>
                           <a:latin typeface="Times New Roman"/>
                         </a:rPr>
-                        <a:t>84.31 Cr</a:t>
+                        <a:t>132.39 Cr</a:t>
                       </a:r>
                     </a:p>
                   </a:txBody>
@@ -25115,7 +25115,7 @@
                           </a:solidFill>
                           <a:latin typeface="Times New Roman"/>
                         </a:rPr>
-                        <a:t>128.46</a:t>
+                        <a:t>144.68</a:t>
                       </a:r>
                     </a:p>
                   </a:txBody>
@@ -25342,7 +25342,7 @@
                           </a:solidFill>
                           <a:latin typeface="Times New Roman"/>
                         </a:rPr>
-                        <a:t>183,938</a:t>
+                        <a:t>187,787</a:t>
                       </a:r>
                       <a:br/>
                       <a:r>
@@ -25352,7 +25352,7 @@
                           </a:solidFill>
                           <a:latin typeface="Times New Roman"/>
                         </a:rPr>
-                        <a:t>18.39 Cr</a:t>
+                        <a:t>18.78 Cr</a:t>
                       </a:r>
                     </a:p>
                   </a:txBody>
@@ -25395,7 +25395,7 @@
                           </a:solidFill>
                           <a:latin typeface="Times New Roman"/>
                         </a:rPr>
-                        <a:t>51,671</a:t>
+                        <a:t>55,520</a:t>
                       </a:r>
                       <a:br/>
                       <a:r>
@@ -25405,7 +25405,7 @@
                           </a:solidFill>
                           <a:latin typeface="Times New Roman"/>
                         </a:rPr>
-                        <a:t>5.17 Cr</a:t>
+                        <a:t>5.55 Cr</a:t>
                       </a:r>
                     </a:p>
                   </a:txBody>
@@ -25448,7 +25448,7 @@
                           </a:solidFill>
                           <a:latin typeface="Times New Roman"/>
                         </a:rPr>
-                        <a:t>139.07</a:t>
+                        <a:t>141.98</a:t>
                       </a:r>
                     </a:p>
                   </a:txBody>
@@ -25675,7 +25675,7 @@
                           </a:solidFill>
                           <a:latin typeface="Times New Roman"/>
                         </a:rPr>
-                        <a:t>140,407</a:t>
+                        <a:t>251,247</a:t>
                       </a:r>
                       <a:br/>
                       <a:r>
@@ -25685,7 +25685,7 @@
                           </a:solidFill>
                           <a:latin typeface="Times New Roman"/>
                         </a:rPr>
-                        <a:t>14.04 Cr</a:t>
+                        <a:t>25.12 Cr</a:t>
                       </a:r>
                     </a:p>
                   </a:txBody>
@@ -25728,7 +25728,7 @@
                           </a:solidFill>
                           <a:latin typeface="Times New Roman"/>
                         </a:rPr>
-                        <a:t>-382,436</a:t>
+                        <a:t>-271,596</a:t>
                       </a:r>
                       <a:br/>
                       <a:r>
@@ -25738,7 +25738,7 @@
                           </a:solidFill>
                           <a:latin typeface="Times New Roman"/>
                         </a:rPr>
-                        <a:t>-38.24 Cr</a:t>
+                        <a:t>-27.16 Cr</a:t>
                       </a:r>
                     </a:p>
                   </a:txBody>
@@ -25781,7 +25781,7 @@
                           </a:solidFill>
                           <a:latin typeface="Times New Roman"/>
                         </a:rPr>
-                        <a:t>26.85</a:t>
+                        <a:t>48.05</a:t>
                       </a:r>
                     </a:p>
                   </a:txBody>
@@ -26674,7 +26674,7 @@
                           </a:solidFill>
                           <a:latin typeface="Times New Roman"/>
                         </a:rPr>
-                        <a:t>25,991</a:t>
+                        <a:t>29,430</a:t>
                       </a:r>
                       <a:br/>
                       <a:r>
@@ -26684,7 +26684,7 @@
                           </a:solidFill>
                           <a:latin typeface="Times New Roman"/>
                         </a:rPr>
-                        <a:t>2.60 Cr</a:t>
+                        <a:t>2.94 Cr</a:t>
                       </a:r>
                     </a:p>
                   </a:txBody>
@@ -26727,7 +26727,7 @@
                           </a:solidFill>
                           <a:latin typeface="Times New Roman"/>
                         </a:rPr>
-                        <a:t>-14,381</a:t>
+                        <a:t>-10,942</a:t>
                       </a:r>
                       <a:br/>
                       <a:r>
@@ -26737,7 +26737,7 @@
                           </a:solidFill>
                           <a:latin typeface="Times New Roman"/>
                         </a:rPr>
-                        <a:t>-1.44 Cr</a:t>
+                        <a:t>-1.09 Cr</a:t>
                       </a:r>
                     </a:p>
                   </a:txBody>
@@ -26780,7 +26780,7 @@
                           </a:solidFill>
                           <a:latin typeface="Times New Roman"/>
                         </a:rPr>
-                        <a:t>64.38</a:t>
+                        <a:t>72.90</a:t>
                       </a:r>
                     </a:p>
                   </a:txBody>
@@ -27340,7 +27340,7 @@
                           </a:solidFill>
                           <a:latin typeface="Times New Roman"/>
                         </a:rPr>
-                        <a:t>71,111</a:t>
+                        <a:t>72,216</a:t>
                       </a:r>
                       <a:br/>
                       <a:r>
@@ -27350,7 +27350,7 @@
                           </a:solidFill>
                           <a:latin typeface="Times New Roman"/>
                         </a:rPr>
-                        <a:t>7.11 Cr</a:t>
+                        <a:t>7.22 Cr</a:t>
                       </a:r>
                     </a:p>
                   </a:txBody>
@@ -27393,7 +27393,7 @@
                           </a:solidFill>
                           <a:latin typeface="Times New Roman"/>
                         </a:rPr>
-                        <a:t>-26,389</a:t>
+                        <a:t>-25,284</a:t>
                       </a:r>
                       <a:br/>
                       <a:r>
@@ -27403,7 +27403,7 @@
                           </a:solidFill>
                           <a:latin typeface="Times New Roman"/>
                         </a:rPr>
-                        <a:t>-2.64 Cr</a:t>
+                        <a:t>-2.53 Cr</a:t>
                       </a:r>
                     </a:p>
                   </a:txBody>
@@ -27446,7 +27446,7 @@
                           </a:solidFill>
                           <a:latin typeface="Times New Roman"/>
                         </a:rPr>
-                        <a:t>72.93</a:t>
+                        <a:t>74.07</a:t>
                       </a:r>
                     </a:p>
                   </a:txBody>
@@ -27673,7 +27673,7 @@
                           </a:solidFill>
                           <a:latin typeface="Times New Roman"/>
                         </a:rPr>
-                        <a:t>147,126</a:t>
+                        <a:t>155,585</a:t>
                       </a:r>
                       <a:br/>
                       <a:r>
@@ -27683,7 +27683,7 @@
                           </a:solidFill>
                           <a:latin typeface="Times New Roman"/>
                         </a:rPr>
-                        <a:t>14.71 Cr</a:t>
+                        <a:t>15.56 Cr</a:t>
                       </a:r>
                     </a:p>
                   </a:txBody>
@@ -27726,7 +27726,7 @@
                           </a:solidFill>
                           <a:latin typeface="Times New Roman"/>
                         </a:rPr>
-                        <a:t>-163,786</a:t>
+                        <a:t>-155,327</a:t>
                       </a:r>
                       <a:br/>
                       <a:r>
@@ -27736,7 +27736,7 @@
                           </a:solidFill>
                           <a:latin typeface="Times New Roman"/>
                         </a:rPr>
-                        <a:t>-16.38 Cr</a:t>
+                        <a:t>-15.53 Cr</a:t>
                       </a:r>
                     </a:p>
                   </a:txBody>
@@ -27779,7 +27779,7 @@
                           </a:solidFill>
                           <a:latin typeface="Times New Roman"/>
                         </a:rPr>
-                        <a:t>47.32</a:t>
+                        <a:t>50.04</a:t>
                       </a:r>
                     </a:p>
                   </a:txBody>
@@ -27913,7 +27913,7 @@
                 </a:solidFill>
                 <a:latin typeface="Times New Roman"/>
               </a:rPr>
-              <a:t>Open Line FR Report - As On 25.09.2026 (Rows 14-18)</a:t>
+              <a:t>Open Line FR Report - As On 05.10.2026 (Rows 14-18)</a:t>
             </a:r>
           </a:p>
         </p:txBody>
@@ -28790,7 +28790,7 @@
                           </a:solidFill>
                           <a:latin typeface="Times New Roman"/>
                         </a:rPr>
-                        <a:t>112,585</a:t>
+                        <a:t>113,720</a:t>
                       </a:r>
                       <a:br/>
                       <a:r>
@@ -28800,7 +28800,7 @@
                           </a:solidFill>
                           <a:latin typeface="Times New Roman"/>
                         </a:rPr>
-                        <a:t>11.26 Cr</a:t>
+                        <a:t>11.37 Cr</a:t>
                       </a:r>
                     </a:p>
                   </a:txBody>
@@ -28843,7 +28843,7 @@
                           </a:solidFill>
                           <a:latin typeface="Times New Roman"/>
                         </a:rPr>
-                        <a:t>-203,148</a:t>
+                        <a:t>-202,013</a:t>
                       </a:r>
                       <a:br/>
                       <a:r>
@@ -28853,7 +28853,7 @@
                           </a:solidFill>
                           <a:latin typeface="Times New Roman"/>
                         </a:rPr>
-                        <a:t>-20.31 Cr</a:t>
+                        <a:t>-20.20 Cr</a:t>
                       </a:r>
                     </a:p>
                   </a:txBody>
@@ -28896,7 +28896,7 @@
                           </a:solidFill>
                           <a:latin typeface="Times New Roman"/>
                         </a:rPr>
-                        <a:t>35.66</a:t>
+                        <a:t>36.02</a:t>
                       </a:r>
                     </a:p>
                   </a:txBody>
@@ -29789,7 +29789,7 @@
                           </a:solidFill>
                           <a:latin typeface="Times New Roman"/>
                         </a:rPr>
-                        <a:t>5,135,999</a:t>
+                        <a:t>5,745,060</a:t>
                       </a:r>
                       <a:br/>
                       <a:r>
@@ -29799,7 +29799,7 @@
                           </a:solidFill>
                           <a:latin typeface="Times New Roman"/>
                         </a:rPr>
-                        <a:t>513.60 Cr</a:t>
+                        <a:t>574.51 Cr</a:t>
                       </a:r>
                     </a:p>
                   </a:txBody>
@@ -29842,7 +29842,7 @@
                           </a:solidFill>
                           <a:latin typeface="Times New Roman"/>
                         </a:rPr>
-                        <a:t>-498,880</a:t>
+                        <a:t>110,181</a:t>
                       </a:r>
                       <a:br/>
                       <a:r>
@@ -29852,7 +29852,7 @@
                           </a:solidFill>
                           <a:latin typeface="Times New Roman"/>
                         </a:rPr>
-                        <a:t>-49.89 Cr</a:t>
+                        <a:t>11.02 Cr</a:t>
                       </a:r>
                     </a:p>
                   </a:txBody>
@@ -29891,37 +29891,37 @@
                       <a:r>
                         <a:rPr lang="en-US" sz="1130" b="1">
                           <a:solidFill>
-                            <a:srgbClr val="000000"/>
-                          </a:solidFill>
-                          <a:latin typeface="Times New Roman"/>
-                        </a:rPr>
-                        <a:t>91.15</a:t>
-                      </a:r>
-                    </a:p>
-                  </a:txBody>
-                  <a:tcPr marL="12000" marR="12000" marT="8000" marB="8000">
-                    <a:lnL w="12700">
-                      <a:solidFill>
-                        <a:srgbClr val="000000"/>
-                      </a:solidFill>
-                    </a:lnL>
-                    <a:lnR w="12700">
-                      <a:solidFill>
-                        <a:srgbClr val="000000"/>
-                      </a:solidFill>
-                    </a:lnR>
-                    <a:lnT w="12700">
-                      <a:solidFill>
-                        <a:srgbClr val="000000"/>
-                      </a:solidFill>
-                    </a:lnT>
-                    <a:lnB w="12700">
-                      <a:solidFill>
-                        <a:srgbClr val="000000"/>
-                      </a:solidFill>
-                    </a:lnB>
-                    <a:solidFill>
-                      <a:srgbClr val="F2C230"/>
+                            <a:srgbClr val="FFFFFF"/>
+                          </a:solidFill>
+                          <a:latin typeface="Times New Roman"/>
+                        </a:rPr>
+                        <a:t>101.96</a:t>
+                      </a:r>
+                    </a:p>
+                  </a:txBody>
+                  <a:tcPr marL="12000" marR="12000" marT="8000" marB="8000">
+                    <a:lnL w="12700">
+                      <a:solidFill>
+                        <a:srgbClr val="000000"/>
+                      </a:solidFill>
+                    </a:lnL>
+                    <a:lnR w="12700">
+                      <a:solidFill>
+                        <a:srgbClr val="000000"/>
+                      </a:solidFill>
+                    </a:lnR>
+                    <a:lnT w="12700">
+                      <a:solidFill>
+                        <a:srgbClr val="000000"/>
+                      </a:solidFill>
+                    </a:lnT>
+                    <a:lnB w="12700">
+                      <a:solidFill>
+                        <a:srgbClr val="000000"/>
+                      </a:solidFill>
+                    </a:lnB>
+                    <a:solidFill>
+                      <a:srgbClr val="D92323"/>
                     </a:solidFill>
                   </a:tcPr>
                 </a:tc>
@@ -30029,7 +30029,7 @@
                 </a:solidFill>
                 <a:latin typeface="Times New Roman"/>
               </a:rPr>
-              <a:t>Open Line FR Fund Wise - As On 25.09.2026</a:t>
+              <a:t>Open Line FR Fund Wise - As On 05.10.2026</a:t>
             </a:r>
           </a:p>
         </p:txBody>
@@ -30530,7 +30530,7 @@
                           </a:solidFill>
                           <a:latin typeface="Times New Roman"/>
                         </a:rPr>
-                        <a:t>457,028</a:t>
+                        <a:t>494,859</a:t>
                       </a:r>
                       <a:br/>
                       <a:r>
@@ -30540,7 +30540,7 @@
                           </a:solidFill>
                           <a:latin typeface="Times New Roman"/>
                         </a:rPr>
-                        <a:t>45.70 Cr</a:t>
+                        <a:t>49.49 Cr</a:t>
                       </a:r>
                     </a:p>
                   </a:txBody>
@@ -30583,7 +30583,7 @@
                           </a:solidFill>
                           <a:latin typeface="Times New Roman"/>
                         </a:rPr>
-                        <a:t>588,503</a:t>
+                        <a:t>550,672</a:t>
                       </a:r>
                       <a:br/>
                       <a:r>
@@ -30593,7 +30593,7 @@
                           </a:solidFill>
                           <a:latin typeface="Times New Roman"/>
                         </a:rPr>
-                        <a:t>58.85 Cr</a:t>
+                        <a:t>55.07 Cr</a:t>
                       </a:r>
                     </a:p>
                   </a:txBody>
@@ -30636,7 +30636,7 @@
                           </a:solidFill>
                           <a:latin typeface="Times New Roman"/>
                         </a:rPr>
-                        <a:t>43.71</a:t>
+                        <a:t>47.33</a:t>
                       </a:r>
                     </a:p>
                   </a:txBody>
@@ -30679,7 +30679,7 @@
                           </a:solidFill>
                           <a:latin typeface="Times New Roman"/>
                         </a:rPr>
-                        <a:t>56.29</a:t>
+                        <a:t>52.67</a:t>
                       </a:r>
                     </a:p>
                   </a:txBody>
@@ -30863,7 +30863,7 @@
                           </a:solidFill>
                           <a:latin typeface="Times New Roman"/>
                         </a:rPr>
-                        <a:t>21,238</a:t>
+                        <a:t>22,085</a:t>
                       </a:r>
                       <a:br/>
                       <a:r>
@@ -30873,7 +30873,7 @@
                           </a:solidFill>
                           <a:latin typeface="Times New Roman"/>
                         </a:rPr>
-                        <a:t>2.12 Cr</a:t>
+                        <a:t>2.21 Cr</a:t>
                       </a:r>
                     </a:p>
                   </a:txBody>
@@ -30916,7 +30916,7 @@
                           </a:solidFill>
                           <a:latin typeface="Times New Roman"/>
                         </a:rPr>
-                        <a:t>18,994</a:t>
+                        <a:t>18,147</a:t>
                       </a:r>
                       <a:br/>
                       <a:r>
@@ -30926,7 +30926,7 @@
                           </a:solidFill>
                           <a:latin typeface="Times New Roman"/>
                         </a:rPr>
-                        <a:t>1.90 Cr</a:t>
+                        <a:t>1.81 Cr</a:t>
                       </a:r>
                     </a:p>
                   </a:txBody>
@@ -30969,7 +30969,7 @@
                           </a:solidFill>
                           <a:latin typeface="Times New Roman"/>
                         </a:rPr>
-                        <a:t>52.79</a:t>
+                        <a:t>54.89</a:t>
                       </a:r>
                     </a:p>
                   </a:txBody>
@@ -31012,7 +31012,7 @@
                           </a:solidFill>
                           <a:latin typeface="Times New Roman"/>
                         </a:rPr>
-                        <a:t>47.21</a:t>
+                        <a:t>45.11</a:t>
                       </a:r>
                     </a:p>
                   </a:txBody>
@@ -31862,7 +31862,7 @@
                           </a:solidFill>
                           <a:latin typeface="Times New Roman"/>
                         </a:rPr>
-                        <a:t>3,844,908</a:t>
+                        <a:t>4,324,735</a:t>
                       </a:r>
                       <a:br/>
                       <a:r>
@@ -31872,7 +31872,7 @@
                           </a:solidFill>
                           <a:latin typeface="Times New Roman"/>
                         </a:rPr>
-                        <a:t>384.49 Cr</a:t>
+                        <a:t>432.47 Cr</a:t>
                       </a:r>
                     </a:p>
                   </a:txBody>
@@ -31915,7 +31915,7 @@
                           </a:solidFill>
                           <a:latin typeface="Times New Roman"/>
                         </a:rPr>
-                        <a:t>-727,393</a:t>
+                        <a:t>-1,207,220</a:t>
                       </a:r>
                       <a:br/>
                       <a:r>
@@ -31925,7 +31925,7 @@
                           </a:solidFill>
                           <a:latin typeface="Times New Roman"/>
                         </a:rPr>
-                        <a:t>-72.74 Cr</a:t>
+                        <a:t>-120.72 Cr</a:t>
                       </a:r>
                     </a:p>
                   </a:txBody>
@@ -31968,7 +31968,7 @@
                           </a:solidFill>
                           <a:latin typeface="Times New Roman"/>
                         </a:rPr>
-                        <a:t>123.33</a:t>
+                        <a:t>138.72</a:t>
                       </a:r>
                     </a:p>
                   </a:txBody>
@@ -32011,7 +32011,7 @@
                           </a:solidFill>
                           <a:latin typeface="Times New Roman"/>
                         </a:rPr>
-                        <a:t>-23.33</a:t>
+                        <a:t>-38.72</a:t>
                       </a:r>
                     </a:p>
                   </a:txBody>
@@ -32528,7 +32528,7 @@
                           </a:solidFill>
                           <a:latin typeface="Times New Roman"/>
                         </a:rPr>
-                        <a:t>794,366</a:t>
+                        <a:t>884,922</a:t>
                       </a:r>
                       <a:br/>
                       <a:r>
@@ -32538,7 +32538,7 @@
                           </a:solidFill>
                           <a:latin typeface="Times New Roman"/>
                         </a:rPr>
-                        <a:t>79.44 Cr</a:t>
+                        <a:t>88.49 Cr</a:t>
                       </a:r>
                     </a:p>
                   </a:txBody>
@@ -32581,7 +32581,7 @@
                           </a:solidFill>
                           <a:latin typeface="Times New Roman"/>
                         </a:rPr>
-                        <a:t>506,643</a:t>
+                        <a:t>416,087</a:t>
                       </a:r>
                       <a:br/>
                       <a:r>
@@ -32591,7 +32591,7 @@
                           </a:solidFill>
                           <a:latin typeface="Times New Roman"/>
                         </a:rPr>
-                        <a:t>50.66 Cr</a:t>
+                        <a:t>41.61 Cr</a:t>
                       </a:r>
                     </a:p>
                   </a:txBody>
@@ -32634,7 +32634,7 @@
                           </a:solidFill>
                           <a:latin typeface="Times New Roman"/>
                         </a:rPr>
-                        <a:t>61.06</a:t>
+                        <a:t>68.02</a:t>
                       </a:r>
                     </a:p>
                   </a:txBody>
@@ -32677,7 +32677,7 @@
                           </a:solidFill>
                           <a:latin typeface="Times New Roman"/>
                         </a:rPr>
-                        <a:t>38.94</a:t>
+                        <a:t>31.98</a:t>
                       </a:r>
                     </a:p>
                   </a:txBody>

--- a/exports/Moradabad_Division_DRM_Budget_FR_Analysis_H_Full_FY_2025_26_Actual.pptx
+++ b/exports/Moradabad_Division_DRM_Budget_FR_Analysis_H_Full_FY_2025_26_Actual.pptx
@@ -6185,7 +6185,7 @@
                 </a:solidFill>
                 <a:latin typeface="Times New Roman"/>
               </a:rPr>
-              <a:t>Demand SMH Wise - SEP 2026 | uploaded 2026-10-05T14:47:35+05:30</a:t>
+              <a:t>Demand SMH Wise - SEP 2026 | uploaded 2026-10-06T10:20:58+05:30</a:t>
             </a:r>
           </a:p>
         </p:txBody>
@@ -13284,7 +13284,7 @@
                 </a:solidFill>
                 <a:latin typeface="Times New Roman"/>
               </a:rPr>
-              <a:t>PU Wise - Staff - SEP 2026 | uploaded 2026-10-05T14:47:35+05:30</a:t>
+              <a:t>PU Wise - Staff - SEP 2026 | uploaded 2026-10-06T10:20:58+05:30</a:t>
             </a:r>
           </a:p>
         </p:txBody>
@@ -19780,7 +19780,7 @@
                 </a:solidFill>
                 <a:latin typeface="Times New Roman"/>
               </a:rPr>
-              <a:t>PU Wise - Non-Staff Part 1 - SEP 2026 | uploaded 2026-10-05T14:47:35+05:30</a:t>
+              <a:t>PU Wise - Non-Staff Part 1 - SEP 2026 | uploaded 2026-10-06T10:20:58+05:30</a:t>
             </a:r>
           </a:p>
         </p:txBody>

--- a/exports/Moradabad_Division_DRM_Budget_FR_Analysis_H_Full_FY_2025_26_Actual.pptx
+++ b/exports/Moradabad_Division_DRM_Budget_FR_Analysis_H_Full_FY_2025_26_Actual.pptx
@@ -12,6 +12,7 @@
     <p:sldId id="260" r:id="rIdSlide5"/>
     <p:sldId id="261" r:id="rIdSlide6"/>
     <p:sldId id="262" r:id="rIdSlide7"/>
+    <p:sldId id="263" r:id="rIdSlide8"/>
   </p:sldIdLst>
   <p:sldSz cx="12192000" cy="6858000"/>
   <p:notesSz cx="6858000" cy="9144000"/>
@@ -5837,6 +5838,243 @@
       </p:grpSpPr>
       <p:sp>
         <p:nvSpPr>
+          <p:cNvPr id="2" name="Title 1">
+            <a:extLst>
+              <a:ext uri="{FF2B5EF4-FFF2-40B4-BE49-F238E27FC236}">
+                <a16:creationId xmlns:a16="http://schemas.microsoft.com/office/drawing/2014/main" id="{CE7B5159-584C-4350-86DF-1495789BEBE2}"/>
+              </a:ext>
+            </a:extLst>
+          </p:cNvPr>
+          <p:cNvSpPr>
+            <a:spLocks noGrp="1"/>
+          </p:cNvSpPr>
+          <p:nvPr>
+            <p:ph type="ctrTitle"/>
+          </p:nvPr>
+        </p:nvSpPr>
+        <p:spPr>
+          <a:xfrm>
+            <a:off x="2643265" y="1163758"/>
+            <a:ext cx="8574622" cy="2616199"/>
+          </a:xfrm>
+        </p:spPr>
+        <p:txBody>
+          <a:bodyPr>
+            <a:normAutofit fontScale="90000"/>
+          </a:bodyPr>
+          <a:lstStyle/>
+          <a:p>
+            <a:pPr algn="ctr">
+              <a:buNone/>
+            </a:pPr>
+            <a:r>
+              <a:rPr sz="8000" b="1">
+                <a:solidFill>
+                  <a:schemeClr val="accent2">
+                    <a:lumMod val="50000"/>
+                  </a:schemeClr>
+                </a:solidFill>
+              </a:rPr>
+              <a:t>Moradabad Division</a:t>
+            </a:r>
+            <a:br/>
+            <a:r>
+              <a:rPr sz="8000" b="1">
+                <a:solidFill>
+                  <a:schemeClr val="accent2">
+                    <a:lumMod val="50000"/>
+                  </a:schemeClr>
+                </a:solidFill>
+              </a:rPr>
+              <a:t>Accounts Dept</a:t>
+            </a:r>
+            <a:br/>
+            <a:r>
+              <a:rPr sz="8000" b="1">
+                <a:solidFill>
+                  <a:schemeClr val="accent2">
+                    <a:lumMod val="50000"/>
+                  </a:schemeClr>
+                </a:solidFill>
+              </a:rPr>
+              <a:t>FY – 2026-2027</a:t>
+            </a:r>
+          </a:p>
+        </p:txBody>
+      </p:sp>
+      <p:sp>
+        <p:nvSpPr>
+          <p:cNvPr id="3" name="Subtitle 2">
+            <a:extLst>
+              <a:ext uri="{FF2B5EF4-FFF2-40B4-BE49-F238E27FC236}">
+                <a16:creationId xmlns:a16="http://schemas.microsoft.com/office/drawing/2014/main" id="{907B258E-CB94-4952-9FB8-D735A3626AB5}"/>
+              </a:ext>
+            </a:extLst>
+          </p:cNvPr>
+          <p:cNvSpPr>
+            <a:spLocks noGrp="1"/>
+          </p:cNvSpPr>
+          <p:nvPr>
+            <p:ph type="subTitle" idx="1"/>
+          </p:nvPr>
+        </p:nvSpPr>
+        <p:spPr>
+          <a:xfrm>
+            <a:off x="3659970" y="3779957"/>
+            <a:ext cx="6987645" cy="1388534"/>
+          </a:xfrm>
+        </p:spPr>
+        <p:txBody>
+          <a:bodyPr>
+            <a:normAutofit fontScale="92500" lnSpcReduction="10000"/>
+          </a:bodyPr>
+          <a:lstStyle/>
+          <a:p>
+            <a:pPr algn="ctr">
+              <a:buNone/>
+            </a:pPr>
+            <a:r>
+              <a:rPr sz="2400" b="1" dirty="0">
+                <a:solidFill>
+                  <a:schemeClr val="accent2">
+                    <a:lumMod val="50000"/>
+                  </a:schemeClr>
+                </a:solidFill>
+              </a:rPr>
+              <a:t>Budget &amp; FR Analysis (2026‑27)</a:t>
+            </a:r>
+            <a:r>
+              <a:rPr sz="2400" dirty="0">
+                <a:solidFill>
+                  <a:schemeClr val="accent2">
+                    <a:lumMod val="50000"/>
+                  </a:schemeClr>
+                </a:solidFill>
+              </a:rPr>
+              <a:t> </a:t>
+            </a:r>
+          </a:p>
+          <a:p>
+            <a:pPr algn="ctr">
+              <a:buNone/>
+            </a:pPr>
+            <a:r>
+              <a:rPr sz="2400" i="1" dirty="0">
+                <a:solidFill>
+                  <a:schemeClr val="accent2">
+                    <a:lumMod val="50000"/>
+                  </a:schemeClr>
+                </a:solidFill>
+              </a:rPr>
+              <a:t>Current Year &amp; Fund Review</a:t>
+            </a:r>
+          </a:p>
+          <a:p>
+            <a:pPr algn="ctr">
+              <a:buNone/>
+            </a:pPr>
+            <a:r>
+              <a:rPr sz="3200" b="1" dirty="0">
+                <a:solidFill>
+                  <a:schemeClr val="accent2">
+                    <a:lumMod val="50000"/>
+                  </a:schemeClr>
+                </a:solidFill>
+              </a:rPr>
+              <a:t>As on 05.10.2026</a:t>
+            </a:r>
+            <a:r>
+              <a:rPr sz="3200" b="1">
+                <a:solidFill>
+                  <a:schemeClr val="accent2">
+                    <a:lumMod val="50000"/>
+                  </a:schemeClr>
+                </a:solidFill>
+              </a:rPr>
+              <a:t/>
+            </a:r>
+            <a:r>
+              <a:rPr lang="en-US" sz="3200" b="1">
+                <a:solidFill>
+                  <a:schemeClr val="accent2">
+                    <a:lumMod val="50000"/>
+                  </a:schemeClr>
+                </a:solidFill>
+              </a:rPr>
+              <a:t/>
+            </a:r>
+            <a:r>
+              <a:rPr sz="3200" b="1">
+                <a:solidFill>
+                  <a:schemeClr val="accent2">
+                    <a:lumMod val="50000"/>
+                  </a:schemeClr>
+                </a:solidFill>
+              </a:rPr>
+              <a:t/>
+            </a:r>
+            <a:r>
+              <a:rPr lang="en-US" sz="3200" b="1">
+                <a:solidFill>
+                  <a:schemeClr val="accent2">
+                    <a:lumMod val="50000"/>
+                  </a:schemeClr>
+                </a:solidFill>
+              </a:rPr>
+              <a:t/>
+            </a:r>
+            <a:r>
+              <a:rPr sz="3200" b="1">
+                <a:solidFill>
+                  <a:schemeClr val="accent2">
+                    <a:lumMod val="50000"/>
+                  </a:schemeClr>
+                </a:solidFill>
+              </a:rPr>
+              <a:t/>
+            </a:r>
+            <a:endParaRPr sz="3200" b="1" dirty="0">
+              <a:solidFill>
+                <a:schemeClr val="accent2">
+                  <a:lumMod val="50000"/>
+                </a:schemeClr>
+              </a:solidFill>
+            </a:endParaRPr>
+          </a:p>
+        </p:txBody>
+      </p:sp>
+    </p:spTree>
+    <p:extLst>
+      <p:ext uri="{BB962C8B-B14F-4D97-AF65-F5344CB8AC3E}">
+        <p14:creationId xmlns:p14="http://schemas.microsoft.com/office/powerpoint/2010/main" val="3436389487"/>
+      </p:ext>
+    </p:extLst>
+  </p:cSld>
+  <p:clrMapOvr>
+    <a:masterClrMapping/>
+  </p:clrMapOvr>
+</p:sld>
+</file>
+
+<file path=ppt/slides/slide2.xml><?xml version="1.0" encoding="utf-8"?>
+<p:sld xmlns:a="http://schemas.openxmlformats.org/drawingml/2006/main" xmlns:r="http://schemas.openxmlformats.org/officeDocument/2006/relationships" xmlns:p="http://schemas.openxmlformats.org/presentationml/2006/main">
+  <p:cSld>
+    <p:spTree>
+      <p:nvGrpSpPr>
+        <p:cNvPr id="1" name=""/>
+        <p:cNvGrpSpPr/>
+        <p:nvPr/>
+      </p:nvGrpSpPr>
+      <p:grpSpPr>
+        <a:xfrm>
+          <a:off x="0" y="0"/>
+          <a:ext cx="0" cy="0"/>
+          <a:chOff x="0" y="0"/>
+          <a:chExt cx="0" cy="0"/>
+        </a:xfrm>
+      </p:grpSpPr>
+      <p:sp>
+        <p:nvSpPr>
           <p:cNvPr id="2" name="Text 2"/>
           <p:cNvSpPr/>
           <p:nvPr/>
@@ -6137,7 +6375,7 @@
 </p:sld>
 </file>
 
-<file path=ppt/slides/slide2.xml><?xml version="1.0" encoding="utf-8"?>
+<file path=ppt/slides/slide3.xml><?xml version="1.0" encoding="utf-8"?>
 <p:sld xmlns:a="http://schemas.openxmlformats.org/drawingml/2006/main" xmlns:r="http://schemas.openxmlformats.org/officeDocument/2006/relationships" xmlns:p="http://schemas.openxmlformats.org/presentationml/2006/main">
   <p:cSld>
     <p:spTree>
@@ -13236,7 +13474,7 @@
 </p:sld>
 </file>
 
-<file path=ppt/slides/slide3.xml><?xml version="1.0" encoding="utf-8"?>
+<file path=ppt/slides/slide4.xml><?xml version="1.0" encoding="utf-8"?>
 <p:sld xmlns:a="http://schemas.openxmlformats.org/drawingml/2006/main" xmlns:r="http://schemas.openxmlformats.org/officeDocument/2006/relationships" xmlns:p="http://schemas.openxmlformats.org/presentationml/2006/main">
   <p:cSld>
     <p:spTree>
@@ -19732,7 +19970,7 @@
 </p:sld>
 </file>
 
-<file path=ppt/slides/slide4.xml><?xml version="1.0" encoding="utf-8"?>
+<file path=ppt/slides/slide5.xml><?xml version="1.0" encoding="utf-8"?>
 <p:sld xmlns:a="http://schemas.openxmlformats.org/drawingml/2006/main" xmlns:r="http://schemas.openxmlformats.org/officeDocument/2006/relationships" xmlns:p="http://schemas.openxmlformats.org/presentationml/2006/main">
   <p:cSld>
     <p:spTree>
@@ -23085,7 +23323,7 @@
 </p:sld>
 </file>
 
-<file path=ppt/slides/slide5.xml><?xml version="1.0" encoding="utf-8"?>
+<file path=ppt/slides/slide6.xml><?xml version="1.0" encoding="utf-8"?>
 <p:sld xmlns:a="http://schemas.openxmlformats.org/drawingml/2006/main" xmlns:r="http://schemas.openxmlformats.org/officeDocument/2006/relationships" xmlns:p="http://schemas.openxmlformats.org/presentationml/2006/main">
   <p:cSld>
     <p:spTree>
@@ -27865,7 +28103,7 @@
 </p:sld>
 </file>
 
-<file path=ppt/slides/slide6.xml><?xml version="1.0" encoding="utf-8"?>
+<file path=ppt/slides/slide7.xml><?xml version="1.0" encoding="utf-8"?>
 <p:sld xmlns:a="http://schemas.openxmlformats.org/drawingml/2006/main" xmlns:r="http://schemas.openxmlformats.org/officeDocument/2006/relationships" xmlns:p="http://schemas.openxmlformats.org/presentationml/2006/main">
   <p:cSld>
     <p:spTree>
@@ -29981,7 +30219,7 @@
 </p:sld>
 </file>
 
-<file path=ppt/slides/slide7.xml><?xml version="1.0" encoding="utf-8"?>
+<file path=ppt/slides/slide8.xml><?xml version="1.0" encoding="utf-8"?>
 <p:sld xmlns:a="http://schemas.openxmlformats.org/drawingml/2006/main" xmlns:r="http://schemas.openxmlformats.org/officeDocument/2006/relationships" xmlns:p="http://schemas.openxmlformats.org/presentationml/2006/main">
   <p:cSld>
     <p:spTree>

--- a/exports/Moradabad_Division_DRM_Budget_FR_Analysis_H_Full_FY_2025_26_Actual.pptx
+++ b/exports/Moradabad_Division_DRM_Budget_FR_Analysis_H_Full_FY_2025_26_Actual.pptx
@@ -6423,7 +6423,7 @@
                 </a:solidFill>
                 <a:latin typeface="Times New Roman"/>
               </a:rPr>
-              <a:t>Demand SMH Wise - SEP 2026 | uploaded 2026-10-06T10:20:58+05:30</a:t>
+              <a:t>Demand SMH Wise - SEP 2026 | uploaded 2026-10-19T14:05:55+05:30</a:t>
             </a:r>
           </a:p>
         </p:txBody>
@@ -13522,7 +13522,7 @@
                 </a:solidFill>
                 <a:latin typeface="Times New Roman"/>
               </a:rPr>
-              <a:t>PU Wise - Staff - SEP 2026 | uploaded 2026-10-06T10:20:58+05:30</a:t>
+              <a:t>PU Wise - Staff - SEP 2026 | uploaded 2026-10-19T14:05:55+05:30</a:t>
             </a:r>
           </a:p>
         </p:txBody>
@@ -20018,7 +20018,7 @@
                 </a:solidFill>
                 <a:latin typeface="Times New Roman"/>
               </a:rPr>
-              <a:t>PU Wise - Non-Staff Part 1 - SEP 2026 | uploaded 2026-10-06T10:20:58+05:30</a:t>
+              <a:t>PU Wise - Non-Staff Part 1 - SEP 2026 | uploaded 2026-10-19T14:05:55+05:30</a:t>
             </a:r>
           </a:p>
         </p:txBody>

--- a/exports/Moradabad_Division_DRM_Budget_FR_Analysis_H_Full_FY_2025_26_Actual.pptx
+++ b/exports/Moradabad_Division_DRM_Budget_FR_Analysis_H_Full_FY_2025_26_Actual.pptx
@@ -5981,7 +5981,7 @@
                   </a:schemeClr>
                 </a:solidFill>
               </a:rPr>
-              <a:t>As on 05.10.2026</a:t>
+              <a:t>As on 19.10.2026</a:t>
             </a:r>
             <a:r>
               <a:rPr sz="3200" b="1">
@@ -23371,7 +23371,7 @@
                 </a:solidFill>
                 <a:latin typeface="Times New Roman"/>
               </a:rPr>
-              <a:t>Open Line FR Report - As On 05.10.2026 (Rows 1-13)</a:t>
+              <a:t>Open Line FR Report - As On 19.10.2026 (Rows 1-13)</a:t>
             </a:r>
           </a:p>
         </p:txBody>
@@ -23915,7 +23915,7 @@
                           </a:solidFill>
                           <a:latin typeface="Times New Roman"/>
                         </a:rPr>
-                        <a:t>80,418</a:t>
+                        <a:t>99,183</a:t>
                       </a:r>
                       <a:br/>
                       <a:r>
@@ -23925,7 +23925,7 @@
                           </a:solidFill>
                           <a:latin typeface="Times New Roman"/>
                         </a:rPr>
-                        <a:t>8.04 Cr</a:t>
+                        <a:t>9.92 Cr</a:t>
                       </a:r>
                     </a:p>
                   </a:txBody>
@@ -23968,7 +23968,7 @@
                           </a:solidFill>
                           <a:latin typeface="Times New Roman"/>
                         </a:rPr>
-                        <a:t>-80,485</a:t>
+                        <a:t>-61,720</a:t>
                       </a:r>
                       <a:br/>
                       <a:r>
@@ -23978,7 +23978,7 @@
                           </a:solidFill>
                           <a:latin typeface="Times New Roman"/>
                         </a:rPr>
-                        <a:t>-8.05 Cr</a:t>
+                        <a:t>-6.17 Cr</a:t>
                       </a:r>
                     </a:p>
                   </a:txBody>
@@ -24021,7 +24021,7 @@
                           </a:solidFill>
                           <a:latin typeface="Times New Roman"/>
                         </a:rPr>
-                        <a:t>49.98</a:t>
+                        <a:t>61.64</a:t>
                       </a:r>
                     </a:p>
                   </a:txBody>
@@ -24248,7 +24248,7 @@
                           </a:solidFill>
                           <a:latin typeface="Times New Roman"/>
                         </a:rPr>
-                        <a:t>12,890</a:t>
+                        <a:t>13,774</a:t>
                       </a:r>
                       <a:br/>
                       <a:r>
@@ -24258,7 +24258,7 @@
                           </a:solidFill>
                           <a:latin typeface="Times New Roman"/>
                         </a:rPr>
-                        <a:t>1.29 Cr</a:t>
+                        <a:t>1.38 Cr</a:t>
                       </a:r>
                     </a:p>
                   </a:txBody>
@@ -24301,7 +24301,7 @@
                           </a:solidFill>
                           <a:latin typeface="Times New Roman"/>
                         </a:rPr>
-                        <a:t>-19,337</a:t>
+                        <a:t>-18,453</a:t>
                       </a:r>
                       <a:br/>
                       <a:r>
@@ -24311,7 +24311,7 @@
                           </a:solidFill>
                           <a:latin typeface="Times New Roman"/>
                         </a:rPr>
-                        <a:t>-1.93 Cr</a:t>
+                        <a:t>-1.85 Cr</a:t>
                       </a:r>
                     </a:p>
                   </a:txBody>
@@ -24354,7 +24354,7 @@
                           </a:solidFill>
                           <a:latin typeface="Times New Roman"/>
                         </a:rPr>
-                        <a:t>40.00</a:t>
+                        <a:t>42.74</a:t>
                       </a:r>
                     </a:p>
                   </a:txBody>
@@ -24914,7 +24914,7 @@
                           </a:solidFill>
                           <a:latin typeface="Times New Roman"/>
                         </a:rPr>
-                        <a:t>379,598</a:t>
+                        <a:t>398,602</a:t>
                       </a:r>
                       <a:br/>
                       <a:r>
@@ -24924,7 +24924,7 @@
                           </a:solidFill>
                           <a:latin typeface="Times New Roman"/>
                         </a:rPr>
-                        <a:t>37.96 Cr</a:t>
+                        <a:t>39.86 Cr</a:t>
                       </a:r>
                     </a:p>
                   </a:txBody>
@@ -24967,7 +24967,7 @@
                           </a:solidFill>
                           <a:latin typeface="Times New Roman"/>
                         </a:rPr>
-                        <a:t>-127,822</a:t>
+                        <a:t>-108,818</a:t>
                       </a:r>
                       <a:br/>
                       <a:r>
@@ -24977,7 +24977,7 @@
                           </a:solidFill>
                           <a:latin typeface="Times New Roman"/>
                         </a:rPr>
-                        <a:t>-12.78 Cr</a:t>
+                        <a:t>-10.88 Cr</a:t>
                       </a:r>
                     </a:p>
                   </a:txBody>
@@ -25020,33 +25020,33 @@
                           </a:solidFill>
                           <a:latin typeface="Times New Roman"/>
                         </a:rPr>
-                        <a:t>74.81</a:t>
-                      </a:r>
-                    </a:p>
-                  </a:txBody>
-                  <a:tcPr marL="12000" marR="12000" marT="8000" marB="8000">
-                    <a:lnL w="12700">
-                      <a:solidFill>
-                        <a:srgbClr val="000000"/>
-                      </a:solidFill>
-                    </a:lnL>
-                    <a:lnR w="12700">
-                      <a:solidFill>
-                        <a:srgbClr val="000000"/>
-                      </a:solidFill>
-                    </a:lnR>
-                    <a:lnT w="12700">
-                      <a:solidFill>
-                        <a:srgbClr val="000000"/>
-                      </a:solidFill>
-                    </a:lnT>
-                    <a:lnB w="12700">
-                      <a:solidFill>
-                        <a:srgbClr val="000000"/>
-                      </a:solidFill>
-                    </a:lnB>
-                    <a:solidFill>
-                      <a:srgbClr val="DFF3E7"/>
+                        <a:t>78.55</a:t>
+                      </a:r>
+                    </a:p>
+                  </a:txBody>
+                  <a:tcPr marL="12000" marR="12000" marT="8000" marB="8000">
+                    <a:lnL w="12700">
+                      <a:solidFill>
+                        <a:srgbClr val="000000"/>
+                      </a:solidFill>
+                    </a:lnL>
+                    <a:lnR w="12700">
+                      <a:solidFill>
+                        <a:srgbClr val="000000"/>
+                      </a:solidFill>
+                    </a:lnR>
+                    <a:lnT w="12700">
+                      <a:solidFill>
+                        <a:srgbClr val="000000"/>
+                      </a:solidFill>
+                    </a:lnT>
+                    <a:lnB w="12700">
+                      <a:solidFill>
+                        <a:srgbClr val="000000"/>
+                      </a:solidFill>
+                    </a:lnB>
+                    <a:solidFill>
+                      <a:srgbClr val="FFF2CC"/>
                     </a:solidFill>
                   </a:tcPr>
                 </a:tc>
@@ -25247,7 +25247,7 @@
                           </a:solidFill>
                           <a:latin typeface="Times New Roman"/>
                         </a:rPr>
-                        <a:t>4,286,712</a:t>
+                        <a:t>4,376,267</a:t>
                       </a:r>
                       <a:br/>
                       <a:r>
@@ -25257,7 +25257,7 @@
                           </a:solidFill>
                           <a:latin typeface="Times New Roman"/>
                         </a:rPr>
-                        <a:t>428.67 Cr</a:t>
+                        <a:t>437.63 Cr</a:t>
                       </a:r>
                     </a:p>
                   </a:txBody>
@@ -25300,7 +25300,7 @@
                           </a:solidFill>
                           <a:latin typeface="Times New Roman"/>
                         </a:rPr>
-                        <a:t>1,323,917</a:t>
+                        <a:t>1,413,472</a:t>
                       </a:r>
                       <a:br/>
                       <a:r>
@@ -25310,7 +25310,7 @@
                           </a:solidFill>
                           <a:latin typeface="Times New Roman"/>
                         </a:rPr>
-                        <a:t>132.39 Cr</a:t>
+                        <a:t>141.35 Cr</a:t>
                       </a:r>
                     </a:p>
                   </a:txBody>
@@ -25353,7 +25353,7 @@
                           </a:solidFill>
                           <a:latin typeface="Times New Roman"/>
                         </a:rPr>
-                        <a:t>144.68</a:t>
+                        <a:t>147.71</a:t>
                       </a:r>
                     </a:p>
                   </a:txBody>
@@ -25580,7 +25580,7 @@
                           </a:solidFill>
                           <a:latin typeface="Times New Roman"/>
                         </a:rPr>
-                        <a:t>187,787</a:t>
+                        <a:t>187,876</a:t>
                       </a:r>
                       <a:br/>
                       <a:r>
@@ -25590,7 +25590,7 @@
                           </a:solidFill>
                           <a:latin typeface="Times New Roman"/>
                         </a:rPr>
-                        <a:t>18.78 Cr</a:t>
+                        <a:t>18.79 Cr</a:t>
                       </a:r>
                     </a:p>
                   </a:txBody>
@@ -25633,7 +25633,7 @@
                           </a:solidFill>
                           <a:latin typeface="Times New Roman"/>
                         </a:rPr>
-                        <a:t>55,520</a:t>
+                        <a:t>55,609</a:t>
                       </a:r>
                       <a:br/>
                       <a:r>
@@ -25643,7 +25643,7 @@
                           </a:solidFill>
                           <a:latin typeface="Times New Roman"/>
                         </a:rPr>
-                        <a:t>5.55 Cr</a:t>
+                        <a:t>5.56 Cr</a:t>
                       </a:r>
                     </a:p>
                   </a:txBody>
@@ -25686,7 +25686,7 @@
                           </a:solidFill>
                           <a:latin typeface="Times New Roman"/>
                         </a:rPr>
-                        <a:t>141.98</a:t>
+                        <a:t>142.04</a:t>
                       </a:r>
                     </a:p>
                   </a:txBody>
@@ -25913,7 +25913,7 @@
                           </a:solidFill>
                           <a:latin typeface="Times New Roman"/>
                         </a:rPr>
-                        <a:t>251,247</a:t>
+                        <a:t>307,683</a:t>
                       </a:r>
                       <a:br/>
                       <a:r>
@@ -25923,7 +25923,7 @@
                           </a:solidFill>
                           <a:latin typeface="Times New Roman"/>
                         </a:rPr>
-                        <a:t>25.12 Cr</a:t>
+                        <a:t>30.77 Cr</a:t>
                       </a:r>
                     </a:p>
                   </a:txBody>
@@ -25966,7 +25966,7 @@
                           </a:solidFill>
                           <a:latin typeface="Times New Roman"/>
                         </a:rPr>
-                        <a:t>-271,596</a:t>
+                        <a:t>-215,160</a:t>
                       </a:r>
                       <a:br/>
                       <a:r>
@@ -25976,7 +25976,7 @@
                           </a:solidFill>
                           <a:latin typeface="Times New Roman"/>
                         </a:rPr>
-                        <a:t>-27.16 Cr</a:t>
+                        <a:t>-21.52 Cr</a:t>
                       </a:r>
                     </a:p>
                   </a:txBody>
@@ -26019,7 +26019,7 @@
                           </a:solidFill>
                           <a:latin typeface="Times New Roman"/>
                         </a:rPr>
-                        <a:t>48.05</a:t>
+                        <a:t>58.85</a:t>
                       </a:r>
                     </a:p>
                   </a:txBody>
@@ -26246,7 +26246,7 @@
                           </a:solidFill>
                           <a:latin typeface="Times New Roman"/>
                         </a:rPr>
-                        <a:t>105,095</a:t>
+                        <a:t>107,120</a:t>
                       </a:r>
                       <a:br/>
                       <a:r>
@@ -26256,7 +26256,7 @@
                           </a:solidFill>
                           <a:latin typeface="Times New Roman"/>
                         </a:rPr>
-                        <a:t>10.51 Cr</a:t>
+                        <a:t>10.71 Cr</a:t>
                       </a:r>
                     </a:p>
                   </a:txBody>
@@ -26299,7 +26299,7 @@
                           </a:solidFill>
                           <a:latin typeface="Times New Roman"/>
                         </a:rPr>
-                        <a:t>-202,748</a:t>
+                        <a:t>-200,723</a:t>
                       </a:r>
                       <a:br/>
                       <a:r>
@@ -26309,7 +26309,7 @@
                           </a:solidFill>
                           <a:latin typeface="Times New Roman"/>
                         </a:rPr>
-                        <a:t>-20.27 Cr</a:t>
+                        <a:t>-20.07 Cr</a:t>
                       </a:r>
                     </a:p>
                   </a:txBody>
@@ -26352,7 +26352,7 @@
                           </a:solidFill>
                           <a:latin typeface="Times New Roman"/>
                         </a:rPr>
-                        <a:t>34.14</a:t>
+                        <a:t>34.80</a:t>
                       </a:r>
                     </a:p>
                   </a:txBody>
@@ -27245,7 +27245,7 @@
                           </a:solidFill>
                           <a:latin typeface="Times New Roman"/>
                         </a:rPr>
-                        <a:t>5,681</a:t>
+                        <a:t>8,185</a:t>
                       </a:r>
                       <a:br/>
                       <a:r>
@@ -27255,7 +27255,7 @@
                           </a:solidFill>
                           <a:latin typeface="Times New Roman"/>
                         </a:rPr>
-                        <a:t>0.57 Cr</a:t>
+                        <a:t>0.82 Cr</a:t>
                       </a:r>
                     </a:p>
                   </a:txBody>
@@ -27298,7 +27298,7 @@
                           </a:solidFill>
                           <a:latin typeface="Times New Roman"/>
                         </a:rPr>
-                        <a:t>-48,021</a:t>
+                        <a:t>-45,517</a:t>
                       </a:r>
                       <a:br/>
                       <a:r>
@@ -27308,7 +27308,7 @@
                           </a:solidFill>
                           <a:latin typeface="Times New Roman"/>
                         </a:rPr>
-                        <a:t>-4.80 Cr</a:t>
+                        <a:t>-4.55 Cr</a:t>
                       </a:r>
                     </a:p>
                   </a:txBody>
@@ -27351,7 +27351,7 @@
                           </a:solidFill>
                           <a:latin typeface="Times New Roman"/>
                         </a:rPr>
-                        <a:t>10.58</a:t>
+                        <a:t>15.24</a:t>
                       </a:r>
                     </a:p>
                   </a:txBody>
@@ -27578,7 +27578,7 @@
                           </a:solidFill>
                           <a:latin typeface="Times New Roman"/>
                         </a:rPr>
-                        <a:t>72,216</a:t>
+                        <a:t>79,886</a:t>
                       </a:r>
                       <a:br/>
                       <a:r>
@@ -27588,7 +27588,7 @@
                           </a:solidFill>
                           <a:latin typeface="Times New Roman"/>
                         </a:rPr>
-                        <a:t>7.22 Cr</a:t>
+                        <a:t>7.99 Cr</a:t>
                       </a:r>
                     </a:p>
                   </a:txBody>
@@ -27631,7 +27631,7 @@
                           </a:solidFill>
                           <a:latin typeface="Times New Roman"/>
                         </a:rPr>
-                        <a:t>-25,284</a:t>
+                        <a:t>-17,614</a:t>
                       </a:r>
                       <a:br/>
                       <a:r>
@@ -27641,7 +27641,7 @@
                           </a:solidFill>
                           <a:latin typeface="Times New Roman"/>
                         </a:rPr>
-                        <a:t>-2.53 Cr</a:t>
+                        <a:t>-1.76 Cr</a:t>
                       </a:r>
                     </a:p>
                   </a:txBody>
@@ -27684,33 +27684,33 @@
                           </a:solidFill>
                           <a:latin typeface="Times New Roman"/>
                         </a:rPr>
-                        <a:t>74.07</a:t>
-                      </a:r>
-                    </a:p>
-                  </a:txBody>
-                  <a:tcPr marL="12000" marR="12000" marT="8000" marB="8000">
-                    <a:lnL w="12700">
-                      <a:solidFill>
-                        <a:srgbClr val="000000"/>
-                      </a:solidFill>
-                    </a:lnL>
-                    <a:lnR w="12700">
-                      <a:solidFill>
-                        <a:srgbClr val="000000"/>
-                      </a:solidFill>
-                    </a:lnR>
-                    <a:lnT w="12700">
-                      <a:solidFill>
-                        <a:srgbClr val="000000"/>
-                      </a:solidFill>
-                    </a:lnT>
-                    <a:lnB w="12700">
-                      <a:solidFill>
-                        <a:srgbClr val="000000"/>
-                      </a:solidFill>
-                    </a:lnB>
-                    <a:solidFill>
-                      <a:srgbClr val="DFF3E7"/>
+                        <a:t>81.93</a:t>
+                      </a:r>
+                    </a:p>
+                  </a:txBody>
+                  <a:tcPr marL="12000" marR="12000" marT="8000" marB="8000">
+                    <a:lnL w="12700">
+                      <a:solidFill>
+                        <a:srgbClr val="000000"/>
+                      </a:solidFill>
+                    </a:lnL>
+                    <a:lnR w="12700">
+                      <a:solidFill>
+                        <a:srgbClr val="000000"/>
+                      </a:solidFill>
+                    </a:lnR>
+                    <a:lnT w="12700">
+                      <a:solidFill>
+                        <a:srgbClr val="000000"/>
+                      </a:solidFill>
+                    </a:lnT>
+                    <a:lnB w="12700">
+                      <a:solidFill>
+                        <a:srgbClr val="000000"/>
+                      </a:solidFill>
+                    </a:lnB>
+                    <a:solidFill>
+                      <a:srgbClr val="FFF2CC"/>
                     </a:solidFill>
                   </a:tcPr>
                 </a:tc>
@@ -27911,7 +27911,7 @@
                           </a:solidFill>
                           <a:latin typeface="Times New Roman"/>
                         </a:rPr>
-                        <a:t>155,585</a:t>
+                        <a:t>209,920</a:t>
                       </a:r>
                       <a:br/>
                       <a:r>
@@ -27921,7 +27921,7 @@
                           </a:solidFill>
                           <a:latin typeface="Times New Roman"/>
                         </a:rPr>
-                        <a:t>15.56 Cr</a:t>
+                        <a:t>20.99 Cr</a:t>
                       </a:r>
                     </a:p>
                   </a:txBody>
@@ -27964,7 +27964,7 @@
                           </a:solidFill>
                           <a:latin typeface="Times New Roman"/>
                         </a:rPr>
-                        <a:t>-155,327</a:t>
+                        <a:t>-100,992</a:t>
                       </a:r>
                       <a:br/>
                       <a:r>
@@ -27974,7 +27974,7 @@
                           </a:solidFill>
                           <a:latin typeface="Times New Roman"/>
                         </a:rPr>
-                        <a:t>-15.53 Cr</a:t>
+                        <a:t>-10.10 Cr</a:t>
                       </a:r>
                     </a:p>
                   </a:txBody>
@@ -28017,7 +28017,7 @@
                           </a:solidFill>
                           <a:latin typeface="Times New Roman"/>
                         </a:rPr>
-                        <a:t>50.04</a:t>
+                        <a:t>67.52</a:t>
                       </a:r>
                     </a:p>
                   </a:txBody>
@@ -28151,7 +28151,7 @@
                 </a:solidFill>
                 <a:latin typeface="Times New Roman"/>
               </a:rPr>
-              <a:t>Open Line FR Report - As On 05.10.2026 (Rows 14-18)</a:t>
+              <a:t>Open Line FR Report - As On 19.10.2026 (Rows 14-18)</a:t>
             </a:r>
           </a:p>
         </p:txBody>
@@ -29028,7 +29028,7 @@
                           </a:solidFill>
                           <a:latin typeface="Times New Roman"/>
                         </a:rPr>
-                        <a:t>113,720</a:t>
+                        <a:t>124,015</a:t>
                       </a:r>
                       <a:br/>
                       <a:r>
@@ -29038,7 +29038,7 @@
                           </a:solidFill>
                           <a:latin typeface="Times New Roman"/>
                         </a:rPr>
-                        <a:t>11.37 Cr</a:t>
+                        <a:t>12.40 Cr</a:t>
                       </a:r>
                     </a:p>
                   </a:txBody>
@@ -29081,7 +29081,7 @@
                           </a:solidFill>
                           <a:latin typeface="Times New Roman"/>
                         </a:rPr>
-                        <a:t>-202,013</a:t>
+                        <a:t>-191,718</a:t>
                       </a:r>
                       <a:br/>
                       <a:r>
@@ -29091,7 +29091,7 @@
                           </a:solidFill>
                           <a:latin typeface="Times New Roman"/>
                         </a:rPr>
-                        <a:t>-20.20 Cr</a:t>
+                        <a:t>-19.17 Cr</a:t>
                       </a:r>
                     </a:p>
                   </a:txBody>
@@ -29134,7 +29134,7 @@
                           </a:solidFill>
                           <a:latin typeface="Times New Roman"/>
                         </a:rPr>
-                        <a:t>36.02</a:t>
+                        <a:t>39.28</a:t>
                       </a:r>
                     </a:p>
                   </a:txBody>
@@ -30027,7 +30027,7 @@
                           </a:solidFill>
                           <a:latin typeface="Times New Roman"/>
                         </a:rPr>
-                        <a:t>5,745,060</a:t>
+                        <a:t>6,006,622</a:t>
                       </a:r>
                       <a:br/>
                       <a:r>
@@ -30037,7 +30037,7 @@
                           </a:solidFill>
                           <a:latin typeface="Times New Roman"/>
                         </a:rPr>
-                        <a:t>574.51 Cr</a:t>
+                        <a:t>600.66 Cr</a:t>
                       </a:r>
                     </a:p>
                   </a:txBody>
@@ -30080,7 +30080,7 @@
                           </a:solidFill>
                           <a:latin typeface="Times New Roman"/>
                         </a:rPr>
-                        <a:t>110,181</a:t>
+                        <a:t>371,743</a:t>
                       </a:r>
                       <a:br/>
                       <a:r>
@@ -30090,7 +30090,7 @@
                           </a:solidFill>
                           <a:latin typeface="Times New Roman"/>
                         </a:rPr>
-                        <a:t>11.02 Cr</a:t>
+                        <a:t>37.17 Cr</a:t>
                       </a:r>
                     </a:p>
                   </a:txBody>
@@ -30133,7 +30133,7 @@
                           </a:solidFill>
                           <a:latin typeface="Times New Roman"/>
                         </a:rPr>
-                        <a:t>101.96</a:t>
+                        <a:t>106.60</a:t>
                       </a:r>
                     </a:p>
                   </a:txBody>
@@ -30267,7 +30267,7 @@
                 </a:solidFill>
                 <a:latin typeface="Times New Roman"/>
               </a:rPr>
-              <a:t>Open Line FR Fund Wise - As On 05.10.2026</a:t>
+              <a:t>Open Line FR Fund Wise - As On 19.10.2026</a:t>
             </a:r>
           </a:p>
         </p:txBody>
@@ -30768,7 +30768,7 @@
                           </a:solidFill>
                           <a:latin typeface="Times New Roman"/>
                         </a:rPr>
-                        <a:t>494,859</a:t>
+                        <a:t>621,086</a:t>
                       </a:r>
                       <a:br/>
                       <a:r>
@@ -30778,7 +30778,7 @@
                           </a:solidFill>
                           <a:latin typeface="Times New Roman"/>
                         </a:rPr>
-                        <a:t>49.49 Cr</a:t>
+                        <a:t>62.11 Cr</a:t>
                       </a:r>
                     </a:p>
                   </a:txBody>
@@ -30821,7 +30821,7 @@
                           </a:solidFill>
                           <a:latin typeface="Times New Roman"/>
                         </a:rPr>
-                        <a:t>550,672</a:t>
+                        <a:t>424,445</a:t>
                       </a:r>
                       <a:br/>
                       <a:r>
@@ -30831,7 +30831,7 @@
                           </a:solidFill>
                           <a:latin typeface="Times New Roman"/>
                         </a:rPr>
-                        <a:t>55.07 Cr</a:t>
+                        <a:t>42.44 Cr</a:t>
                       </a:r>
                     </a:p>
                   </a:txBody>
@@ -30874,7 +30874,7 @@
                           </a:solidFill>
                           <a:latin typeface="Times New Roman"/>
                         </a:rPr>
-                        <a:t>47.33</a:t>
+                        <a:t>59.40</a:t>
                       </a:r>
                     </a:p>
                   </a:txBody>
@@ -30917,7 +30917,7 @@
                           </a:solidFill>
                           <a:latin typeface="Times New Roman"/>
                         </a:rPr>
-                        <a:t>52.67</a:t>
+                        <a:t>40.60</a:t>
                       </a:r>
                     </a:p>
                   </a:txBody>
@@ -31101,7 +31101,7 @@
                           </a:solidFill>
                           <a:latin typeface="Times New Roman"/>
                         </a:rPr>
-                        <a:t>22,085</a:t>
+                        <a:t>25,605</a:t>
                       </a:r>
                       <a:br/>
                       <a:r>
@@ -31111,7 +31111,7 @@
                           </a:solidFill>
                           <a:latin typeface="Times New Roman"/>
                         </a:rPr>
-                        <a:t>2.21 Cr</a:t>
+                        <a:t>2.56 Cr</a:t>
                       </a:r>
                     </a:p>
                   </a:txBody>
@@ -31154,7 +31154,7 @@
                           </a:solidFill>
                           <a:latin typeface="Times New Roman"/>
                         </a:rPr>
-                        <a:t>18,147</a:t>
+                        <a:t>14,627</a:t>
                       </a:r>
                       <a:br/>
                       <a:r>
@@ -31164,7 +31164,7 @@
                           </a:solidFill>
                           <a:latin typeface="Times New Roman"/>
                         </a:rPr>
-                        <a:t>1.81 Cr</a:t>
+                        <a:t>1.46 Cr</a:t>
                       </a:r>
                     </a:p>
                   </a:txBody>
@@ -31207,7 +31207,7 @@
                           </a:solidFill>
                           <a:latin typeface="Times New Roman"/>
                         </a:rPr>
-                        <a:t>54.89</a:t>
+                        <a:t>63.64</a:t>
                       </a:r>
                     </a:p>
                   </a:txBody>
@@ -31250,7 +31250,7 @@
                           </a:solidFill>
                           <a:latin typeface="Times New Roman"/>
                         </a:rPr>
-                        <a:t>45.11</a:t>
+                        <a:t>36.36</a:t>
                       </a:r>
                     </a:p>
                   </a:txBody>
@@ -31434,7 +31434,7 @@
                           </a:solidFill>
                           <a:latin typeface="Times New Roman"/>
                         </a:rPr>
-                        <a:t>18,459</a:t>
+                        <a:t>18,607</a:t>
                       </a:r>
                       <a:br/>
                       <a:r>
@@ -31444,7 +31444,7 @@
                           </a:solidFill>
                           <a:latin typeface="Times New Roman"/>
                         </a:rPr>
-                        <a:t>1.85 Cr</a:t>
+                        <a:t>1.86 Cr</a:t>
                       </a:r>
                     </a:p>
                   </a:txBody>
@@ -31487,7 +31487,7 @@
                           </a:solidFill>
                           <a:latin typeface="Times New Roman"/>
                         </a:rPr>
-                        <a:t>112,133</a:t>
+                        <a:t>111,985</a:t>
                       </a:r>
                       <a:br/>
                       <a:r>
@@ -31497,7 +31497,7 @@
                           </a:solidFill>
                           <a:latin typeface="Times New Roman"/>
                         </a:rPr>
-                        <a:t>11.21 Cr</a:t>
+                        <a:t>11.20 Cr</a:t>
                       </a:r>
                     </a:p>
                   </a:txBody>
@@ -31540,7 +31540,7 @@
                           </a:solidFill>
                           <a:latin typeface="Times New Roman"/>
                         </a:rPr>
-                        <a:t>14.13</a:t>
+                        <a:t>14.25</a:t>
                       </a:r>
                     </a:p>
                   </a:txBody>
@@ -31583,7 +31583,7 @@
                           </a:solidFill>
                           <a:latin typeface="Times New Roman"/>
                         </a:rPr>
-                        <a:t>85.87</a:t>
+                        <a:t>85.75</a:t>
                       </a:r>
                     </a:p>
                   </a:txBody>
@@ -32100,7 +32100,7 @@
                           </a:solidFill>
                           <a:latin typeface="Times New Roman"/>
                         </a:rPr>
-                        <a:t>4,324,735</a:t>
+                        <a:t>4,405,363</a:t>
                       </a:r>
                       <a:br/>
                       <a:r>
@@ -32110,7 +32110,7 @@
                           </a:solidFill>
                           <a:latin typeface="Times New Roman"/>
                         </a:rPr>
-                        <a:t>432.47 Cr</a:t>
+                        <a:t>440.54 Cr</a:t>
                       </a:r>
                     </a:p>
                   </a:txBody>
@@ -32153,7 +32153,7 @@
                           </a:solidFill>
                           <a:latin typeface="Times New Roman"/>
                         </a:rPr>
-                        <a:t>-1,207,220</a:t>
+                        <a:t>-1,287,848</a:t>
                       </a:r>
                       <a:br/>
                       <a:r>
@@ -32163,7 +32163,7 @@
                           </a:solidFill>
                           <a:latin typeface="Times New Roman"/>
                         </a:rPr>
-                        <a:t>-120.72 Cr</a:t>
+                        <a:t>-128.78 Cr</a:t>
                       </a:r>
                     </a:p>
                   </a:txBody>
@@ -32206,7 +32206,7 @@
                           </a:solidFill>
                           <a:latin typeface="Times New Roman"/>
                         </a:rPr>
-                        <a:t>138.72</a:t>
+                        <a:t>141.31</a:t>
                       </a:r>
                     </a:p>
                   </a:txBody>
@@ -32249,7 +32249,7 @@
                           </a:solidFill>
                           <a:latin typeface="Times New Roman"/>
                         </a:rPr>
-                        <a:t>-38.72</a:t>
+                        <a:t>-41.31</a:t>
                       </a:r>
                     </a:p>
                   </a:txBody>
@@ -32766,7 +32766,7 @@
                           </a:solidFill>
                           <a:latin typeface="Times New Roman"/>
                         </a:rPr>
-                        <a:t>884,922</a:t>
+                        <a:t>935,961</a:t>
                       </a:r>
                       <a:br/>
                       <a:r>
@@ -32776,7 +32776,7 @@
                           </a:solidFill>
                           <a:latin typeface="Times New Roman"/>
                         </a:rPr>
-                        <a:t>88.49 Cr</a:t>
+                        <a:t>93.60 Cr</a:t>
                       </a:r>
                     </a:p>
                   </a:txBody>
@@ -32819,7 +32819,7 @@
                           </a:solidFill>
                           <a:latin typeface="Times New Roman"/>
                         </a:rPr>
-                        <a:t>416,087</a:t>
+                        <a:t>365,048</a:t>
                       </a:r>
                       <a:br/>
                       <a:r>
@@ -32829,7 +32829,7 @@
                           </a:solidFill>
                           <a:latin typeface="Times New Roman"/>
                         </a:rPr>
-                        <a:t>41.61 Cr</a:t>
+                        <a:t>36.50 Cr</a:t>
                       </a:r>
                     </a:p>
                   </a:txBody>
@@ -32872,7 +32872,7 @@
                           </a:solidFill>
                           <a:latin typeface="Times New Roman"/>
                         </a:rPr>
-                        <a:t>68.02</a:t>
+                        <a:t>71.94</a:t>
                       </a:r>
                     </a:p>
                   </a:txBody>
@@ -32915,7 +32915,7 @@
                           </a:solidFill>
                           <a:latin typeface="Times New Roman"/>
                         </a:rPr>
-                        <a:t>31.98</a:t>
+                        <a:t>28.06</a:t>
                       </a:r>
                     </a:p>
                   </a:txBody>

--- a/exports/Moradabad_Division_DRM_Budget_FR_Analysis_H_Full_FY_2025_26_Actual.pptx
+++ b/exports/Moradabad_Division_DRM_Budget_FR_Analysis_H_Full_FY_2025_26_Actual.pptx
@@ -6423,7 +6423,7 @@
                 </a:solidFill>
                 <a:latin typeface="Times New Roman"/>
               </a:rPr>
-              <a:t>Demand SMH Wise - SEP 2026 | uploaded 2026-10-19T14:05:55+05:30</a:t>
+              <a:t>Demand SMH Wise - SEP 2026 | uploaded 2026-10-27T11:36:19+05:30</a:t>
             </a:r>
           </a:p>
         </p:txBody>
@@ -7166,7 +7166,7 @@
                           </a:solidFill>
                           <a:latin typeface="Times New Roman"/>
                         </a:rPr>
-                        <a:t>641,522</a:t>
+                        <a:t>643,222</a:t>
                       </a:r>
                       <a:br/>
                       <a:r>
@@ -7176,7 +7176,7 @@
                           </a:solidFill>
                           <a:latin typeface="Times New Roman"/>
                         </a:rPr>
-                        <a:t>64.15 Cr</a:t>
+                        <a:t>64.32 Cr</a:t>
                       </a:r>
                     </a:p>
                   </a:txBody>
@@ -7219,7 +7219,7 @@
                           </a:solidFill>
                           <a:latin typeface="Times New Roman"/>
                         </a:rPr>
-                        <a:t>320,761</a:t>
+                        <a:t>321,611</a:t>
                       </a:r>
                       <a:br/>
                       <a:r>
@@ -7229,7 +7229,7 @@
                           </a:solidFill>
                           <a:latin typeface="Times New Roman"/>
                         </a:rPr>
-                        <a:t>32.08 Cr</a:t>
+                        <a:t>32.16 Cr</a:t>
                       </a:r>
                     </a:p>
                   </a:txBody>
@@ -7325,7 +7325,7 @@
                           </a:solidFill>
                           <a:latin typeface="Times New Roman"/>
                         </a:rPr>
-                        <a:t>32,751</a:t>
+                        <a:t>31,901</a:t>
                       </a:r>
                       <a:br/>
                       <a:r>
@@ -7335,7 +7335,7 @@
                           </a:solidFill>
                           <a:latin typeface="Times New Roman"/>
                         </a:rPr>
-                        <a:t>3.28 Cr</a:t>
+                        <a:t>3.19 Cr</a:t>
                       </a:r>
                     </a:p>
                   </a:txBody>
@@ -7421,7 +7421,7 @@
                           </a:solidFill>
                           <a:latin typeface="Times New Roman"/>
                         </a:rPr>
-                        <a:t>288,010</a:t>
+                        <a:t>289,710</a:t>
                       </a:r>
                       <a:br/>
                       <a:r>
@@ -7431,7 +7431,7 @@
                           </a:solidFill>
                           <a:latin typeface="Times New Roman"/>
                         </a:rPr>
-                        <a:t>28.80 Cr</a:t>
+                        <a:t>28.97 Cr</a:t>
                       </a:r>
                     </a:p>
                   </a:txBody>
@@ -7658,7 +7658,7 @@
                           </a:solidFill>
                           <a:latin typeface="Times New Roman"/>
                         </a:rPr>
-                        <a:t>3,608,902</a:t>
+                        <a:t>3,809,302</a:t>
                       </a:r>
                       <a:br/>
                       <a:r>
@@ -7668,7 +7668,7 @@
                           </a:solidFill>
                           <a:latin typeface="Times New Roman"/>
                         </a:rPr>
-                        <a:t>360.89 Cr</a:t>
+                        <a:t>380.93 Cr</a:t>
                       </a:r>
                     </a:p>
                   </a:txBody>
@@ -7711,7 +7711,7 @@
                           </a:solidFill>
                           <a:latin typeface="Times New Roman"/>
                         </a:rPr>
-                        <a:t>1,804,451</a:t>
+                        <a:t>1,904,651</a:t>
                       </a:r>
                       <a:br/>
                       <a:r>
@@ -7721,7 +7721,7 @@
                           </a:solidFill>
                           <a:latin typeface="Times New Roman"/>
                         </a:rPr>
-                        <a:t>180.45 Cr</a:t>
+                        <a:t>190.47 Cr</a:t>
                       </a:r>
                     </a:p>
                   </a:txBody>
@@ -7817,7 +7817,7 @@
                           </a:solidFill>
                           <a:latin typeface="Times New Roman"/>
                         </a:rPr>
-                        <a:t>321,923</a:t>
+                        <a:t>221,723</a:t>
                       </a:r>
                       <a:br/>
                       <a:r>
@@ -7827,7 +7827,7 @@
                           </a:solidFill>
                           <a:latin typeface="Times New Roman"/>
                         </a:rPr>
-                        <a:t>32.19 Cr</a:t>
+                        <a:t>22.17 Cr</a:t>
                       </a:r>
                     </a:p>
                   </a:txBody>
@@ -7870,7 +7870,7 @@
                           </a:solidFill>
                           <a:latin typeface="Times New Roman"/>
                         </a:rPr>
-                        <a:t>118</a:t>
+                        <a:t>112</a:t>
                       </a:r>
                     </a:p>
                   </a:txBody>
@@ -7913,7 +7913,7 @@
                           </a:solidFill>
                           <a:latin typeface="Times New Roman"/>
                         </a:rPr>
-                        <a:t>1,482,528</a:t>
+                        <a:t>1,682,928</a:t>
                       </a:r>
                       <a:br/>
                       <a:r>
@@ -7923,7 +7923,7 @@
                           </a:solidFill>
                           <a:latin typeface="Times New Roman"/>
                         </a:rPr>
-                        <a:t>148.25 Cr</a:t>
+                        <a:t>168.29 Cr</a:t>
                       </a:r>
                     </a:p>
                   </a:txBody>
@@ -7966,7 +7966,7 @@
                           </a:solidFill>
                           <a:latin typeface="Times New Roman"/>
                         </a:rPr>
-                        <a:t>59</a:t>
+                        <a:t>56</a:t>
                       </a:r>
                     </a:p>
                   </a:txBody>
@@ -9134,7 +9134,7 @@
                           </a:solidFill>
                           <a:latin typeface="Times New Roman"/>
                         </a:rPr>
-                        <a:t>2,059,950</a:t>
+                        <a:t>2,111,950</a:t>
                       </a:r>
                       <a:br/>
                       <a:r>
@@ -9144,7 +9144,7 @@
                           </a:solidFill>
                           <a:latin typeface="Times New Roman"/>
                         </a:rPr>
-                        <a:t>206.00 Cr</a:t>
+                        <a:t>211.19 Cr</a:t>
                       </a:r>
                     </a:p>
                   </a:txBody>
@@ -9187,7 +9187,7 @@
                           </a:solidFill>
                           <a:latin typeface="Times New Roman"/>
                         </a:rPr>
-                        <a:t>1,029,975</a:t>
+                        <a:t>1,055,975</a:t>
                       </a:r>
                       <a:br/>
                       <a:r>
@@ -9197,7 +9197,7 @@
                           </a:solidFill>
                           <a:latin typeface="Times New Roman"/>
                         </a:rPr>
-                        <a:t>103.00 Cr</a:t>
+                        <a:t>105.60 Cr</a:t>
                       </a:r>
                     </a:p>
                   </a:txBody>
@@ -9293,7 +9293,7 @@
                           </a:solidFill>
                           <a:latin typeface="Times New Roman"/>
                         </a:rPr>
-                        <a:t>162,435</a:t>
+                        <a:t>136,435</a:t>
                       </a:r>
                       <a:br/>
                       <a:r>
@@ -9303,7 +9303,7 @@
                           </a:solidFill>
                           <a:latin typeface="Times New Roman"/>
                         </a:rPr>
-                        <a:t>16.24 Cr</a:t>
+                        <a:t>13.64 Cr</a:t>
                       </a:r>
                     </a:p>
                   </a:txBody>
@@ -9346,7 +9346,7 @@
                           </a:solidFill>
                           <a:latin typeface="Times New Roman"/>
                         </a:rPr>
-                        <a:t>116</a:t>
+                        <a:t>113</a:t>
                       </a:r>
                     </a:p>
                   </a:txBody>
@@ -9389,7 +9389,7 @@
                           </a:solidFill>
                           <a:latin typeface="Times New Roman"/>
                         </a:rPr>
-                        <a:t>867,540</a:t>
+                        <a:t>919,540</a:t>
                       </a:r>
                       <a:br/>
                       <a:r>
@@ -9399,7 +9399,7 @@
                           </a:solidFill>
                           <a:latin typeface="Times New Roman"/>
                         </a:rPr>
-                        <a:t>86.75 Cr</a:t>
+                        <a:t>91.95 Cr</a:t>
                       </a:r>
                     </a:p>
                   </a:txBody>
@@ -9442,7 +9442,7 @@
                           </a:solidFill>
                           <a:latin typeface="Times New Roman"/>
                         </a:rPr>
-                        <a:t>58</a:t>
+                        <a:t>56</a:t>
                       </a:r>
                     </a:p>
                   </a:txBody>
@@ -10118,7 +10118,7 @@
                           </a:solidFill>
                           <a:latin typeface="Times New Roman"/>
                         </a:rPr>
-                        <a:t>4,428,766</a:t>
+                        <a:t>4,504,666</a:t>
                       </a:r>
                       <a:br/>
                       <a:r>
@@ -10128,7 +10128,7 @@
                           </a:solidFill>
                           <a:latin typeface="Times New Roman"/>
                         </a:rPr>
-                        <a:t>442.88 Cr</a:t>
+                        <a:t>450.47 Cr</a:t>
                       </a:r>
                     </a:p>
                   </a:txBody>
@@ -10171,7 +10171,7 @@
                           </a:solidFill>
                           <a:latin typeface="Times New Roman"/>
                         </a:rPr>
-                        <a:t>2,214,383</a:t>
+                        <a:t>2,252,333</a:t>
                       </a:r>
                       <a:br/>
                       <a:r>
@@ -10181,7 +10181,7 @@
                           </a:solidFill>
                           <a:latin typeface="Times New Roman"/>
                         </a:rPr>
-                        <a:t>221.44 Cr</a:t>
+                        <a:t>225.23 Cr</a:t>
                       </a:r>
                     </a:p>
                   </a:txBody>
@@ -10277,7 +10277,7 @@
                           </a:solidFill>
                           <a:latin typeface="Times New Roman"/>
                         </a:rPr>
-                        <a:t>388,218</a:t>
+                        <a:t>350,268</a:t>
                       </a:r>
                       <a:br/>
                       <a:r>
@@ -10287,7 +10287,7 @@
                           </a:solidFill>
                           <a:latin typeface="Times New Roman"/>
                         </a:rPr>
-                        <a:t>38.82 Cr</a:t>
+                        <a:t>35.03 Cr</a:t>
                       </a:r>
                     </a:p>
                   </a:txBody>
@@ -10330,7 +10330,7 @@
                           </a:solidFill>
                           <a:latin typeface="Times New Roman"/>
                         </a:rPr>
-                        <a:t>118</a:t>
+                        <a:t>116</a:t>
                       </a:r>
                     </a:p>
                   </a:txBody>
@@ -10373,7 +10373,7 @@
                           </a:solidFill>
                           <a:latin typeface="Times New Roman"/>
                         </a:rPr>
-                        <a:t>1,826,165</a:t>
+                        <a:t>1,902,065</a:t>
                       </a:r>
                       <a:br/>
                       <a:r>
@@ -10383,7 +10383,7 @@
                           </a:solidFill>
                           <a:latin typeface="Times New Roman"/>
                         </a:rPr>
-                        <a:t>182.62 Cr</a:t>
+                        <a:t>190.21 Cr</a:t>
                       </a:r>
                     </a:p>
                   </a:txBody>
@@ -10426,7 +10426,7 @@
                           </a:solidFill>
                           <a:latin typeface="Times New Roman"/>
                         </a:rPr>
-                        <a:t>59</a:t>
+                        <a:t>58</a:t>
                       </a:r>
                     </a:p>
                   </a:txBody>
@@ -12578,7 +12578,7 @@
                           </a:solidFill>
                           <a:latin typeface="Times New Roman"/>
                         </a:rPr>
-                        <a:t>32,595,873</a:t>
+                        <a:t>32,925,873</a:t>
                       </a:r>
                       <a:br/>
                       <a:r>
@@ -12588,7 +12588,7 @@
                           </a:solidFill>
                           <a:latin typeface="Times New Roman"/>
                         </a:rPr>
-                        <a:t>3259.59 Cr</a:t>
+                        <a:t>3292.59 Cr</a:t>
                       </a:r>
                     </a:p>
                   </a:txBody>
@@ -12631,7 +12631,7 @@
                           </a:solidFill>
                           <a:latin typeface="Times New Roman"/>
                         </a:rPr>
-                        <a:t>16,297,936</a:t>
+                        <a:t>16,462,936</a:t>
                       </a:r>
                       <a:br/>
                       <a:r>
@@ -12641,7 +12641,7 @@
                           </a:solidFill>
                           <a:latin typeface="Times New Roman"/>
                         </a:rPr>
-                        <a:t>1629.79 Cr</a:t>
+                        <a:t>1646.29 Cr</a:t>
                       </a:r>
                     </a:p>
                   </a:txBody>
@@ -12737,7 +12737,7 @@
                           </a:solidFill>
                           <a:latin typeface="Times New Roman"/>
                         </a:rPr>
-                        <a:t>3,620,384</a:t>
+                        <a:t>3,455,384</a:t>
                       </a:r>
                       <a:br/>
                       <a:r>
@@ -12747,7 +12747,7 @@
                           </a:solidFill>
                           <a:latin typeface="Times New Roman"/>
                         </a:rPr>
-                        <a:t>362.04 Cr</a:t>
+                        <a:t>345.54 Cr</a:t>
                       </a:r>
                     </a:p>
                   </a:txBody>
@@ -12790,7 +12790,7 @@
                           </a:solidFill>
                           <a:latin typeface="Times New Roman"/>
                         </a:rPr>
-                        <a:t>122</a:t>
+                        <a:t>121</a:t>
                       </a:r>
                     </a:p>
                   </a:txBody>
@@ -12833,7 +12833,7 @@
                           </a:solidFill>
                           <a:latin typeface="Times New Roman"/>
                         </a:rPr>
-                        <a:t>12,677,552</a:t>
+                        <a:t>13,007,552</a:t>
                       </a:r>
                       <a:br/>
                       <a:r>
@@ -12843,7 +12843,7 @@
                           </a:solidFill>
                           <a:latin typeface="Times New Roman"/>
                         </a:rPr>
-                        <a:t>1267.76 Cr</a:t>
+                        <a:t>1300.76 Cr</a:t>
                       </a:r>
                     </a:p>
                   </a:txBody>
@@ -12886,7 +12886,7 @@
                           </a:solidFill>
                           <a:latin typeface="Times New Roman"/>
                         </a:rPr>
-                        <a:t>61</a:t>
+                        <a:t>60</a:t>
                       </a:r>
                     </a:p>
                   </a:txBody>
@@ -13522,7 +13522,7 @@
                 </a:solidFill>
                 <a:latin typeface="Times New Roman"/>
               </a:rPr>
-              <a:t>PU Wise - Staff - SEP 2026 | uploaded 2026-10-19T14:05:55+05:30</a:t>
+              <a:t>PU Wise - Staff - SEP 2026 | uploaded 2026-10-27T11:36:19+05:30</a:t>
             </a:r>
           </a:p>
         </p:txBody>
@@ -20018,7 +20018,7 @@
                 </a:solidFill>
                 <a:latin typeface="Times New Roman"/>
               </a:rPr>
-              <a:t>PU Wise - Non-Staff Part 1 - SEP 2026 | uploaded 2026-10-19T14:05:55+05:30</a:t>
+              <a:t>PU Wise - Non-Staff Part 1 - SEP 2026 | uploaded 2026-10-27T11:36:19+05:30</a:t>
             </a:r>
           </a:p>
         </p:txBody>
@@ -21123,7 +21123,7 @@
                           </a:solidFill>
                           <a:latin typeface="Times New Roman"/>
                         </a:rPr>
-                        <a:t>149,947</a:t>
+                        <a:t>192,347</a:t>
                       </a:r>
                       <a:br/>
                       <a:r>
@@ -21133,7 +21133,7 @@
                           </a:solidFill>
                           <a:latin typeface="Times New Roman"/>
                         </a:rPr>
-                        <a:t>14.99 Cr</a:t>
+                        <a:t>19.23 Cr</a:t>
                       </a:r>
                     </a:p>
                   </a:txBody>
@@ -21176,7 +21176,7 @@
                           </a:solidFill>
                           <a:latin typeface="Times New Roman"/>
                         </a:rPr>
-                        <a:t>74,974</a:t>
+                        <a:t>96,174</a:t>
                       </a:r>
                       <a:br/>
                       <a:r>
@@ -21186,7 +21186,7 @@
                           </a:solidFill>
                           <a:latin typeface="Times New Roman"/>
                         </a:rPr>
-                        <a:t>7.50 Cr</a:t>
+                        <a:t>9.62 Cr</a:t>
                       </a:r>
                     </a:p>
                   </a:txBody>
@@ -21282,7 +21282,7 @@
                           </a:solidFill>
                           <a:latin typeface="Times New Roman"/>
                         </a:rPr>
-                        <a:t>9,962</a:t>
+                        <a:t>-11,238</a:t>
                       </a:r>
                       <a:br/>
                       <a:r>
@@ -21292,7 +21292,7 @@
                           </a:solidFill>
                           <a:latin typeface="Times New Roman"/>
                         </a:rPr>
-                        <a:t>1.00 Cr</a:t>
+                        <a:t>-1.12 Cr</a:t>
                       </a:r>
                     </a:p>
                   </a:txBody>
@@ -21335,33 +21335,33 @@
                           </a:solidFill>
                           <a:latin typeface="Times New Roman"/>
                         </a:rPr>
-                        <a:t>113</a:t>
-                      </a:r>
-                    </a:p>
-                  </a:txBody>
-                  <a:tcPr marL="12000" marR="12000" marT="8000" marB="8000">
-                    <a:lnL w="12700">
-                      <a:solidFill>
-                        <a:srgbClr val="000000"/>
-                      </a:solidFill>
-                    </a:lnL>
-                    <a:lnR w="12700">
-                      <a:solidFill>
-                        <a:srgbClr val="000000"/>
-                      </a:solidFill>
-                    </a:lnR>
-                    <a:lnT w="12700">
-                      <a:solidFill>
-                        <a:srgbClr val="000000"/>
-                      </a:solidFill>
-                    </a:lnT>
-                    <a:lnB w="12700">
-                      <a:solidFill>
-                        <a:srgbClr val="000000"/>
-                      </a:solidFill>
-                    </a:lnB>
-                    <a:solidFill>
-                      <a:srgbClr val="FCE4E4"/>
+                        <a:t>88</a:t>
+                      </a:r>
+                    </a:p>
+                  </a:txBody>
+                  <a:tcPr marL="12000" marR="12000" marT="8000" marB="8000">
+                    <a:lnL w="12700">
+                      <a:solidFill>
+                        <a:srgbClr val="000000"/>
+                      </a:solidFill>
+                    </a:lnL>
+                    <a:lnR w="12700">
+                      <a:solidFill>
+                        <a:srgbClr val="000000"/>
+                      </a:solidFill>
+                    </a:lnR>
+                    <a:lnT w="12700">
+                      <a:solidFill>
+                        <a:srgbClr val="000000"/>
+                      </a:solidFill>
+                    </a:lnT>
+                    <a:lnB w="12700">
+                      <a:solidFill>
+                        <a:srgbClr val="000000"/>
+                      </a:solidFill>
+                    </a:lnB>
+                    <a:solidFill>
+                      <a:srgbClr val="FFF2CC"/>
                     </a:solidFill>
                   </a:tcPr>
                 </a:tc>
@@ -21378,7 +21378,7 @@
                           </a:solidFill>
                           <a:latin typeface="Times New Roman"/>
                         </a:rPr>
-                        <a:t>65,011</a:t>
+                        <a:t>107,411</a:t>
                       </a:r>
                       <a:br/>
                       <a:r>
@@ -21388,7 +21388,7 @@
                           </a:solidFill>
                           <a:latin typeface="Times New Roman"/>
                         </a:rPr>
-                        <a:t>6.50 Cr</a:t>
+                        <a:t>10.74 Cr</a:t>
                       </a:r>
                     </a:p>
                   </a:txBody>
@@ -21431,7 +21431,7 @@
                           </a:solidFill>
                           <a:latin typeface="Times New Roman"/>
                         </a:rPr>
-                        <a:t>57</a:t>
+                        <a:t>44</a:t>
                       </a:r>
                     </a:p>
                   </a:txBody>
@@ -22021,7 +22021,7 @@
                           </a:solidFill>
                           <a:latin typeface="Times New Roman"/>
                         </a:rPr>
-                        <a:t>3,254,310</a:t>
+                        <a:t>3,541,910</a:t>
                       </a:r>
                       <a:br/>
                       <a:r>
@@ -22031,7 +22031,7 @@
                           </a:solidFill>
                           <a:latin typeface="Times New Roman"/>
                         </a:rPr>
-                        <a:t>325.43 Cr</a:t>
+                        <a:t>354.19 Cr</a:t>
                       </a:r>
                     </a:p>
                   </a:txBody>
@@ -22074,7 +22074,7 @@
                           </a:solidFill>
                           <a:latin typeface="Times New Roman"/>
                         </a:rPr>
-                        <a:t>1,627,155</a:t>
+                        <a:t>1,770,955</a:t>
                       </a:r>
                       <a:br/>
                       <a:r>
@@ -22084,7 +22084,7 @@
                           </a:solidFill>
                           <a:latin typeface="Times New Roman"/>
                         </a:rPr>
-                        <a:t>162.72 Cr</a:t>
+                        <a:t>177.10 Cr</a:t>
                       </a:r>
                     </a:p>
                   </a:txBody>
@@ -22180,7 +22180,7 @@
                           </a:solidFill>
                           <a:latin typeface="Times New Roman"/>
                         </a:rPr>
-                        <a:t>398,533</a:t>
+                        <a:t>254,733</a:t>
                       </a:r>
                       <a:br/>
                       <a:r>
@@ -22190,7 +22190,7 @@
                           </a:solidFill>
                           <a:latin typeface="Times New Roman"/>
                         </a:rPr>
-                        <a:t>39.85 Cr</a:t>
+                        <a:t>25.47 Cr</a:t>
                       </a:r>
                     </a:p>
                   </a:txBody>
@@ -22233,7 +22233,7 @@
                           </a:solidFill>
                           <a:latin typeface="Times New Roman"/>
                         </a:rPr>
-                        <a:t>124</a:t>
+                        <a:t>114</a:t>
                       </a:r>
                     </a:p>
                   </a:txBody>
@@ -22276,7 +22276,7 @@
                           </a:solidFill>
                           <a:latin typeface="Times New Roman"/>
                         </a:rPr>
-                        <a:t>1,228,622</a:t>
+                        <a:t>1,516,222</a:t>
                       </a:r>
                       <a:br/>
                       <a:r>
@@ -22286,7 +22286,7 @@
                           </a:solidFill>
                           <a:latin typeface="Times New Roman"/>
                         </a:rPr>
-                        <a:t>122.86 Cr</a:t>
+                        <a:t>151.62 Cr</a:t>
                       </a:r>
                     </a:p>
                   </a:txBody>
@@ -22329,7 +22329,7 @@
                           </a:solidFill>
                           <a:latin typeface="Times New Roman"/>
                         </a:rPr>
-                        <a:t>62</a:t>
+                        <a:t>57</a:t>
                       </a:r>
                     </a:p>
                   </a:txBody>
@@ -22919,7 +22919,7 @@
                           </a:solidFill>
                           <a:latin typeface="Times New Roman"/>
                         </a:rPr>
-                        <a:t>13,055,089</a:t>
+                        <a:t>13,385,089</a:t>
                       </a:r>
                       <a:br/>
                       <a:r>
@@ -22929,7 +22929,7 @@
                           </a:solidFill>
                           <a:latin typeface="Times New Roman"/>
                         </a:rPr>
-                        <a:t>1305.51 Cr</a:t>
+                        <a:t>1338.51 Cr</a:t>
                       </a:r>
                     </a:p>
                   </a:txBody>
@@ -22972,7 +22972,7 @@
                           </a:solidFill>
                           <a:latin typeface="Times New Roman"/>
                         </a:rPr>
-                        <a:t>6,527,544</a:t>
+                        <a:t>6,692,544</a:t>
                       </a:r>
                       <a:br/>
                       <a:r>
@@ -22982,7 +22982,7 @@
                           </a:solidFill>
                           <a:latin typeface="Times New Roman"/>
                         </a:rPr>
-                        <a:t>652.75 Cr</a:t>
+                        <a:t>669.25 Cr</a:t>
                       </a:r>
                     </a:p>
                   </a:txBody>
@@ -23078,7 +23078,7 @@
                           </a:solidFill>
                           <a:latin typeface="Times New Roman"/>
                         </a:rPr>
-                        <a:t>2,305,012</a:t>
+                        <a:t>2,140,012</a:t>
                       </a:r>
                       <a:br/>
                       <a:r>
@@ -23088,7 +23088,7 @@
                           </a:solidFill>
                           <a:latin typeface="Times New Roman"/>
                         </a:rPr>
-                        <a:t>230.50 Cr</a:t>
+                        <a:t>214.00 Cr</a:t>
                       </a:r>
                     </a:p>
                   </a:txBody>
@@ -23131,7 +23131,7 @@
                           </a:solidFill>
                           <a:latin typeface="Times New Roman"/>
                         </a:rPr>
-                        <a:t>135</a:t>
+                        <a:t>132</a:t>
                       </a:r>
                     </a:p>
                   </a:txBody>
@@ -23174,7 +23174,7 @@
                           </a:solidFill>
                           <a:latin typeface="Times New Roman"/>
                         </a:rPr>
-                        <a:t>4,222,533</a:t>
+                        <a:t>4,552,533</a:t>
                       </a:r>
                       <a:br/>
                       <a:r>
@@ -23184,7 +23184,7 @@
                           </a:solidFill>
                           <a:latin typeface="Times New Roman"/>
                         </a:rPr>
-                        <a:t>422.25 Cr</a:t>
+                        <a:t>455.25 Cr</a:t>
                       </a:r>
                     </a:p>
                   </a:txBody>
@@ -23227,7 +23227,7 @@
                           </a:solidFill>
                           <a:latin typeface="Times New Roman"/>
                         </a:rPr>
-                        <a:t>68</a:t>
+                        <a:t>66</a:t>
                       </a:r>
                     </a:p>
                   </a:txBody>
